--- a/MRCEGLIA_IMPORTACAO_E_SERVICOS.pptx
+++ b/MRCEGLIA_IMPORTACAO_E_SERVICOS.pptx
@@ -161,7 +161,7 @@
                 <c:formatCode>General</c:formatCode>
                 <c:ptCount val="2"/>
                 <c:pt idx="0">
-                  <c:v>4</c:v>
+                  <c:v>0</c:v>
                 </c:pt>
                 <c:pt idx="1">
                   <c:v>34</c:v>
@@ -210,7 +210,7 @@
                 <c:formatCode>General</c:formatCode>
                 <c:ptCount val="2"/>
                 <c:pt idx="0">
-                  <c:v>1</c:v>
+                  <c:v>0</c:v>
                 </c:pt>
                 <c:pt idx="1">
                   <c:v>0</c:v>
@@ -3687,7 +3687,7 @@
         <p:spPr>
           <a:xfrm>
             <a:off x="1005840" y="2240279"/>
-            <a:ext cx="2377439" cy="891540"/>
+            <a:ext cx="2377440" cy="868680"/>
           </a:xfrm>
           <a:prstGeom prst="rect">
             <a:avLst/>
@@ -3721,8 +3721,8 @@
         </p:nvSpPr>
         <p:spPr>
           <a:xfrm>
-            <a:off x="1005840" y="3058668"/>
-            <a:ext cx="2377439" cy="548640"/>
+            <a:off x="1005840" y="3090672"/>
+            <a:ext cx="2377440" cy="411480"/>
           </a:xfrm>
           <a:prstGeom prst="rect">
             <a:avLst/>
@@ -3802,7 +3802,7 @@
         <p:spPr>
           <a:xfrm>
             <a:off x="3931920" y="2240279"/>
-            <a:ext cx="2377439" cy="891540"/>
+            <a:ext cx="2377440" cy="868680"/>
           </a:xfrm>
           <a:prstGeom prst="rect">
             <a:avLst/>
@@ -3836,8 +3836,8 @@
         </p:nvSpPr>
         <p:spPr>
           <a:xfrm>
-            <a:off x="3931920" y="3058668"/>
-            <a:ext cx="2377439" cy="548640"/>
+            <a:off x="3931920" y="3090672"/>
+            <a:ext cx="2377440" cy="411480"/>
           </a:xfrm>
           <a:prstGeom prst="rect">
             <a:avLst/>
@@ -3917,7 +3917,7 @@
         <p:spPr>
           <a:xfrm>
             <a:off x="6858000" y="2240279"/>
-            <a:ext cx="2377439" cy="891540"/>
+            <a:ext cx="2377440" cy="868680"/>
           </a:xfrm>
           <a:prstGeom prst="rect">
             <a:avLst/>
@@ -3951,8 +3951,8 @@
         </p:nvSpPr>
         <p:spPr>
           <a:xfrm>
-            <a:off x="6858000" y="3058668"/>
-            <a:ext cx="2377439" cy="548640"/>
+            <a:off x="6858000" y="3090672"/>
+            <a:ext cx="2377440" cy="411480"/>
           </a:xfrm>
           <a:prstGeom prst="rect">
             <a:avLst/>
@@ -4032,7 +4032,7 @@
         <p:spPr>
           <a:xfrm>
             <a:off x="9784080" y="2240279"/>
-            <a:ext cx="2377439" cy="891540"/>
+            <a:ext cx="2377440" cy="868680"/>
           </a:xfrm>
           <a:prstGeom prst="rect">
             <a:avLst/>
@@ -4066,8 +4066,8 @@
         </p:nvSpPr>
         <p:spPr>
           <a:xfrm>
-            <a:off x="9784080" y="3058668"/>
-            <a:ext cx="2377439" cy="548640"/>
+            <a:off x="9784080" y="3090672"/>
+            <a:ext cx="2377440" cy="411480"/>
           </a:xfrm>
           <a:prstGeom prst="rect">
             <a:avLst/>
@@ -4120,7 +4120,7 @@
               <a:tr h="475488">
                 <a:tc>
                   <a:txBody>
-                    <a:bodyPr wrap="square"/>
+                    <a:bodyPr/>
                     <a:lstStyle/>
                     <a:p>
                       <a:pPr algn="ctr"/>
@@ -4143,7 +4143,7 @@
                 </a:tc>
                 <a:tc>
                   <a:txBody>
-                    <a:bodyPr wrap="square"/>
+                    <a:bodyPr/>
                     <a:lstStyle/>
                     <a:p>
                       <a:pPr algn="ctr"/>
@@ -4166,7 +4166,7 @@
                 </a:tc>
                 <a:tc>
                   <a:txBody>
-                    <a:bodyPr wrap="square"/>
+                    <a:bodyPr/>
                     <a:lstStyle/>
                     <a:p>
                       <a:pPr algn="ctr"/>
@@ -4189,7 +4189,7 @@
                 </a:tc>
                 <a:tc>
                   <a:txBody>
-                    <a:bodyPr wrap="square"/>
+                    <a:bodyPr/>
                     <a:lstStyle/>
                     <a:p>
                       <a:pPr algn="ctr"/>
@@ -4214,18 +4214,18 @@
               <a:tr h="475488">
                 <a:tc>
                   <a:txBody>
-                    <a:bodyPr wrap="square"/>
-                    <a:lstStyle/>
-                    <a:p>
-                      <a:pPr algn="l"/>
-                      <a:r>
-                        <a:rPr sz="1000" b="0">
-                          <a:solidFill>
-                            <a:srgbClr val="1D1B43"/>
-                          </a:solidFill>
-                          <a:latin typeface="Calibri"/>
-                        </a:rPr>
-                        <a:t>Total Entregas</a:t>
+                    <a:bodyPr/>
+                    <a:lstStyle/>
+                    <a:p>
+                      <a:pPr algn="l"/>
+                      <a:r>
+                        <a:rPr sz="1000" b="0">
+                          <a:solidFill>
+                            <a:srgbClr val="1D1B43"/>
+                          </a:solidFill>
+                          <a:latin typeface="Calibri"/>
+                        </a:rPr>
+                        <a:t>Total</a:t>
                       </a:r>
                     </a:p>
                   </a:txBody>
@@ -4237,18 +4237,18 @@
                 </a:tc>
                 <a:tc>
                   <a:txBody>
-                    <a:bodyPr wrap="square"/>
-                    <a:lstStyle/>
-                    <a:p>
-                      <a:pPr algn="l"/>
-                      <a:r>
-                        <a:rPr sz="1000" b="0">
-                          <a:solidFill>
-                            <a:srgbClr val="1D1B43"/>
-                          </a:solidFill>
-                          <a:latin typeface="Calibri"/>
-                        </a:rPr>
-                        <a:t>5</a:t>
+                    <a:bodyPr/>
+                    <a:lstStyle/>
+                    <a:p>
+                      <a:pPr algn="l"/>
+                      <a:r>
+                        <a:rPr sz="1000" b="0">
+                          <a:solidFill>
+                            <a:srgbClr val="1D1B43"/>
+                          </a:solidFill>
+                          <a:latin typeface="Calibri"/>
+                        </a:rPr>
+                        <a:t>0</a:t>
                       </a:r>
                     </a:p>
                   </a:txBody>
@@ -4260,7 +4260,7 @@
                 </a:tc>
                 <a:tc>
                   <a:txBody>
-                    <a:bodyPr wrap="square"/>
+                    <a:bodyPr/>
                     <a:lstStyle/>
                     <a:p>
                       <a:pPr algn="l"/>
@@ -4283,18 +4283,18 @@
                 </a:tc>
                 <a:tc>
                   <a:txBody>
-                    <a:bodyPr wrap="square"/>
-                    <a:lstStyle/>
-                    <a:p>
-                      <a:pPr algn="l"/>
-                      <a:r>
-                        <a:rPr sz="1000" b="0">
-                          <a:solidFill>
-                            <a:srgbClr val="1D1B43"/>
-                          </a:solidFill>
-                          <a:latin typeface="Calibri"/>
-                        </a:rPr>
-                        <a:t>+ 29</a:t>
+                    <a:bodyPr/>
+                    <a:lstStyle/>
+                    <a:p>
+                      <a:pPr algn="l"/>
+                      <a:r>
+                        <a:rPr sz="1000" b="0">
+                          <a:solidFill>
+                            <a:srgbClr val="1D1B43"/>
+                          </a:solidFill>
+                          <a:latin typeface="Calibri"/>
+                        </a:rPr>
+                        <a:t>+ 34</a:t>
                       </a:r>
                     </a:p>
                   </a:txBody>
@@ -4308,7 +4308,7 @@
               <a:tr h="475488">
                 <a:tc>
                   <a:txBody>
-                    <a:bodyPr wrap="square"/>
+                    <a:bodyPr/>
                     <a:lstStyle/>
                     <a:p>
                       <a:pPr algn="l"/>
@@ -4331,18 +4331,18 @@
                 </a:tc>
                 <a:tc>
                   <a:txBody>
-                    <a:bodyPr wrap="square"/>
-                    <a:lstStyle/>
-                    <a:p>
-                      <a:pPr algn="l"/>
-                      <a:r>
-                        <a:rPr sz="1000" b="0">
-                          <a:solidFill>
-                            <a:srgbClr val="1D1B43"/>
-                          </a:solidFill>
-                          <a:latin typeface="Calibri"/>
-                        </a:rPr>
-                        <a:t>4</a:t>
+                    <a:bodyPr/>
+                    <a:lstStyle/>
+                    <a:p>
+                      <a:pPr algn="l"/>
+                      <a:r>
+                        <a:rPr sz="1000" b="0">
+                          <a:solidFill>
+                            <a:srgbClr val="1D1B43"/>
+                          </a:solidFill>
+                          <a:latin typeface="Calibri"/>
+                        </a:rPr>
+                        <a:t>0</a:t>
                       </a:r>
                     </a:p>
                   </a:txBody>
@@ -4354,7 +4354,7 @@
                 </a:tc>
                 <a:tc>
                   <a:txBody>
-                    <a:bodyPr wrap="square"/>
+                    <a:bodyPr/>
                     <a:lstStyle/>
                     <a:p>
                       <a:pPr algn="l"/>
@@ -4377,18 +4377,18 @@
                 </a:tc>
                 <a:tc>
                   <a:txBody>
-                    <a:bodyPr wrap="square"/>
-                    <a:lstStyle/>
-                    <a:p>
-                      <a:pPr algn="l"/>
-                      <a:r>
-                        <a:rPr sz="1000" b="0">
-                          <a:solidFill>
-                            <a:srgbClr val="1D1B43"/>
-                          </a:solidFill>
-                          <a:latin typeface="Calibri"/>
-                        </a:rPr>
-                        <a:t>+ 30</a:t>
+                    <a:bodyPr/>
+                    <a:lstStyle/>
+                    <a:p>
+                      <a:pPr algn="l"/>
+                      <a:r>
+                        <a:rPr sz="1000" b="0">
+                          <a:solidFill>
+                            <a:srgbClr val="1D1B43"/>
+                          </a:solidFill>
+                          <a:latin typeface="Calibri"/>
+                        </a:rPr>
+                        <a:t>+ 34</a:t>
                       </a:r>
                     </a:p>
                   </a:txBody>
@@ -4402,18 +4402,18 @@
               <a:tr h="475488">
                 <a:tc>
                   <a:txBody>
-                    <a:bodyPr wrap="square"/>
-                    <a:lstStyle/>
-                    <a:p>
-                      <a:pPr algn="l"/>
-                      <a:r>
-                        <a:rPr sz="1000" b="0">
-                          <a:solidFill>
-                            <a:srgbClr val="1D1B43"/>
-                          </a:solidFill>
-                          <a:latin typeface="Calibri"/>
-                        </a:rPr>
-                        <a:t>Fora do Prazo</a:t>
+                    <a:bodyPr/>
+                    <a:lstStyle/>
+                    <a:p>
+                      <a:pPr algn="l"/>
+                      <a:r>
+                        <a:rPr sz="1000" b="0">
+                          <a:solidFill>
+                            <a:srgbClr val="1D1B43"/>
+                          </a:solidFill>
+                          <a:latin typeface="Calibri"/>
+                        </a:rPr>
+                        <a:t>Fora Prazo</a:t>
                       </a:r>
                     </a:p>
                   </a:txBody>
@@ -4425,18 +4425,18 @@
                 </a:tc>
                 <a:tc>
                   <a:txBody>
-                    <a:bodyPr wrap="square"/>
-                    <a:lstStyle/>
-                    <a:p>
-                      <a:pPr algn="l"/>
-                      <a:r>
-                        <a:rPr sz="1000" b="0">
-                          <a:solidFill>
-                            <a:srgbClr val="1D1B43"/>
-                          </a:solidFill>
-                          <a:latin typeface="Calibri"/>
-                        </a:rPr>
-                        <a:t>1</a:t>
+                    <a:bodyPr/>
+                    <a:lstStyle/>
+                    <a:p>
+                      <a:pPr algn="l"/>
+                      <a:r>
+                        <a:rPr sz="1000" b="0">
+                          <a:solidFill>
+                            <a:srgbClr val="1D1B43"/>
+                          </a:solidFill>
+                          <a:latin typeface="Calibri"/>
+                        </a:rPr>
+                        <a:t>0</a:t>
                       </a:r>
                     </a:p>
                   </a:txBody>
@@ -4448,7 +4448,7 @@
                 </a:tc>
                 <a:tc>
                   <a:txBody>
-                    <a:bodyPr wrap="square"/>
+                    <a:bodyPr/>
                     <a:lstStyle/>
                     <a:p>
                       <a:pPr algn="l"/>
@@ -4471,18 +4471,18 @@
                 </a:tc>
                 <a:tc>
                   <a:txBody>
-                    <a:bodyPr wrap="square"/>
-                    <a:lstStyle/>
-                    <a:p>
-                      <a:pPr algn="l"/>
-                      <a:r>
-                        <a:rPr sz="1000" b="0">
-                          <a:solidFill>
-                            <a:srgbClr val="1D1B43"/>
-                          </a:solidFill>
-                          <a:latin typeface="Calibri"/>
-                        </a:rPr>
-                        <a:t>- 1</a:t>
+                    <a:bodyPr/>
+                    <a:lstStyle/>
+                    <a:p>
+                      <a:pPr algn="l"/>
+                      <a:r>
+                        <a:rPr sz="1000" b="0">
+                          <a:solidFill>
+                            <a:srgbClr val="1D1B43"/>
+                          </a:solidFill>
+                          <a:latin typeface="Calibri"/>
+                        </a:rPr>
+                        <a:t>- 0</a:t>
                       </a:r>
                     </a:p>
                   </a:txBody>
@@ -4496,7 +4496,7 @@
               <a:tr h="475488">
                 <a:tc>
                   <a:txBody>
-                    <a:bodyPr wrap="square"/>
+                    <a:bodyPr/>
                     <a:lstStyle/>
                     <a:p>
                       <a:pPr algn="l"/>
@@ -4519,18 +4519,18 @@
                 </a:tc>
                 <a:tc>
                   <a:txBody>
-                    <a:bodyPr wrap="square"/>
-                    <a:lstStyle/>
-                    <a:p>
-                      <a:pPr algn="l"/>
-                      <a:r>
-                        <a:rPr sz="1000" b="0">
-                          <a:solidFill>
-                            <a:srgbClr val="1D1B43"/>
-                          </a:solidFill>
-                          <a:latin typeface="Calibri"/>
-                        </a:rPr>
-                        <a:t>80.0%</a:t>
+                    <a:bodyPr/>
+                    <a:lstStyle/>
+                    <a:p>
+                      <a:pPr algn="l"/>
+                      <a:r>
+                        <a:rPr sz="1000" b="0">
+                          <a:solidFill>
+                            <a:srgbClr val="1D1B43"/>
+                          </a:solidFill>
+                          <a:latin typeface="Calibri"/>
+                        </a:rPr>
+                        <a:t>100.0%</a:t>
                       </a:r>
                     </a:p>
                   </a:txBody>
@@ -4542,7 +4542,7 @@
                 </a:tc>
                 <a:tc>
                   <a:txBody>
-                    <a:bodyPr wrap="square"/>
+                    <a:bodyPr/>
                     <a:lstStyle/>
                     <a:p>
                       <a:pPr algn="l"/>
@@ -4565,18 +4565,18 @@
                 </a:tc>
                 <a:tc>
                   <a:txBody>
-                    <a:bodyPr wrap="square"/>
-                    <a:lstStyle/>
-                    <a:p>
-                      <a:pPr algn="l"/>
-                      <a:r>
-                        <a:rPr sz="1000" b="0">
-                          <a:solidFill>
-                            <a:srgbClr val="1D1B43"/>
-                          </a:solidFill>
-                          <a:latin typeface="Calibri"/>
-                        </a:rPr>
-                        <a:t>+ 20.0pp</a:t>
+                    <a:bodyPr/>
+                    <a:lstStyle/>
+                    <a:p>
+                      <a:pPr algn="l"/>
+                      <a:r>
+                        <a:rPr sz="1000" b="0">
+                          <a:solidFill>
+                            <a:srgbClr val="1D1B43"/>
+                          </a:solidFill>
+                          <a:latin typeface="Calibri"/>
+                        </a:rPr>
+                        <a:t>+ 0.0pp</a:t>
                       </a:r>
                     </a:p>
                   </a:txBody>
@@ -4765,7 +4765,7 @@
               <a:tr h="438912">
                 <a:tc>
                   <a:txBody>
-                    <a:bodyPr wrap="square"/>
+                    <a:bodyPr/>
                     <a:lstStyle/>
                     <a:p>
                       <a:pPr algn="ctr"/>
@@ -4788,7 +4788,7 @@
                 </a:tc>
                 <a:tc>
                   <a:txBody>
-                    <a:bodyPr wrap="square"/>
+                    <a:bodyPr/>
                     <a:lstStyle/>
                     <a:p>
                       <a:pPr algn="ctr"/>
@@ -4811,7 +4811,7 @@
                 </a:tc>
                 <a:tc>
                   <a:txBody>
-                    <a:bodyPr wrap="square"/>
+                    <a:bodyPr/>
                     <a:lstStyle/>
                     <a:p>
                       <a:pPr algn="ctr"/>
@@ -4834,7 +4834,7 @@
                 </a:tc>
                 <a:tc>
                   <a:txBody>
-                    <a:bodyPr wrap="square"/>
+                    <a:bodyPr/>
                     <a:lstStyle/>
                     <a:p>
                       <a:pPr algn="ctr"/>
@@ -4857,7 +4857,7 @@
                 </a:tc>
                 <a:tc>
                   <a:txBody>
-                    <a:bodyPr wrap="square"/>
+                    <a:bodyPr/>
                     <a:lstStyle/>
                     <a:p>
                       <a:pPr algn="ctr"/>
@@ -4882,7 +4882,7 @@
               <a:tr h="438912">
                 <a:tc>
                   <a:txBody>
-                    <a:bodyPr wrap="square"/>
+                    <a:bodyPr/>
                     <a:lstStyle/>
                     <a:p>
                       <a:pPr algn="l"/>
@@ -4905,18 +4905,18 @@
                 </a:tc>
                 <a:tc>
                   <a:txBody>
-                    <a:bodyPr wrap="square"/>
-                    <a:lstStyle/>
-                    <a:p>
-                      <a:pPr algn="l"/>
-                      <a:r>
-                        <a:rPr sz="1000" b="0">
-                          <a:solidFill>
-                            <a:srgbClr val="1D1B43"/>
-                          </a:solidFill>
-                          <a:latin typeface="Calibri"/>
-                        </a:rPr>
-                        <a:t>5</a:t>
+                    <a:bodyPr/>
+                    <a:lstStyle/>
+                    <a:p>
+                      <a:pPr algn="l"/>
+                      <a:r>
+                        <a:rPr sz="1000" b="0">
+                          <a:solidFill>
+                            <a:srgbClr val="1D1B43"/>
+                          </a:solidFill>
+                          <a:latin typeface="Calibri"/>
+                        </a:rPr>
+                        <a:t>0</a:t>
                       </a:r>
                     </a:p>
                   </a:txBody>
@@ -4928,18 +4928,18 @@
                 </a:tc>
                 <a:tc>
                   <a:txBody>
-                    <a:bodyPr wrap="square"/>
-                    <a:lstStyle/>
-                    <a:p>
-                      <a:pPr algn="l"/>
-                      <a:r>
-                        <a:rPr sz="1000" b="0">
-                          <a:solidFill>
-                            <a:srgbClr val="1D1B43"/>
-                          </a:solidFill>
-                          <a:latin typeface="Calibri"/>
-                        </a:rPr>
-                        <a:t>4</a:t>
+                    <a:bodyPr/>
+                    <a:lstStyle/>
+                    <a:p>
+                      <a:pPr algn="l"/>
+                      <a:r>
+                        <a:rPr sz="1000" b="0">
+                          <a:solidFill>
+                            <a:srgbClr val="1D1B43"/>
+                          </a:solidFill>
+                          <a:latin typeface="Calibri"/>
+                        </a:rPr>
+                        <a:t>0</a:t>
                       </a:r>
                     </a:p>
                   </a:txBody>
@@ -4951,18 +4951,18 @@
                 </a:tc>
                 <a:tc>
                   <a:txBody>
-                    <a:bodyPr wrap="square"/>
-                    <a:lstStyle/>
-                    <a:p>
-                      <a:pPr algn="l"/>
-                      <a:r>
-                        <a:rPr sz="1000" b="0">
-                          <a:solidFill>
-                            <a:srgbClr val="1D1B43"/>
-                          </a:solidFill>
-                          <a:latin typeface="Calibri"/>
-                        </a:rPr>
-                        <a:t>1</a:t>
+                    <a:bodyPr/>
+                    <a:lstStyle/>
+                    <a:p>
+                      <a:pPr algn="l"/>
+                      <a:r>
+                        <a:rPr sz="1000" b="0">
+                          <a:solidFill>
+                            <a:srgbClr val="1D1B43"/>
+                          </a:solidFill>
+                          <a:latin typeface="Calibri"/>
+                        </a:rPr>
+                        <a:t>0</a:t>
                       </a:r>
                     </a:p>
                   </a:txBody>
@@ -4974,18 +4974,18 @@
                 </a:tc>
                 <a:tc>
                   <a:txBody>
-                    <a:bodyPr wrap="square"/>
-                    <a:lstStyle/>
-                    <a:p>
-                      <a:pPr algn="l"/>
-                      <a:r>
-                        <a:rPr sz="1000" b="0">
-                          <a:solidFill>
-                            <a:srgbClr val="1D1B43"/>
-                          </a:solidFill>
-                          <a:latin typeface="Calibri"/>
-                        </a:rPr>
-                        <a:t>80.0%</a:t>
+                    <a:bodyPr/>
+                    <a:lstStyle/>
+                    <a:p>
+                      <a:pPr algn="l"/>
+                      <a:r>
+                        <a:rPr sz="1000" b="0">
+                          <a:solidFill>
+                            <a:srgbClr val="1D1B43"/>
+                          </a:solidFill>
+                          <a:latin typeface="Calibri"/>
+                        </a:rPr>
+                        <a:t>100.0%</a:t>
                       </a:r>
                     </a:p>
                   </a:txBody>
@@ -4999,7 +4999,7 @@
               <a:tr h="438912">
                 <a:tc>
                   <a:txBody>
-                    <a:bodyPr wrap="square"/>
+                    <a:bodyPr/>
                     <a:lstStyle/>
                     <a:p>
                       <a:pPr algn="l"/>
@@ -5022,7 +5022,7 @@
                 </a:tc>
                 <a:tc>
                   <a:txBody>
-                    <a:bodyPr wrap="square"/>
+                    <a:bodyPr/>
                     <a:lstStyle/>
                     <a:p>
                       <a:pPr algn="l"/>
@@ -5045,7 +5045,7 @@
                 </a:tc>
                 <a:tc>
                   <a:txBody>
-                    <a:bodyPr wrap="square"/>
+                    <a:bodyPr/>
                     <a:lstStyle/>
                     <a:p>
                       <a:pPr algn="l"/>
@@ -5068,7 +5068,7 @@
                 </a:tc>
                 <a:tc>
                   <a:txBody>
-                    <a:bodyPr wrap="square"/>
+                    <a:bodyPr/>
                     <a:lstStyle/>
                     <a:p>
                       <a:pPr algn="l"/>
@@ -5091,7 +5091,7 @@
                 </a:tc>
                 <a:tc>
                   <a:txBody>
-                    <a:bodyPr wrap="square"/>
+                    <a:bodyPr/>
                     <a:lstStyle/>
                     <a:p>
                       <a:pPr algn="l"/>
@@ -5352,7 +5352,7 @@
               <a:tr h="457200">
                 <a:tc>
                   <a:txBody>
-                    <a:bodyPr wrap="square"/>
+                    <a:bodyPr/>
                     <a:lstStyle/>
                     <a:p>
                       <a:pPr algn="ctr"/>
@@ -5375,7 +5375,7 @@
                 </a:tc>
                 <a:tc>
                   <a:txBody>
-                    <a:bodyPr wrap="square"/>
+                    <a:bodyPr/>
                     <a:lstStyle/>
                     <a:p>
                       <a:pPr algn="ctr"/>
@@ -5398,7 +5398,7 @@
                 </a:tc>
                 <a:tc>
                   <a:txBody>
-                    <a:bodyPr wrap="square"/>
+                    <a:bodyPr/>
                     <a:lstStyle/>
                     <a:p>
                       <a:pPr algn="ctr"/>
@@ -5421,7 +5421,7 @@
                 </a:tc>
                 <a:tc>
                   <a:txBody>
-                    <a:bodyPr wrap="square"/>
+                    <a:bodyPr/>
                     <a:lstStyle/>
                     <a:p>
                       <a:pPr algn="ctr"/>
@@ -5444,7 +5444,7 @@
                 </a:tc>
                 <a:tc>
                   <a:txBody>
-                    <a:bodyPr wrap="square"/>
+                    <a:bodyPr/>
                     <a:lstStyle/>
                     <a:p>
                       <a:pPr algn="ctr"/>
@@ -5467,7 +5467,7 @@
                 </a:tc>
                 <a:tc>
                   <a:txBody>
-                    <a:bodyPr wrap="square"/>
+                    <a:bodyPr/>
                     <a:lstStyle/>
                     <a:p>
                       <a:pPr algn="ctr"/>
@@ -5492,7 +5492,7 @@
               <a:tr h="457200">
                 <a:tc>
                   <a:txBody>
-                    <a:bodyPr wrap="square"/>
+                    <a:bodyPr/>
                     <a:lstStyle/>
                     <a:p>
                       <a:pPr algn="l"/>
@@ -5515,7 +5515,7 @@
                 </a:tc>
                 <a:tc>
                   <a:txBody>
-                    <a:bodyPr wrap="square"/>
+                    <a:bodyPr/>
                     <a:lstStyle/>
                     <a:p>
                       <a:pPr algn="l"/>
@@ -5538,7 +5538,7 @@
                 </a:tc>
                 <a:tc>
                   <a:txBody>
-                    <a:bodyPr wrap="square"/>
+                    <a:bodyPr/>
                     <a:lstStyle/>
                     <a:p>
                       <a:pPr algn="l"/>
@@ -5561,7 +5561,7 @@
                 </a:tc>
                 <a:tc>
                   <a:txBody>
-                    <a:bodyPr wrap="square"/>
+                    <a:bodyPr/>
                     <a:lstStyle/>
                     <a:p>
                       <a:pPr algn="l"/>
@@ -5584,7 +5584,7 @@
                 </a:tc>
                 <a:tc>
                   <a:txBody>
-                    <a:bodyPr wrap="square"/>
+                    <a:bodyPr/>
                     <a:lstStyle/>
                     <a:p>
                       <a:pPr algn="l"/>
@@ -5607,7 +5607,7 @@
                 </a:tc>
                 <a:tc>
                   <a:txBody>
-                    <a:bodyPr wrap="square"/>
+                    <a:bodyPr/>
                     <a:lstStyle/>
                     <a:p>
                       <a:pPr algn="l"/>
@@ -5632,7 +5632,7 @@
               <a:tr h="457200">
                 <a:tc>
                   <a:txBody>
-                    <a:bodyPr wrap="square"/>
+                    <a:bodyPr/>
                     <a:lstStyle/>
                     <a:p>
                       <a:pPr algn="l"/>
@@ -5655,7 +5655,7 @@
                 </a:tc>
                 <a:tc>
                   <a:txBody>
-                    <a:bodyPr wrap="square"/>
+                    <a:bodyPr/>
                     <a:lstStyle/>
                     <a:p>
                       <a:pPr algn="l"/>
@@ -5678,7 +5678,7 @@
                 </a:tc>
                 <a:tc>
                   <a:txBody>
-                    <a:bodyPr wrap="square"/>
+                    <a:bodyPr/>
                     <a:lstStyle/>
                     <a:p>
                       <a:pPr algn="l"/>
@@ -5701,7 +5701,7 @@
                 </a:tc>
                 <a:tc>
                   <a:txBody>
-                    <a:bodyPr wrap="square"/>
+                    <a:bodyPr/>
                     <a:lstStyle/>
                     <a:p>
                       <a:pPr algn="l"/>
@@ -5724,7 +5724,7 @@
                 </a:tc>
                 <a:tc>
                   <a:txBody>
-                    <a:bodyPr wrap="square"/>
+                    <a:bodyPr/>
                     <a:lstStyle/>
                     <a:p>
                       <a:pPr algn="l"/>
@@ -5747,7 +5747,7 @@
                 </a:tc>
                 <a:tc>
                   <a:txBody>
-                    <a:bodyPr wrap="square"/>
+                    <a:bodyPr/>
                     <a:lstStyle/>
                     <a:p>
                       <a:pPr algn="l"/>
@@ -5772,7 +5772,7 @@
               <a:tr h="457200">
                 <a:tc>
                   <a:txBody>
-                    <a:bodyPr wrap="square"/>
+                    <a:bodyPr/>
                     <a:lstStyle/>
                     <a:p>
                       <a:pPr algn="l"/>
@@ -5795,7 +5795,7 @@
                 </a:tc>
                 <a:tc>
                   <a:txBody>
-                    <a:bodyPr wrap="square"/>
+                    <a:bodyPr/>
                     <a:lstStyle/>
                     <a:p>
                       <a:pPr algn="l"/>
@@ -5818,7 +5818,7 @@
                 </a:tc>
                 <a:tc>
                   <a:txBody>
-                    <a:bodyPr wrap="square"/>
+                    <a:bodyPr/>
                     <a:lstStyle/>
                     <a:p>
                       <a:pPr algn="l"/>
@@ -5841,7 +5841,7 @@
                 </a:tc>
                 <a:tc>
                   <a:txBody>
-                    <a:bodyPr wrap="square"/>
+                    <a:bodyPr/>
                     <a:lstStyle/>
                     <a:p>
                       <a:pPr algn="l"/>
@@ -5864,7 +5864,7 @@
                 </a:tc>
                 <a:tc>
                   <a:txBody>
-                    <a:bodyPr wrap="square"/>
+                    <a:bodyPr/>
                     <a:lstStyle/>
                     <a:p>
                       <a:pPr algn="l"/>
@@ -5887,7 +5887,7 @@
                 </a:tc>
                 <a:tc>
                   <a:txBody>
-                    <a:bodyPr wrap="square"/>
+                    <a:bodyPr/>
                     <a:lstStyle/>
                     <a:p>
                       <a:pPr algn="l"/>
@@ -5912,7 +5912,7 @@
               <a:tr h="457200">
                 <a:tc>
                   <a:txBody>
-                    <a:bodyPr wrap="square"/>
+                    <a:bodyPr/>
                     <a:lstStyle/>
                     <a:p>
                       <a:pPr algn="l"/>
@@ -5935,7 +5935,7 @@
                 </a:tc>
                 <a:tc>
                   <a:txBody>
-                    <a:bodyPr wrap="square"/>
+                    <a:bodyPr/>
                     <a:lstStyle/>
                     <a:p>
                       <a:pPr algn="l"/>
@@ -5958,7 +5958,7 @@
                 </a:tc>
                 <a:tc>
                   <a:txBody>
-                    <a:bodyPr wrap="square"/>
+                    <a:bodyPr/>
                     <a:lstStyle/>
                     <a:p>
                       <a:pPr algn="l"/>
@@ -5981,7 +5981,7 @@
                 </a:tc>
                 <a:tc>
                   <a:txBody>
-                    <a:bodyPr wrap="square"/>
+                    <a:bodyPr/>
                     <a:lstStyle/>
                     <a:p>
                       <a:pPr algn="l"/>
@@ -6004,7 +6004,7 @@
                 </a:tc>
                 <a:tc>
                   <a:txBody>
-                    <a:bodyPr wrap="square"/>
+                    <a:bodyPr/>
                     <a:lstStyle/>
                     <a:p>
                       <a:pPr algn="l"/>
@@ -6027,7 +6027,7 @@
                 </a:tc>
                 <a:tc>
                   <a:txBody>
-                    <a:bodyPr wrap="square"/>
+                    <a:bodyPr/>
                     <a:lstStyle/>
                     <a:p>
                       <a:pPr algn="l"/>
@@ -6052,7 +6052,7 @@
               <a:tr h="457200">
                 <a:tc>
                   <a:txBody>
-                    <a:bodyPr wrap="square"/>
+                    <a:bodyPr/>
                     <a:lstStyle/>
                     <a:p>
                       <a:pPr algn="l"/>
@@ -6075,7 +6075,7 @@
                 </a:tc>
                 <a:tc>
                   <a:txBody>
-                    <a:bodyPr wrap="square"/>
+                    <a:bodyPr/>
                     <a:lstStyle/>
                     <a:p>
                       <a:pPr algn="l"/>
@@ -6098,7 +6098,7 @@
                 </a:tc>
                 <a:tc>
                   <a:txBody>
-                    <a:bodyPr wrap="square"/>
+                    <a:bodyPr/>
                     <a:lstStyle/>
                     <a:p>
                       <a:pPr algn="l"/>
@@ -6121,7 +6121,7 @@
                 </a:tc>
                 <a:tc>
                   <a:txBody>
-                    <a:bodyPr wrap="square"/>
+                    <a:bodyPr/>
                     <a:lstStyle/>
                     <a:p>
                       <a:pPr algn="l"/>
@@ -6144,7 +6144,7 @@
                 </a:tc>
                 <a:tc>
                   <a:txBody>
-                    <a:bodyPr wrap="square"/>
+                    <a:bodyPr/>
                     <a:lstStyle/>
                     <a:p>
                       <a:pPr algn="l"/>
@@ -6167,7 +6167,7 @@
                 </a:tc>
                 <a:tc>
                   <a:txBody>
-                    <a:bodyPr wrap="square"/>
+                    <a:bodyPr/>
                     <a:lstStyle/>
                     <a:p>
                       <a:pPr algn="l"/>
@@ -6192,7 +6192,7 @@
               <a:tr h="457200">
                 <a:tc>
                   <a:txBody>
-                    <a:bodyPr wrap="square"/>
+                    <a:bodyPr/>
                     <a:lstStyle/>
                     <a:p>
                       <a:pPr algn="l"/>
@@ -6215,7 +6215,7 @@
                 </a:tc>
                 <a:tc>
                   <a:txBody>
-                    <a:bodyPr wrap="square"/>
+                    <a:bodyPr/>
                     <a:lstStyle/>
                     <a:p>
                       <a:pPr algn="l"/>
@@ -6238,7 +6238,7 @@
                 </a:tc>
                 <a:tc>
                   <a:txBody>
-                    <a:bodyPr wrap="square"/>
+                    <a:bodyPr/>
                     <a:lstStyle/>
                     <a:p>
                       <a:pPr algn="l"/>
@@ -6261,7 +6261,7 @@
                 </a:tc>
                 <a:tc>
                   <a:txBody>
-                    <a:bodyPr wrap="square"/>
+                    <a:bodyPr/>
                     <a:lstStyle/>
                     <a:p>
                       <a:pPr algn="l"/>
@@ -6284,7 +6284,7 @@
                 </a:tc>
                 <a:tc>
                   <a:txBody>
-                    <a:bodyPr wrap="square"/>
+                    <a:bodyPr/>
                     <a:lstStyle/>
                     <a:p>
                       <a:pPr algn="l"/>
@@ -6307,7 +6307,7 @@
                 </a:tc>
                 <a:tc>
                   <a:txBody>
-                    <a:bodyPr wrap="square"/>
+                    <a:bodyPr/>
                     <a:lstStyle/>
                     <a:p>
                       <a:pPr algn="l"/>
@@ -6332,7 +6332,7 @@
               <a:tr h="457200">
                 <a:tc>
                   <a:txBody>
-                    <a:bodyPr wrap="square"/>
+                    <a:bodyPr/>
                     <a:lstStyle/>
                     <a:p>
                       <a:pPr algn="l"/>
@@ -6355,7 +6355,7 @@
                 </a:tc>
                 <a:tc>
                   <a:txBody>
-                    <a:bodyPr wrap="square"/>
+                    <a:bodyPr/>
                     <a:lstStyle/>
                     <a:p>
                       <a:pPr algn="l"/>
@@ -6378,7 +6378,7 @@
                 </a:tc>
                 <a:tc>
                   <a:txBody>
-                    <a:bodyPr wrap="square"/>
+                    <a:bodyPr/>
                     <a:lstStyle/>
                     <a:p>
                       <a:pPr algn="l"/>
@@ -6401,7 +6401,7 @@
                 </a:tc>
                 <a:tc>
                   <a:txBody>
-                    <a:bodyPr wrap="square"/>
+                    <a:bodyPr/>
                     <a:lstStyle/>
                     <a:p>
                       <a:pPr algn="l"/>
@@ -6424,7 +6424,7 @@
                 </a:tc>
                 <a:tc>
                   <a:txBody>
-                    <a:bodyPr wrap="square"/>
+                    <a:bodyPr/>
                     <a:lstStyle/>
                     <a:p>
                       <a:pPr algn="l"/>
@@ -6447,7 +6447,7 @@
                 </a:tc>
                 <a:tc>
                   <a:txBody>
-                    <a:bodyPr wrap="square"/>
+                    <a:bodyPr/>
                     <a:lstStyle/>
                     <a:p>
                       <a:pPr algn="l"/>
@@ -6472,7 +6472,7 @@
               <a:tr h="457200">
                 <a:tc>
                   <a:txBody>
-                    <a:bodyPr wrap="square"/>
+                    <a:bodyPr/>
                     <a:lstStyle/>
                     <a:p>
                       <a:pPr algn="l"/>
@@ -6495,7 +6495,7 @@
                 </a:tc>
                 <a:tc>
                   <a:txBody>
-                    <a:bodyPr wrap="square"/>
+                    <a:bodyPr/>
                     <a:lstStyle/>
                     <a:p>
                       <a:pPr algn="l"/>
@@ -6518,7 +6518,7 @@
                 </a:tc>
                 <a:tc>
                   <a:txBody>
-                    <a:bodyPr wrap="square"/>
+                    <a:bodyPr/>
                     <a:lstStyle/>
                     <a:p>
                       <a:pPr algn="l"/>
@@ -6541,7 +6541,7 @@
                 </a:tc>
                 <a:tc>
                   <a:txBody>
-                    <a:bodyPr wrap="square"/>
+                    <a:bodyPr/>
                     <a:lstStyle/>
                     <a:p>
                       <a:pPr algn="l"/>
@@ -6564,7 +6564,7 @@
                 </a:tc>
                 <a:tc>
                   <a:txBody>
-                    <a:bodyPr wrap="square"/>
+                    <a:bodyPr/>
                     <a:lstStyle/>
                     <a:p>
                       <a:pPr algn="l"/>
@@ -6587,7 +6587,7 @@
                 </a:tc>
                 <a:tc>
                   <a:txBody>
-                    <a:bodyPr wrap="square"/>
+                    <a:bodyPr/>
                     <a:lstStyle/>
                     <a:p>
                       <a:pPr algn="l"/>
@@ -6771,7 +6771,7 @@
               <a:tr h="292608">
                 <a:tc>
                   <a:txBody>
-                    <a:bodyPr wrap="square"/>
+                    <a:bodyPr/>
                     <a:lstStyle/>
                     <a:p>
                       <a:pPr algn="ctr"/>
@@ -6794,7 +6794,7 @@
                 </a:tc>
                 <a:tc>
                   <a:txBody>
-                    <a:bodyPr wrap="square"/>
+                    <a:bodyPr/>
                     <a:lstStyle/>
                     <a:p>
                       <a:pPr algn="ctr"/>
@@ -6817,7 +6817,7 @@
                 </a:tc>
                 <a:tc>
                   <a:txBody>
-                    <a:bodyPr wrap="square"/>
+                    <a:bodyPr/>
                     <a:lstStyle/>
                     <a:p>
                       <a:pPr algn="ctr"/>
@@ -6840,7 +6840,7 @@
                 </a:tc>
                 <a:tc>
                   <a:txBody>
-                    <a:bodyPr wrap="square"/>
+                    <a:bodyPr/>
                     <a:lstStyle/>
                     <a:p>
                       <a:pPr algn="ctr"/>
@@ -6863,7 +6863,7 @@
                 </a:tc>
                 <a:tc>
                   <a:txBody>
-                    <a:bodyPr wrap="square"/>
+                    <a:bodyPr/>
                     <a:lstStyle/>
                     <a:p>
                       <a:pPr algn="ctr"/>
@@ -6886,7 +6886,7 @@
                 </a:tc>
                 <a:tc>
                   <a:txBody>
-                    <a:bodyPr wrap="square"/>
+                    <a:bodyPr/>
                     <a:lstStyle/>
                     <a:p>
                       <a:pPr algn="ctr"/>
@@ -6909,7 +6909,7 @@
                 </a:tc>
                 <a:tc>
                   <a:txBody>
-                    <a:bodyPr wrap="square"/>
+                    <a:bodyPr/>
                     <a:lstStyle/>
                     <a:p>
                       <a:pPr algn="ctr"/>
@@ -6934,7 +6934,7 @@
               <a:tr h="292608">
                 <a:tc>
                   <a:txBody>
-                    <a:bodyPr wrap="square"/>
+                    <a:bodyPr/>
                     <a:lstStyle/>
                     <a:p>
                       <a:pPr algn="l"/>
@@ -6957,7 +6957,7 @@
                 </a:tc>
                 <a:tc>
                   <a:txBody>
-                    <a:bodyPr wrap="square"/>
+                    <a:bodyPr/>
                     <a:lstStyle/>
                     <a:p>
                       <a:pPr algn="l"/>
@@ -6980,7 +6980,7 @@
                 </a:tc>
                 <a:tc>
                   <a:txBody>
-                    <a:bodyPr wrap="square"/>
+                    <a:bodyPr/>
                     <a:lstStyle/>
                     <a:p>
                       <a:pPr algn="l"/>
@@ -7003,7 +7003,7 @@
                 </a:tc>
                 <a:tc>
                   <a:txBody>
-                    <a:bodyPr wrap="square"/>
+                    <a:bodyPr/>
                     <a:lstStyle/>
                     <a:p>
                       <a:pPr algn="l"/>
@@ -7026,7 +7026,7 @@
                 </a:tc>
                 <a:tc>
                   <a:txBody>
-                    <a:bodyPr wrap="square"/>
+                    <a:bodyPr/>
                     <a:lstStyle/>
                     <a:p>
                       <a:pPr algn="l"/>
@@ -7049,7 +7049,7 @@
                 </a:tc>
                 <a:tc>
                   <a:txBody>
-                    <a:bodyPr wrap="square"/>
+                    <a:bodyPr/>
                     <a:lstStyle/>
                     <a:p>
                       <a:pPr algn="l"/>
@@ -7072,7 +7072,7 @@
                 </a:tc>
                 <a:tc>
                   <a:txBody>
-                    <a:bodyPr wrap="square"/>
+                    <a:bodyPr/>
                     <a:lstStyle/>
                     <a:p>
                       <a:pPr algn="l"/>
@@ -7097,7 +7097,7 @@
               <a:tr h="292608">
                 <a:tc>
                   <a:txBody>
-                    <a:bodyPr wrap="square"/>
+                    <a:bodyPr/>
                     <a:lstStyle/>
                     <a:p>
                       <a:pPr algn="l"/>
@@ -7120,7 +7120,7 @@
                 </a:tc>
                 <a:tc>
                   <a:txBody>
-                    <a:bodyPr wrap="square"/>
+                    <a:bodyPr/>
                     <a:lstStyle/>
                     <a:p>
                       <a:pPr algn="l"/>
@@ -7143,7 +7143,7 @@
                 </a:tc>
                 <a:tc>
                   <a:txBody>
-                    <a:bodyPr wrap="square"/>
+                    <a:bodyPr/>
                     <a:lstStyle/>
                     <a:p>
                       <a:pPr algn="l"/>
@@ -7166,7 +7166,7 @@
                 </a:tc>
                 <a:tc>
                   <a:txBody>
-                    <a:bodyPr wrap="square"/>
+                    <a:bodyPr/>
                     <a:lstStyle/>
                     <a:p>
                       <a:pPr algn="l"/>
@@ -7189,7 +7189,7 @@
                 </a:tc>
                 <a:tc>
                   <a:txBody>
-                    <a:bodyPr wrap="square"/>
+                    <a:bodyPr/>
                     <a:lstStyle/>
                     <a:p>
                       <a:pPr algn="l"/>
@@ -7212,7 +7212,7 @@
                 </a:tc>
                 <a:tc>
                   <a:txBody>
-                    <a:bodyPr wrap="square"/>
+                    <a:bodyPr/>
                     <a:lstStyle/>
                     <a:p>
                       <a:pPr algn="l"/>
@@ -7235,7 +7235,7 @@
                 </a:tc>
                 <a:tc>
                   <a:txBody>
-                    <a:bodyPr wrap="square"/>
+                    <a:bodyPr/>
                     <a:lstStyle/>
                     <a:p>
                       <a:pPr algn="l"/>
@@ -7260,7 +7260,7 @@
               <a:tr h="292608">
                 <a:tc>
                   <a:txBody>
-                    <a:bodyPr wrap="square"/>
+                    <a:bodyPr/>
                     <a:lstStyle/>
                     <a:p>
                       <a:pPr algn="l"/>
@@ -7283,7 +7283,7 @@
                 </a:tc>
                 <a:tc>
                   <a:txBody>
-                    <a:bodyPr wrap="square"/>
+                    <a:bodyPr/>
                     <a:lstStyle/>
                     <a:p>
                       <a:pPr algn="l"/>
@@ -7306,7 +7306,7 @@
                 </a:tc>
                 <a:tc>
                   <a:txBody>
-                    <a:bodyPr wrap="square"/>
+                    <a:bodyPr/>
                     <a:lstStyle/>
                     <a:p>
                       <a:pPr algn="l"/>
@@ -7329,7 +7329,7 @@
                 </a:tc>
                 <a:tc>
                   <a:txBody>
-                    <a:bodyPr wrap="square"/>
+                    <a:bodyPr/>
                     <a:lstStyle/>
                     <a:p>
                       <a:pPr algn="l"/>
@@ -7352,7 +7352,7 @@
                 </a:tc>
                 <a:tc>
                   <a:txBody>
-                    <a:bodyPr wrap="square"/>
+                    <a:bodyPr/>
                     <a:lstStyle/>
                     <a:p>
                       <a:pPr algn="l"/>
@@ -7375,7 +7375,7 @@
                 </a:tc>
                 <a:tc>
                   <a:txBody>
-                    <a:bodyPr wrap="square"/>
+                    <a:bodyPr/>
                     <a:lstStyle/>
                     <a:p>
                       <a:pPr algn="l"/>
@@ -7398,7 +7398,7 @@
                 </a:tc>
                 <a:tc>
                   <a:txBody>
-                    <a:bodyPr wrap="square"/>
+                    <a:bodyPr/>
                     <a:lstStyle/>
                     <a:p>
                       <a:pPr algn="l"/>
@@ -7423,7 +7423,7 @@
               <a:tr h="292608">
                 <a:tc>
                   <a:txBody>
-                    <a:bodyPr wrap="square"/>
+                    <a:bodyPr/>
                     <a:lstStyle/>
                     <a:p>
                       <a:pPr algn="l"/>
@@ -7446,7 +7446,7 @@
                 </a:tc>
                 <a:tc>
                   <a:txBody>
-                    <a:bodyPr wrap="square"/>
+                    <a:bodyPr/>
                     <a:lstStyle/>
                     <a:p>
                       <a:pPr algn="l"/>
@@ -7469,7 +7469,7 @@
                 </a:tc>
                 <a:tc>
                   <a:txBody>
-                    <a:bodyPr wrap="square"/>
+                    <a:bodyPr/>
                     <a:lstStyle/>
                     <a:p>
                       <a:pPr algn="l"/>
@@ -7492,7 +7492,7 @@
                 </a:tc>
                 <a:tc>
                   <a:txBody>
-                    <a:bodyPr wrap="square"/>
+                    <a:bodyPr/>
                     <a:lstStyle/>
                     <a:p>
                       <a:pPr algn="l"/>
@@ -7515,7 +7515,7 @@
                 </a:tc>
                 <a:tc>
                   <a:txBody>
-                    <a:bodyPr wrap="square"/>
+                    <a:bodyPr/>
                     <a:lstStyle/>
                     <a:p>
                       <a:pPr algn="l"/>
@@ -7538,7 +7538,7 @@
                 </a:tc>
                 <a:tc>
                   <a:txBody>
-                    <a:bodyPr wrap="square"/>
+                    <a:bodyPr/>
                     <a:lstStyle/>
                     <a:p>
                       <a:pPr algn="l"/>
@@ -7561,7 +7561,7 @@
                 </a:tc>
                 <a:tc>
                   <a:txBody>
-                    <a:bodyPr wrap="square"/>
+                    <a:bodyPr/>
                     <a:lstStyle/>
                     <a:p>
                       <a:pPr algn="l"/>
@@ -7586,7 +7586,7 @@
               <a:tr h="292608">
                 <a:tc>
                   <a:txBody>
-                    <a:bodyPr wrap="square"/>
+                    <a:bodyPr/>
                     <a:lstStyle/>
                     <a:p>
                       <a:pPr algn="l"/>
@@ -7609,7 +7609,7 @@
                 </a:tc>
                 <a:tc>
                   <a:txBody>
-                    <a:bodyPr wrap="square"/>
+                    <a:bodyPr/>
                     <a:lstStyle/>
                     <a:p>
                       <a:pPr algn="l"/>
@@ -7632,7 +7632,7 @@
                 </a:tc>
                 <a:tc>
                   <a:txBody>
-                    <a:bodyPr wrap="square"/>
+                    <a:bodyPr/>
                     <a:lstStyle/>
                     <a:p>
                       <a:pPr algn="l"/>
@@ -7655,7 +7655,7 @@
                 </a:tc>
                 <a:tc>
                   <a:txBody>
-                    <a:bodyPr wrap="square"/>
+                    <a:bodyPr/>
                     <a:lstStyle/>
                     <a:p>
                       <a:pPr algn="l"/>
@@ -7678,7 +7678,7 @@
                 </a:tc>
                 <a:tc>
                   <a:txBody>
-                    <a:bodyPr wrap="square"/>
+                    <a:bodyPr/>
                     <a:lstStyle/>
                     <a:p>
                       <a:pPr algn="l"/>
@@ -7701,7 +7701,7 @@
                 </a:tc>
                 <a:tc>
                   <a:txBody>
-                    <a:bodyPr wrap="square"/>
+                    <a:bodyPr/>
                     <a:lstStyle/>
                     <a:p>
                       <a:pPr algn="l"/>
@@ -7724,7 +7724,7 @@
                 </a:tc>
                 <a:tc>
                   <a:txBody>
-                    <a:bodyPr wrap="square"/>
+                    <a:bodyPr/>
                     <a:lstStyle/>
                     <a:p>
                       <a:pPr algn="l"/>
@@ -7749,7 +7749,7 @@
               <a:tr h="292608">
                 <a:tc>
                   <a:txBody>
-                    <a:bodyPr wrap="square"/>
+                    <a:bodyPr/>
                     <a:lstStyle/>
                     <a:p>
                       <a:pPr algn="l"/>
@@ -7772,7 +7772,7 @@
                 </a:tc>
                 <a:tc>
                   <a:txBody>
-                    <a:bodyPr wrap="square"/>
+                    <a:bodyPr/>
                     <a:lstStyle/>
                     <a:p>
                       <a:pPr algn="l"/>
@@ -7795,7 +7795,7 @@
                 </a:tc>
                 <a:tc>
                   <a:txBody>
-                    <a:bodyPr wrap="square"/>
+                    <a:bodyPr/>
                     <a:lstStyle/>
                     <a:p>
                       <a:pPr algn="l"/>
@@ -7818,7 +7818,7 @@
                 </a:tc>
                 <a:tc>
                   <a:txBody>
-                    <a:bodyPr wrap="square"/>
+                    <a:bodyPr/>
                     <a:lstStyle/>
                     <a:p>
                       <a:pPr algn="l"/>
@@ -7841,7 +7841,7 @@
                 </a:tc>
                 <a:tc>
                   <a:txBody>
-                    <a:bodyPr wrap="square"/>
+                    <a:bodyPr/>
                     <a:lstStyle/>
                     <a:p>
                       <a:pPr algn="l"/>
@@ -7864,7 +7864,7 @@
                 </a:tc>
                 <a:tc>
                   <a:txBody>
-                    <a:bodyPr wrap="square"/>
+                    <a:bodyPr/>
                     <a:lstStyle/>
                     <a:p>
                       <a:pPr algn="l"/>
@@ -7887,7 +7887,7 @@
                 </a:tc>
                 <a:tc>
                   <a:txBody>
-                    <a:bodyPr wrap="square"/>
+                    <a:bodyPr/>
                     <a:lstStyle/>
                     <a:p>
                       <a:pPr algn="l"/>
@@ -7912,7 +7912,7 @@
               <a:tr h="292608">
                 <a:tc>
                   <a:txBody>
-                    <a:bodyPr wrap="square"/>
+                    <a:bodyPr/>
                     <a:lstStyle/>
                     <a:p>
                       <a:pPr algn="l"/>
@@ -7935,7 +7935,7 @@
                 </a:tc>
                 <a:tc>
                   <a:txBody>
-                    <a:bodyPr wrap="square"/>
+                    <a:bodyPr/>
                     <a:lstStyle/>
                     <a:p>
                       <a:pPr algn="l"/>
@@ -7958,7 +7958,7 @@
                 </a:tc>
                 <a:tc>
                   <a:txBody>
-                    <a:bodyPr wrap="square"/>
+                    <a:bodyPr/>
                     <a:lstStyle/>
                     <a:p>
                       <a:pPr algn="l"/>
@@ -7981,7 +7981,7 @@
                 </a:tc>
                 <a:tc>
                   <a:txBody>
-                    <a:bodyPr wrap="square"/>
+                    <a:bodyPr/>
                     <a:lstStyle/>
                     <a:p>
                       <a:pPr algn="l"/>
@@ -8004,7 +8004,7 @@
                 </a:tc>
                 <a:tc>
                   <a:txBody>
-                    <a:bodyPr wrap="square"/>
+                    <a:bodyPr/>
                     <a:lstStyle/>
                     <a:p>
                       <a:pPr algn="l"/>
@@ -8027,7 +8027,7 @@
                 </a:tc>
                 <a:tc>
                   <a:txBody>
-                    <a:bodyPr wrap="square"/>
+                    <a:bodyPr/>
                     <a:lstStyle/>
                     <a:p>
                       <a:pPr algn="l"/>
@@ -8050,7 +8050,7 @@
                 </a:tc>
                 <a:tc>
                   <a:txBody>
-                    <a:bodyPr wrap="square"/>
+                    <a:bodyPr/>
                     <a:lstStyle/>
                     <a:p>
                       <a:pPr algn="l"/>
@@ -8075,7 +8075,7 @@
               <a:tr h="292608">
                 <a:tc>
                   <a:txBody>
-                    <a:bodyPr wrap="square"/>
+                    <a:bodyPr/>
                     <a:lstStyle/>
                     <a:p>
                       <a:pPr algn="l"/>
@@ -8098,7 +8098,7 @@
                 </a:tc>
                 <a:tc>
                   <a:txBody>
-                    <a:bodyPr wrap="square"/>
+                    <a:bodyPr/>
                     <a:lstStyle/>
                     <a:p>
                       <a:pPr algn="l"/>
@@ -8121,7 +8121,7 @@
                 </a:tc>
                 <a:tc>
                   <a:txBody>
-                    <a:bodyPr wrap="square"/>
+                    <a:bodyPr/>
                     <a:lstStyle/>
                     <a:p>
                       <a:pPr algn="l"/>
@@ -8144,7 +8144,7 @@
                 </a:tc>
                 <a:tc>
                   <a:txBody>
-                    <a:bodyPr wrap="square"/>
+                    <a:bodyPr/>
                     <a:lstStyle/>
                     <a:p>
                       <a:pPr algn="l"/>
@@ -8167,7 +8167,7 @@
                 </a:tc>
                 <a:tc>
                   <a:txBody>
-                    <a:bodyPr wrap="square"/>
+                    <a:bodyPr/>
                     <a:lstStyle/>
                     <a:p>
                       <a:pPr algn="l"/>
@@ -8190,7 +8190,7 @@
                 </a:tc>
                 <a:tc>
                   <a:txBody>
-                    <a:bodyPr wrap="square"/>
+                    <a:bodyPr/>
                     <a:lstStyle/>
                     <a:p>
                       <a:pPr algn="l"/>
@@ -8213,7 +8213,7 @@
                 </a:tc>
                 <a:tc>
                   <a:txBody>
-                    <a:bodyPr wrap="square"/>
+                    <a:bodyPr/>
                     <a:lstStyle/>
                     <a:p>
                       <a:pPr algn="l"/>
@@ -8238,7 +8238,7 @@
               <a:tr h="292608">
                 <a:tc>
                   <a:txBody>
-                    <a:bodyPr wrap="square"/>
+                    <a:bodyPr/>
                     <a:lstStyle/>
                     <a:p>
                       <a:pPr algn="l"/>
@@ -8261,7 +8261,7 @@
                 </a:tc>
                 <a:tc>
                   <a:txBody>
-                    <a:bodyPr wrap="square"/>
+                    <a:bodyPr/>
                     <a:lstStyle/>
                     <a:p>
                       <a:pPr algn="l"/>
@@ -8284,7 +8284,7 @@
                 </a:tc>
                 <a:tc>
                   <a:txBody>
-                    <a:bodyPr wrap="square"/>
+                    <a:bodyPr/>
                     <a:lstStyle/>
                     <a:p>
                       <a:pPr algn="l"/>
@@ -8307,7 +8307,7 @@
                 </a:tc>
                 <a:tc>
                   <a:txBody>
-                    <a:bodyPr wrap="square"/>
+                    <a:bodyPr/>
                     <a:lstStyle/>
                     <a:p>
                       <a:pPr algn="l"/>
@@ -8330,7 +8330,7 @@
                 </a:tc>
                 <a:tc>
                   <a:txBody>
-                    <a:bodyPr wrap="square"/>
+                    <a:bodyPr/>
                     <a:lstStyle/>
                     <a:p>
                       <a:pPr algn="l"/>
@@ -8353,7 +8353,7 @@
                 </a:tc>
                 <a:tc>
                   <a:txBody>
-                    <a:bodyPr wrap="square"/>
+                    <a:bodyPr/>
                     <a:lstStyle/>
                     <a:p>
                       <a:pPr algn="l"/>
@@ -8376,7 +8376,7 @@
                 </a:tc>
                 <a:tc>
                   <a:txBody>
-                    <a:bodyPr wrap="square"/>
+                    <a:bodyPr/>
                     <a:lstStyle/>
                     <a:p>
                       <a:pPr algn="l"/>
@@ -8401,7 +8401,7 @@
               <a:tr h="292608">
                 <a:tc>
                   <a:txBody>
-                    <a:bodyPr wrap="square"/>
+                    <a:bodyPr/>
                     <a:lstStyle/>
                     <a:p>
                       <a:pPr algn="l"/>
@@ -8424,7 +8424,7 @@
                 </a:tc>
                 <a:tc>
                   <a:txBody>
-                    <a:bodyPr wrap="square"/>
+                    <a:bodyPr/>
                     <a:lstStyle/>
                     <a:p>
                       <a:pPr algn="l"/>
@@ -8447,7 +8447,7 @@
                 </a:tc>
                 <a:tc>
                   <a:txBody>
-                    <a:bodyPr wrap="square"/>
+                    <a:bodyPr/>
                     <a:lstStyle/>
                     <a:p>
                       <a:pPr algn="l"/>
@@ -8470,7 +8470,7 @@
                 </a:tc>
                 <a:tc>
                   <a:txBody>
-                    <a:bodyPr wrap="square"/>
+                    <a:bodyPr/>
                     <a:lstStyle/>
                     <a:p>
                       <a:pPr algn="l"/>
@@ -8493,7 +8493,7 @@
                 </a:tc>
                 <a:tc>
                   <a:txBody>
-                    <a:bodyPr wrap="square"/>
+                    <a:bodyPr/>
                     <a:lstStyle/>
                     <a:p>
                       <a:pPr algn="l"/>
@@ -8516,7 +8516,7 @@
                 </a:tc>
                 <a:tc>
                   <a:txBody>
-                    <a:bodyPr wrap="square"/>
+                    <a:bodyPr/>
                     <a:lstStyle/>
                     <a:p>
                       <a:pPr algn="l"/>
@@ -8539,7 +8539,7 @@
                 </a:tc>
                 <a:tc>
                   <a:txBody>
-                    <a:bodyPr wrap="square"/>
+                    <a:bodyPr/>
                     <a:lstStyle/>
                     <a:p>
                       <a:pPr algn="l"/>
@@ -8564,7 +8564,7 @@
               <a:tr h="292608">
                 <a:tc>
                   <a:txBody>
-                    <a:bodyPr wrap="square"/>
+                    <a:bodyPr/>
                     <a:lstStyle/>
                     <a:p>
                       <a:pPr algn="l"/>
@@ -8587,7 +8587,7 @@
                 </a:tc>
                 <a:tc>
                   <a:txBody>
-                    <a:bodyPr wrap="square"/>
+                    <a:bodyPr/>
                     <a:lstStyle/>
                     <a:p>
                       <a:pPr algn="l"/>
@@ -8610,7 +8610,7 @@
                 </a:tc>
                 <a:tc>
                   <a:txBody>
-                    <a:bodyPr wrap="square"/>
+                    <a:bodyPr/>
                     <a:lstStyle/>
                     <a:p>
                       <a:pPr algn="l"/>
@@ -8633,7 +8633,7 @@
                 </a:tc>
                 <a:tc>
                   <a:txBody>
-                    <a:bodyPr wrap="square"/>
+                    <a:bodyPr/>
                     <a:lstStyle/>
                     <a:p>
                       <a:pPr algn="l"/>
@@ -8656,7 +8656,7 @@
                 </a:tc>
                 <a:tc>
                   <a:txBody>
-                    <a:bodyPr wrap="square"/>
+                    <a:bodyPr/>
                     <a:lstStyle/>
                     <a:p>
                       <a:pPr algn="l"/>
@@ -8679,7 +8679,7 @@
                 </a:tc>
                 <a:tc>
                   <a:txBody>
-                    <a:bodyPr wrap="square"/>
+                    <a:bodyPr/>
                     <a:lstStyle/>
                     <a:p>
                       <a:pPr algn="l"/>
@@ -8702,7 +8702,7 @@
                 </a:tc>
                 <a:tc>
                   <a:txBody>
-                    <a:bodyPr wrap="square"/>
+                    <a:bodyPr/>
                     <a:lstStyle/>
                     <a:p>
                       <a:pPr algn="l"/>
@@ -8727,7 +8727,7 @@
               <a:tr h="292608">
                 <a:tc>
                   <a:txBody>
-                    <a:bodyPr wrap="square"/>
+                    <a:bodyPr/>
                     <a:lstStyle/>
                     <a:p>
                       <a:pPr algn="l"/>
@@ -8750,7 +8750,7 @@
                 </a:tc>
                 <a:tc>
                   <a:txBody>
-                    <a:bodyPr wrap="square"/>
+                    <a:bodyPr/>
                     <a:lstStyle/>
                     <a:p>
                       <a:pPr algn="l"/>
@@ -8773,7 +8773,7 @@
                 </a:tc>
                 <a:tc>
                   <a:txBody>
-                    <a:bodyPr wrap="square"/>
+                    <a:bodyPr/>
                     <a:lstStyle/>
                     <a:p>
                       <a:pPr algn="l"/>
@@ -8796,7 +8796,7 @@
                 </a:tc>
                 <a:tc>
                   <a:txBody>
-                    <a:bodyPr wrap="square"/>
+                    <a:bodyPr/>
                     <a:lstStyle/>
                     <a:p>
                       <a:pPr algn="l"/>
@@ -8819,7 +8819,7 @@
                 </a:tc>
                 <a:tc>
                   <a:txBody>
-                    <a:bodyPr wrap="square"/>
+                    <a:bodyPr/>
                     <a:lstStyle/>
                     <a:p>
                       <a:pPr algn="l"/>
@@ -8842,7 +8842,7 @@
                 </a:tc>
                 <a:tc>
                   <a:txBody>
-                    <a:bodyPr wrap="square"/>
+                    <a:bodyPr/>
                     <a:lstStyle/>
                     <a:p>
                       <a:pPr algn="l"/>
@@ -8865,7 +8865,7 @@
                 </a:tc>
                 <a:tc>
                   <a:txBody>
-                    <a:bodyPr wrap="square"/>
+                    <a:bodyPr/>
                     <a:lstStyle/>
                     <a:p>
                       <a:pPr algn="l"/>
@@ -8890,7 +8890,7 @@
               <a:tr h="292608">
                 <a:tc>
                   <a:txBody>
-                    <a:bodyPr wrap="square"/>
+                    <a:bodyPr/>
                     <a:lstStyle/>
                     <a:p>
                       <a:pPr algn="l"/>
@@ -8913,7 +8913,7 @@
                 </a:tc>
                 <a:tc>
                   <a:txBody>
-                    <a:bodyPr wrap="square"/>
+                    <a:bodyPr/>
                     <a:lstStyle/>
                     <a:p>
                       <a:pPr algn="l"/>
@@ -8936,7 +8936,7 @@
                 </a:tc>
                 <a:tc>
                   <a:txBody>
-                    <a:bodyPr wrap="square"/>
+                    <a:bodyPr/>
                     <a:lstStyle/>
                     <a:p>
                       <a:pPr algn="l"/>
@@ -8959,7 +8959,7 @@
                 </a:tc>
                 <a:tc>
                   <a:txBody>
-                    <a:bodyPr wrap="square"/>
+                    <a:bodyPr/>
                     <a:lstStyle/>
                     <a:p>
                       <a:pPr algn="l"/>
@@ -8982,7 +8982,7 @@
                 </a:tc>
                 <a:tc>
                   <a:txBody>
-                    <a:bodyPr wrap="square"/>
+                    <a:bodyPr/>
                     <a:lstStyle/>
                     <a:p>
                       <a:pPr algn="l"/>
@@ -9005,7 +9005,7 @@
                 </a:tc>
                 <a:tc>
                   <a:txBody>
-                    <a:bodyPr wrap="square"/>
+                    <a:bodyPr/>
                     <a:lstStyle/>
                     <a:p>
                       <a:pPr algn="l"/>
@@ -9028,7 +9028,7 @@
                 </a:tc>
                 <a:tc>
                   <a:txBody>
-                    <a:bodyPr wrap="square"/>
+                    <a:bodyPr/>
                     <a:lstStyle/>
                     <a:p>
                       <a:pPr algn="l"/>
@@ -9053,7 +9053,7 @@
               <a:tr h="292608">
                 <a:tc>
                   <a:txBody>
-                    <a:bodyPr wrap="square"/>
+                    <a:bodyPr/>
                     <a:lstStyle/>
                     <a:p>
                       <a:pPr algn="l"/>
@@ -9076,7 +9076,7 @@
                 </a:tc>
                 <a:tc>
                   <a:txBody>
-                    <a:bodyPr wrap="square"/>
+                    <a:bodyPr/>
                     <a:lstStyle/>
                     <a:p>
                       <a:pPr algn="l"/>
@@ -9099,7 +9099,7 @@
                 </a:tc>
                 <a:tc>
                   <a:txBody>
-                    <a:bodyPr wrap="square"/>
+                    <a:bodyPr/>
                     <a:lstStyle/>
                     <a:p>
                       <a:pPr algn="l"/>
@@ -9122,7 +9122,7 @@
                 </a:tc>
                 <a:tc>
                   <a:txBody>
-                    <a:bodyPr wrap="square"/>
+                    <a:bodyPr/>
                     <a:lstStyle/>
                     <a:p>
                       <a:pPr algn="l"/>
@@ -9145,7 +9145,7 @@
                 </a:tc>
                 <a:tc>
                   <a:txBody>
-                    <a:bodyPr wrap="square"/>
+                    <a:bodyPr/>
                     <a:lstStyle/>
                     <a:p>
                       <a:pPr algn="l"/>
@@ -9168,7 +9168,7 @@
                 </a:tc>
                 <a:tc>
                   <a:txBody>
-                    <a:bodyPr wrap="square"/>
+                    <a:bodyPr/>
                     <a:lstStyle/>
                     <a:p>
                       <a:pPr algn="l"/>
@@ -9191,7 +9191,7 @@
                 </a:tc>
                 <a:tc>
                   <a:txBody>
-                    <a:bodyPr wrap="square"/>
+                    <a:bodyPr/>
                     <a:lstStyle/>
                     <a:p>
                       <a:pPr algn="l"/>

--- a/MRCEGLIA_IMPORTACAO_E_SERVICOS.pptx
+++ b/MRCEGLIA_IMPORTACAO_E_SERVICOS.pptx
@@ -11,6 +11,7 @@
     <p:sldId id="259" r:id="rId10"/>
     <p:sldId id="260" r:id="rId11"/>
     <p:sldId id="261" r:id="rId12"/>
+    <p:sldId id="262" r:id="rId13"/>
   </p:sldIdLst>
   <p:sldSz cx="12188952" cy="6858000" type="screen4x3"/>
   <p:notesSz cx="6858000" cy="9144000"/>
@@ -146,10 +147,10 @@
               <c:strCache>
                 <c:ptCount val="2"/>
                 <c:pt idx="0">
-                  <c:v>Marco 2026</c:v>
+                  <c:v>Abril 2026</c:v>
                 </c:pt>
                 <c:pt idx="1">
-                  <c:v>Abril 2026</c:v>
+                  <c:v>Maio 2026</c:v>
                 </c:pt>
               </c:strCache>
             </c:strRef>
@@ -161,10 +162,10 @@
                 <c:formatCode>General</c:formatCode>
                 <c:ptCount val="2"/>
                 <c:pt idx="0">
-                  <c:v>0</c:v>
+                  <c:v>34</c:v>
                 </c:pt>
                 <c:pt idx="1">
-                  <c:v>34</c:v>
+                  <c:v>35</c:v>
                 </c:pt>
               </c:numCache>
             </c:numRef>
@@ -195,10 +196,10 @@
               <c:strCache>
                 <c:ptCount val="2"/>
                 <c:pt idx="0">
-                  <c:v>Marco 2026</c:v>
+                  <c:v>Abril 2026</c:v>
                 </c:pt>
                 <c:pt idx="1">
-                  <c:v>Abril 2026</c:v>
+                  <c:v>Maio 2026</c:v>
                 </c:pt>
               </c:strCache>
             </c:strRef>
@@ -213,7 +214,7 @@
                   <c:v>0</c:v>
                 </c:pt>
                 <c:pt idx="1">
-                  <c:v>0</c:v>
+                  <c:v>4</c:v>
                 </c:pt>
               </c:numCache>
             </c:numRef>
@@ -3386,7 +3387,7 @@
                 </a:solidFill>
                 <a:latin typeface="Calibri"/>
               </a:rPr>
-              <a:t>INDICADORES ABRIL 2026</a:t>
+              <a:t>INDICADORES MAIO 2026</a:t>
             </a:r>
           </a:p>
         </p:txBody>
@@ -3708,7 +3709,7 @@
                 </a:solidFill>
                 <a:latin typeface="Calibri"/>
               </a:rPr>
-              <a:t>34</a:t>
+              <a:t>39</a:t>
             </a:r>
           </a:p>
         </p:txBody>
@@ -3823,7 +3824,7 @@
                 </a:solidFill>
                 <a:latin typeface="Calibri"/>
               </a:rPr>
-              <a:t>34</a:t>
+              <a:t>35</a:t>
             </a:r>
           </a:p>
         </p:txBody>
@@ -3934,11 +3935,11 @@
             <a:r>
               <a:rPr sz="2800" b="1">
                 <a:solidFill>
-                  <a:srgbClr val="10B981"/>
+                  <a:srgbClr val="EF4444"/>
                 </a:solidFill>
                 <a:latin typeface="Calibri"/>
               </a:rPr>
-              <a:t>0</a:t>
+              <a:t>4</a:t>
             </a:r>
           </a:p>
         </p:txBody>
@@ -4049,11 +4050,11 @@
             <a:r>
               <a:rPr sz="2800" b="1">
                 <a:solidFill>
-                  <a:srgbClr val="10B981"/>
+                  <a:srgbClr val="F59E0B"/>
                 </a:solidFill>
                 <a:latin typeface="Calibri"/>
               </a:rPr>
-              <a:t>100.0%</a:t>
+              <a:t>89.7%</a:t>
             </a:r>
           </a:p>
         </p:txBody>
@@ -4154,7 +4155,7 @@
                           </a:solidFill>
                           <a:latin typeface="Calibri"/>
                         </a:rPr>
-                        <a:t>Marco 2026</a:t>
+                        <a:t>Abril 2026</a:t>
                       </a:r>
                     </a:p>
                   </a:txBody>
@@ -4177,7 +4178,7 @@
                           </a:solidFill>
                           <a:latin typeface="Calibri"/>
                         </a:rPr>
-                        <a:t>Abril 2026</a:t>
+                        <a:t>Maio 2026</a:t>
                       </a:r>
                     </a:p>
                   </a:txBody>
@@ -4248,7 +4249,7 @@
                           </a:solidFill>
                           <a:latin typeface="Calibri"/>
                         </a:rPr>
-                        <a:t>0</a:t>
+                        <a:t>34</a:t>
                       </a:r>
                     </a:p>
                   </a:txBody>
@@ -4271,7 +4272,7 @@
                           </a:solidFill>
                           <a:latin typeface="Calibri"/>
                         </a:rPr>
-                        <a:t>34</a:t>
+                        <a:t>39</a:t>
                       </a:r>
                     </a:p>
                   </a:txBody>
@@ -4294,7 +4295,7 @@
                           </a:solidFill>
                           <a:latin typeface="Calibri"/>
                         </a:rPr>
-                        <a:t>+ 34</a:t>
+                        <a:t>+ 5</a:t>
                       </a:r>
                     </a:p>
                   </a:txBody>
@@ -4342,7 +4343,7 @@
                           </a:solidFill>
                           <a:latin typeface="Calibri"/>
                         </a:rPr>
-                        <a:t>0</a:t>
+                        <a:t>34</a:t>
                       </a:r>
                     </a:p>
                   </a:txBody>
@@ -4365,7 +4366,7 @@
                           </a:solidFill>
                           <a:latin typeface="Calibri"/>
                         </a:rPr>
-                        <a:t>34</a:t>
+                        <a:t>35</a:t>
                       </a:r>
                     </a:p>
                   </a:txBody>
@@ -4388,7 +4389,7 @@
                           </a:solidFill>
                           <a:latin typeface="Calibri"/>
                         </a:rPr>
-                        <a:t>+ 34</a:t>
+                        <a:t>+ 1</a:t>
                       </a:r>
                     </a:p>
                   </a:txBody>
@@ -4459,7 +4460,7 @@
                           </a:solidFill>
                           <a:latin typeface="Calibri"/>
                         </a:rPr>
-                        <a:t>0</a:t>
+                        <a:t>4</a:t>
                       </a:r>
                     </a:p>
                   </a:txBody>
@@ -4482,7 +4483,7 @@
                           </a:solidFill>
                           <a:latin typeface="Calibri"/>
                         </a:rPr>
-                        <a:t>- 0</a:t>
+                        <a:t>+ 4</a:t>
                       </a:r>
                     </a:p>
                   </a:txBody>
@@ -4553,7 +4554,7 @@
                           </a:solidFill>
                           <a:latin typeface="Calibri"/>
                         </a:rPr>
-                        <a:t>100.0%</a:t>
+                        <a:t>89.7%</a:t>
                       </a:r>
                     </a:p>
                   </a:txBody>
@@ -4576,7 +4577,7 @@
                           </a:solidFill>
                           <a:latin typeface="Calibri"/>
                         </a:rPr>
-                        <a:t>+ 0.0pp</a:t>
+                        <a:t>- 10.3pp</a:t>
                       </a:r>
                     </a:p>
                   </a:txBody>
@@ -4893,7 +4894,7 @@
                           </a:solidFill>
                           <a:latin typeface="Calibri"/>
                         </a:rPr>
-                        <a:t>Marco 2026</a:t>
+                        <a:t>Abril 2026</a:t>
                       </a:r>
                     </a:p>
                   </a:txBody>
@@ -4916,7 +4917,7 @@
                           </a:solidFill>
                           <a:latin typeface="Calibri"/>
                         </a:rPr>
-                        <a:t>0</a:t>
+                        <a:t>34</a:t>
                       </a:r>
                     </a:p>
                   </a:txBody>
@@ -4939,7 +4940,7 @@
                           </a:solidFill>
                           <a:latin typeface="Calibri"/>
                         </a:rPr>
-                        <a:t>0</a:t>
+                        <a:t>34</a:t>
                       </a:r>
                     </a:p>
                   </a:txBody>
@@ -5010,7 +5011,7 @@
                           </a:solidFill>
                           <a:latin typeface="Calibri"/>
                         </a:rPr>
-                        <a:t>Abril 2026</a:t>
+                        <a:t>Maio 2026</a:t>
                       </a:r>
                     </a:p>
                   </a:txBody>
@@ -5033,7 +5034,7 @@
                           </a:solidFill>
                           <a:latin typeface="Calibri"/>
                         </a:rPr>
-                        <a:t>34</a:t>
+                        <a:t>39</a:t>
                       </a:r>
                     </a:p>
                   </a:txBody>
@@ -5056,7 +5057,7 @@
                           </a:solidFill>
                           <a:latin typeface="Calibri"/>
                         </a:rPr>
-                        <a:t>34</a:t>
+                        <a:t>35</a:t>
                       </a:r>
                     </a:p>
                   </a:txBody>
@@ -5079,7 +5080,7 @@
                           </a:solidFill>
                           <a:latin typeface="Calibri"/>
                         </a:rPr>
-                        <a:t>0</a:t>
+                        <a:t>4</a:t>
                       </a:r>
                     </a:p>
                   </a:txBody>
@@ -5102,7 +5103,7 @@
                           </a:solidFill>
                           <a:latin typeface="Calibri"/>
                         </a:rPr>
-                        <a:t>100.0%</a:t>
+                        <a:t>89.7%</a:t>
                       </a:r>
                     </a:p>
                   </a:txBody>
@@ -5190,7 +5191,7 @@
                 </a:solidFill>
                 <a:latin typeface="Calibri"/>
               </a:rPr>
-              <a:t>PERFORMANCE: 100.0% - EXCELENTE</a:t>
+              <a:t>PERFORMANCE: 89.7% - REGULAR</a:t>
             </a:r>
           </a:p>
         </p:txBody>
@@ -5254,7 +5255,7 @@
         <p:spPr>
           <a:xfrm>
             <a:off x="749808" y="502920"/>
-            <a:ext cx="9144000" cy="914400"/>
+            <a:ext cx="10058400" cy="914400"/>
           </a:xfrm>
           <a:prstGeom prst="rect">
             <a:avLst/>
@@ -5269,13 +5270,13 @@
           <a:p>
             <a:pPr algn="l"/>
             <a:r>
-              <a:rPr sz="4000" b="1">
+              <a:rPr sz="3200" b="1">
                 <a:solidFill>
                   <a:srgbClr val="F97316"/>
                 </a:solidFill>
                 <a:latin typeface="Calibri"/>
               </a:rPr>
-              <a:t>PERFORMANCE POR UF</a:t>
+              <a:t>OCORRENCIAS FORA DO PRAZO (4)</a:t>
             </a:r>
           </a:p>
         </p:txBody>
@@ -5288,7 +5289,7 @@
         </p:nvSpPr>
         <p:spPr>
           <a:xfrm>
-            <a:off x="749808" y="1719072"/>
+            <a:off x="749808" y="1600200"/>
             <a:ext cx="10424160" cy="36576"/>
           </a:xfrm>
           <a:prstGeom prst="rect">
@@ -5332,8 +5333,8 @@
           <p:nvPr/>
         </p:nvGraphicFramePr>
         <p:xfrm>
-          <a:off x="731520" y="1920240"/>
-          <a:ext cx="10698480" cy="4114800"/>
+          <a:off x="457200" y="1828800"/>
+          <a:ext cx="11429999" cy="1920240"/>
         </p:xfrm>
         <a:graphic>
           <a:graphicData uri="http://schemas.openxmlformats.org/drawingml/2006/table">
@@ -5342,14 +5343,13 @@
                 <a:tableStyleId>{5C22544A-7EE6-4342-B048-85BDC9FD1C3A}</a:tableStyleId>
               </a:tblPr>
               <a:tblGrid>
-                <a:gridCol w="1097280"/>
-                <a:gridCol w="1645920"/>
-                <a:gridCol w="1645920"/>
-                <a:gridCol w="1645920"/>
+                <a:gridCol w="1280160"/>
+                <a:gridCol w="3749039"/>
+                <a:gridCol w="2103120"/>
                 <a:gridCol w="1554480"/>
-                <a:gridCol w="3108960"/>
+                <a:gridCol w="2743200"/>
               </a:tblGrid>
-              <a:tr h="457200">
+              <a:tr h="384048">
                 <a:tc>
                   <a:txBody>
                     <a:bodyPr/>
@@ -5363,7 +5363,7 @@
                           </a:solidFill>
                           <a:latin typeface="Calibri"/>
                         </a:rPr>
-                        <a:t>UF</a:t>
+                        <a:t>MD</a:t>
                       </a:r>
                     </a:p>
                   </a:txBody>
@@ -5386,7 +5386,7 @@
                           </a:solidFill>
                           <a:latin typeface="Calibri"/>
                         </a:rPr>
-                        <a:t>TOTAL</a:t>
+                        <a:t>DESTINATARIO</a:t>
                       </a:r>
                     </a:p>
                   </a:txBody>
@@ -5409,7 +5409,7 @@
                           </a:solidFill>
                           <a:latin typeface="Calibri"/>
                         </a:rPr>
-                        <a:t>NO PRAZO</a:t>
+                        <a:t>CIDADE/UF</a:t>
                       </a:r>
                     </a:p>
                   </a:txBody>
@@ -5432,7 +5432,7 @@
                           </a:solidFill>
                           <a:latin typeface="Calibri"/>
                         </a:rPr>
-                        <a:t>FORA</a:t>
+                        <a:t>PREV. ENTREGA</a:t>
                       </a:r>
                     </a:p>
                   </a:txBody>
@@ -5455,7 +5455,7 @@
                           </a:solidFill>
                           <a:latin typeface="Calibri"/>
                         </a:rPr>
-                        <a:t>TAXA</a:t>
+                        <a:t>STATUS</a:t>
                       </a:r>
                     </a:p>
                   </a:txBody>
@@ -5465,45 +5465,22 @@
                     </a:solidFill>
                   </a:tcPr>
                 </a:tc>
-                <a:tc>
-                  <a:txBody>
-                    <a:bodyPr/>
-                    <a:lstStyle/>
-                    <a:p>
-                      <a:pPr algn="ctr"/>
-                      <a:r>
-                        <a:rPr sz="1100" b="1">
-                          <a:solidFill>
-                            <a:srgbClr val="FFFFFF"/>
-                          </a:solidFill>
-                          <a:latin typeface="Calibri"/>
-                        </a:rPr>
-                        <a:t>STATUS</a:t>
-                      </a:r>
-                    </a:p>
-                  </a:txBody>
-                  <a:tcPr>
-                    <a:solidFill>
-                      <a:srgbClr val="1D1B43"/>
-                    </a:solidFill>
-                  </a:tcPr>
-                </a:tc>
               </a:tr>
-              <a:tr h="457200">
-                <a:tc>
-                  <a:txBody>
-                    <a:bodyPr/>
-                    <a:lstStyle/>
-                    <a:p>
-                      <a:pPr algn="l"/>
-                      <a:r>
-                        <a:rPr sz="1000" b="0">
-                          <a:solidFill>
-                            <a:srgbClr val="1D1B43"/>
-                          </a:solidFill>
-                          <a:latin typeface="Calibri"/>
-                        </a:rPr>
-                        <a:t>SP</a:t>
+              <a:tr h="384048">
+                <a:tc>
+                  <a:txBody>
+                    <a:bodyPr/>
+                    <a:lstStyle/>
+                    <a:p>
+                      <a:pPr algn="l"/>
+                      <a:r>
+                        <a:rPr sz="1000" b="0">
+                          <a:solidFill>
+                            <a:srgbClr val="1D1B43"/>
+                          </a:solidFill>
+                          <a:latin typeface="Calibri"/>
+                        </a:rPr>
+                        <a:t>280714</a:t>
                       </a:r>
                     </a:p>
                   </a:txBody>
@@ -5526,7 +5503,7 @@
                           </a:solidFill>
                           <a:latin typeface="Calibri"/>
                         </a:rPr>
-                        <a:t>14</a:t>
+                        <a:t>ALBERTO ANDRES ANDRE - JOAO PESSOA / PB</a:t>
                       </a:r>
                     </a:p>
                   </a:txBody>
@@ -5549,7 +5526,7 @@
                           </a:solidFill>
                           <a:latin typeface="Calibri"/>
                         </a:rPr>
-                        <a:t>14</a:t>
+                        <a:t>JOAO PESSOA/PB</a:t>
                       </a:r>
                     </a:p>
                   </a:txBody>
@@ -5572,7 +5549,7 @@
                           </a:solidFill>
                           <a:latin typeface="Calibri"/>
                         </a:rPr>
-                        <a:t>0</a:t>
+                        <a:t>08/05/2026</a:t>
                       </a:r>
                     </a:p>
                   </a:txBody>
@@ -5595,7 +5572,7 @@
                           </a:solidFill>
                           <a:latin typeface="Calibri"/>
                         </a:rPr>
-                        <a:t>100.0%</a:t>
+                        <a:t>ENTREGUE FORA DO PRAZO</a:t>
                       </a:r>
                     </a:p>
                   </a:txBody>
@@ -5605,20 +5582,139 @@
                     </a:solidFill>
                   </a:tcPr>
                 </a:tc>
-                <a:tc>
-                  <a:txBody>
-                    <a:bodyPr/>
-                    <a:lstStyle/>
-                    <a:p>
-                      <a:pPr algn="l"/>
-                      <a:r>
-                        <a:rPr sz="1000" b="0">
-                          <a:solidFill>
-                            <a:srgbClr val="1D1B43"/>
-                          </a:solidFill>
-                          <a:latin typeface="Calibri"/>
-                        </a:rPr>
-                        <a:t>Excelente</a:t>
+              </a:tr>
+              <a:tr h="384048">
+                <a:tc>
+                  <a:txBody>
+                    <a:bodyPr/>
+                    <a:lstStyle/>
+                    <a:p>
+                      <a:pPr algn="l"/>
+                      <a:r>
+                        <a:rPr sz="1000" b="0">
+                          <a:solidFill>
+                            <a:srgbClr val="1D1B43"/>
+                          </a:solidFill>
+                          <a:latin typeface="Calibri"/>
+                        </a:rPr>
+                        <a:t>280719</a:t>
+                      </a:r>
+                    </a:p>
+                  </a:txBody>
+                  <a:tcPr>
+                    <a:solidFill>
+                      <a:srgbClr val="F2F2F2"/>
+                    </a:solidFill>
+                  </a:tcPr>
+                </a:tc>
+                <a:tc>
+                  <a:txBody>
+                    <a:bodyPr/>
+                    <a:lstStyle/>
+                    <a:p>
+                      <a:pPr algn="l"/>
+                      <a:r>
+                        <a:rPr sz="1000" b="0">
+                          <a:solidFill>
+                            <a:srgbClr val="1D1B43"/>
+                          </a:solidFill>
+                          <a:latin typeface="Calibri"/>
+                        </a:rPr>
+                        <a:t>PITINHO DE PALHA PRO - BRASILIA / DF</a:t>
+                      </a:r>
+                    </a:p>
+                  </a:txBody>
+                  <a:tcPr>
+                    <a:solidFill>
+                      <a:srgbClr val="F2F2F2"/>
+                    </a:solidFill>
+                  </a:tcPr>
+                </a:tc>
+                <a:tc>
+                  <a:txBody>
+                    <a:bodyPr/>
+                    <a:lstStyle/>
+                    <a:p>
+                      <a:pPr algn="l"/>
+                      <a:r>
+                        <a:rPr sz="1000" b="0">
+                          <a:solidFill>
+                            <a:srgbClr val="1D1B43"/>
+                          </a:solidFill>
+                          <a:latin typeface="Calibri"/>
+                        </a:rPr>
+                        <a:t>BRASILIA/DF</a:t>
+                      </a:r>
+                    </a:p>
+                  </a:txBody>
+                  <a:tcPr>
+                    <a:solidFill>
+                      <a:srgbClr val="F2F2F2"/>
+                    </a:solidFill>
+                  </a:tcPr>
+                </a:tc>
+                <a:tc>
+                  <a:txBody>
+                    <a:bodyPr/>
+                    <a:lstStyle/>
+                    <a:p>
+                      <a:pPr algn="l"/>
+                      <a:r>
+                        <a:rPr sz="1000" b="0">
+                          <a:solidFill>
+                            <a:srgbClr val="1D1B43"/>
+                          </a:solidFill>
+                          <a:latin typeface="Calibri"/>
+                        </a:rPr>
+                        <a:t>08/05/2026</a:t>
+                      </a:r>
+                    </a:p>
+                  </a:txBody>
+                  <a:tcPr>
+                    <a:solidFill>
+                      <a:srgbClr val="F2F2F2"/>
+                    </a:solidFill>
+                  </a:tcPr>
+                </a:tc>
+                <a:tc>
+                  <a:txBody>
+                    <a:bodyPr/>
+                    <a:lstStyle/>
+                    <a:p>
+                      <a:pPr algn="l"/>
+                      <a:r>
+                        <a:rPr sz="1000" b="0">
+                          <a:solidFill>
+                            <a:srgbClr val="1D1B43"/>
+                          </a:solidFill>
+                          <a:latin typeface="Calibri"/>
+                        </a:rPr>
+                        <a:t>FORA DO PRAZO</a:t>
+                      </a:r>
+                    </a:p>
+                  </a:txBody>
+                  <a:tcPr>
+                    <a:solidFill>
+                      <a:srgbClr val="F2F2F2"/>
+                    </a:solidFill>
+                  </a:tcPr>
+                </a:tc>
+              </a:tr>
+              <a:tr h="384048">
+                <a:tc>
+                  <a:txBody>
+                    <a:bodyPr/>
+                    <a:lstStyle/>
+                    <a:p>
+                      <a:pPr algn="l"/>
+                      <a:r>
+                        <a:rPr sz="1000" b="0">
+                          <a:solidFill>
+                            <a:srgbClr val="1D1B43"/>
+                          </a:solidFill>
+                          <a:latin typeface="Calibri"/>
+                        </a:rPr>
+                        <a:t>280721</a:t>
                       </a:r>
                     </a:p>
                   </a:txBody>
@@ -5628,22 +5724,114 @@
                     </a:solidFill>
                   </a:tcPr>
                 </a:tc>
+                <a:tc>
+                  <a:txBody>
+                    <a:bodyPr/>
+                    <a:lstStyle/>
+                    <a:p>
+                      <a:pPr algn="l"/>
+                      <a:r>
+                        <a:rPr sz="1000" b="0">
+                          <a:solidFill>
+                            <a:srgbClr val="1D1B43"/>
+                          </a:solidFill>
+                          <a:latin typeface="Calibri"/>
+                        </a:rPr>
+                        <a:t>TABACARIA HIJAZI - SAO LUIZ / MA</a:t>
+                      </a:r>
+                    </a:p>
+                  </a:txBody>
+                  <a:tcPr>
+                    <a:solidFill>
+                      <a:srgbClr val="FFFFFF"/>
+                    </a:solidFill>
+                  </a:tcPr>
+                </a:tc>
+                <a:tc>
+                  <a:txBody>
+                    <a:bodyPr/>
+                    <a:lstStyle/>
+                    <a:p>
+                      <a:pPr algn="l"/>
+                      <a:r>
+                        <a:rPr sz="1000" b="0">
+                          <a:solidFill>
+                            <a:srgbClr val="1D1B43"/>
+                          </a:solidFill>
+                          <a:latin typeface="Calibri"/>
+                        </a:rPr>
+                        <a:t>SAO LUIZ/MA</a:t>
+                      </a:r>
+                    </a:p>
+                  </a:txBody>
+                  <a:tcPr>
+                    <a:solidFill>
+                      <a:srgbClr val="FFFFFF"/>
+                    </a:solidFill>
+                  </a:tcPr>
+                </a:tc>
+                <a:tc>
+                  <a:txBody>
+                    <a:bodyPr/>
+                    <a:lstStyle/>
+                    <a:p>
+                      <a:pPr algn="l"/>
+                      <a:r>
+                        <a:rPr sz="1000" b="0">
+                          <a:solidFill>
+                            <a:srgbClr val="1D1B43"/>
+                          </a:solidFill>
+                          <a:latin typeface="Calibri"/>
+                        </a:rPr>
+                        <a:t>08/05/2026</a:t>
+                      </a:r>
+                    </a:p>
+                  </a:txBody>
+                  <a:tcPr>
+                    <a:solidFill>
+                      <a:srgbClr val="FFFFFF"/>
+                    </a:solidFill>
+                  </a:tcPr>
+                </a:tc>
+                <a:tc>
+                  <a:txBody>
+                    <a:bodyPr/>
+                    <a:lstStyle/>
+                    <a:p>
+                      <a:pPr algn="l"/>
+                      <a:r>
+                        <a:rPr sz="1000" b="0">
+                          <a:solidFill>
+                            <a:srgbClr val="1D1B43"/>
+                          </a:solidFill>
+                          <a:latin typeface="Calibri"/>
+                        </a:rPr>
+                        <a:t>ENTREGUE FORA DO PRAZO</a:t>
+                      </a:r>
+                    </a:p>
+                  </a:txBody>
+                  <a:tcPr>
+                    <a:solidFill>
+                      <a:srgbClr val="FFFFFF"/>
+                    </a:solidFill>
+                  </a:tcPr>
+                </a:tc>
               </a:tr>
-              <a:tr h="457200">
-                <a:tc>
-                  <a:txBody>
-                    <a:bodyPr/>
-                    <a:lstStyle/>
-                    <a:p>
-                      <a:pPr algn="l"/>
-                      <a:r>
-                        <a:rPr sz="1000" b="0">
-                          <a:solidFill>
-                            <a:srgbClr val="1D1B43"/>
-                          </a:solidFill>
-                          <a:latin typeface="Calibri"/>
-                        </a:rPr>
-                        <a:t>RJ</a:t>
+              <a:tr h="384048">
+                <a:tc>
+                  <a:txBody>
+                    <a:bodyPr/>
+                    <a:lstStyle/>
+                    <a:p>
+                      <a:pPr algn="l"/>
+                      <a:r>
+                        <a:rPr sz="1000" b="0">
+                          <a:solidFill>
+                            <a:srgbClr val="1D1B43"/>
+                          </a:solidFill>
+                          <a:latin typeface="Calibri"/>
+                        </a:rPr>
+                        <a:t>282336</a:t>
                       </a:r>
                     </a:p>
                   </a:txBody>
@@ -5666,7 +5854,7 @@
                           </a:solidFill>
                           <a:latin typeface="Calibri"/>
                         </a:rPr>
-                        <a:t>6</a:t>
+                        <a:t>TABACARIA HIJAZI - SAO LUIZ / MA</a:t>
                       </a:r>
                     </a:p>
                   </a:txBody>
@@ -5689,7 +5877,7 @@
                           </a:solidFill>
                           <a:latin typeface="Calibri"/>
                         </a:rPr>
-                        <a:t>6</a:t>
+                        <a:t>SAO LUIZ/MA</a:t>
                       </a:r>
                     </a:p>
                   </a:txBody>
@@ -5712,7 +5900,7 @@
                           </a:solidFill>
                           <a:latin typeface="Calibri"/>
                         </a:rPr>
-                        <a:t>0</a:t>
+                        <a:t>19/05/2026</a:t>
                       </a:r>
                     </a:p>
                   </a:txBody>
@@ -5735,870 +5923,7 @@
                           </a:solidFill>
                           <a:latin typeface="Calibri"/>
                         </a:rPr>
-                        <a:t>100.0%</a:t>
-                      </a:r>
-                    </a:p>
-                  </a:txBody>
-                  <a:tcPr>
-                    <a:solidFill>
-                      <a:srgbClr val="F2F2F2"/>
-                    </a:solidFill>
-                  </a:tcPr>
-                </a:tc>
-                <a:tc>
-                  <a:txBody>
-                    <a:bodyPr/>
-                    <a:lstStyle/>
-                    <a:p>
-                      <a:pPr algn="l"/>
-                      <a:r>
-                        <a:rPr sz="1000" b="0">
-                          <a:solidFill>
-                            <a:srgbClr val="1D1B43"/>
-                          </a:solidFill>
-                          <a:latin typeface="Calibri"/>
-                        </a:rPr>
-                        <a:t>Excelente</a:t>
-                      </a:r>
-                    </a:p>
-                  </a:txBody>
-                  <a:tcPr>
-                    <a:solidFill>
-                      <a:srgbClr val="F2F2F2"/>
-                    </a:solidFill>
-                  </a:tcPr>
-                </a:tc>
-              </a:tr>
-              <a:tr h="457200">
-                <a:tc>
-                  <a:txBody>
-                    <a:bodyPr/>
-                    <a:lstStyle/>
-                    <a:p>
-                      <a:pPr algn="l"/>
-                      <a:r>
-                        <a:rPr sz="1000" b="0">
-                          <a:solidFill>
-                            <a:srgbClr val="1D1B43"/>
-                          </a:solidFill>
-                          <a:latin typeface="Calibri"/>
-                        </a:rPr>
-                        <a:t>SC</a:t>
-                      </a:r>
-                    </a:p>
-                  </a:txBody>
-                  <a:tcPr>
-                    <a:solidFill>
-                      <a:srgbClr val="FFFFFF"/>
-                    </a:solidFill>
-                  </a:tcPr>
-                </a:tc>
-                <a:tc>
-                  <a:txBody>
-                    <a:bodyPr/>
-                    <a:lstStyle/>
-                    <a:p>
-                      <a:pPr algn="l"/>
-                      <a:r>
-                        <a:rPr sz="1000" b="0">
-                          <a:solidFill>
-                            <a:srgbClr val="1D1B43"/>
-                          </a:solidFill>
-                          <a:latin typeface="Calibri"/>
-                        </a:rPr>
-                        <a:t>6</a:t>
-                      </a:r>
-                    </a:p>
-                  </a:txBody>
-                  <a:tcPr>
-                    <a:solidFill>
-                      <a:srgbClr val="FFFFFF"/>
-                    </a:solidFill>
-                  </a:tcPr>
-                </a:tc>
-                <a:tc>
-                  <a:txBody>
-                    <a:bodyPr/>
-                    <a:lstStyle/>
-                    <a:p>
-                      <a:pPr algn="l"/>
-                      <a:r>
-                        <a:rPr sz="1000" b="0">
-                          <a:solidFill>
-                            <a:srgbClr val="1D1B43"/>
-                          </a:solidFill>
-                          <a:latin typeface="Calibri"/>
-                        </a:rPr>
-                        <a:t>6</a:t>
-                      </a:r>
-                    </a:p>
-                  </a:txBody>
-                  <a:tcPr>
-                    <a:solidFill>
-                      <a:srgbClr val="FFFFFF"/>
-                    </a:solidFill>
-                  </a:tcPr>
-                </a:tc>
-                <a:tc>
-                  <a:txBody>
-                    <a:bodyPr/>
-                    <a:lstStyle/>
-                    <a:p>
-                      <a:pPr algn="l"/>
-                      <a:r>
-                        <a:rPr sz="1000" b="0">
-                          <a:solidFill>
-                            <a:srgbClr val="1D1B43"/>
-                          </a:solidFill>
-                          <a:latin typeface="Calibri"/>
-                        </a:rPr>
-                        <a:t>0</a:t>
-                      </a:r>
-                    </a:p>
-                  </a:txBody>
-                  <a:tcPr>
-                    <a:solidFill>
-                      <a:srgbClr val="FFFFFF"/>
-                    </a:solidFill>
-                  </a:tcPr>
-                </a:tc>
-                <a:tc>
-                  <a:txBody>
-                    <a:bodyPr/>
-                    <a:lstStyle/>
-                    <a:p>
-                      <a:pPr algn="l"/>
-                      <a:r>
-                        <a:rPr sz="1000" b="0">
-                          <a:solidFill>
-                            <a:srgbClr val="1D1B43"/>
-                          </a:solidFill>
-                          <a:latin typeface="Calibri"/>
-                        </a:rPr>
-                        <a:t>100.0%</a:t>
-                      </a:r>
-                    </a:p>
-                  </a:txBody>
-                  <a:tcPr>
-                    <a:solidFill>
-                      <a:srgbClr val="FFFFFF"/>
-                    </a:solidFill>
-                  </a:tcPr>
-                </a:tc>
-                <a:tc>
-                  <a:txBody>
-                    <a:bodyPr/>
-                    <a:lstStyle/>
-                    <a:p>
-                      <a:pPr algn="l"/>
-                      <a:r>
-                        <a:rPr sz="1000" b="0">
-                          <a:solidFill>
-                            <a:srgbClr val="1D1B43"/>
-                          </a:solidFill>
-                          <a:latin typeface="Calibri"/>
-                        </a:rPr>
-                        <a:t>Excelente</a:t>
-                      </a:r>
-                    </a:p>
-                  </a:txBody>
-                  <a:tcPr>
-                    <a:solidFill>
-                      <a:srgbClr val="FFFFFF"/>
-                    </a:solidFill>
-                  </a:tcPr>
-                </a:tc>
-              </a:tr>
-              <a:tr h="457200">
-                <a:tc>
-                  <a:txBody>
-                    <a:bodyPr/>
-                    <a:lstStyle/>
-                    <a:p>
-                      <a:pPr algn="l"/>
-                      <a:r>
-                        <a:rPr sz="1000" b="0">
-                          <a:solidFill>
-                            <a:srgbClr val="1D1B43"/>
-                          </a:solidFill>
-                          <a:latin typeface="Calibri"/>
-                        </a:rPr>
-                        <a:t>RS</a:t>
-                      </a:r>
-                    </a:p>
-                  </a:txBody>
-                  <a:tcPr>
-                    <a:solidFill>
-                      <a:srgbClr val="F2F2F2"/>
-                    </a:solidFill>
-                  </a:tcPr>
-                </a:tc>
-                <a:tc>
-                  <a:txBody>
-                    <a:bodyPr/>
-                    <a:lstStyle/>
-                    <a:p>
-                      <a:pPr algn="l"/>
-                      <a:r>
-                        <a:rPr sz="1000" b="0">
-                          <a:solidFill>
-                            <a:srgbClr val="1D1B43"/>
-                          </a:solidFill>
-                          <a:latin typeface="Calibri"/>
-                        </a:rPr>
-                        <a:t>3</a:t>
-                      </a:r>
-                    </a:p>
-                  </a:txBody>
-                  <a:tcPr>
-                    <a:solidFill>
-                      <a:srgbClr val="F2F2F2"/>
-                    </a:solidFill>
-                  </a:tcPr>
-                </a:tc>
-                <a:tc>
-                  <a:txBody>
-                    <a:bodyPr/>
-                    <a:lstStyle/>
-                    <a:p>
-                      <a:pPr algn="l"/>
-                      <a:r>
-                        <a:rPr sz="1000" b="0">
-                          <a:solidFill>
-                            <a:srgbClr val="1D1B43"/>
-                          </a:solidFill>
-                          <a:latin typeface="Calibri"/>
-                        </a:rPr>
-                        <a:t>3</a:t>
-                      </a:r>
-                    </a:p>
-                  </a:txBody>
-                  <a:tcPr>
-                    <a:solidFill>
-                      <a:srgbClr val="F2F2F2"/>
-                    </a:solidFill>
-                  </a:tcPr>
-                </a:tc>
-                <a:tc>
-                  <a:txBody>
-                    <a:bodyPr/>
-                    <a:lstStyle/>
-                    <a:p>
-                      <a:pPr algn="l"/>
-                      <a:r>
-                        <a:rPr sz="1000" b="0">
-                          <a:solidFill>
-                            <a:srgbClr val="1D1B43"/>
-                          </a:solidFill>
-                          <a:latin typeface="Calibri"/>
-                        </a:rPr>
-                        <a:t>0</a:t>
-                      </a:r>
-                    </a:p>
-                  </a:txBody>
-                  <a:tcPr>
-                    <a:solidFill>
-                      <a:srgbClr val="F2F2F2"/>
-                    </a:solidFill>
-                  </a:tcPr>
-                </a:tc>
-                <a:tc>
-                  <a:txBody>
-                    <a:bodyPr/>
-                    <a:lstStyle/>
-                    <a:p>
-                      <a:pPr algn="l"/>
-                      <a:r>
-                        <a:rPr sz="1000" b="0">
-                          <a:solidFill>
-                            <a:srgbClr val="1D1B43"/>
-                          </a:solidFill>
-                          <a:latin typeface="Calibri"/>
-                        </a:rPr>
-                        <a:t>100.0%</a:t>
-                      </a:r>
-                    </a:p>
-                  </a:txBody>
-                  <a:tcPr>
-                    <a:solidFill>
-                      <a:srgbClr val="F2F2F2"/>
-                    </a:solidFill>
-                  </a:tcPr>
-                </a:tc>
-                <a:tc>
-                  <a:txBody>
-                    <a:bodyPr/>
-                    <a:lstStyle/>
-                    <a:p>
-                      <a:pPr algn="l"/>
-                      <a:r>
-                        <a:rPr sz="1000" b="0">
-                          <a:solidFill>
-                            <a:srgbClr val="1D1B43"/>
-                          </a:solidFill>
-                          <a:latin typeface="Calibri"/>
-                        </a:rPr>
-                        <a:t>Excelente</a:t>
-                      </a:r>
-                    </a:p>
-                  </a:txBody>
-                  <a:tcPr>
-                    <a:solidFill>
-                      <a:srgbClr val="F2F2F2"/>
-                    </a:solidFill>
-                  </a:tcPr>
-                </a:tc>
-              </a:tr>
-              <a:tr h="457200">
-                <a:tc>
-                  <a:txBody>
-                    <a:bodyPr/>
-                    <a:lstStyle/>
-                    <a:p>
-                      <a:pPr algn="l"/>
-                      <a:r>
-                        <a:rPr sz="1000" b="0">
-                          <a:solidFill>
-                            <a:srgbClr val="1D1B43"/>
-                          </a:solidFill>
-                          <a:latin typeface="Calibri"/>
-                        </a:rPr>
-                        <a:t>GO</a:t>
-                      </a:r>
-                    </a:p>
-                  </a:txBody>
-                  <a:tcPr>
-                    <a:solidFill>
-                      <a:srgbClr val="FFFFFF"/>
-                    </a:solidFill>
-                  </a:tcPr>
-                </a:tc>
-                <a:tc>
-                  <a:txBody>
-                    <a:bodyPr/>
-                    <a:lstStyle/>
-                    <a:p>
-                      <a:pPr algn="l"/>
-                      <a:r>
-                        <a:rPr sz="1000" b="0">
-                          <a:solidFill>
-                            <a:srgbClr val="1D1B43"/>
-                          </a:solidFill>
-                          <a:latin typeface="Calibri"/>
-                        </a:rPr>
-                        <a:t>2</a:t>
-                      </a:r>
-                    </a:p>
-                  </a:txBody>
-                  <a:tcPr>
-                    <a:solidFill>
-                      <a:srgbClr val="FFFFFF"/>
-                    </a:solidFill>
-                  </a:tcPr>
-                </a:tc>
-                <a:tc>
-                  <a:txBody>
-                    <a:bodyPr/>
-                    <a:lstStyle/>
-                    <a:p>
-                      <a:pPr algn="l"/>
-                      <a:r>
-                        <a:rPr sz="1000" b="0">
-                          <a:solidFill>
-                            <a:srgbClr val="1D1B43"/>
-                          </a:solidFill>
-                          <a:latin typeface="Calibri"/>
-                        </a:rPr>
-                        <a:t>2</a:t>
-                      </a:r>
-                    </a:p>
-                  </a:txBody>
-                  <a:tcPr>
-                    <a:solidFill>
-                      <a:srgbClr val="FFFFFF"/>
-                    </a:solidFill>
-                  </a:tcPr>
-                </a:tc>
-                <a:tc>
-                  <a:txBody>
-                    <a:bodyPr/>
-                    <a:lstStyle/>
-                    <a:p>
-                      <a:pPr algn="l"/>
-                      <a:r>
-                        <a:rPr sz="1000" b="0">
-                          <a:solidFill>
-                            <a:srgbClr val="1D1B43"/>
-                          </a:solidFill>
-                          <a:latin typeface="Calibri"/>
-                        </a:rPr>
-                        <a:t>0</a:t>
-                      </a:r>
-                    </a:p>
-                  </a:txBody>
-                  <a:tcPr>
-                    <a:solidFill>
-                      <a:srgbClr val="FFFFFF"/>
-                    </a:solidFill>
-                  </a:tcPr>
-                </a:tc>
-                <a:tc>
-                  <a:txBody>
-                    <a:bodyPr/>
-                    <a:lstStyle/>
-                    <a:p>
-                      <a:pPr algn="l"/>
-                      <a:r>
-                        <a:rPr sz="1000" b="0">
-                          <a:solidFill>
-                            <a:srgbClr val="1D1B43"/>
-                          </a:solidFill>
-                          <a:latin typeface="Calibri"/>
-                        </a:rPr>
-                        <a:t>100.0%</a:t>
-                      </a:r>
-                    </a:p>
-                  </a:txBody>
-                  <a:tcPr>
-                    <a:solidFill>
-                      <a:srgbClr val="FFFFFF"/>
-                    </a:solidFill>
-                  </a:tcPr>
-                </a:tc>
-                <a:tc>
-                  <a:txBody>
-                    <a:bodyPr/>
-                    <a:lstStyle/>
-                    <a:p>
-                      <a:pPr algn="l"/>
-                      <a:r>
-                        <a:rPr sz="1000" b="0">
-                          <a:solidFill>
-                            <a:srgbClr val="1D1B43"/>
-                          </a:solidFill>
-                          <a:latin typeface="Calibri"/>
-                        </a:rPr>
-                        <a:t>Excelente</a:t>
-                      </a:r>
-                    </a:p>
-                  </a:txBody>
-                  <a:tcPr>
-                    <a:solidFill>
-                      <a:srgbClr val="FFFFFF"/>
-                    </a:solidFill>
-                  </a:tcPr>
-                </a:tc>
-              </a:tr>
-              <a:tr h="457200">
-                <a:tc>
-                  <a:txBody>
-                    <a:bodyPr/>
-                    <a:lstStyle/>
-                    <a:p>
-                      <a:pPr algn="l"/>
-                      <a:r>
-                        <a:rPr sz="1000" b="0">
-                          <a:solidFill>
-                            <a:srgbClr val="1D1B43"/>
-                          </a:solidFill>
-                          <a:latin typeface="Calibri"/>
-                        </a:rPr>
-                        <a:t>PE</a:t>
-                      </a:r>
-                    </a:p>
-                  </a:txBody>
-                  <a:tcPr>
-                    <a:solidFill>
-                      <a:srgbClr val="F2F2F2"/>
-                    </a:solidFill>
-                  </a:tcPr>
-                </a:tc>
-                <a:tc>
-                  <a:txBody>
-                    <a:bodyPr/>
-                    <a:lstStyle/>
-                    <a:p>
-                      <a:pPr algn="l"/>
-                      <a:r>
-                        <a:rPr sz="1000" b="0">
-                          <a:solidFill>
-                            <a:srgbClr val="1D1B43"/>
-                          </a:solidFill>
-                          <a:latin typeface="Calibri"/>
-                        </a:rPr>
-                        <a:t>1</a:t>
-                      </a:r>
-                    </a:p>
-                  </a:txBody>
-                  <a:tcPr>
-                    <a:solidFill>
-                      <a:srgbClr val="F2F2F2"/>
-                    </a:solidFill>
-                  </a:tcPr>
-                </a:tc>
-                <a:tc>
-                  <a:txBody>
-                    <a:bodyPr/>
-                    <a:lstStyle/>
-                    <a:p>
-                      <a:pPr algn="l"/>
-                      <a:r>
-                        <a:rPr sz="1000" b="0">
-                          <a:solidFill>
-                            <a:srgbClr val="1D1B43"/>
-                          </a:solidFill>
-                          <a:latin typeface="Calibri"/>
-                        </a:rPr>
-                        <a:t>1</a:t>
-                      </a:r>
-                    </a:p>
-                  </a:txBody>
-                  <a:tcPr>
-                    <a:solidFill>
-                      <a:srgbClr val="F2F2F2"/>
-                    </a:solidFill>
-                  </a:tcPr>
-                </a:tc>
-                <a:tc>
-                  <a:txBody>
-                    <a:bodyPr/>
-                    <a:lstStyle/>
-                    <a:p>
-                      <a:pPr algn="l"/>
-                      <a:r>
-                        <a:rPr sz="1000" b="0">
-                          <a:solidFill>
-                            <a:srgbClr val="1D1B43"/>
-                          </a:solidFill>
-                          <a:latin typeface="Calibri"/>
-                        </a:rPr>
-                        <a:t>0</a:t>
-                      </a:r>
-                    </a:p>
-                  </a:txBody>
-                  <a:tcPr>
-                    <a:solidFill>
-                      <a:srgbClr val="F2F2F2"/>
-                    </a:solidFill>
-                  </a:tcPr>
-                </a:tc>
-                <a:tc>
-                  <a:txBody>
-                    <a:bodyPr/>
-                    <a:lstStyle/>
-                    <a:p>
-                      <a:pPr algn="l"/>
-                      <a:r>
-                        <a:rPr sz="1000" b="0">
-                          <a:solidFill>
-                            <a:srgbClr val="1D1B43"/>
-                          </a:solidFill>
-                          <a:latin typeface="Calibri"/>
-                        </a:rPr>
-                        <a:t>100.0%</a:t>
-                      </a:r>
-                    </a:p>
-                  </a:txBody>
-                  <a:tcPr>
-                    <a:solidFill>
-                      <a:srgbClr val="F2F2F2"/>
-                    </a:solidFill>
-                  </a:tcPr>
-                </a:tc>
-                <a:tc>
-                  <a:txBody>
-                    <a:bodyPr/>
-                    <a:lstStyle/>
-                    <a:p>
-                      <a:pPr algn="l"/>
-                      <a:r>
-                        <a:rPr sz="1000" b="0">
-                          <a:solidFill>
-                            <a:srgbClr val="1D1B43"/>
-                          </a:solidFill>
-                          <a:latin typeface="Calibri"/>
-                        </a:rPr>
-                        <a:t>Excelente</a:t>
-                      </a:r>
-                    </a:p>
-                  </a:txBody>
-                  <a:tcPr>
-                    <a:solidFill>
-                      <a:srgbClr val="F2F2F2"/>
-                    </a:solidFill>
-                  </a:tcPr>
-                </a:tc>
-              </a:tr>
-              <a:tr h="457200">
-                <a:tc>
-                  <a:txBody>
-                    <a:bodyPr/>
-                    <a:lstStyle/>
-                    <a:p>
-                      <a:pPr algn="l"/>
-                      <a:r>
-                        <a:rPr sz="1000" b="0">
-                          <a:solidFill>
-                            <a:srgbClr val="1D1B43"/>
-                          </a:solidFill>
-                          <a:latin typeface="Calibri"/>
-                        </a:rPr>
-                        <a:t>BA</a:t>
-                      </a:r>
-                    </a:p>
-                  </a:txBody>
-                  <a:tcPr>
-                    <a:solidFill>
-                      <a:srgbClr val="FFFFFF"/>
-                    </a:solidFill>
-                  </a:tcPr>
-                </a:tc>
-                <a:tc>
-                  <a:txBody>
-                    <a:bodyPr/>
-                    <a:lstStyle/>
-                    <a:p>
-                      <a:pPr algn="l"/>
-                      <a:r>
-                        <a:rPr sz="1000" b="0">
-                          <a:solidFill>
-                            <a:srgbClr val="1D1B43"/>
-                          </a:solidFill>
-                          <a:latin typeface="Calibri"/>
-                        </a:rPr>
-                        <a:t>1</a:t>
-                      </a:r>
-                    </a:p>
-                  </a:txBody>
-                  <a:tcPr>
-                    <a:solidFill>
-                      <a:srgbClr val="FFFFFF"/>
-                    </a:solidFill>
-                  </a:tcPr>
-                </a:tc>
-                <a:tc>
-                  <a:txBody>
-                    <a:bodyPr/>
-                    <a:lstStyle/>
-                    <a:p>
-                      <a:pPr algn="l"/>
-                      <a:r>
-                        <a:rPr sz="1000" b="0">
-                          <a:solidFill>
-                            <a:srgbClr val="1D1B43"/>
-                          </a:solidFill>
-                          <a:latin typeface="Calibri"/>
-                        </a:rPr>
-                        <a:t>1</a:t>
-                      </a:r>
-                    </a:p>
-                  </a:txBody>
-                  <a:tcPr>
-                    <a:solidFill>
-                      <a:srgbClr val="FFFFFF"/>
-                    </a:solidFill>
-                  </a:tcPr>
-                </a:tc>
-                <a:tc>
-                  <a:txBody>
-                    <a:bodyPr/>
-                    <a:lstStyle/>
-                    <a:p>
-                      <a:pPr algn="l"/>
-                      <a:r>
-                        <a:rPr sz="1000" b="0">
-                          <a:solidFill>
-                            <a:srgbClr val="1D1B43"/>
-                          </a:solidFill>
-                          <a:latin typeface="Calibri"/>
-                        </a:rPr>
-                        <a:t>0</a:t>
-                      </a:r>
-                    </a:p>
-                  </a:txBody>
-                  <a:tcPr>
-                    <a:solidFill>
-                      <a:srgbClr val="FFFFFF"/>
-                    </a:solidFill>
-                  </a:tcPr>
-                </a:tc>
-                <a:tc>
-                  <a:txBody>
-                    <a:bodyPr/>
-                    <a:lstStyle/>
-                    <a:p>
-                      <a:pPr algn="l"/>
-                      <a:r>
-                        <a:rPr sz="1000" b="0">
-                          <a:solidFill>
-                            <a:srgbClr val="1D1B43"/>
-                          </a:solidFill>
-                          <a:latin typeface="Calibri"/>
-                        </a:rPr>
-                        <a:t>100.0%</a:t>
-                      </a:r>
-                    </a:p>
-                  </a:txBody>
-                  <a:tcPr>
-                    <a:solidFill>
-                      <a:srgbClr val="FFFFFF"/>
-                    </a:solidFill>
-                  </a:tcPr>
-                </a:tc>
-                <a:tc>
-                  <a:txBody>
-                    <a:bodyPr/>
-                    <a:lstStyle/>
-                    <a:p>
-                      <a:pPr algn="l"/>
-                      <a:r>
-                        <a:rPr sz="1000" b="0">
-                          <a:solidFill>
-                            <a:srgbClr val="1D1B43"/>
-                          </a:solidFill>
-                          <a:latin typeface="Calibri"/>
-                        </a:rPr>
-                        <a:t>Excelente</a:t>
-                      </a:r>
-                    </a:p>
-                  </a:txBody>
-                  <a:tcPr>
-                    <a:solidFill>
-                      <a:srgbClr val="FFFFFF"/>
-                    </a:solidFill>
-                  </a:tcPr>
-                </a:tc>
-              </a:tr>
-              <a:tr h="457200">
-                <a:tc>
-                  <a:txBody>
-                    <a:bodyPr/>
-                    <a:lstStyle/>
-                    <a:p>
-                      <a:pPr algn="l"/>
-                      <a:r>
-                        <a:rPr sz="1000" b="0">
-                          <a:solidFill>
-                            <a:srgbClr val="1D1B43"/>
-                          </a:solidFill>
-                          <a:latin typeface="Calibri"/>
-                        </a:rPr>
-                        <a:t>DF</a:t>
-                      </a:r>
-                    </a:p>
-                  </a:txBody>
-                  <a:tcPr>
-                    <a:solidFill>
-                      <a:srgbClr val="F2F2F2"/>
-                    </a:solidFill>
-                  </a:tcPr>
-                </a:tc>
-                <a:tc>
-                  <a:txBody>
-                    <a:bodyPr/>
-                    <a:lstStyle/>
-                    <a:p>
-                      <a:pPr algn="l"/>
-                      <a:r>
-                        <a:rPr sz="1000" b="0">
-                          <a:solidFill>
-                            <a:srgbClr val="1D1B43"/>
-                          </a:solidFill>
-                          <a:latin typeface="Calibri"/>
-                        </a:rPr>
-                        <a:t>1</a:t>
-                      </a:r>
-                    </a:p>
-                  </a:txBody>
-                  <a:tcPr>
-                    <a:solidFill>
-                      <a:srgbClr val="F2F2F2"/>
-                    </a:solidFill>
-                  </a:tcPr>
-                </a:tc>
-                <a:tc>
-                  <a:txBody>
-                    <a:bodyPr/>
-                    <a:lstStyle/>
-                    <a:p>
-                      <a:pPr algn="l"/>
-                      <a:r>
-                        <a:rPr sz="1000" b="0">
-                          <a:solidFill>
-                            <a:srgbClr val="1D1B43"/>
-                          </a:solidFill>
-                          <a:latin typeface="Calibri"/>
-                        </a:rPr>
-                        <a:t>1</a:t>
-                      </a:r>
-                    </a:p>
-                  </a:txBody>
-                  <a:tcPr>
-                    <a:solidFill>
-                      <a:srgbClr val="F2F2F2"/>
-                    </a:solidFill>
-                  </a:tcPr>
-                </a:tc>
-                <a:tc>
-                  <a:txBody>
-                    <a:bodyPr/>
-                    <a:lstStyle/>
-                    <a:p>
-                      <a:pPr algn="l"/>
-                      <a:r>
-                        <a:rPr sz="1000" b="0">
-                          <a:solidFill>
-                            <a:srgbClr val="1D1B43"/>
-                          </a:solidFill>
-                          <a:latin typeface="Calibri"/>
-                        </a:rPr>
-                        <a:t>0</a:t>
-                      </a:r>
-                    </a:p>
-                  </a:txBody>
-                  <a:tcPr>
-                    <a:solidFill>
-                      <a:srgbClr val="F2F2F2"/>
-                    </a:solidFill>
-                  </a:tcPr>
-                </a:tc>
-                <a:tc>
-                  <a:txBody>
-                    <a:bodyPr/>
-                    <a:lstStyle/>
-                    <a:p>
-                      <a:pPr algn="l"/>
-                      <a:r>
-                        <a:rPr sz="1000" b="0">
-                          <a:solidFill>
-                            <a:srgbClr val="1D1B43"/>
-                          </a:solidFill>
-                          <a:latin typeface="Calibri"/>
-                        </a:rPr>
-                        <a:t>100.0%</a:t>
-                      </a:r>
-                    </a:p>
-                  </a:txBody>
-                  <a:tcPr>
-                    <a:solidFill>
-                      <a:srgbClr val="F2F2F2"/>
-                    </a:solidFill>
-                  </a:tcPr>
-                </a:tc>
-                <a:tc>
-                  <a:txBody>
-                    <a:bodyPr/>
-                    <a:lstStyle/>
-                    <a:p>
-                      <a:pPr algn="l"/>
-                      <a:r>
-                        <a:rPr sz="1000" b="0">
-                          <a:solidFill>
-                            <a:srgbClr val="1D1B43"/>
-                          </a:solidFill>
-                          <a:latin typeface="Calibri"/>
-                        </a:rPr>
-                        <a:t>Excelente</a:t>
+                        <a:t>ENTREGUE FORA DO PRAZO</a:t>
                       </a:r>
                     </a:p>
                   </a:txBody>
@@ -6672,6 +5997,1704 @@
         <p:spPr>
           <a:xfrm>
             <a:off x="749808" y="502920"/>
+            <a:ext cx="9144000" cy="914400"/>
+          </a:xfrm>
+          <a:prstGeom prst="rect">
+            <a:avLst/>
+          </a:prstGeom>
+          <a:noFill/>
+        </p:spPr>
+        <p:txBody>
+          <a:bodyPr wrap="square">
+            <a:spAutoFit/>
+          </a:bodyPr>
+          <a:lstStyle/>
+          <a:p>
+            <a:pPr algn="l"/>
+            <a:r>
+              <a:rPr sz="4000" b="1">
+                <a:solidFill>
+                  <a:srgbClr val="F97316"/>
+                </a:solidFill>
+                <a:latin typeface="Calibri"/>
+              </a:rPr>
+              <a:t>PERFORMANCE POR UF</a:t>
+            </a:r>
+          </a:p>
+        </p:txBody>
+      </p:sp>
+      <p:sp>
+        <p:nvSpPr>
+          <p:cNvPr id="4" name="Rectangle 3"/>
+          <p:cNvSpPr/>
+          <p:nvPr/>
+        </p:nvSpPr>
+        <p:spPr>
+          <a:xfrm>
+            <a:off x="749808" y="1719072"/>
+            <a:ext cx="10424160" cy="36576"/>
+          </a:xfrm>
+          <a:prstGeom prst="rect">
+            <a:avLst/>
+          </a:prstGeom>
+          <a:solidFill>
+            <a:srgbClr val="F97316"/>
+          </a:solidFill>
+          <a:ln>
+            <a:noFill/>
+          </a:ln>
+        </p:spPr>
+        <p:style>
+          <a:lnRef idx="1">
+            <a:schemeClr val="accent1"/>
+          </a:lnRef>
+          <a:fillRef idx="3">
+            <a:schemeClr val="accent1"/>
+          </a:fillRef>
+          <a:effectRef idx="2">
+            <a:schemeClr val="accent1"/>
+          </a:effectRef>
+          <a:fontRef idx="minor">
+            <a:schemeClr val="lt1"/>
+          </a:fontRef>
+        </p:style>
+        <p:txBody>
+          <a:bodyPr rtlCol="0" anchor="ctr"/>
+          <a:lstStyle/>
+          <a:p>
+            <a:pPr algn="ctr"/>
+          </a:p>
+        </p:txBody>
+      </p:sp>
+      <p:graphicFrame>
+        <p:nvGraphicFramePr>
+          <p:cNvPr id="5" name="Table 4"/>
+          <p:cNvGraphicFramePr>
+            <a:graphicFrameLocks noGrp="1"/>
+          </p:cNvGraphicFramePr>
+          <p:nvPr/>
+        </p:nvGraphicFramePr>
+        <p:xfrm>
+          <a:off x="731520" y="1920240"/>
+          <a:ext cx="10698480" cy="4389110"/>
+        </p:xfrm>
+        <a:graphic>
+          <a:graphicData uri="http://schemas.openxmlformats.org/drawingml/2006/table">
+            <a:tbl>
+              <a:tblPr firstRow="1" bandRow="1">
+                <a:tableStyleId>{5C22544A-7EE6-4342-B048-85BDC9FD1C3A}</a:tableStyleId>
+              </a:tblPr>
+              <a:tblGrid>
+                <a:gridCol w="1097280"/>
+                <a:gridCol w="1645920"/>
+                <a:gridCol w="1645920"/>
+                <a:gridCol w="1645920"/>
+                <a:gridCol w="1554480"/>
+                <a:gridCol w="3108960"/>
+              </a:tblGrid>
+              <a:tr h="399010">
+                <a:tc>
+                  <a:txBody>
+                    <a:bodyPr/>
+                    <a:lstStyle/>
+                    <a:p>
+                      <a:pPr algn="ctr"/>
+                      <a:r>
+                        <a:rPr sz="1100" b="1">
+                          <a:solidFill>
+                            <a:srgbClr val="FFFFFF"/>
+                          </a:solidFill>
+                          <a:latin typeface="Calibri"/>
+                        </a:rPr>
+                        <a:t>UF</a:t>
+                      </a:r>
+                    </a:p>
+                  </a:txBody>
+                  <a:tcPr>
+                    <a:solidFill>
+                      <a:srgbClr val="1D1B43"/>
+                    </a:solidFill>
+                  </a:tcPr>
+                </a:tc>
+                <a:tc>
+                  <a:txBody>
+                    <a:bodyPr/>
+                    <a:lstStyle/>
+                    <a:p>
+                      <a:pPr algn="ctr"/>
+                      <a:r>
+                        <a:rPr sz="1100" b="1">
+                          <a:solidFill>
+                            <a:srgbClr val="FFFFFF"/>
+                          </a:solidFill>
+                          <a:latin typeface="Calibri"/>
+                        </a:rPr>
+                        <a:t>TOTAL</a:t>
+                      </a:r>
+                    </a:p>
+                  </a:txBody>
+                  <a:tcPr>
+                    <a:solidFill>
+                      <a:srgbClr val="1D1B43"/>
+                    </a:solidFill>
+                  </a:tcPr>
+                </a:tc>
+                <a:tc>
+                  <a:txBody>
+                    <a:bodyPr/>
+                    <a:lstStyle/>
+                    <a:p>
+                      <a:pPr algn="ctr"/>
+                      <a:r>
+                        <a:rPr sz="1100" b="1">
+                          <a:solidFill>
+                            <a:srgbClr val="FFFFFF"/>
+                          </a:solidFill>
+                          <a:latin typeface="Calibri"/>
+                        </a:rPr>
+                        <a:t>NO PRAZO</a:t>
+                      </a:r>
+                    </a:p>
+                  </a:txBody>
+                  <a:tcPr>
+                    <a:solidFill>
+                      <a:srgbClr val="1D1B43"/>
+                    </a:solidFill>
+                  </a:tcPr>
+                </a:tc>
+                <a:tc>
+                  <a:txBody>
+                    <a:bodyPr/>
+                    <a:lstStyle/>
+                    <a:p>
+                      <a:pPr algn="ctr"/>
+                      <a:r>
+                        <a:rPr sz="1100" b="1">
+                          <a:solidFill>
+                            <a:srgbClr val="FFFFFF"/>
+                          </a:solidFill>
+                          <a:latin typeface="Calibri"/>
+                        </a:rPr>
+                        <a:t>FORA</a:t>
+                      </a:r>
+                    </a:p>
+                  </a:txBody>
+                  <a:tcPr>
+                    <a:solidFill>
+                      <a:srgbClr val="1D1B43"/>
+                    </a:solidFill>
+                  </a:tcPr>
+                </a:tc>
+                <a:tc>
+                  <a:txBody>
+                    <a:bodyPr/>
+                    <a:lstStyle/>
+                    <a:p>
+                      <a:pPr algn="ctr"/>
+                      <a:r>
+                        <a:rPr sz="1100" b="1">
+                          <a:solidFill>
+                            <a:srgbClr val="FFFFFF"/>
+                          </a:solidFill>
+                          <a:latin typeface="Calibri"/>
+                        </a:rPr>
+                        <a:t>TAXA</a:t>
+                      </a:r>
+                    </a:p>
+                  </a:txBody>
+                  <a:tcPr>
+                    <a:solidFill>
+                      <a:srgbClr val="1D1B43"/>
+                    </a:solidFill>
+                  </a:tcPr>
+                </a:tc>
+                <a:tc>
+                  <a:txBody>
+                    <a:bodyPr/>
+                    <a:lstStyle/>
+                    <a:p>
+                      <a:pPr algn="ctr"/>
+                      <a:r>
+                        <a:rPr sz="1100" b="1">
+                          <a:solidFill>
+                            <a:srgbClr val="FFFFFF"/>
+                          </a:solidFill>
+                          <a:latin typeface="Calibri"/>
+                        </a:rPr>
+                        <a:t>STATUS</a:t>
+                      </a:r>
+                    </a:p>
+                  </a:txBody>
+                  <a:tcPr>
+                    <a:solidFill>
+                      <a:srgbClr val="1D1B43"/>
+                    </a:solidFill>
+                  </a:tcPr>
+                </a:tc>
+              </a:tr>
+              <a:tr h="399010">
+                <a:tc>
+                  <a:txBody>
+                    <a:bodyPr/>
+                    <a:lstStyle/>
+                    <a:p>
+                      <a:pPr algn="l"/>
+                      <a:r>
+                        <a:rPr sz="1000" b="0">
+                          <a:solidFill>
+                            <a:srgbClr val="1D1B43"/>
+                          </a:solidFill>
+                          <a:latin typeface="Calibri"/>
+                        </a:rPr>
+                        <a:t>SP</a:t>
+                      </a:r>
+                    </a:p>
+                  </a:txBody>
+                  <a:tcPr>
+                    <a:solidFill>
+                      <a:srgbClr val="FFFFFF"/>
+                    </a:solidFill>
+                  </a:tcPr>
+                </a:tc>
+                <a:tc>
+                  <a:txBody>
+                    <a:bodyPr/>
+                    <a:lstStyle/>
+                    <a:p>
+                      <a:pPr algn="l"/>
+                      <a:r>
+                        <a:rPr sz="1000" b="0">
+                          <a:solidFill>
+                            <a:srgbClr val="1D1B43"/>
+                          </a:solidFill>
+                          <a:latin typeface="Calibri"/>
+                        </a:rPr>
+                        <a:t>16</a:t>
+                      </a:r>
+                    </a:p>
+                  </a:txBody>
+                  <a:tcPr>
+                    <a:solidFill>
+                      <a:srgbClr val="FFFFFF"/>
+                    </a:solidFill>
+                  </a:tcPr>
+                </a:tc>
+                <a:tc>
+                  <a:txBody>
+                    <a:bodyPr/>
+                    <a:lstStyle/>
+                    <a:p>
+                      <a:pPr algn="l"/>
+                      <a:r>
+                        <a:rPr sz="1000" b="0">
+                          <a:solidFill>
+                            <a:srgbClr val="1D1B43"/>
+                          </a:solidFill>
+                          <a:latin typeface="Calibri"/>
+                        </a:rPr>
+                        <a:t>16</a:t>
+                      </a:r>
+                    </a:p>
+                  </a:txBody>
+                  <a:tcPr>
+                    <a:solidFill>
+                      <a:srgbClr val="FFFFFF"/>
+                    </a:solidFill>
+                  </a:tcPr>
+                </a:tc>
+                <a:tc>
+                  <a:txBody>
+                    <a:bodyPr/>
+                    <a:lstStyle/>
+                    <a:p>
+                      <a:pPr algn="l"/>
+                      <a:r>
+                        <a:rPr sz="1000" b="0">
+                          <a:solidFill>
+                            <a:srgbClr val="1D1B43"/>
+                          </a:solidFill>
+                          <a:latin typeface="Calibri"/>
+                        </a:rPr>
+                        <a:t>0</a:t>
+                      </a:r>
+                    </a:p>
+                  </a:txBody>
+                  <a:tcPr>
+                    <a:solidFill>
+                      <a:srgbClr val="FFFFFF"/>
+                    </a:solidFill>
+                  </a:tcPr>
+                </a:tc>
+                <a:tc>
+                  <a:txBody>
+                    <a:bodyPr/>
+                    <a:lstStyle/>
+                    <a:p>
+                      <a:pPr algn="l"/>
+                      <a:r>
+                        <a:rPr sz="1000" b="0">
+                          <a:solidFill>
+                            <a:srgbClr val="1D1B43"/>
+                          </a:solidFill>
+                          <a:latin typeface="Calibri"/>
+                        </a:rPr>
+                        <a:t>100.0%</a:t>
+                      </a:r>
+                    </a:p>
+                  </a:txBody>
+                  <a:tcPr>
+                    <a:solidFill>
+                      <a:srgbClr val="FFFFFF"/>
+                    </a:solidFill>
+                  </a:tcPr>
+                </a:tc>
+                <a:tc>
+                  <a:txBody>
+                    <a:bodyPr/>
+                    <a:lstStyle/>
+                    <a:p>
+                      <a:pPr algn="l"/>
+                      <a:r>
+                        <a:rPr sz="1000" b="0">
+                          <a:solidFill>
+                            <a:srgbClr val="1D1B43"/>
+                          </a:solidFill>
+                          <a:latin typeface="Calibri"/>
+                        </a:rPr>
+                        <a:t>Excelente</a:t>
+                      </a:r>
+                    </a:p>
+                  </a:txBody>
+                  <a:tcPr>
+                    <a:solidFill>
+                      <a:srgbClr val="FFFFFF"/>
+                    </a:solidFill>
+                  </a:tcPr>
+                </a:tc>
+              </a:tr>
+              <a:tr h="399010">
+                <a:tc>
+                  <a:txBody>
+                    <a:bodyPr/>
+                    <a:lstStyle/>
+                    <a:p>
+                      <a:pPr algn="l"/>
+                      <a:r>
+                        <a:rPr sz="1000" b="0">
+                          <a:solidFill>
+                            <a:srgbClr val="1D1B43"/>
+                          </a:solidFill>
+                          <a:latin typeface="Calibri"/>
+                        </a:rPr>
+                        <a:t>RJ</a:t>
+                      </a:r>
+                    </a:p>
+                  </a:txBody>
+                  <a:tcPr>
+                    <a:solidFill>
+                      <a:srgbClr val="F2F2F2"/>
+                    </a:solidFill>
+                  </a:tcPr>
+                </a:tc>
+                <a:tc>
+                  <a:txBody>
+                    <a:bodyPr/>
+                    <a:lstStyle/>
+                    <a:p>
+                      <a:pPr algn="l"/>
+                      <a:r>
+                        <a:rPr sz="1000" b="0">
+                          <a:solidFill>
+                            <a:srgbClr val="1D1B43"/>
+                          </a:solidFill>
+                          <a:latin typeface="Calibri"/>
+                        </a:rPr>
+                        <a:t>6</a:t>
+                      </a:r>
+                    </a:p>
+                  </a:txBody>
+                  <a:tcPr>
+                    <a:solidFill>
+                      <a:srgbClr val="F2F2F2"/>
+                    </a:solidFill>
+                  </a:tcPr>
+                </a:tc>
+                <a:tc>
+                  <a:txBody>
+                    <a:bodyPr/>
+                    <a:lstStyle/>
+                    <a:p>
+                      <a:pPr algn="l"/>
+                      <a:r>
+                        <a:rPr sz="1000" b="0">
+                          <a:solidFill>
+                            <a:srgbClr val="1D1B43"/>
+                          </a:solidFill>
+                          <a:latin typeface="Calibri"/>
+                        </a:rPr>
+                        <a:t>6</a:t>
+                      </a:r>
+                    </a:p>
+                  </a:txBody>
+                  <a:tcPr>
+                    <a:solidFill>
+                      <a:srgbClr val="F2F2F2"/>
+                    </a:solidFill>
+                  </a:tcPr>
+                </a:tc>
+                <a:tc>
+                  <a:txBody>
+                    <a:bodyPr/>
+                    <a:lstStyle/>
+                    <a:p>
+                      <a:pPr algn="l"/>
+                      <a:r>
+                        <a:rPr sz="1000" b="0">
+                          <a:solidFill>
+                            <a:srgbClr val="1D1B43"/>
+                          </a:solidFill>
+                          <a:latin typeface="Calibri"/>
+                        </a:rPr>
+                        <a:t>0</a:t>
+                      </a:r>
+                    </a:p>
+                  </a:txBody>
+                  <a:tcPr>
+                    <a:solidFill>
+                      <a:srgbClr val="F2F2F2"/>
+                    </a:solidFill>
+                  </a:tcPr>
+                </a:tc>
+                <a:tc>
+                  <a:txBody>
+                    <a:bodyPr/>
+                    <a:lstStyle/>
+                    <a:p>
+                      <a:pPr algn="l"/>
+                      <a:r>
+                        <a:rPr sz="1000" b="0">
+                          <a:solidFill>
+                            <a:srgbClr val="1D1B43"/>
+                          </a:solidFill>
+                          <a:latin typeface="Calibri"/>
+                        </a:rPr>
+                        <a:t>100.0%</a:t>
+                      </a:r>
+                    </a:p>
+                  </a:txBody>
+                  <a:tcPr>
+                    <a:solidFill>
+                      <a:srgbClr val="F2F2F2"/>
+                    </a:solidFill>
+                  </a:tcPr>
+                </a:tc>
+                <a:tc>
+                  <a:txBody>
+                    <a:bodyPr/>
+                    <a:lstStyle/>
+                    <a:p>
+                      <a:pPr algn="l"/>
+                      <a:r>
+                        <a:rPr sz="1000" b="0">
+                          <a:solidFill>
+                            <a:srgbClr val="1D1B43"/>
+                          </a:solidFill>
+                          <a:latin typeface="Calibri"/>
+                        </a:rPr>
+                        <a:t>Excelente</a:t>
+                      </a:r>
+                    </a:p>
+                  </a:txBody>
+                  <a:tcPr>
+                    <a:solidFill>
+                      <a:srgbClr val="F2F2F2"/>
+                    </a:solidFill>
+                  </a:tcPr>
+                </a:tc>
+              </a:tr>
+              <a:tr h="399010">
+                <a:tc>
+                  <a:txBody>
+                    <a:bodyPr/>
+                    <a:lstStyle/>
+                    <a:p>
+                      <a:pPr algn="l"/>
+                      <a:r>
+                        <a:rPr sz="1000" b="0">
+                          <a:solidFill>
+                            <a:srgbClr val="1D1B43"/>
+                          </a:solidFill>
+                          <a:latin typeface="Calibri"/>
+                        </a:rPr>
+                        <a:t>RS</a:t>
+                      </a:r>
+                    </a:p>
+                  </a:txBody>
+                  <a:tcPr>
+                    <a:solidFill>
+                      <a:srgbClr val="FFFFFF"/>
+                    </a:solidFill>
+                  </a:tcPr>
+                </a:tc>
+                <a:tc>
+                  <a:txBody>
+                    <a:bodyPr/>
+                    <a:lstStyle/>
+                    <a:p>
+                      <a:pPr algn="l"/>
+                      <a:r>
+                        <a:rPr sz="1000" b="0">
+                          <a:solidFill>
+                            <a:srgbClr val="1D1B43"/>
+                          </a:solidFill>
+                          <a:latin typeface="Calibri"/>
+                        </a:rPr>
+                        <a:t>4</a:t>
+                      </a:r>
+                    </a:p>
+                  </a:txBody>
+                  <a:tcPr>
+                    <a:solidFill>
+                      <a:srgbClr val="FFFFFF"/>
+                    </a:solidFill>
+                  </a:tcPr>
+                </a:tc>
+                <a:tc>
+                  <a:txBody>
+                    <a:bodyPr/>
+                    <a:lstStyle/>
+                    <a:p>
+                      <a:pPr algn="l"/>
+                      <a:r>
+                        <a:rPr sz="1000" b="0">
+                          <a:solidFill>
+                            <a:srgbClr val="1D1B43"/>
+                          </a:solidFill>
+                          <a:latin typeface="Calibri"/>
+                        </a:rPr>
+                        <a:t>4</a:t>
+                      </a:r>
+                    </a:p>
+                  </a:txBody>
+                  <a:tcPr>
+                    <a:solidFill>
+                      <a:srgbClr val="FFFFFF"/>
+                    </a:solidFill>
+                  </a:tcPr>
+                </a:tc>
+                <a:tc>
+                  <a:txBody>
+                    <a:bodyPr/>
+                    <a:lstStyle/>
+                    <a:p>
+                      <a:pPr algn="l"/>
+                      <a:r>
+                        <a:rPr sz="1000" b="0">
+                          <a:solidFill>
+                            <a:srgbClr val="1D1B43"/>
+                          </a:solidFill>
+                          <a:latin typeface="Calibri"/>
+                        </a:rPr>
+                        <a:t>0</a:t>
+                      </a:r>
+                    </a:p>
+                  </a:txBody>
+                  <a:tcPr>
+                    <a:solidFill>
+                      <a:srgbClr val="FFFFFF"/>
+                    </a:solidFill>
+                  </a:tcPr>
+                </a:tc>
+                <a:tc>
+                  <a:txBody>
+                    <a:bodyPr/>
+                    <a:lstStyle/>
+                    <a:p>
+                      <a:pPr algn="l"/>
+                      <a:r>
+                        <a:rPr sz="1000" b="0">
+                          <a:solidFill>
+                            <a:srgbClr val="1D1B43"/>
+                          </a:solidFill>
+                          <a:latin typeface="Calibri"/>
+                        </a:rPr>
+                        <a:t>100.0%</a:t>
+                      </a:r>
+                    </a:p>
+                  </a:txBody>
+                  <a:tcPr>
+                    <a:solidFill>
+                      <a:srgbClr val="FFFFFF"/>
+                    </a:solidFill>
+                  </a:tcPr>
+                </a:tc>
+                <a:tc>
+                  <a:txBody>
+                    <a:bodyPr/>
+                    <a:lstStyle/>
+                    <a:p>
+                      <a:pPr algn="l"/>
+                      <a:r>
+                        <a:rPr sz="1000" b="0">
+                          <a:solidFill>
+                            <a:srgbClr val="1D1B43"/>
+                          </a:solidFill>
+                          <a:latin typeface="Calibri"/>
+                        </a:rPr>
+                        <a:t>Excelente</a:t>
+                      </a:r>
+                    </a:p>
+                  </a:txBody>
+                  <a:tcPr>
+                    <a:solidFill>
+                      <a:srgbClr val="FFFFFF"/>
+                    </a:solidFill>
+                  </a:tcPr>
+                </a:tc>
+              </a:tr>
+              <a:tr h="399010">
+                <a:tc>
+                  <a:txBody>
+                    <a:bodyPr/>
+                    <a:lstStyle/>
+                    <a:p>
+                      <a:pPr algn="l"/>
+                      <a:r>
+                        <a:rPr sz="1000" b="0">
+                          <a:solidFill>
+                            <a:srgbClr val="1D1B43"/>
+                          </a:solidFill>
+                          <a:latin typeface="Calibri"/>
+                        </a:rPr>
+                        <a:t>MA</a:t>
+                      </a:r>
+                    </a:p>
+                  </a:txBody>
+                  <a:tcPr>
+                    <a:solidFill>
+                      <a:srgbClr val="F2F2F2"/>
+                    </a:solidFill>
+                  </a:tcPr>
+                </a:tc>
+                <a:tc>
+                  <a:txBody>
+                    <a:bodyPr/>
+                    <a:lstStyle/>
+                    <a:p>
+                      <a:pPr algn="l"/>
+                      <a:r>
+                        <a:rPr sz="1000" b="0">
+                          <a:solidFill>
+                            <a:srgbClr val="1D1B43"/>
+                          </a:solidFill>
+                          <a:latin typeface="Calibri"/>
+                        </a:rPr>
+                        <a:t>2</a:t>
+                      </a:r>
+                    </a:p>
+                  </a:txBody>
+                  <a:tcPr>
+                    <a:solidFill>
+                      <a:srgbClr val="F2F2F2"/>
+                    </a:solidFill>
+                  </a:tcPr>
+                </a:tc>
+                <a:tc>
+                  <a:txBody>
+                    <a:bodyPr/>
+                    <a:lstStyle/>
+                    <a:p>
+                      <a:pPr algn="l"/>
+                      <a:r>
+                        <a:rPr sz="1000" b="0">
+                          <a:solidFill>
+                            <a:srgbClr val="1D1B43"/>
+                          </a:solidFill>
+                          <a:latin typeface="Calibri"/>
+                        </a:rPr>
+                        <a:t>0</a:t>
+                      </a:r>
+                    </a:p>
+                  </a:txBody>
+                  <a:tcPr>
+                    <a:solidFill>
+                      <a:srgbClr val="F2F2F2"/>
+                    </a:solidFill>
+                  </a:tcPr>
+                </a:tc>
+                <a:tc>
+                  <a:txBody>
+                    <a:bodyPr/>
+                    <a:lstStyle/>
+                    <a:p>
+                      <a:pPr algn="l"/>
+                      <a:r>
+                        <a:rPr sz="1000" b="0">
+                          <a:solidFill>
+                            <a:srgbClr val="1D1B43"/>
+                          </a:solidFill>
+                          <a:latin typeface="Calibri"/>
+                        </a:rPr>
+                        <a:t>2</a:t>
+                      </a:r>
+                    </a:p>
+                  </a:txBody>
+                  <a:tcPr>
+                    <a:solidFill>
+                      <a:srgbClr val="F2F2F2"/>
+                    </a:solidFill>
+                  </a:tcPr>
+                </a:tc>
+                <a:tc>
+                  <a:txBody>
+                    <a:bodyPr/>
+                    <a:lstStyle/>
+                    <a:p>
+                      <a:pPr algn="l"/>
+                      <a:r>
+                        <a:rPr sz="1000" b="0">
+                          <a:solidFill>
+                            <a:srgbClr val="1D1B43"/>
+                          </a:solidFill>
+                          <a:latin typeface="Calibri"/>
+                        </a:rPr>
+                        <a:t>0.0%</a:t>
+                      </a:r>
+                    </a:p>
+                  </a:txBody>
+                  <a:tcPr>
+                    <a:solidFill>
+                      <a:srgbClr val="F2F2F2"/>
+                    </a:solidFill>
+                  </a:tcPr>
+                </a:tc>
+                <a:tc>
+                  <a:txBody>
+                    <a:bodyPr/>
+                    <a:lstStyle/>
+                    <a:p>
+                      <a:pPr algn="l"/>
+                      <a:r>
+                        <a:rPr sz="1000" b="0">
+                          <a:solidFill>
+                            <a:srgbClr val="1D1B43"/>
+                          </a:solidFill>
+                          <a:latin typeface="Calibri"/>
+                        </a:rPr>
+                        <a:t>Atencao</a:t>
+                      </a:r>
+                    </a:p>
+                  </a:txBody>
+                  <a:tcPr>
+                    <a:solidFill>
+                      <a:srgbClr val="F2F2F2"/>
+                    </a:solidFill>
+                  </a:tcPr>
+                </a:tc>
+              </a:tr>
+              <a:tr h="399010">
+                <a:tc>
+                  <a:txBody>
+                    <a:bodyPr/>
+                    <a:lstStyle/>
+                    <a:p>
+                      <a:pPr algn="l"/>
+                      <a:r>
+                        <a:rPr sz="1000" b="0">
+                          <a:solidFill>
+                            <a:srgbClr val="1D1B43"/>
+                          </a:solidFill>
+                          <a:latin typeface="Calibri"/>
+                        </a:rPr>
+                        <a:t>GO</a:t>
+                      </a:r>
+                    </a:p>
+                  </a:txBody>
+                  <a:tcPr>
+                    <a:solidFill>
+                      <a:srgbClr val="FFFFFF"/>
+                    </a:solidFill>
+                  </a:tcPr>
+                </a:tc>
+                <a:tc>
+                  <a:txBody>
+                    <a:bodyPr/>
+                    <a:lstStyle/>
+                    <a:p>
+                      <a:pPr algn="l"/>
+                      <a:r>
+                        <a:rPr sz="1000" b="0">
+                          <a:solidFill>
+                            <a:srgbClr val="1D1B43"/>
+                          </a:solidFill>
+                          <a:latin typeface="Calibri"/>
+                        </a:rPr>
+                        <a:t>2</a:t>
+                      </a:r>
+                    </a:p>
+                  </a:txBody>
+                  <a:tcPr>
+                    <a:solidFill>
+                      <a:srgbClr val="FFFFFF"/>
+                    </a:solidFill>
+                  </a:tcPr>
+                </a:tc>
+                <a:tc>
+                  <a:txBody>
+                    <a:bodyPr/>
+                    <a:lstStyle/>
+                    <a:p>
+                      <a:pPr algn="l"/>
+                      <a:r>
+                        <a:rPr sz="1000" b="0">
+                          <a:solidFill>
+                            <a:srgbClr val="1D1B43"/>
+                          </a:solidFill>
+                          <a:latin typeface="Calibri"/>
+                        </a:rPr>
+                        <a:t>2</a:t>
+                      </a:r>
+                    </a:p>
+                  </a:txBody>
+                  <a:tcPr>
+                    <a:solidFill>
+                      <a:srgbClr val="FFFFFF"/>
+                    </a:solidFill>
+                  </a:tcPr>
+                </a:tc>
+                <a:tc>
+                  <a:txBody>
+                    <a:bodyPr/>
+                    <a:lstStyle/>
+                    <a:p>
+                      <a:pPr algn="l"/>
+                      <a:r>
+                        <a:rPr sz="1000" b="0">
+                          <a:solidFill>
+                            <a:srgbClr val="1D1B43"/>
+                          </a:solidFill>
+                          <a:latin typeface="Calibri"/>
+                        </a:rPr>
+                        <a:t>0</a:t>
+                      </a:r>
+                    </a:p>
+                  </a:txBody>
+                  <a:tcPr>
+                    <a:solidFill>
+                      <a:srgbClr val="FFFFFF"/>
+                    </a:solidFill>
+                  </a:tcPr>
+                </a:tc>
+                <a:tc>
+                  <a:txBody>
+                    <a:bodyPr/>
+                    <a:lstStyle/>
+                    <a:p>
+                      <a:pPr algn="l"/>
+                      <a:r>
+                        <a:rPr sz="1000" b="0">
+                          <a:solidFill>
+                            <a:srgbClr val="1D1B43"/>
+                          </a:solidFill>
+                          <a:latin typeface="Calibri"/>
+                        </a:rPr>
+                        <a:t>100.0%</a:t>
+                      </a:r>
+                    </a:p>
+                  </a:txBody>
+                  <a:tcPr>
+                    <a:solidFill>
+                      <a:srgbClr val="FFFFFF"/>
+                    </a:solidFill>
+                  </a:tcPr>
+                </a:tc>
+                <a:tc>
+                  <a:txBody>
+                    <a:bodyPr/>
+                    <a:lstStyle/>
+                    <a:p>
+                      <a:pPr algn="l"/>
+                      <a:r>
+                        <a:rPr sz="1000" b="0">
+                          <a:solidFill>
+                            <a:srgbClr val="1D1B43"/>
+                          </a:solidFill>
+                          <a:latin typeface="Calibri"/>
+                        </a:rPr>
+                        <a:t>Excelente</a:t>
+                      </a:r>
+                    </a:p>
+                  </a:txBody>
+                  <a:tcPr>
+                    <a:solidFill>
+                      <a:srgbClr val="FFFFFF"/>
+                    </a:solidFill>
+                  </a:tcPr>
+                </a:tc>
+              </a:tr>
+              <a:tr h="399010">
+                <a:tc>
+                  <a:txBody>
+                    <a:bodyPr/>
+                    <a:lstStyle/>
+                    <a:p>
+                      <a:pPr algn="l"/>
+                      <a:r>
+                        <a:rPr sz="1000" b="0">
+                          <a:solidFill>
+                            <a:srgbClr val="1D1B43"/>
+                          </a:solidFill>
+                          <a:latin typeface="Calibri"/>
+                        </a:rPr>
+                        <a:t>MG</a:t>
+                      </a:r>
+                    </a:p>
+                  </a:txBody>
+                  <a:tcPr>
+                    <a:solidFill>
+                      <a:srgbClr val="F2F2F2"/>
+                    </a:solidFill>
+                  </a:tcPr>
+                </a:tc>
+                <a:tc>
+                  <a:txBody>
+                    <a:bodyPr/>
+                    <a:lstStyle/>
+                    <a:p>
+                      <a:pPr algn="l"/>
+                      <a:r>
+                        <a:rPr sz="1000" b="0">
+                          <a:solidFill>
+                            <a:srgbClr val="1D1B43"/>
+                          </a:solidFill>
+                          <a:latin typeface="Calibri"/>
+                        </a:rPr>
+                        <a:t>2</a:t>
+                      </a:r>
+                    </a:p>
+                  </a:txBody>
+                  <a:tcPr>
+                    <a:solidFill>
+                      <a:srgbClr val="F2F2F2"/>
+                    </a:solidFill>
+                  </a:tcPr>
+                </a:tc>
+                <a:tc>
+                  <a:txBody>
+                    <a:bodyPr/>
+                    <a:lstStyle/>
+                    <a:p>
+                      <a:pPr algn="l"/>
+                      <a:r>
+                        <a:rPr sz="1000" b="0">
+                          <a:solidFill>
+                            <a:srgbClr val="1D1B43"/>
+                          </a:solidFill>
+                          <a:latin typeface="Calibri"/>
+                        </a:rPr>
+                        <a:t>2</a:t>
+                      </a:r>
+                    </a:p>
+                  </a:txBody>
+                  <a:tcPr>
+                    <a:solidFill>
+                      <a:srgbClr val="F2F2F2"/>
+                    </a:solidFill>
+                  </a:tcPr>
+                </a:tc>
+                <a:tc>
+                  <a:txBody>
+                    <a:bodyPr/>
+                    <a:lstStyle/>
+                    <a:p>
+                      <a:pPr algn="l"/>
+                      <a:r>
+                        <a:rPr sz="1000" b="0">
+                          <a:solidFill>
+                            <a:srgbClr val="1D1B43"/>
+                          </a:solidFill>
+                          <a:latin typeface="Calibri"/>
+                        </a:rPr>
+                        <a:t>0</a:t>
+                      </a:r>
+                    </a:p>
+                  </a:txBody>
+                  <a:tcPr>
+                    <a:solidFill>
+                      <a:srgbClr val="F2F2F2"/>
+                    </a:solidFill>
+                  </a:tcPr>
+                </a:tc>
+                <a:tc>
+                  <a:txBody>
+                    <a:bodyPr/>
+                    <a:lstStyle/>
+                    <a:p>
+                      <a:pPr algn="l"/>
+                      <a:r>
+                        <a:rPr sz="1000" b="0">
+                          <a:solidFill>
+                            <a:srgbClr val="1D1B43"/>
+                          </a:solidFill>
+                          <a:latin typeface="Calibri"/>
+                        </a:rPr>
+                        <a:t>100.0%</a:t>
+                      </a:r>
+                    </a:p>
+                  </a:txBody>
+                  <a:tcPr>
+                    <a:solidFill>
+                      <a:srgbClr val="F2F2F2"/>
+                    </a:solidFill>
+                  </a:tcPr>
+                </a:tc>
+                <a:tc>
+                  <a:txBody>
+                    <a:bodyPr/>
+                    <a:lstStyle/>
+                    <a:p>
+                      <a:pPr algn="l"/>
+                      <a:r>
+                        <a:rPr sz="1000" b="0">
+                          <a:solidFill>
+                            <a:srgbClr val="1D1B43"/>
+                          </a:solidFill>
+                          <a:latin typeface="Calibri"/>
+                        </a:rPr>
+                        <a:t>Excelente</a:t>
+                      </a:r>
+                    </a:p>
+                  </a:txBody>
+                  <a:tcPr>
+                    <a:solidFill>
+                      <a:srgbClr val="F2F2F2"/>
+                    </a:solidFill>
+                  </a:tcPr>
+                </a:tc>
+              </a:tr>
+              <a:tr h="399010">
+                <a:tc>
+                  <a:txBody>
+                    <a:bodyPr/>
+                    <a:lstStyle/>
+                    <a:p>
+                      <a:pPr algn="l"/>
+                      <a:r>
+                        <a:rPr sz="1000" b="0">
+                          <a:solidFill>
+                            <a:srgbClr val="1D1B43"/>
+                          </a:solidFill>
+                          <a:latin typeface="Calibri"/>
+                        </a:rPr>
+                        <a:t>DF</a:t>
+                      </a:r>
+                    </a:p>
+                  </a:txBody>
+                  <a:tcPr>
+                    <a:solidFill>
+                      <a:srgbClr val="FFFFFF"/>
+                    </a:solidFill>
+                  </a:tcPr>
+                </a:tc>
+                <a:tc>
+                  <a:txBody>
+                    <a:bodyPr/>
+                    <a:lstStyle/>
+                    <a:p>
+                      <a:pPr algn="l"/>
+                      <a:r>
+                        <a:rPr sz="1000" b="0">
+                          <a:solidFill>
+                            <a:srgbClr val="1D1B43"/>
+                          </a:solidFill>
+                          <a:latin typeface="Calibri"/>
+                        </a:rPr>
+                        <a:t>1</a:t>
+                      </a:r>
+                    </a:p>
+                  </a:txBody>
+                  <a:tcPr>
+                    <a:solidFill>
+                      <a:srgbClr val="FFFFFF"/>
+                    </a:solidFill>
+                  </a:tcPr>
+                </a:tc>
+                <a:tc>
+                  <a:txBody>
+                    <a:bodyPr/>
+                    <a:lstStyle/>
+                    <a:p>
+                      <a:pPr algn="l"/>
+                      <a:r>
+                        <a:rPr sz="1000" b="0">
+                          <a:solidFill>
+                            <a:srgbClr val="1D1B43"/>
+                          </a:solidFill>
+                          <a:latin typeface="Calibri"/>
+                        </a:rPr>
+                        <a:t>0</a:t>
+                      </a:r>
+                    </a:p>
+                  </a:txBody>
+                  <a:tcPr>
+                    <a:solidFill>
+                      <a:srgbClr val="FFFFFF"/>
+                    </a:solidFill>
+                  </a:tcPr>
+                </a:tc>
+                <a:tc>
+                  <a:txBody>
+                    <a:bodyPr/>
+                    <a:lstStyle/>
+                    <a:p>
+                      <a:pPr algn="l"/>
+                      <a:r>
+                        <a:rPr sz="1000" b="0">
+                          <a:solidFill>
+                            <a:srgbClr val="1D1B43"/>
+                          </a:solidFill>
+                          <a:latin typeface="Calibri"/>
+                        </a:rPr>
+                        <a:t>1</a:t>
+                      </a:r>
+                    </a:p>
+                  </a:txBody>
+                  <a:tcPr>
+                    <a:solidFill>
+                      <a:srgbClr val="FFFFFF"/>
+                    </a:solidFill>
+                  </a:tcPr>
+                </a:tc>
+                <a:tc>
+                  <a:txBody>
+                    <a:bodyPr/>
+                    <a:lstStyle/>
+                    <a:p>
+                      <a:pPr algn="l"/>
+                      <a:r>
+                        <a:rPr sz="1000" b="0">
+                          <a:solidFill>
+                            <a:srgbClr val="1D1B43"/>
+                          </a:solidFill>
+                          <a:latin typeface="Calibri"/>
+                        </a:rPr>
+                        <a:t>0.0%</a:t>
+                      </a:r>
+                    </a:p>
+                  </a:txBody>
+                  <a:tcPr>
+                    <a:solidFill>
+                      <a:srgbClr val="FFFFFF"/>
+                    </a:solidFill>
+                  </a:tcPr>
+                </a:tc>
+                <a:tc>
+                  <a:txBody>
+                    <a:bodyPr/>
+                    <a:lstStyle/>
+                    <a:p>
+                      <a:pPr algn="l"/>
+                      <a:r>
+                        <a:rPr sz="1000" b="0">
+                          <a:solidFill>
+                            <a:srgbClr val="1D1B43"/>
+                          </a:solidFill>
+                          <a:latin typeface="Calibri"/>
+                        </a:rPr>
+                        <a:t>Atencao</a:t>
+                      </a:r>
+                    </a:p>
+                  </a:txBody>
+                  <a:tcPr>
+                    <a:solidFill>
+                      <a:srgbClr val="FFFFFF"/>
+                    </a:solidFill>
+                  </a:tcPr>
+                </a:tc>
+              </a:tr>
+              <a:tr h="399010">
+                <a:tc>
+                  <a:txBody>
+                    <a:bodyPr/>
+                    <a:lstStyle/>
+                    <a:p>
+                      <a:pPr algn="l"/>
+                      <a:r>
+                        <a:rPr sz="1000" b="0">
+                          <a:solidFill>
+                            <a:srgbClr val="1D1B43"/>
+                          </a:solidFill>
+                          <a:latin typeface="Calibri"/>
+                        </a:rPr>
+                        <a:t>CE</a:t>
+                      </a:r>
+                    </a:p>
+                  </a:txBody>
+                  <a:tcPr>
+                    <a:solidFill>
+                      <a:srgbClr val="F2F2F2"/>
+                    </a:solidFill>
+                  </a:tcPr>
+                </a:tc>
+                <a:tc>
+                  <a:txBody>
+                    <a:bodyPr/>
+                    <a:lstStyle/>
+                    <a:p>
+                      <a:pPr algn="l"/>
+                      <a:r>
+                        <a:rPr sz="1000" b="0">
+                          <a:solidFill>
+                            <a:srgbClr val="1D1B43"/>
+                          </a:solidFill>
+                          <a:latin typeface="Calibri"/>
+                        </a:rPr>
+                        <a:t>1</a:t>
+                      </a:r>
+                    </a:p>
+                  </a:txBody>
+                  <a:tcPr>
+                    <a:solidFill>
+                      <a:srgbClr val="F2F2F2"/>
+                    </a:solidFill>
+                  </a:tcPr>
+                </a:tc>
+                <a:tc>
+                  <a:txBody>
+                    <a:bodyPr/>
+                    <a:lstStyle/>
+                    <a:p>
+                      <a:pPr algn="l"/>
+                      <a:r>
+                        <a:rPr sz="1000" b="0">
+                          <a:solidFill>
+                            <a:srgbClr val="1D1B43"/>
+                          </a:solidFill>
+                          <a:latin typeface="Calibri"/>
+                        </a:rPr>
+                        <a:t>1</a:t>
+                      </a:r>
+                    </a:p>
+                  </a:txBody>
+                  <a:tcPr>
+                    <a:solidFill>
+                      <a:srgbClr val="F2F2F2"/>
+                    </a:solidFill>
+                  </a:tcPr>
+                </a:tc>
+                <a:tc>
+                  <a:txBody>
+                    <a:bodyPr/>
+                    <a:lstStyle/>
+                    <a:p>
+                      <a:pPr algn="l"/>
+                      <a:r>
+                        <a:rPr sz="1000" b="0">
+                          <a:solidFill>
+                            <a:srgbClr val="1D1B43"/>
+                          </a:solidFill>
+                          <a:latin typeface="Calibri"/>
+                        </a:rPr>
+                        <a:t>0</a:t>
+                      </a:r>
+                    </a:p>
+                  </a:txBody>
+                  <a:tcPr>
+                    <a:solidFill>
+                      <a:srgbClr val="F2F2F2"/>
+                    </a:solidFill>
+                  </a:tcPr>
+                </a:tc>
+                <a:tc>
+                  <a:txBody>
+                    <a:bodyPr/>
+                    <a:lstStyle/>
+                    <a:p>
+                      <a:pPr algn="l"/>
+                      <a:r>
+                        <a:rPr sz="1000" b="0">
+                          <a:solidFill>
+                            <a:srgbClr val="1D1B43"/>
+                          </a:solidFill>
+                          <a:latin typeface="Calibri"/>
+                        </a:rPr>
+                        <a:t>100.0%</a:t>
+                      </a:r>
+                    </a:p>
+                  </a:txBody>
+                  <a:tcPr>
+                    <a:solidFill>
+                      <a:srgbClr val="F2F2F2"/>
+                    </a:solidFill>
+                  </a:tcPr>
+                </a:tc>
+                <a:tc>
+                  <a:txBody>
+                    <a:bodyPr/>
+                    <a:lstStyle/>
+                    <a:p>
+                      <a:pPr algn="l"/>
+                      <a:r>
+                        <a:rPr sz="1000" b="0">
+                          <a:solidFill>
+                            <a:srgbClr val="1D1B43"/>
+                          </a:solidFill>
+                          <a:latin typeface="Calibri"/>
+                        </a:rPr>
+                        <a:t>Excelente</a:t>
+                      </a:r>
+                    </a:p>
+                  </a:txBody>
+                  <a:tcPr>
+                    <a:solidFill>
+                      <a:srgbClr val="F2F2F2"/>
+                    </a:solidFill>
+                  </a:tcPr>
+                </a:tc>
+              </a:tr>
+              <a:tr h="399010">
+                <a:tc>
+                  <a:txBody>
+                    <a:bodyPr/>
+                    <a:lstStyle/>
+                    <a:p>
+                      <a:pPr algn="l"/>
+                      <a:r>
+                        <a:rPr sz="1000" b="0">
+                          <a:solidFill>
+                            <a:srgbClr val="1D1B43"/>
+                          </a:solidFill>
+                          <a:latin typeface="Calibri"/>
+                        </a:rPr>
+                        <a:t>BA</a:t>
+                      </a:r>
+                    </a:p>
+                  </a:txBody>
+                  <a:tcPr>
+                    <a:solidFill>
+                      <a:srgbClr val="FFFFFF"/>
+                    </a:solidFill>
+                  </a:tcPr>
+                </a:tc>
+                <a:tc>
+                  <a:txBody>
+                    <a:bodyPr/>
+                    <a:lstStyle/>
+                    <a:p>
+                      <a:pPr algn="l"/>
+                      <a:r>
+                        <a:rPr sz="1000" b="0">
+                          <a:solidFill>
+                            <a:srgbClr val="1D1B43"/>
+                          </a:solidFill>
+                          <a:latin typeface="Calibri"/>
+                        </a:rPr>
+                        <a:t>1</a:t>
+                      </a:r>
+                    </a:p>
+                  </a:txBody>
+                  <a:tcPr>
+                    <a:solidFill>
+                      <a:srgbClr val="FFFFFF"/>
+                    </a:solidFill>
+                  </a:tcPr>
+                </a:tc>
+                <a:tc>
+                  <a:txBody>
+                    <a:bodyPr/>
+                    <a:lstStyle/>
+                    <a:p>
+                      <a:pPr algn="l"/>
+                      <a:r>
+                        <a:rPr sz="1000" b="0">
+                          <a:solidFill>
+                            <a:srgbClr val="1D1B43"/>
+                          </a:solidFill>
+                          <a:latin typeface="Calibri"/>
+                        </a:rPr>
+                        <a:t>1</a:t>
+                      </a:r>
+                    </a:p>
+                  </a:txBody>
+                  <a:tcPr>
+                    <a:solidFill>
+                      <a:srgbClr val="FFFFFF"/>
+                    </a:solidFill>
+                  </a:tcPr>
+                </a:tc>
+                <a:tc>
+                  <a:txBody>
+                    <a:bodyPr/>
+                    <a:lstStyle/>
+                    <a:p>
+                      <a:pPr algn="l"/>
+                      <a:r>
+                        <a:rPr sz="1000" b="0">
+                          <a:solidFill>
+                            <a:srgbClr val="1D1B43"/>
+                          </a:solidFill>
+                          <a:latin typeface="Calibri"/>
+                        </a:rPr>
+                        <a:t>0</a:t>
+                      </a:r>
+                    </a:p>
+                  </a:txBody>
+                  <a:tcPr>
+                    <a:solidFill>
+                      <a:srgbClr val="FFFFFF"/>
+                    </a:solidFill>
+                  </a:tcPr>
+                </a:tc>
+                <a:tc>
+                  <a:txBody>
+                    <a:bodyPr/>
+                    <a:lstStyle/>
+                    <a:p>
+                      <a:pPr algn="l"/>
+                      <a:r>
+                        <a:rPr sz="1000" b="0">
+                          <a:solidFill>
+                            <a:srgbClr val="1D1B43"/>
+                          </a:solidFill>
+                          <a:latin typeface="Calibri"/>
+                        </a:rPr>
+                        <a:t>100.0%</a:t>
+                      </a:r>
+                    </a:p>
+                  </a:txBody>
+                  <a:tcPr>
+                    <a:solidFill>
+                      <a:srgbClr val="FFFFFF"/>
+                    </a:solidFill>
+                  </a:tcPr>
+                </a:tc>
+                <a:tc>
+                  <a:txBody>
+                    <a:bodyPr/>
+                    <a:lstStyle/>
+                    <a:p>
+                      <a:pPr algn="l"/>
+                      <a:r>
+                        <a:rPr sz="1000" b="0">
+                          <a:solidFill>
+                            <a:srgbClr val="1D1B43"/>
+                          </a:solidFill>
+                          <a:latin typeface="Calibri"/>
+                        </a:rPr>
+                        <a:t>Excelente</a:t>
+                      </a:r>
+                    </a:p>
+                  </a:txBody>
+                  <a:tcPr>
+                    <a:solidFill>
+                      <a:srgbClr val="FFFFFF"/>
+                    </a:solidFill>
+                  </a:tcPr>
+                </a:tc>
+              </a:tr>
+              <a:tr h="399010">
+                <a:tc>
+                  <a:txBody>
+                    <a:bodyPr/>
+                    <a:lstStyle/>
+                    <a:p>
+                      <a:pPr algn="l"/>
+                      <a:r>
+                        <a:rPr sz="1000" b="0">
+                          <a:solidFill>
+                            <a:srgbClr val="1D1B43"/>
+                          </a:solidFill>
+                          <a:latin typeface="Calibri"/>
+                        </a:rPr>
+                        <a:t>ES</a:t>
+                      </a:r>
+                    </a:p>
+                  </a:txBody>
+                  <a:tcPr>
+                    <a:solidFill>
+                      <a:srgbClr val="F2F2F2"/>
+                    </a:solidFill>
+                  </a:tcPr>
+                </a:tc>
+                <a:tc>
+                  <a:txBody>
+                    <a:bodyPr/>
+                    <a:lstStyle/>
+                    <a:p>
+                      <a:pPr algn="l"/>
+                      <a:r>
+                        <a:rPr sz="1000" b="0">
+                          <a:solidFill>
+                            <a:srgbClr val="1D1B43"/>
+                          </a:solidFill>
+                          <a:latin typeface="Calibri"/>
+                        </a:rPr>
+                        <a:t>1</a:t>
+                      </a:r>
+                    </a:p>
+                  </a:txBody>
+                  <a:tcPr>
+                    <a:solidFill>
+                      <a:srgbClr val="F2F2F2"/>
+                    </a:solidFill>
+                  </a:tcPr>
+                </a:tc>
+                <a:tc>
+                  <a:txBody>
+                    <a:bodyPr/>
+                    <a:lstStyle/>
+                    <a:p>
+                      <a:pPr algn="l"/>
+                      <a:r>
+                        <a:rPr sz="1000" b="0">
+                          <a:solidFill>
+                            <a:srgbClr val="1D1B43"/>
+                          </a:solidFill>
+                          <a:latin typeface="Calibri"/>
+                        </a:rPr>
+                        <a:t>1</a:t>
+                      </a:r>
+                    </a:p>
+                  </a:txBody>
+                  <a:tcPr>
+                    <a:solidFill>
+                      <a:srgbClr val="F2F2F2"/>
+                    </a:solidFill>
+                  </a:tcPr>
+                </a:tc>
+                <a:tc>
+                  <a:txBody>
+                    <a:bodyPr/>
+                    <a:lstStyle/>
+                    <a:p>
+                      <a:pPr algn="l"/>
+                      <a:r>
+                        <a:rPr sz="1000" b="0">
+                          <a:solidFill>
+                            <a:srgbClr val="1D1B43"/>
+                          </a:solidFill>
+                          <a:latin typeface="Calibri"/>
+                        </a:rPr>
+                        <a:t>0</a:t>
+                      </a:r>
+                    </a:p>
+                  </a:txBody>
+                  <a:tcPr>
+                    <a:solidFill>
+                      <a:srgbClr val="F2F2F2"/>
+                    </a:solidFill>
+                  </a:tcPr>
+                </a:tc>
+                <a:tc>
+                  <a:txBody>
+                    <a:bodyPr/>
+                    <a:lstStyle/>
+                    <a:p>
+                      <a:pPr algn="l"/>
+                      <a:r>
+                        <a:rPr sz="1000" b="0">
+                          <a:solidFill>
+                            <a:srgbClr val="1D1B43"/>
+                          </a:solidFill>
+                          <a:latin typeface="Calibri"/>
+                        </a:rPr>
+                        <a:t>100.0%</a:t>
+                      </a:r>
+                    </a:p>
+                  </a:txBody>
+                  <a:tcPr>
+                    <a:solidFill>
+                      <a:srgbClr val="F2F2F2"/>
+                    </a:solidFill>
+                  </a:tcPr>
+                </a:tc>
+                <a:tc>
+                  <a:txBody>
+                    <a:bodyPr/>
+                    <a:lstStyle/>
+                    <a:p>
+                      <a:pPr algn="l"/>
+                      <a:r>
+                        <a:rPr sz="1000" b="0">
+                          <a:solidFill>
+                            <a:srgbClr val="1D1B43"/>
+                          </a:solidFill>
+                          <a:latin typeface="Calibri"/>
+                        </a:rPr>
+                        <a:t>Excelente</a:t>
+                      </a:r>
+                    </a:p>
+                  </a:txBody>
+                  <a:tcPr>
+                    <a:solidFill>
+                      <a:srgbClr val="F2F2F2"/>
+                    </a:solidFill>
+                  </a:tcPr>
+                </a:tc>
+              </a:tr>
+            </a:tbl>
+          </a:graphicData>
+        </a:graphic>
+      </p:graphicFrame>
+    </p:spTree>
+  </p:cSld>
+  <p:clrMapOvr>
+    <a:masterClrMapping/>
+  </p:clrMapOvr>
+</p:sld>
+</file>
+
+<file path=ppt/slides/slide6.xml><?xml version="1.0" encoding="utf-8"?>
+<p:sld xmlns:a="http://schemas.openxmlformats.org/drawingml/2006/main" xmlns:p="http://schemas.openxmlformats.org/presentationml/2006/main" xmlns:r="http://schemas.openxmlformats.org/officeDocument/2006/relationships">
+  <p:cSld>
+    <p:bg>
+      <p:bgPr>
+        <a:solidFill>
+          <a:srgbClr val="FFFFFF"/>
+        </a:solidFill>
+        <a:effectLst/>
+      </p:bgPr>
+    </p:bg>
+    <p:spTree>
+      <p:nvGrpSpPr>
+        <p:cNvPr id="1" name=""/>
+        <p:cNvGrpSpPr/>
+        <p:nvPr/>
+      </p:nvGrpSpPr>
+      <p:grpSpPr/>
+      <p:pic>
+        <p:nvPicPr>
+          <p:cNvPr id="2" name="Picture 1" descr="slide2_img3.png"/>
+          <p:cNvPicPr>
+            <a:picLocks noChangeAspect="1"/>
+          </p:cNvPicPr>
+          <p:nvPr/>
+        </p:nvPicPr>
+        <p:blipFill>
+          <a:blip r:embed="rId2"/>
+          <a:stretch>
+            <a:fillRect/>
+          </a:stretch>
+        </p:blipFill>
+        <p:spPr>
+          <a:xfrm>
+            <a:off x="10661904" y="155448"/>
+            <a:ext cx="1380744" cy="667512"/>
+          </a:xfrm>
+          <a:prstGeom prst="rect">
+            <a:avLst/>
+          </a:prstGeom>
+        </p:spPr>
+      </p:pic>
+      <p:sp>
+        <p:nvSpPr>
+          <p:cNvPr id="3" name="TextBox 2"/>
+          <p:cNvSpPr txBox="1"/>
+          <p:nvPr/>
+        </p:nvSpPr>
+        <p:spPr>
+          <a:xfrm>
+            <a:off x="749808" y="502920"/>
             <a:ext cx="10058400" cy="914400"/>
           </a:xfrm>
           <a:prstGeom prst="rect">
@@ -6693,7 +7716,7 @@
                 </a:solidFill>
                 <a:latin typeface="Calibri"/>
               </a:rPr>
-              <a:t>TOP DESTINATARIOS (26 pontos)</a:t>
+              <a:t>TOP DESTINATARIOS (34 pontos)</a:t>
             </a:r>
           </a:p>
         </p:txBody>
@@ -6968,7 +7991,7 @@
                           </a:solidFill>
                           <a:latin typeface="Calibri"/>
                         </a:rPr>
-                        <a:t>MRCEGLIA IMPORTACAO - ITAJAI / SC</a:t>
+                        <a:t>JP COMERCIO EXTERIOR - RIO DE JANEIRO / RJ</a:t>
                       </a:r>
                     </a:p>
                   </a:txBody>
@@ -6991,7 +8014,7 @@
                           </a:solidFill>
                           <a:latin typeface="Calibri"/>
                         </a:rPr>
-                        <a:t>3</a:t>
+                        <a:t>2</a:t>
                       </a:r>
                     </a:p>
                   </a:txBody>
@@ -7014,7 +8037,7 @@
                           </a:solidFill>
                           <a:latin typeface="Calibri"/>
                         </a:rPr>
-                        <a:t>3</a:t>
+                        <a:t>2</a:t>
                       </a:r>
                     </a:p>
                   </a:txBody>
@@ -7131,7 +8154,7 @@
                           </a:solidFill>
                           <a:latin typeface="Calibri"/>
                         </a:rPr>
-                        <a:t>GABRIEL VELISTA NASC - SANTOS / SP</a:t>
+                        <a:t>JAY ARBUDA PRESENTES - SAO PAULO / SP</a:t>
                       </a:r>
                     </a:p>
                   </a:txBody>
@@ -7294,7 +8317,7 @@
                           </a:solidFill>
                           <a:latin typeface="Calibri"/>
                         </a:rPr>
-                        <a:t>UNNIX GROW E HEADSHO - SAO PAULO / SP</a:t>
+                        <a:t>TRUST MEGA TECHNOLOG - SAO PAULO / SP</a:t>
                       </a:r>
                     </a:p>
                   </a:txBody>
@@ -7457,7 +8480,7 @@
                           </a:solidFill>
                           <a:latin typeface="Calibri"/>
                         </a:rPr>
-                        <a:t>PORTOEXPRESS LOGISTI - ITAJAI / SC</a:t>
+                        <a:t>REGIS G.MARQUES - PORTO ALEGRE / RS</a:t>
                       </a:r>
                     </a:p>
                   </a:txBody>
@@ -7620,7 +8643,7 @@
                           </a:solidFill>
                           <a:latin typeface="Calibri"/>
                         </a:rPr>
-                        <a:t>NEW FUTURE ARTIGOS D - RIO DE JANEIRO / RJ</a:t>
+                        <a:t>TABACARIA HIJAZI - SAO LUIZ / MA</a:t>
                       </a:r>
                     </a:p>
                   </a:txBody>
@@ -7666,6 +8689,29 @@
                           </a:solidFill>
                           <a:latin typeface="Calibri"/>
                         </a:rPr>
+                        <a:t>0</a:t>
+                      </a:r>
+                    </a:p>
+                  </a:txBody>
+                  <a:tcPr>
+                    <a:solidFill>
+                      <a:srgbClr val="FFFFFF"/>
+                    </a:solidFill>
+                  </a:tcPr>
+                </a:tc>
+                <a:tc>
+                  <a:txBody>
+                    <a:bodyPr/>
+                    <a:lstStyle/>
+                    <a:p>
+                      <a:pPr algn="l"/>
+                      <a:r>
+                        <a:rPr sz="1000" b="0">
+                          <a:solidFill>
+                            <a:srgbClr val="1D1B43"/>
+                          </a:solidFill>
+                          <a:latin typeface="Calibri"/>
+                        </a:rPr>
                         <a:t>2</a:t>
                       </a:r>
                     </a:p>
@@ -7689,7 +8735,7 @@
                           </a:solidFill>
                           <a:latin typeface="Calibri"/>
                         </a:rPr>
-                        <a:t>0</a:t>
+                        <a:t>0.0%</a:t>
                       </a:r>
                     </a:p>
                   </a:txBody>
@@ -7712,30 +8758,7 @@
                           </a:solidFill>
                           <a:latin typeface="Calibri"/>
                         </a:rPr>
-                        <a:t>100.0%</a:t>
-                      </a:r>
-                    </a:p>
-                  </a:txBody>
-                  <a:tcPr>
-                    <a:solidFill>
-                      <a:srgbClr val="FFFFFF"/>
-                    </a:solidFill>
-                  </a:tcPr>
-                </a:tc>
-                <a:tc>
-                  <a:txBody>
-                    <a:bodyPr/>
-                    <a:lstStyle/>
-                    <a:p>
-                      <a:pPr algn="l"/>
-                      <a:r>
-                        <a:rPr sz="1000" b="0">
-                          <a:solidFill>
-                            <a:srgbClr val="1D1B43"/>
-                          </a:solidFill>
-                          <a:latin typeface="Calibri"/>
-                        </a:rPr>
-                        <a:t>Excelente</a:t>
+                        <a:t>Atencao</a:t>
                       </a:r>
                     </a:p>
                   </a:txBody>
@@ -7783,7 +8806,7 @@
                           </a:solidFill>
                           <a:latin typeface="Calibri"/>
                         </a:rPr>
-                        <a:t>TRUST MEGA TECHNOLOG - SAO PAULO / SP</a:t>
+                        <a:t>27.889.907 JESSE ROD - RIO DE JANEIRO / RJ</a:t>
                       </a:r>
                     </a:p>
                   </a:txBody>
@@ -7806,7 +8829,7 @@
                           </a:solidFill>
                           <a:latin typeface="Calibri"/>
                         </a:rPr>
-                        <a:t>2</a:t>
+                        <a:t>1</a:t>
                       </a:r>
                     </a:p>
                   </a:txBody>
@@ -7829,7 +8852,7 @@
                           </a:solidFill>
                           <a:latin typeface="Calibri"/>
                         </a:rPr>
-                        <a:t>2</a:t>
+                        <a:t>1</a:t>
                       </a:r>
                     </a:p>
                   </a:txBody>
@@ -7946,7 +8969,7 @@
                           </a:solidFill>
                           <a:latin typeface="Calibri"/>
                         </a:rPr>
-                        <a:t>GB COMERCIO DE VESTU - VOLTA REDONDA / RJ</a:t>
+                        <a:t>ALBERTO ANDRES ANDRE - JOAO PESSOA / PB</a:t>
                       </a:r>
                     </a:p>
                   </a:txBody>
@@ -7969,7 +8992,7 @@
                           </a:solidFill>
                           <a:latin typeface="Calibri"/>
                         </a:rPr>
-                        <a:t>2</a:t>
+                        <a:t>1</a:t>
                       </a:r>
                     </a:p>
                   </a:txBody>
@@ -7992,7 +9015,7 @@
                           </a:solidFill>
                           <a:latin typeface="Calibri"/>
                         </a:rPr>
-                        <a:t>2</a:t>
+                        <a:t>0</a:t>
                       </a:r>
                     </a:p>
                   </a:txBody>
@@ -8015,7 +9038,7 @@
                           </a:solidFill>
                           <a:latin typeface="Calibri"/>
                         </a:rPr>
-                        <a:t>0</a:t>
+                        <a:t>1</a:t>
                       </a:r>
                     </a:p>
                   </a:txBody>
@@ -8038,7 +9061,7 @@
                           </a:solidFill>
                           <a:latin typeface="Calibri"/>
                         </a:rPr>
-                        <a:t>100.0%</a:t>
+                        <a:t>0.0%</a:t>
                       </a:r>
                     </a:p>
                   </a:txBody>
@@ -8061,7 +9084,7 @@
                           </a:solidFill>
                           <a:latin typeface="Calibri"/>
                         </a:rPr>
-                        <a:t>Excelente</a:t>
+                        <a:t>Atencao</a:t>
                       </a:r>
                     </a:p>
                   </a:txBody>
@@ -8109,7 +9132,7 @@
                           </a:solidFill>
                           <a:latin typeface="Calibri"/>
                         </a:rPr>
-                        <a:t>BEST PRICE - BRASILIA / DF</a:t>
+                        <a:t>DARK SHOP TABACARIA - BELO HORIZONTE / MG</a:t>
                       </a:r>
                     </a:p>
                   </a:txBody>
@@ -8272,7 +9295,7 @@
                           </a:solidFill>
                           <a:latin typeface="Calibri"/>
                         </a:rPr>
-                        <a:t>CAFE DA MATA LTDA - SAO PAULO / SP</a:t>
+                        <a:t>BE HAPPY TABACARIA L - VOLTA REDONDA / RJ</a:t>
                       </a:r>
                     </a:p>
                   </a:txBody>
@@ -8435,7 +9458,7 @@
                           </a:solidFill>
                           <a:latin typeface="Calibri"/>
                         </a:rPr>
-                        <a:t>BELLI ROOTS - SAO PAULO / SP</a:t>
+                        <a:t>BRENO SILVA MACHADO - NITEROI / RJ</a:t>
                       </a:r>
                     </a:p>
                   </a:txBody>
@@ -8598,7 +9621,7 @@
                           </a:solidFill>
                           <a:latin typeface="Calibri"/>
                         </a:rPr>
-                        <a:t>J&amp;CIA - FLORIANOPOLIS / SC</a:t>
+                        <a:t>ERICKSON EUGENIO SUZ - CAXIAS DO SUL / RS</a:t>
                       </a:r>
                     </a:p>
                   </a:txBody>
@@ -8761,7 +9784,7 @@
                           </a:solidFill>
                           <a:latin typeface="Calibri"/>
                         </a:rPr>
-                        <a:t>IMNUNES ARTIGOS NACI - SAO PAULO / SP</a:t>
+                        <a:t>DOS CRIAS ATACADO LT - SERRA / ES</a:t>
                       </a:r>
                     </a:p>
                   </a:txBody>
@@ -8924,7 +9947,7 @@
                           </a:solidFill>
                           <a:latin typeface="Calibri"/>
                         </a:rPr>
-                        <a:t>DISTRIBUIDORA CORING - ANAPOLIS / GO</a:t>
+                        <a:t>ESPECIARIAS DO CERRA - GOIANIA / GO</a:t>
                       </a:r>
                     </a:p>
                   </a:txBody>
@@ -9087,7 +10110,7 @@
                           </a:solidFill>
                           <a:latin typeface="Calibri"/>
                         </a:rPr>
-                        <a:t>ERICKSON EUGENIO SUZ - CAXIAS DO SUL / RS</a:t>
+                        <a:t>FIRE COMERCIO DE ART - SANTOS / SP</a:t>
                       </a:r>
                     </a:p>
                   </a:txBody>
@@ -9225,7 +10248,7 @@
 </p:sld>
 </file>
 
-<file path=ppt/slides/slide6.xml><?xml version="1.0" encoding="utf-8"?>
+<file path=ppt/slides/slide7.xml><?xml version="1.0" encoding="utf-8"?>
 <p:sld xmlns:a="http://schemas.openxmlformats.org/drawingml/2006/main" xmlns:p="http://schemas.openxmlformats.org/presentationml/2006/main" xmlns:r="http://schemas.openxmlformats.org/officeDocument/2006/relationships">
   <p:cSld>
     <p:bg>

--- a/MRCEGLIA_IMPORTACAO_E_SERVICOS.pptx
+++ b/MRCEGLIA_IMPORTACAO_E_SERVICOS.pptx
@@ -11,7 +11,6 @@
     <p:sldId id="259" r:id="rId10"/>
     <p:sldId id="260" r:id="rId11"/>
     <p:sldId id="261" r:id="rId12"/>
-    <p:sldId id="262" r:id="rId13"/>
   </p:sldIdLst>
   <p:sldSz cx="12188952" cy="6858000" type="screen4x3"/>
   <p:notesSz cx="6858000" cy="9144000"/>
@@ -143,29 +142,23 @@
           </c:spPr>
           <c:cat>
             <c:strRef>
-              <c:f>Sheet1!$A$2:$A$3</c:f>
+              <c:f>Sheet1!$A$2:$A$2</c:f>
               <c:strCache>
-                <c:ptCount val="2"/>
+                <c:ptCount val="1"/>
                 <c:pt idx="0">
                   <c:v>Abril 2026</c:v>
-                </c:pt>
-                <c:pt idx="1">
-                  <c:v>Maio 2026</c:v>
                 </c:pt>
               </c:strCache>
             </c:strRef>
           </c:cat>
           <c:val>
             <c:numRef>
-              <c:f>Sheet1!$B$2:$B$3</c:f>
+              <c:f>Sheet1!$B$2:$B$2</c:f>
               <c:numCache>
                 <c:formatCode>General</c:formatCode>
-                <c:ptCount val="2"/>
+                <c:ptCount val="1"/>
                 <c:pt idx="0">
                   <c:v>34</c:v>
-                </c:pt>
-                <c:pt idx="1">
-                  <c:v>35</c:v>
                 </c:pt>
               </c:numCache>
             </c:numRef>
@@ -192,29 +185,23 @@
           </c:spPr>
           <c:cat>
             <c:strRef>
-              <c:f>Sheet1!$A$2:$A$3</c:f>
+              <c:f>Sheet1!$A$2:$A$2</c:f>
               <c:strCache>
-                <c:ptCount val="2"/>
+                <c:ptCount val="1"/>
                 <c:pt idx="0">
                   <c:v>Abril 2026</c:v>
-                </c:pt>
-                <c:pt idx="1">
-                  <c:v>Maio 2026</c:v>
                 </c:pt>
               </c:strCache>
             </c:strRef>
           </c:cat>
           <c:val>
             <c:numRef>
-              <c:f>Sheet1!$C$2:$C$3</c:f>
+              <c:f>Sheet1!$C$2:$C$2</c:f>
               <c:numCache>
                 <c:formatCode>General</c:formatCode>
-                <c:ptCount val="2"/>
+                <c:ptCount val="1"/>
                 <c:pt idx="0">
                   <c:v>0</c:v>
-                </c:pt>
-                <c:pt idx="1">
-                  <c:v>4</c:v>
                 </c:pt>
               </c:numCache>
             </c:numRef>
@@ -3387,7 +3374,7 @@
                 </a:solidFill>
                 <a:latin typeface="Calibri"/>
               </a:rPr>
-              <a:t>INDICADORES MAIO 2026</a:t>
+              <a:t>INDICADORES ABRIL 2026</a:t>
             </a:r>
           </a:p>
         </p:txBody>
@@ -3494,14 +3481,13 @@
           <a:p>
             <a:pPr algn="ctr"/>
             <a:r>
-              <a:rPr sz="1600" b="1">
+              <a:rPr sz="1400" b="1">
                 <a:solidFill>
                   <a:srgbClr val="FFFFFF"/>
                 </a:solidFill>
                 <a:latin typeface="Calibri"/>
               </a:rPr>
-              <a:t>Nossa rota e ir alem das
-entregas!</a:t>
+              <a:t>Nossa rota e ir alem das entregas!</a:t>
             </a:r>
           </a:p>
         </p:txBody>
@@ -3709,7 +3695,7 @@
                 </a:solidFill>
                 <a:latin typeface="Calibri"/>
               </a:rPr>
-              <a:t>39</a:t>
+              <a:t>34</a:t>
             </a:r>
           </a:p>
         </p:txBody>
@@ -3824,7 +3810,7 @@
                 </a:solidFill>
                 <a:latin typeface="Calibri"/>
               </a:rPr>
-              <a:t>35</a:t>
+              <a:t>34</a:t>
             </a:r>
           </a:p>
         </p:txBody>
@@ -3935,11 +3921,11 @@
             <a:r>
               <a:rPr sz="2800" b="1">
                 <a:solidFill>
-                  <a:srgbClr val="EF4444"/>
+                  <a:srgbClr val="10B981"/>
                 </a:solidFill>
                 <a:latin typeface="Calibri"/>
               </a:rPr>
-              <a:t>4</a:t>
+              <a:t>0</a:t>
             </a:r>
           </a:p>
         </p:txBody>
@@ -4050,11 +4036,11 @@
             <a:r>
               <a:rPr sz="2800" b="1">
                 <a:solidFill>
-                  <a:srgbClr val="F59E0B"/>
+                  <a:srgbClr val="10B981"/>
                 </a:solidFill>
                 <a:latin typeface="Calibri"/>
               </a:rPr>
-              <a:t>89.7%</a:t>
+              <a:t>100.0%</a:t>
             </a:r>
           </a:p>
         </p:txBody>
@@ -4155,30 +4141,30 @@
                           </a:solidFill>
                           <a:latin typeface="Calibri"/>
                         </a:rPr>
+                        <a:t>Marco 2026</a:t>
+                      </a:r>
+                    </a:p>
+                  </a:txBody>
+                  <a:tcPr>
+                    <a:solidFill>
+                      <a:srgbClr val="1D1B43"/>
+                    </a:solidFill>
+                  </a:tcPr>
+                </a:tc>
+                <a:tc>
+                  <a:txBody>
+                    <a:bodyPr/>
+                    <a:lstStyle/>
+                    <a:p>
+                      <a:pPr algn="ctr"/>
+                      <a:r>
+                        <a:rPr sz="1100" b="1">
+                          <a:solidFill>
+                            <a:srgbClr val="FFFFFF"/>
+                          </a:solidFill>
+                          <a:latin typeface="Calibri"/>
+                        </a:rPr>
                         <a:t>Abril 2026</a:t>
-                      </a:r>
-                    </a:p>
-                  </a:txBody>
-                  <a:tcPr>
-                    <a:solidFill>
-                      <a:srgbClr val="1D1B43"/>
-                    </a:solidFill>
-                  </a:tcPr>
-                </a:tc>
-                <a:tc>
-                  <a:txBody>
-                    <a:bodyPr/>
-                    <a:lstStyle/>
-                    <a:p>
-                      <a:pPr algn="ctr"/>
-                      <a:r>
-                        <a:rPr sz="1100" b="1">
-                          <a:solidFill>
-                            <a:srgbClr val="FFFFFF"/>
-                          </a:solidFill>
-                          <a:latin typeface="Calibri"/>
-                        </a:rPr>
-                        <a:t>Maio 2026</a:t>
                       </a:r>
                     </a:p>
                   </a:txBody>
@@ -4249,6 +4235,29 @@
                           </a:solidFill>
                           <a:latin typeface="Calibri"/>
                         </a:rPr>
+                        <a:t>-</a:t>
+                      </a:r>
+                    </a:p>
+                  </a:txBody>
+                  <a:tcPr>
+                    <a:solidFill>
+                      <a:srgbClr val="FFFFFF"/>
+                    </a:solidFill>
+                  </a:tcPr>
+                </a:tc>
+                <a:tc>
+                  <a:txBody>
+                    <a:bodyPr/>
+                    <a:lstStyle/>
+                    <a:p>
+                      <a:pPr algn="l"/>
+                      <a:r>
+                        <a:rPr sz="1000" b="0">
+                          <a:solidFill>
+                            <a:srgbClr val="1D1B43"/>
+                          </a:solidFill>
+                          <a:latin typeface="Calibri"/>
+                        </a:rPr>
                         <a:t>34</a:t>
                       </a:r>
                     </a:p>
@@ -4272,30 +4281,7 @@
                           </a:solidFill>
                           <a:latin typeface="Calibri"/>
                         </a:rPr>
-                        <a:t>39</a:t>
-                      </a:r>
-                    </a:p>
-                  </a:txBody>
-                  <a:tcPr>
-                    <a:solidFill>
-                      <a:srgbClr val="FFFFFF"/>
-                    </a:solidFill>
-                  </a:tcPr>
-                </a:tc>
-                <a:tc>
-                  <a:txBody>
-                    <a:bodyPr/>
-                    <a:lstStyle/>
-                    <a:p>
-                      <a:pPr algn="l"/>
-                      <a:r>
-                        <a:rPr sz="1000" b="0">
-                          <a:solidFill>
-                            <a:srgbClr val="1D1B43"/>
-                          </a:solidFill>
-                          <a:latin typeface="Calibri"/>
-                        </a:rPr>
-                        <a:t>+ 5</a:t>
+                        <a:t>-</a:t>
                       </a:r>
                     </a:p>
                   </a:txBody>
@@ -4343,6 +4329,29 @@
                           </a:solidFill>
                           <a:latin typeface="Calibri"/>
                         </a:rPr>
+                        <a:t>-</a:t>
+                      </a:r>
+                    </a:p>
+                  </a:txBody>
+                  <a:tcPr>
+                    <a:solidFill>
+                      <a:srgbClr val="F2F2F2"/>
+                    </a:solidFill>
+                  </a:tcPr>
+                </a:tc>
+                <a:tc>
+                  <a:txBody>
+                    <a:bodyPr/>
+                    <a:lstStyle/>
+                    <a:p>
+                      <a:pPr algn="l"/>
+                      <a:r>
+                        <a:rPr sz="1000" b="0">
+                          <a:solidFill>
+                            <a:srgbClr val="1D1B43"/>
+                          </a:solidFill>
+                          <a:latin typeface="Calibri"/>
+                        </a:rPr>
                         <a:t>34</a:t>
                       </a:r>
                     </a:p>
@@ -4366,30 +4375,7 @@
                           </a:solidFill>
                           <a:latin typeface="Calibri"/>
                         </a:rPr>
-                        <a:t>35</a:t>
-                      </a:r>
-                    </a:p>
-                  </a:txBody>
-                  <a:tcPr>
-                    <a:solidFill>
-                      <a:srgbClr val="F2F2F2"/>
-                    </a:solidFill>
-                  </a:tcPr>
-                </a:tc>
-                <a:tc>
-                  <a:txBody>
-                    <a:bodyPr/>
-                    <a:lstStyle/>
-                    <a:p>
-                      <a:pPr algn="l"/>
-                      <a:r>
-                        <a:rPr sz="1000" b="0">
-                          <a:solidFill>
-                            <a:srgbClr val="1D1B43"/>
-                          </a:solidFill>
-                          <a:latin typeface="Calibri"/>
-                        </a:rPr>
-                        <a:t>+ 1</a:t>
+                        <a:t>-</a:t>
                       </a:r>
                     </a:p>
                   </a:txBody>
@@ -4437,6 +4423,29 @@
                           </a:solidFill>
                           <a:latin typeface="Calibri"/>
                         </a:rPr>
+                        <a:t>-</a:t>
+                      </a:r>
+                    </a:p>
+                  </a:txBody>
+                  <a:tcPr>
+                    <a:solidFill>
+                      <a:srgbClr val="FFFFFF"/>
+                    </a:solidFill>
+                  </a:tcPr>
+                </a:tc>
+                <a:tc>
+                  <a:txBody>
+                    <a:bodyPr/>
+                    <a:lstStyle/>
+                    <a:p>
+                      <a:pPr algn="l"/>
+                      <a:r>
+                        <a:rPr sz="1000" b="0">
+                          <a:solidFill>
+                            <a:srgbClr val="1D1B43"/>
+                          </a:solidFill>
+                          <a:latin typeface="Calibri"/>
+                        </a:rPr>
                         <a:t>0</a:t>
                       </a:r>
                     </a:p>
@@ -4460,30 +4469,7 @@
                           </a:solidFill>
                           <a:latin typeface="Calibri"/>
                         </a:rPr>
-                        <a:t>4</a:t>
-                      </a:r>
-                    </a:p>
-                  </a:txBody>
-                  <a:tcPr>
-                    <a:solidFill>
-                      <a:srgbClr val="FFFFFF"/>
-                    </a:solidFill>
-                  </a:tcPr>
-                </a:tc>
-                <a:tc>
-                  <a:txBody>
-                    <a:bodyPr/>
-                    <a:lstStyle/>
-                    <a:p>
-                      <a:pPr algn="l"/>
-                      <a:r>
-                        <a:rPr sz="1000" b="0">
-                          <a:solidFill>
-                            <a:srgbClr val="1D1B43"/>
-                          </a:solidFill>
-                          <a:latin typeface="Calibri"/>
-                        </a:rPr>
-                        <a:t>+ 4</a:t>
+                        <a:t>-</a:t>
                       </a:r>
                     </a:p>
                   </a:txBody>
@@ -4531,6 +4517,29 @@
                           </a:solidFill>
                           <a:latin typeface="Calibri"/>
                         </a:rPr>
+                        <a:t>-</a:t>
+                      </a:r>
+                    </a:p>
+                  </a:txBody>
+                  <a:tcPr>
+                    <a:solidFill>
+                      <a:srgbClr val="F2F2F2"/>
+                    </a:solidFill>
+                  </a:tcPr>
+                </a:tc>
+                <a:tc>
+                  <a:txBody>
+                    <a:bodyPr/>
+                    <a:lstStyle/>
+                    <a:p>
+                      <a:pPr algn="l"/>
+                      <a:r>
+                        <a:rPr sz="1000" b="0">
+                          <a:solidFill>
+                            <a:srgbClr val="1D1B43"/>
+                          </a:solidFill>
+                          <a:latin typeface="Calibri"/>
+                        </a:rPr>
                         <a:t>100.0%</a:t>
                       </a:r>
                     </a:p>
@@ -4554,30 +4563,7 @@
                           </a:solidFill>
                           <a:latin typeface="Calibri"/>
                         </a:rPr>
-                        <a:t>89.7%</a:t>
-                      </a:r>
-                    </a:p>
-                  </a:txBody>
-                  <a:tcPr>
-                    <a:solidFill>
-                      <a:srgbClr val="F2F2F2"/>
-                    </a:solidFill>
-                  </a:tcPr>
-                </a:tc>
-                <a:tc>
-                  <a:txBody>
-                    <a:bodyPr/>
-                    <a:lstStyle/>
-                    <a:p>
-                      <a:pPr algn="l"/>
-                      <a:r>
-                        <a:rPr sz="1000" b="0">
-                          <a:solidFill>
-                            <a:srgbClr val="1D1B43"/>
-                          </a:solidFill>
-                          <a:latin typeface="Calibri"/>
-                        </a:rPr>
-                        <a:t>- 10.3pp</a:t>
+                        <a:t>-</a:t>
                       </a:r>
                     </a:p>
                   </a:txBody>
@@ -4748,7 +4734,7 @@
         </p:nvGraphicFramePr>
         <p:xfrm>
           <a:off x="7955279" y="2286000"/>
-          <a:ext cx="4480560" cy="1316736"/>
+          <a:ext cx="4480560" cy="877824"/>
         </p:xfrm>
         <a:graphic>
           <a:graphicData uri="http://schemas.openxmlformats.org/drawingml/2006/table">
@@ -4993,123 +4979,6 @@
                   <a:tcPr>
                     <a:solidFill>
                       <a:srgbClr val="FFFFFF"/>
-                    </a:solidFill>
-                  </a:tcPr>
-                </a:tc>
-              </a:tr>
-              <a:tr h="438912">
-                <a:tc>
-                  <a:txBody>
-                    <a:bodyPr/>
-                    <a:lstStyle/>
-                    <a:p>
-                      <a:pPr algn="l"/>
-                      <a:r>
-                        <a:rPr sz="1000" b="0">
-                          <a:solidFill>
-                            <a:srgbClr val="1D1B43"/>
-                          </a:solidFill>
-                          <a:latin typeface="Calibri"/>
-                        </a:rPr>
-                        <a:t>Maio 2026</a:t>
-                      </a:r>
-                    </a:p>
-                  </a:txBody>
-                  <a:tcPr>
-                    <a:solidFill>
-                      <a:srgbClr val="F2F2F2"/>
-                    </a:solidFill>
-                  </a:tcPr>
-                </a:tc>
-                <a:tc>
-                  <a:txBody>
-                    <a:bodyPr/>
-                    <a:lstStyle/>
-                    <a:p>
-                      <a:pPr algn="l"/>
-                      <a:r>
-                        <a:rPr sz="1000" b="0">
-                          <a:solidFill>
-                            <a:srgbClr val="1D1B43"/>
-                          </a:solidFill>
-                          <a:latin typeface="Calibri"/>
-                        </a:rPr>
-                        <a:t>39</a:t>
-                      </a:r>
-                    </a:p>
-                  </a:txBody>
-                  <a:tcPr>
-                    <a:solidFill>
-                      <a:srgbClr val="F2F2F2"/>
-                    </a:solidFill>
-                  </a:tcPr>
-                </a:tc>
-                <a:tc>
-                  <a:txBody>
-                    <a:bodyPr/>
-                    <a:lstStyle/>
-                    <a:p>
-                      <a:pPr algn="l"/>
-                      <a:r>
-                        <a:rPr sz="1000" b="0">
-                          <a:solidFill>
-                            <a:srgbClr val="1D1B43"/>
-                          </a:solidFill>
-                          <a:latin typeface="Calibri"/>
-                        </a:rPr>
-                        <a:t>35</a:t>
-                      </a:r>
-                    </a:p>
-                  </a:txBody>
-                  <a:tcPr>
-                    <a:solidFill>
-                      <a:srgbClr val="F2F2F2"/>
-                    </a:solidFill>
-                  </a:tcPr>
-                </a:tc>
-                <a:tc>
-                  <a:txBody>
-                    <a:bodyPr/>
-                    <a:lstStyle/>
-                    <a:p>
-                      <a:pPr algn="l"/>
-                      <a:r>
-                        <a:rPr sz="1000" b="0">
-                          <a:solidFill>
-                            <a:srgbClr val="1D1B43"/>
-                          </a:solidFill>
-                          <a:latin typeface="Calibri"/>
-                        </a:rPr>
-                        <a:t>4</a:t>
-                      </a:r>
-                    </a:p>
-                  </a:txBody>
-                  <a:tcPr>
-                    <a:solidFill>
-                      <a:srgbClr val="F2F2F2"/>
-                    </a:solidFill>
-                  </a:tcPr>
-                </a:tc>
-                <a:tc>
-                  <a:txBody>
-                    <a:bodyPr/>
-                    <a:lstStyle/>
-                    <a:p>
-                      <a:pPr algn="l"/>
-                      <a:r>
-                        <a:rPr sz="1000" b="0">
-                          <a:solidFill>
-                            <a:srgbClr val="1D1B43"/>
-                          </a:solidFill>
-                          <a:latin typeface="Calibri"/>
-                        </a:rPr>
-                        <a:t>89.7%</a:t>
-                      </a:r>
-                    </a:p>
-                  </a:txBody>
-                  <a:tcPr>
-                    <a:solidFill>
-                      <a:srgbClr val="F2F2F2"/>
                     </a:solidFill>
                   </a:tcPr>
                 </a:tc>
@@ -5191,7 +5060,7 @@
                 </a:solidFill>
                 <a:latin typeface="Calibri"/>
               </a:rPr>
-              <a:t>PERFORMANCE: 89.7% - REGULAR</a:t>
+              <a:t>PERFORMANCE: 100.0% - EXCELENTE</a:t>
             </a:r>
           </a:p>
         </p:txBody>
@@ -5255,7 +5124,7 @@
         <p:spPr>
           <a:xfrm>
             <a:off x="749808" y="502920"/>
-            <a:ext cx="10058400" cy="914400"/>
+            <a:ext cx="9144000" cy="914400"/>
           </a:xfrm>
           <a:prstGeom prst="rect">
             <a:avLst/>
@@ -5270,13 +5139,13 @@
           <a:p>
             <a:pPr algn="l"/>
             <a:r>
-              <a:rPr sz="3200" b="1">
+              <a:rPr sz="4000" b="1">
                 <a:solidFill>
                   <a:srgbClr val="F97316"/>
                 </a:solidFill>
                 <a:latin typeface="Calibri"/>
               </a:rPr>
-              <a:t>OCORRENCIAS FORA DO PRAZO (4)</a:t>
+              <a:t>PERFORMANCE POR UF</a:t>
             </a:r>
           </a:p>
         </p:txBody>
@@ -5289,7 +5158,7 @@
         </p:nvSpPr>
         <p:spPr>
           <a:xfrm>
-            <a:off x="749808" y="1600200"/>
+            <a:off x="749808" y="1719072"/>
             <a:ext cx="10424160" cy="36576"/>
           </a:xfrm>
           <a:prstGeom prst="rect">
@@ -5333,8 +5202,8 @@
           <p:nvPr/>
         </p:nvGraphicFramePr>
         <p:xfrm>
-          <a:off x="457200" y="1828800"/>
-          <a:ext cx="11429999" cy="1920240"/>
+          <a:off x="731520" y="1920240"/>
+          <a:ext cx="10698480" cy="4114800"/>
         </p:xfrm>
         <a:graphic>
           <a:graphicData uri="http://schemas.openxmlformats.org/drawingml/2006/table">
@@ -5343,13 +5212,14 @@
                 <a:tableStyleId>{5C22544A-7EE6-4342-B048-85BDC9FD1C3A}</a:tableStyleId>
               </a:tblPr>
               <a:tblGrid>
-                <a:gridCol w="1280160"/>
-                <a:gridCol w="3749039"/>
-                <a:gridCol w="2103120"/>
+                <a:gridCol w="1097280"/>
+                <a:gridCol w="1645920"/>
+                <a:gridCol w="1645920"/>
+                <a:gridCol w="1645920"/>
                 <a:gridCol w="1554480"/>
-                <a:gridCol w="2743200"/>
+                <a:gridCol w="3108960"/>
               </a:tblGrid>
-              <a:tr h="384048">
+              <a:tr h="457200">
                 <a:tc>
                   <a:txBody>
                     <a:bodyPr/>
@@ -5363,7 +5233,7 @@
                           </a:solidFill>
                           <a:latin typeface="Calibri"/>
                         </a:rPr>
-                        <a:t>MD</a:t>
+                        <a:t>UF</a:t>
                       </a:r>
                     </a:p>
                   </a:txBody>
@@ -5386,7 +5256,7 @@
                           </a:solidFill>
                           <a:latin typeface="Calibri"/>
                         </a:rPr>
-                        <a:t>DESTINATARIO</a:t>
+                        <a:t>TOTAL</a:t>
                       </a:r>
                     </a:p>
                   </a:txBody>
@@ -5409,7 +5279,7 @@
                           </a:solidFill>
                           <a:latin typeface="Calibri"/>
                         </a:rPr>
-                        <a:t>CIDADE/UF</a:t>
+                        <a:t>NO PRAZO</a:t>
                       </a:r>
                     </a:p>
                   </a:txBody>
@@ -5432,7 +5302,7 @@
                           </a:solidFill>
                           <a:latin typeface="Calibri"/>
                         </a:rPr>
-                        <a:t>PREV. ENTREGA</a:t>
+                        <a:t>FORA</a:t>
                       </a:r>
                     </a:p>
                   </a:txBody>
@@ -5455,6 +5325,29 @@
                           </a:solidFill>
                           <a:latin typeface="Calibri"/>
                         </a:rPr>
+                        <a:t>TAXA</a:t>
+                      </a:r>
+                    </a:p>
+                  </a:txBody>
+                  <a:tcPr>
+                    <a:solidFill>
+                      <a:srgbClr val="1D1B43"/>
+                    </a:solidFill>
+                  </a:tcPr>
+                </a:tc>
+                <a:tc>
+                  <a:txBody>
+                    <a:bodyPr/>
+                    <a:lstStyle/>
+                    <a:p>
+                      <a:pPr algn="ctr"/>
+                      <a:r>
+                        <a:rPr sz="1100" b="1">
+                          <a:solidFill>
+                            <a:srgbClr val="FFFFFF"/>
+                          </a:solidFill>
+                          <a:latin typeface="Calibri"/>
+                        </a:rPr>
                         <a:t>STATUS</a:t>
                       </a:r>
                     </a:p>
@@ -5466,21 +5359,21 @@
                   </a:tcPr>
                 </a:tc>
               </a:tr>
-              <a:tr h="384048">
-                <a:tc>
-                  <a:txBody>
-                    <a:bodyPr/>
-                    <a:lstStyle/>
-                    <a:p>
-                      <a:pPr algn="l"/>
-                      <a:r>
-                        <a:rPr sz="1000" b="0">
-                          <a:solidFill>
-                            <a:srgbClr val="1D1B43"/>
-                          </a:solidFill>
-                          <a:latin typeface="Calibri"/>
-                        </a:rPr>
-                        <a:t>280714</a:t>
+              <a:tr h="457200">
+                <a:tc>
+                  <a:txBody>
+                    <a:bodyPr/>
+                    <a:lstStyle/>
+                    <a:p>
+                      <a:pPr algn="l"/>
+                      <a:r>
+                        <a:rPr sz="1000" b="0">
+                          <a:solidFill>
+                            <a:srgbClr val="1D1B43"/>
+                          </a:solidFill>
+                          <a:latin typeface="Calibri"/>
+                        </a:rPr>
+                        <a:t>SP</a:t>
                       </a:r>
                     </a:p>
                   </a:txBody>
@@ -5503,7 +5396,7 @@
                           </a:solidFill>
                           <a:latin typeface="Calibri"/>
                         </a:rPr>
-                        <a:t>ALBERTO ANDRES ANDRE - JOAO PESSOA / PB</a:t>
+                        <a:t>14</a:t>
                       </a:r>
                     </a:p>
                   </a:txBody>
@@ -5526,7 +5419,7 @@
                           </a:solidFill>
                           <a:latin typeface="Calibri"/>
                         </a:rPr>
-                        <a:t>JOAO PESSOA/PB</a:t>
+                        <a:t>14</a:t>
                       </a:r>
                     </a:p>
                   </a:txBody>
@@ -5549,7 +5442,7 @@
                           </a:solidFill>
                           <a:latin typeface="Calibri"/>
                         </a:rPr>
-                        <a:t>08/05/2026</a:t>
+                        <a:t>0</a:t>
                       </a:r>
                     </a:p>
                   </a:txBody>
@@ -5572,7 +5465,7 @@
                           </a:solidFill>
                           <a:latin typeface="Calibri"/>
                         </a:rPr>
-                        <a:t>ENTREGUE FORA DO PRAZO</a:t>
+                        <a:t>100.0%</a:t>
                       </a:r>
                     </a:p>
                   </a:txBody>
@@ -5582,22 +5475,45 @@
                     </a:solidFill>
                   </a:tcPr>
                 </a:tc>
+                <a:tc>
+                  <a:txBody>
+                    <a:bodyPr/>
+                    <a:lstStyle/>
+                    <a:p>
+                      <a:pPr algn="l"/>
+                      <a:r>
+                        <a:rPr sz="1000" b="0">
+                          <a:solidFill>
+                            <a:srgbClr val="1D1B43"/>
+                          </a:solidFill>
+                          <a:latin typeface="Calibri"/>
+                        </a:rPr>
+                        <a:t>Excelente</a:t>
+                      </a:r>
+                    </a:p>
+                  </a:txBody>
+                  <a:tcPr>
+                    <a:solidFill>
+                      <a:srgbClr val="FFFFFF"/>
+                    </a:solidFill>
+                  </a:tcPr>
+                </a:tc>
               </a:tr>
-              <a:tr h="384048">
-                <a:tc>
-                  <a:txBody>
-                    <a:bodyPr/>
-                    <a:lstStyle/>
-                    <a:p>
-                      <a:pPr algn="l"/>
-                      <a:r>
-                        <a:rPr sz="1000" b="0">
-                          <a:solidFill>
-                            <a:srgbClr val="1D1B43"/>
-                          </a:solidFill>
-                          <a:latin typeface="Calibri"/>
-                        </a:rPr>
-                        <a:t>280719</a:t>
+              <a:tr h="457200">
+                <a:tc>
+                  <a:txBody>
+                    <a:bodyPr/>
+                    <a:lstStyle/>
+                    <a:p>
+                      <a:pPr algn="l"/>
+                      <a:r>
+                        <a:rPr sz="1000" b="0">
+                          <a:solidFill>
+                            <a:srgbClr val="1D1B43"/>
+                          </a:solidFill>
+                          <a:latin typeface="Calibri"/>
+                        </a:rPr>
+                        <a:t>RJ</a:t>
                       </a:r>
                     </a:p>
                   </a:txBody>
@@ -5620,7 +5536,7 @@
                           </a:solidFill>
                           <a:latin typeface="Calibri"/>
                         </a:rPr>
-                        <a:t>PITINHO DE PALHA PRO - BRASILIA / DF</a:t>
+                        <a:t>6</a:t>
                       </a:r>
                     </a:p>
                   </a:txBody>
@@ -5643,7 +5559,7 @@
                           </a:solidFill>
                           <a:latin typeface="Calibri"/>
                         </a:rPr>
-                        <a:t>BRASILIA/DF</a:t>
+                        <a:t>6</a:t>
                       </a:r>
                     </a:p>
                   </a:txBody>
@@ -5666,7 +5582,7 @@
                           </a:solidFill>
                           <a:latin typeface="Calibri"/>
                         </a:rPr>
-                        <a:t>08/05/2026</a:t>
+                        <a:t>0</a:t>
                       </a:r>
                     </a:p>
                   </a:txBody>
@@ -5689,7 +5605,7 @@
                           </a:solidFill>
                           <a:latin typeface="Calibri"/>
                         </a:rPr>
-                        <a:t>FORA DO PRAZO</a:t>
+                        <a:t>100.0%</a:t>
                       </a:r>
                     </a:p>
                   </a:txBody>
@@ -5699,22 +5615,45 @@
                     </a:solidFill>
                   </a:tcPr>
                 </a:tc>
+                <a:tc>
+                  <a:txBody>
+                    <a:bodyPr/>
+                    <a:lstStyle/>
+                    <a:p>
+                      <a:pPr algn="l"/>
+                      <a:r>
+                        <a:rPr sz="1000" b="0">
+                          <a:solidFill>
+                            <a:srgbClr val="1D1B43"/>
+                          </a:solidFill>
+                          <a:latin typeface="Calibri"/>
+                        </a:rPr>
+                        <a:t>Excelente</a:t>
+                      </a:r>
+                    </a:p>
+                  </a:txBody>
+                  <a:tcPr>
+                    <a:solidFill>
+                      <a:srgbClr val="F2F2F2"/>
+                    </a:solidFill>
+                  </a:tcPr>
+                </a:tc>
               </a:tr>
-              <a:tr h="384048">
-                <a:tc>
-                  <a:txBody>
-                    <a:bodyPr/>
-                    <a:lstStyle/>
-                    <a:p>
-                      <a:pPr algn="l"/>
-                      <a:r>
-                        <a:rPr sz="1000" b="0">
-                          <a:solidFill>
-                            <a:srgbClr val="1D1B43"/>
-                          </a:solidFill>
-                          <a:latin typeface="Calibri"/>
-                        </a:rPr>
-                        <a:t>280721</a:t>
+              <a:tr h="457200">
+                <a:tc>
+                  <a:txBody>
+                    <a:bodyPr/>
+                    <a:lstStyle/>
+                    <a:p>
+                      <a:pPr algn="l"/>
+                      <a:r>
+                        <a:rPr sz="1000" b="0">
+                          <a:solidFill>
+                            <a:srgbClr val="1D1B43"/>
+                          </a:solidFill>
+                          <a:latin typeface="Calibri"/>
+                        </a:rPr>
+                        <a:t>SC</a:t>
                       </a:r>
                     </a:p>
                   </a:txBody>
@@ -5737,7 +5676,7 @@
                           </a:solidFill>
                           <a:latin typeface="Calibri"/>
                         </a:rPr>
-                        <a:t>TABACARIA HIJAZI - SAO LUIZ / MA</a:t>
+                        <a:t>6</a:t>
                       </a:r>
                     </a:p>
                   </a:txBody>
@@ -5760,7 +5699,7 @@
                           </a:solidFill>
                           <a:latin typeface="Calibri"/>
                         </a:rPr>
-                        <a:t>SAO LUIZ/MA</a:t>
+                        <a:t>6</a:t>
                       </a:r>
                     </a:p>
                   </a:txBody>
@@ -5783,7 +5722,7 @@
                           </a:solidFill>
                           <a:latin typeface="Calibri"/>
                         </a:rPr>
-                        <a:t>08/05/2026</a:t>
+                        <a:t>0</a:t>
                       </a:r>
                     </a:p>
                   </a:txBody>
@@ -5806,7 +5745,7 @@
                           </a:solidFill>
                           <a:latin typeface="Calibri"/>
                         </a:rPr>
-                        <a:t>ENTREGUE FORA DO PRAZO</a:t>
+                        <a:t>100.0%</a:t>
                       </a:r>
                     </a:p>
                   </a:txBody>
@@ -5816,22 +5755,45 @@
                     </a:solidFill>
                   </a:tcPr>
                 </a:tc>
+                <a:tc>
+                  <a:txBody>
+                    <a:bodyPr/>
+                    <a:lstStyle/>
+                    <a:p>
+                      <a:pPr algn="l"/>
+                      <a:r>
+                        <a:rPr sz="1000" b="0">
+                          <a:solidFill>
+                            <a:srgbClr val="1D1B43"/>
+                          </a:solidFill>
+                          <a:latin typeface="Calibri"/>
+                        </a:rPr>
+                        <a:t>Excelente</a:t>
+                      </a:r>
+                    </a:p>
+                  </a:txBody>
+                  <a:tcPr>
+                    <a:solidFill>
+                      <a:srgbClr val="FFFFFF"/>
+                    </a:solidFill>
+                  </a:tcPr>
+                </a:tc>
               </a:tr>
-              <a:tr h="384048">
-                <a:tc>
-                  <a:txBody>
-                    <a:bodyPr/>
-                    <a:lstStyle/>
-                    <a:p>
-                      <a:pPr algn="l"/>
-                      <a:r>
-                        <a:rPr sz="1000" b="0">
-                          <a:solidFill>
-                            <a:srgbClr val="1D1B43"/>
-                          </a:solidFill>
-                          <a:latin typeface="Calibri"/>
-                        </a:rPr>
-                        <a:t>282336</a:t>
+              <a:tr h="457200">
+                <a:tc>
+                  <a:txBody>
+                    <a:bodyPr/>
+                    <a:lstStyle/>
+                    <a:p>
+                      <a:pPr algn="l"/>
+                      <a:r>
+                        <a:rPr sz="1000" b="0">
+                          <a:solidFill>
+                            <a:srgbClr val="1D1B43"/>
+                          </a:solidFill>
+                          <a:latin typeface="Calibri"/>
+                        </a:rPr>
+                        <a:t>RS</a:t>
                       </a:r>
                     </a:p>
                   </a:txBody>
@@ -5854,7 +5816,7 @@
                           </a:solidFill>
                           <a:latin typeface="Calibri"/>
                         </a:rPr>
-                        <a:t>TABACARIA HIJAZI - SAO LUIZ / MA</a:t>
+                        <a:t>3</a:t>
                       </a:r>
                     </a:p>
                   </a:txBody>
@@ -5877,7 +5839,7 @@
                           </a:solidFill>
                           <a:latin typeface="Calibri"/>
                         </a:rPr>
-                        <a:t>SAO LUIZ/MA</a:t>
+                        <a:t>3</a:t>
                       </a:r>
                     </a:p>
                   </a:txBody>
@@ -5900,7 +5862,7 @@
                           </a:solidFill>
                           <a:latin typeface="Calibri"/>
                         </a:rPr>
-                        <a:t>19/05/2026</a:t>
+                        <a:t>0</a:t>
                       </a:r>
                     </a:p>
                   </a:txBody>
@@ -5923,7 +5885,590 @@
                           </a:solidFill>
                           <a:latin typeface="Calibri"/>
                         </a:rPr>
-                        <a:t>ENTREGUE FORA DO PRAZO</a:t>
+                        <a:t>100.0%</a:t>
+                      </a:r>
+                    </a:p>
+                  </a:txBody>
+                  <a:tcPr>
+                    <a:solidFill>
+                      <a:srgbClr val="F2F2F2"/>
+                    </a:solidFill>
+                  </a:tcPr>
+                </a:tc>
+                <a:tc>
+                  <a:txBody>
+                    <a:bodyPr/>
+                    <a:lstStyle/>
+                    <a:p>
+                      <a:pPr algn="l"/>
+                      <a:r>
+                        <a:rPr sz="1000" b="0">
+                          <a:solidFill>
+                            <a:srgbClr val="1D1B43"/>
+                          </a:solidFill>
+                          <a:latin typeface="Calibri"/>
+                        </a:rPr>
+                        <a:t>Excelente</a:t>
+                      </a:r>
+                    </a:p>
+                  </a:txBody>
+                  <a:tcPr>
+                    <a:solidFill>
+                      <a:srgbClr val="F2F2F2"/>
+                    </a:solidFill>
+                  </a:tcPr>
+                </a:tc>
+              </a:tr>
+              <a:tr h="457200">
+                <a:tc>
+                  <a:txBody>
+                    <a:bodyPr/>
+                    <a:lstStyle/>
+                    <a:p>
+                      <a:pPr algn="l"/>
+                      <a:r>
+                        <a:rPr sz="1000" b="0">
+                          <a:solidFill>
+                            <a:srgbClr val="1D1B43"/>
+                          </a:solidFill>
+                          <a:latin typeface="Calibri"/>
+                        </a:rPr>
+                        <a:t>GO</a:t>
+                      </a:r>
+                    </a:p>
+                  </a:txBody>
+                  <a:tcPr>
+                    <a:solidFill>
+                      <a:srgbClr val="FFFFFF"/>
+                    </a:solidFill>
+                  </a:tcPr>
+                </a:tc>
+                <a:tc>
+                  <a:txBody>
+                    <a:bodyPr/>
+                    <a:lstStyle/>
+                    <a:p>
+                      <a:pPr algn="l"/>
+                      <a:r>
+                        <a:rPr sz="1000" b="0">
+                          <a:solidFill>
+                            <a:srgbClr val="1D1B43"/>
+                          </a:solidFill>
+                          <a:latin typeface="Calibri"/>
+                        </a:rPr>
+                        <a:t>2</a:t>
+                      </a:r>
+                    </a:p>
+                  </a:txBody>
+                  <a:tcPr>
+                    <a:solidFill>
+                      <a:srgbClr val="FFFFFF"/>
+                    </a:solidFill>
+                  </a:tcPr>
+                </a:tc>
+                <a:tc>
+                  <a:txBody>
+                    <a:bodyPr/>
+                    <a:lstStyle/>
+                    <a:p>
+                      <a:pPr algn="l"/>
+                      <a:r>
+                        <a:rPr sz="1000" b="0">
+                          <a:solidFill>
+                            <a:srgbClr val="1D1B43"/>
+                          </a:solidFill>
+                          <a:latin typeface="Calibri"/>
+                        </a:rPr>
+                        <a:t>2</a:t>
+                      </a:r>
+                    </a:p>
+                  </a:txBody>
+                  <a:tcPr>
+                    <a:solidFill>
+                      <a:srgbClr val="FFFFFF"/>
+                    </a:solidFill>
+                  </a:tcPr>
+                </a:tc>
+                <a:tc>
+                  <a:txBody>
+                    <a:bodyPr/>
+                    <a:lstStyle/>
+                    <a:p>
+                      <a:pPr algn="l"/>
+                      <a:r>
+                        <a:rPr sz="1000" b="0">
+                          <a:solidFill>
+                            <a:srgbClr val="1D1B43"/>
+                          </a:solidFill>
+                          <a:latin typeface="Calibri"/>
+                        </a:rPr>
+                        <a:t>0</a:t>
+                      </a:r>
+                    </a:p>
+                  </a:txBody>
+                  <a:tcPr>
+                    <a:solidFill>
+                      <a:srgbClr val="FFFFFF"/>
+                    </a:solidFill>
+                  </a:tcPr>
+                </a:tc>
+                <a:tc>
+                  <a:txBody>
+                    <a:bodyPr/>
+                    <a:lstStyle/>
+                    <a:p>
+                      <a:pPr algn="l"/>
+                      <a:r>
+                        <a:rPr sz="1000" b="0">
+                          <a:solidFill>
+                            <a:srgbClr val="1D1B43"/>
+                          </a:solidFill>
+                          <a:latin typeface="Calibri"/>
+                        </a:rPr>
+                        <a:t>100.0%</a:t>
+                      </a:r>
+                    </a:p>
+                  </a:txBody>
+                  <a:tcPr>
+                    <a:solidFill>
+                      <a:srgbClr val="FFFFFF"/>
+                    </a:solidFill>
+                  </a:tcPr>
+                </a:tc>
+                <a:tc>
+                  <a:txBody>
+                    <a:bodyPr/>
+                    <a:lstStyle/>
+                    <a:p>
+                      <a:pPr algn="l"/>
+                      <a:r>
+                        <a:rPr sz="1000" b="0">
+                          <a:solidFill>
+                            <a:srgbClr val="1D1B43"/>
+                          </a:solidFill>
+                          <a:latin typeface="Calibri"/>
+                        </a:rPr>
+                        <a:t>Excelente</a:t>
+                      </a:r>
+                    </a:p>
+                  </a:txBody>
+                  <a:tcPr>
+                    <a:solidFill>
+                      <a:srgbClr val="FFFFFF"/>
+                    </a:solidFill>
+                  </a:tcPr>
+                </a:tc>
+              </a:tr>
+              <a:tr h="457200">
+                <a:tc>
+                  <a:txBody>
+                    <a:bodyPr/>
+                    <a:lstStyle/>
+                    <a:p>
+                      <a:pPr algn="l"/>
+                      <a:r>
+                        <a:rPr sz="1000" b="0">
+                          <a:solidFill>
+                            <a:srgbClr val="1D1B43"/>
+                          </a:solidFill>
+                          <a:latin typeface="Calibri"/>
+                        </a:rPr>
+                        <a:t>PE</a:t>
+                      </a:r>
+                    </a:p>
+                  </a:txBody>
+                  <a:tcPr>
+                    <a:solidFill>
+                      <a:srgbClr val="F2F2F2"/>
+                    </a:solidFill>
+                  </a:tcPr>
+                </a:tc>
+                <a:tc>
+                  <a:txBody>
+                    <a:bodyPr/>
+                    <a:lstStyle/>
+                    <a:p>
+                      <a:pPr algn="l"/>
+                      <a:r>
+                        <a:rPr sz="1000" b="0">
+                          <a:solidFill>
+                            <a:srgbClr val="1D1B43"/>
+                          </a:solidFill>
+                          <a:latin typeface="Calibri"/>
+                        </a:rPr>
+                        <a:t>1</a:t>
+                      </a:r>
+                    </a:p>
+                  </a:txBody>
+                  <a:tcPr>
+                    <a:solidFill>
+                      <a:srgbClr val="F2F2F2"/>
+                    </a:solidFill>
+                  </a:tcPr>
+                </a:tc>
+                <a:tc>
+                  <a:txBody>
+                    <a:bodyPr/>
+                    <a:lstStyle/>
+                    <a:p>
+                      <a:pPr algn="l"/>
+                      <a:r>
+                        <a:rPr sz="1000" b="0">
+                          <a:solidFill>
+                            <a:srgbClr val="1D1B43"/>
+                          </a:solidFill>
+                          <a:latin typeface="Calibri"/>
+                        </a:rPr>
+                        <a:t>1</a:t>
+                      </a:r>
+                    </a:p>
+                  </a:txBody>
+                  <a:tcPr>
+                    <a:solidFill>
+                      <a:srgbClr val="F2F2F2"/>
+                    </a:solidFill>
+                  </a:tcPr>
+                </a:tc>
+                <a:tc>
+                  <a:txBody>
+                    <a:bodyPr/>
+                    <a:lstStyle/>
+                    <a:p>
+                      <a:pPr algn="l"/>
+                      <a:r>
+                        <a:rPr sz="1000" b="0">
+                          <a:solidFill>
+                            <a:srgbClr val="1D1B43"/>
+                          </a:solidFill>
+                          <a:latin typeface="Calibri"/>
+                        </a:rPr>
+                        <a:t>0</a:t>
+                      </a:r>
+                    </a:p>
+                  </a:txBody>
+                  <a:tcPr>
+                    <a:solidFill>
+                      <a:srgbClr val="F2F2F2"/>
+                    </a:solidFill>
+                  </a:tcPr>
+                </a:tc>
+                <a:tc>
+                  <a:txBody>
+                    <a:bodyPr/>
+                    <a:lstStyle/>
+                    <a:p>
+                      <a:pPr algn="l"/>
+                      <a:r>
+                        <a:rPr sz="1000" b="0">
+                          <a:solidFill>
+                            <a:srgbClr val="1D1B43"/>
+                          </a:solidFill>
+                          <a:latin typeface="Calibri"/>
+                        </a:rPr>
+                        <a:t>100.0%</a:t>
+                      </a:r>
+                    </a:p>
+                  </a:txBody>
+                  <a:tcPr>
+                    <a:solidFill>
+                      <a:srgbClr val="F2F2F2"/>
+                    </a:solidFill>
+                  </a:tcPr>
+                </a:tc>
+                <a:tc>
+                  <a:txBody>
+                    <a:bodyPr/>
+                    <a:lstStyle/>
+                    <a:p>
+                      <a:pPr algn="l"/>
+                      <a:r>
+                        <a:rPr sz="1000" b="0">
+                          <a:solidFill>
+                            <a:srgbClr val="1D1B43"/>
+                          </a:solidFill>
+                          <a:latin typeface="Calibri"/>
+                        </a:rPr>
+                        <a:t>Excelente</a:t>
+                      </a:r>
+                    </a:p>
+                  </a:txBody>
+                  <a:tcPr>
+                    <a:solidFill>
+                      <a:srgbClr val="F2F2F2"/>
+                    </a:solidFill>
+                  </a:tcPr>
+                </a:tc>
+              </a:tr>
+              <a:tr h="457200">
+                <a:tc>
+                  <a:txBody>
+                    <a:bodyPr/>
+                    <a:lstStyle/>
+                    <a:p>
+                      <a:pPr algn="l"/>
+                      <a:r>
+                        <a:rPr sz="1000" b="0">
+                          <a:solidFill>
+                            <a:srgbClr val="1D1B43"/>
+                          </a:solidFill>
+                          <a:latin typeface="Calibri"/>
+                        </a:rPr>
+                        <a:t>BA</a:t>
+                      </a:r>
+                    </a:p>
+                  </a:txBody>
+                  <a:tcPr>
+                    <a:solidFill>
+                      <a:srgbClr val="FFFFFF"/>
+                    </a:solidFill>
+                  </a:tcPr>
+                </a:tc>
+                <a:tc>
+                  <a:txBody>
+                    <a:bodyPr/>
+                    <a:lstStyle/>
+                    <a:p>
+                      <a:pPr algn="l"/>
+                      <a:r>
+                        <a:rPr sz="1000" b="0">
+                          <a:solidFill>
+                            <a:srgbClr val="1D1B43"/>
+                          </a:solidFill>
+                          <a:latin typeface="Calibri"/>
+                        </a:rPr>
+                        <a:t>1</a:t>
+                      </a:r>
+                    </a:p>
+                  </a:txBody>
+                  <a:tcPr>
+                    <a:solidFill>
+                      <a:srgbClr val="FFFFFF"/>
+                    </a:solidFill>
+                  </a:tcPr>
+                </a:tc>
+                <a:tc>
+                  <a:txBody>
+                    <a:bodyPr/>
+                    <a:lstStyle/>
+                    <a:p>
+                      <a:pPr algn="l"/>
+                      <a:r>
+                        <a:rPr sz="1000" b="0">
+                          <a:solidFill>
+                            <a:srgbClr val="1D1B43"/>
+                          </a:solidFill>
+                          <a:latin typeface="Calibri"/>
+                        </a:rPr>
+                        <a:t>1</a:t>
+                      </a:r>
+                    </a:p>
+                  </a:txBody>
+                  <a:tcPr>
+                    <a:solidFill>
+                      <a:srgbClr val="FFFFFF"/>
+                    </a:solidFill>
+                  </a:tcPr>
+                </a:tc>
+                <a:tc>
+                  <a:txBody>
+                    <a:bodyPr/>
+                    <a:lstStyle/>
+                    <a:p>
+                      <a:pPr algn="l"/>
+                      <a:r>
+                        <a:rPr sz="1000" b="0">
+                          <a:solidFill>
+                            <a:srgbClr val="1D1B43"/>
+                          </a:solidFill>
+                          <a:latin typeface="Calibri"/>
+                        </a:rPr>
+                        <a:t>0</a:t>
+                      </a:r>
+                    </a:p>
+                  </a:txBody>
+                  <a:tcPr>
+                    <a:solidFill>
+                      <a:srgbClr val="FFFFFF"/>
+                    </a:solidFill>
+                  </a:tcPr>
+                </a:tc>
+                <a:tc>
+                  <a:txBody>
+                    <a:bodyPr/>
+                    <a:lstStyle/>
+                    <a:p>
+                      <a:pPr algn="l"/>
+                      <a:r>
+                        <a:rPr sz="1000" b="0">
+                          <a:solidFill>
+                            <a:srgbClr val="1D1B43"/>
+                          </a:solidFill>
+                          <a:latin typeface="Calibri"/>
+                        </a:rPr>
+                        <a:t>100.0%</a:t>
+                      </a:r>
+                    </a:p>
+                  </a:txBody>
+                  <a:tcPr>
+                    <a:solidFill>
+                      <a:srgbClr val="FFFFFF"/>
+                    </a:solidFill>
+                  </a:tcPr>
+                </a:tc>
+                <a:tc>
+                  <a:txBody>
+                    <a:bodyPr/>
+                    <a:lstStyle/>
+                    <a:p>
+                      <a:pPr algn="l"/>
+                      <a:r>
+                        <a:rPr sz="1000" b="0">
+                          <a:solidFill>
+                            <a:srgbClr val="1D1B43"/>
+                          </a:solidFill>
+                          <a:latin typeface="Calibri"/>
+                        </a:rPr>
+                        <a:t>Excelente</a:t>
+                      </a:r>
+                    </a:p>
+                  </a:txBody>
+                  <a:tcPr>
+                    <a:solidFill>
+                      <a:srgbClr val="FFFFFF"/>
+                    </a:solidFill>
+                  </a:tcPr>
+                </a:tc>
+              </a:tr>
+              <a:tr h="457200">
+                <a:tc>
+                  <a:txBody>
+                    <a:bodyPr/>
+                    <a:lstStyle/>
+                    <a:p>
+                      <a:pPr algn="l"/>
+                      <a:r>
+                        <a:rPr sz="1000" b="0">
+                          <a:solidFill>
+                            <a:srgbClr val="1D1B43"/>
+                          </a:solidFill>
+                          <a:latin typeface="Calibri"/>
+                        </a:rPr>
+                        <a:t>DF</a:t>
+                      </a:r>
+                    </a:p>
+                  </a:txBody>
+                  <a:tcPr>
+                    <a:solidFill>
+                      <a:srgbClr val="F2F2F2"/>
+                    </a:solidFill>
+                  </a:tcPr>
+                </a:tc>
+                <a:tc>
+                  <a:txBody>
+                    <a:bodyPr/>
+                    <a:lstStyle/>
+                    <a:p>
+                      <a:pPr algn="l"/>
+                      <a:r>
+                        <a:rPr sz="1000" b="0">
+                          <a:solidFill>
+                            <a:srgbClr val="1D1B43"/>
+                          </a:solidFill>
+                          <a:latin typeface="Calibri"/>
+                        </a:rPr>
+                        <a:t>1</a:t>
+                      </a:r>
+                    </a:p>
+                  </a:txBody>
+                  <a:tcPr>
+                    <a:solidFill>
+                      <a:srgbClr val="F2F2F2"/>
+                    </a:solidFill>
+                  </a:tcPr>
+                </a:tc>
+                <a:tc>
+                  <a:txBody>
+                    <a:bodyPr/>
+                    <a:lstStyle/>
+                    <a:p>
+                      <a:pPr algn="l"/>
+                      <a:r>
+                        <a:rPr sz="1000" b="0">
+                          <a:solidFill>
+                            <a:srgbClr val="1D1B43"/>
+                          </a:solidFill>
+                          <a:latin typeface="Calibri"/>
+                        </a:rPr>
+                        <a:t>1</a:t>
+                      </a:r>
+                    </a:p>
+                  </a:txBody>
+                  <a:tcPr>
+                    <a:solidFill>
+                      <a:srgbClr val="F2F2F2"/>
+                    </a:solidFill>
+                  </a:tcPr>
+                </a:tc>
+                <a:tc>
+                  <a:txBody>
+                    <a:bodyPr/>
+                    <a:lstStyle/>
+                    <a:p>
+                      <a:pPr algn="l"/>
+                      <a:r>
+                        <a:rPr sz="1000" b="0">
+                          <a:solidFill>
+                            <a:srgbClr val="1D1B43"/>
+                          </a:solidFill>
+                          <a:latin typeface="Calibri"/>
+                        </a:rPr>
+                        <a:t>0</a:t>
+                      </a:r>
+                    </a:p>
+                  </a:txBody>
+                  <a:tcPr>
+                    <a:solidFill>
+                      <a:srgbClr val="F2F2F2"/>
+                    </a:solidFill>
+                  </a:tcPr>
+                </a:tc>
+                <a:tc>
+                  <a:txBody>
+                    <a:bodyPr/>
+                    <a:lstStyle/>
+                    <a:p>
+                      <a:pPr algn="l"/>
+                      <a:r>
+                        <a:rPr sz="1000" b="0">
+                          <a:solidFill>
+                            <a:srgbClr val="1D1B43"/>
+                          </a:solidFill>
+                          <a:latin typeface="Calibri"/>
+                        </a:rPr>
+                        <a:t>100.0%</a:t>
+                      </a:r>
+                    </a:p>
+                  </a:txBody>
+                  <a:tcPr>
+                    <a:solidFill>
+                      <a:srgbClr val="F2F2F2"/>
+                    </a:solidFill>
+                  </a:tcPr>
+                </a:tc>
+                <a:tc>
+                  <a:txBody>
+                    <a:bodyPr/>
+                    <a:lstStyle/>
+                    <a:p>
+                      <a:pPr algn="l"/>
+                      <a:r>
+                        <a:rPr sz="1000" b="0">
+                          <a:solidFill>
+                            <a:srgbClr val="1D1B43"/>
+                          </a:solidFill>
+                          <a:latin typeface="Calibri"/>
+                        </a:rPr>
+                        <a:t>Excelente</a:t>
                       </a:r>
                     </a:p>
                   </a:txBody>
@@ -5997,1704 +6542,6 @@
         <p:spPr>
           <a:xfrm>
             <a:off x="749808" y="502920"/>
-            <a:ext cx="9144000" cy="914400"/>
-          </a:xfrm>
-          <a:prstGeom prst="rect">
-            <a:avLst/>
-          </a:prstGeom>
-          <a:noFill/>
-        </p:spPr>
-        <p:txBody>
-          <a:bodyPr wrap="square">
-            <a:spAutoFit/>
-          </a:bodyPr>
-          <a:lstStyle/>
-          <a:p>
-            <a:pPr algn="l"/>
-            <a:r>
-              <a:rPr sz="4000" b="1">
-                <a:solidFill>
-                  <a:srgbClr val="F97316"/>
-                </a:solidFill>
-                <a:latin typeface="Calibri"/>
-              </a:rPr>
-              <a:t>PERFORMANCE POR UF</a:t>
-            </a:r>
-          </a:p>
-        </p:txBody>
-      </p:sp>
-      <p:sp>
-        <p:nvSpPr>
-          <p:cNvPr id="4" name="Rectangle 3"/>
-          <p:cNvSpPr/>
-          <p:nvPr/>
-        </p:nvSpPr>
-        <p:spPr>
-          <a:xfrm>
-            <a:off x="749808" y="1719072"/>
-            <a:ext cx="10424160" cy="36576"/>
-          </a:xfrm>
-          <a:prstGeom prst="rect">
-            <a:avLst/>
-          </a:prstGeom>
-          <a:solidFill>
-            <a:srgbClr val="F97316"/>
-          </a:solidFill>
-          <a:ln>
-            <a:noFill/>
-          </a:ln>
-        </p:spPr>
-        <p:style>
-          <a:lnRef idx="1">
-            <a:schemeClr val="accent1"/>
-          </a:lnRef>
-          <a:fillRef idx="3">
-            <a:schemeClr val="accent1"/>
-          </a:fillRef>
-          <a:effectRef idx="2">
-            <a:schemeClr val="accent1"/>
-          </a:effectRef>
-          <a:fontRef idx="minor">
-            <a:schemeClr val="lt1"/>
-          </a:fontRef>
-        </p:style>
-        <p:txBody>
-          <a:bodyPr rtlCol="0" anchor="ctr"/>
-          <a:lstStyle/>
-          <a:p>
-            <a:pPr algn="ctr"/>
-          </a:p>
-        </p:txBody>
-      </p:sp>
-      <p:graphicFrame>
-        <p:nvGraphicFramePr>
-          <p:cNvPr id="5" name="Table 4"/>
-          <p:cNvGraphicFramePr>
-            <a:graphicFrameLocks noGrp="1"/>
-          </p:cNvGraphicFramePr>
-          <p:nvPr/>
-        </p:nvGraphicFramePr>
-        <p:xfrm>
-          <a:off x="731520" y="1920240"/>
-          <a:ext cx="10698480" cy="4389110"/>
-        </p:xfrm>
-        <a:graphic>
-          <a:graphicData uri="http://schemas.openxmlformats.org/drawingml/2006/table">
-            <a:tbl>
-              <a:tblPr firstRow="1" bandRow="1">
-                <a:tableStyleId>{5C22544A-7EE6-4342-B048-85BDC9FD1C3A}</a:tableStyleId>
-              </a:tblPr>
-              <a:tblGrid>
-                <a:gridCol w="1097280"/>
-                <a:gridCol w="1645920"/>
-                <a:gridCol w="1645920"/>
-                <a:gridCol w="1645920"/>
-                <a:gridCol w="1554480"/>
-                <a:gridCol w="3108960"/>
-              </a:tblGrid>
-              <a:tr h="399010">
-                <a:tc>
-                  <a:txBody>
-                    <a:bodyPr/>
-                    <a:lstStyle/>
-                    <a:p>
-                      <a:pPr algn="ctr"/>
-                      <a:r>
-                        <a:rPr sz="1100" b="1">
-                          <a:solidFill>
-                            <a:srgbClr val="FFFFFF"/>
-                          </a:solidFill>
-                          <a:latin typeface="Calibri"/>
-                        </a:rPr>
-                        <a:t>UF</a:t>
-                      </a:r>
-                    </a:p>
-                  </a:txBody>
-                  <a:tcPr>
-                    <a:solidFill>
-                      <a:srgbClr val="1D1B43"/>
-                    </a:solidFill>
-                  </a:tcPr>
-                </a:tc>
-                <a:tc>
-                  <a:txBody>
-                    <a:bodyPr/>
-                    <a:lstStyle/>
-                    <a:p>
-                      <a:pPr algn="ctr"/>
-                      <a:r>
-                        <a:rPr sz="1100" b="1">
-                          <a:solidFill>
-                            <a:srgbClr val="FFFFFF"/>
-                          </a:solidFill>
-                          <a:latin typeface="Calibri"/>
-                        </a:rPr>
-                        <a:t>TOTAL</a:t>
-                      </a:r>
-                    </a:p>
-                  </a:txBody>
-                  <a:tcPr>
-                    <a:solidFill>
-                      <a:srgbClr val="1D1B43"/>
-                    </a:solidFill>
-                  </a:tcPr>
-                </a:tc>
-                <a:tc>
-                  <a:txBody>
-                    <a:bodyPr/>
-                    <a:lstStyle/>
-                    <a:p>
-                      <a:pPr algn="ctr"/>
-                      <a:r>
-                        <a:rPr sz="1100" b="1">
-                          <a:solidFill>
-                            <a:srgbClr val="FFFFFF"/>
-                          </a:solidFill>
-                          <a:latin typeface="Calibri"/>
-                        </a:rPr>
-                        <a:t>NO PRAZO</a:t>
-                      </a:r>
-                    </a:p>
-                  </a:txBody>
-                  <a:tcPr>
-                    <a:solidFill>
-                      <a:srgbClr val="1D1B43"/>
-                    </a:solidFill>
-                  </a:tcPr>
-                </a:tc>
-                <a:tc>
-                  <a:txBody>
-                    <a:bodyPr/>
-                    <a:lstStyle/>
-                    <a:p>
-                      <a:pPr algn="ctr"/>
-                      <a:r>
-                        <a:rPr sz="1100" b="1">
-                          <a:solidFill>
-                            <a:srgbClr val="FFFFFF"/>
-                          </a:solidFill>
-                          <a:latin typeface="Calibri"/>
-                        </a:rPr>
-                        <a:t>FORA</a:t>
-                      </a:r>
-                    </a:p>
-                  </a:txBody>
-                  <a:tcPr>
-                    <a:solidFill>
-                      <a:srgbClr val="1D1B43"/>
-                    </a:solidFill>
-                  </a:tcPr>
-                </a:tc>
-                <a:tc>
-                  <a:txBody>
-                    <a:bodyPr/>
-                    <a:lstStyle/>
-                    <a:p>
-                      <a:pPr algn="ctr"/>
-                      <a:r>
-                        <a:rPr sz="1100" b="1">
-                          <a:solidFill>
-                            <a:srgbClr val="FFFFFF"/>
-                          </a:solidFill>
-                          <a:latin typeface="Calibri"/>
-                        </a:rPr>
-                        <a:t>TAXA</a:t>
-                      </a:r>
-                    </a:p>
-                  </a:txBody>
-                  <a:tcPr>
-                    <a:solidFill>
-                      <a:srgbClr val="1D1B43"/>
-                    </a:solidFill>
-                  </a:tcPr>
-                </a:tc>
-                <a:tc>
-                  <a:txBody>
-                    <a:bodyPr/>
-                    <a:lstStyle/>
-                    <a:p>
-                      <a:pPr algn="ctr"/>
-                      <a:r>
-                        <a:rPr sz="1100" b="1">
-                          <a:solidFill>
-                            <a:srgbClr val="FFFFFF"/>
-                          </a:solidFill>
-                          <a:latin typeface="Calibri"/>
-                        </a:rPr>
-                        <a:t>STATUS</a:t>
-                      </a:r>
-                    </a:p>
-                  </a:txBody>
-                  <a:tcPr>
-                    <a:solidFill>
-                      <a:srgbClr val="1D1B43"/>
-                    </a:solidFill>
-                  </a:tcPr>
-                </a:tc>
-              </a:tr>
-              <a:tr h="399010">
-                <a:tc>
-                  <a:txBody>
-                    <a:bodyPr/>
-                    <a:lstStyle/>
-                    <a:p>
-                      <a:pPr algn="l"/>
-                      <a:r>
-                        <a:rPr sz="1000" b="0">
-                          <a:solidFill>
-                            <a:srgbClr val="1D1B43"/>
-                          </a:solidFill>
-                          <a:latin typeface="Calibri"/>
-                        </a:rPr>
-                        <a:t>SP</a:t>
-                      </a:r>
-                    </a:p>
-                  </a:txBody>
-                  <a:tcPr>
-                    <a:solidFill>
-                      <a:srgbClr val="FFFFFF"/>
-                    </a:solidFill>
-                  </a:tcPr>
-                </a:tc>
-                <a:tc>
-                  <a:txBody>
-                    <a:bodyPr/>
-                    <a:lstStyle/>
-                    <a:p>
-                      <a:pPr algn="l"/>
-                      <a:r>
-                        <a:rPr sz="1000" b="0">
-                          <a:solidFill>
-                            <a:srgbClr val="1D1B43"/>
-                          </a:solidFill>
-                          <a:latin typeface="Calibri"/>
-                        </a:rPr>
-                        <a:t>16</a:t>
-                      </a:r>
-                    </a:p>
-                  </a:txBody>
-                  <a:tcPr>
-                    <a:solidFill>
-                      <a:srgbClr val="FFFFFF"/>
-                    </a:solidFill>
-                  </a:tcPr>
-                </a:tc>
-                <a:tc>
-                  <a:txBody>
-                    <a:bodyPr/>
-                    <a:lstStyle/>
-                    <a:p>
-                      <a:pPr algn="l"/>
-                      <a:r>
-                        <a:rPr sz="1000" b="0">
-                          <a:solidFill>
-                            <a:srgbClr val="1D1B43"/>
-                          </a:solidFill>
-                          <a:latin typeface="Calibri"/>
-                        </a:rPr>
-                        <a:t>16</a:t>
-                      </a:r>
-                    </a:p>
-                  </a:txBody>
-                  <a:tcPr>
-                    <a:solidFill>
-                      <a:srgbClr val="FFFFFF"/>
-                    </a:solidFill>
-                  </a:tcPr>
-                </a:tc>
-                <a:tc>
-                  <a:txBody>
-                    <a:bodyPr/>
-                    <a:lstStyle/>
-                    <a:p>
-                      <a:pPr algn="l"/>
-                      <a:r>
-                        <a:rPr sz="1000" b="0">
-                          <a:solidFill>
-                            <a:srgbClr val="1D1B43"/>
-                          </a:solidFill>
-                          <a:latin typeface="Calibri"/>
-                        </a:rPr>
-                        <a:t>0</a:t>
-                      </a:r>
-                    </a:p>
-                  </a:txBody>
-                  <a:tcPr>
-                    <a:solidFill>
-                      <a:srgbClr val="FFFFFF"/>
-                    </a:solidFill>
-                  </a:tcPr>
-                </a:tc>
-                <a:tc>
-                  <a:txBody>
-                    <a:bodyPr/>
-                    <a:lstStyle/>
-                    <a:p>
-                      <a:pPr algn="l"/>
-                      <a:r>
-                        <a:rPr sz="1000" b="0">
-                          <a:solidFill>
-                            <a:srgbClr val="1D1B43"/>
-                          </a:solidFill>
-                          <a:latin typeface="Calibri"/>
-                        </a:rPr>
-                        <a:t>100.0%</a:t>
-                      </a:r>
-                    </a:p>
-                  </a:txBody>
-                  <a:tcPr>
-                    <a:solidFill>
-                      <a:srgbClr val="FFFFFF"/>
-                    </a:solidFill>
-                  </a:tcPr>
-                </a:tc>
-                <a:tc>
-                  <a:txBody>
-                    <a:bodyPr/>
-                    <a:lstStyle/>
-                    <a:p>
-                      <a:pPr algn="l"/>
-                      <a:r>
-                        <a:rPr sz="1000" b="0">
-                          <a:solidFill>
-                            <a:srgbClr val="1D1B43"/>
-                          </a:solidFill>
-                          <a:latin typeface="Calibri"/>
-                        </a:rPr>
-                        <a:t>Excelente</a:t>
-                      </a:r>
-                    </a:p>
-                  </a:txBody>
-                  <a:tcPr>
-                    <a:solidFill>
-                      <a:srgbClr val="FFFFFF"/>
-                    </a:solidFill>
-                  </a:tcPr>
-                </a:tc>
-              </a:tr>
-              <a:tr h="399010">
-                <a:tc>
-                  <a:txBody>
-                    <a:bodyPr/>
-                    <a:lstStyle/>
-                    <a:p>
-                      <a:pPr algn="l"/>
-                      <a:r>
-                        <a:rPr sz="1000" b="0">
-                          <a:solidFill>
-                            <a:srgbClr val="1D1B43"/>
-                          </a:solidFill>
-                          <a:latin typeface="Calibri"/>
-                        </a:rPr>
-                        <a:t>RJ</a:t>
-                      </a:r>
-                    </a:p>
-                  </a:txBody>
-                  <a:tcPr>
-                    <a:solidFill>
-                      <a:srgbClr val="F2F2F2"/>
-                    </a:solidFill>
-                  </a:tcPr>
-                </a:tc>
-                <a:tc>
-                  <a:txBody>
-                    <a:bodyPr/>
-                    <a:lstStyle/>
-                    <a:p>
-                      <a:pPr algn="l"/>
-                      <a:r>
-                        <a:rPr sz="1000" b="0">
-                          <a:solidFill>
-                            <a:srgbClr val="1D1B43"/>
-                          </a:solidFill>
-                          <a:latin typeface="Calibri"/>
-                        </a:rPr>
-                        <a:t>6</a:t>
-                      </a:r>
-                    </a:p>
-                  </a:txBody>
-                  <a:tcPr>
-                    <a:solidFill>
-                      <a:srgbClr val="F2F2F2"/>
-                    </a:solidFill>
-                  </a:tcPr>
-                </a:tc>
-                <a:tc>
-                  <a:txBody>
-                    <a:bodyPr/>
-                    <a:lstStyle/>
-                    <a:p>
-                      <a:pPr algn="l"/>
-                      <a:r>
-                        <a:rPr sz="1000" b="0">
-                          <a:solidFill>
-                            <a:srgbClr val="1D1B43"/>
-                          </a:solidFill>
-                          <a:latin typeface="Calibri"/>
-                        </a:rPr>
-                        <a:t>6</a:t>
-                      </a:r>
-                    </a:p>
-                  </a:txBody>
-                  <a:tcPr>
-                    <a:solidFill>
-                      <a:srgbClr val="F2F2F2"/>
-                    </a:solidFill>
-                  </a:tcPr>
-                </a:tc>
-                <a:tc>
-                  <a:txBody>
-                    <a:bodyPr/>
-                    <a:lstStyle/>
-                    <a:p>
-                      <a:pPr algn="l"/>
-                      <a:r>
-                        <a:rPr sz="1000" b="0">
-                          <a:solidFill>
-                            <a:srgbClr val="1D1B43"/>
-                          </a:solidFill>
-                          <a:latin typeface="Calibri"/>
-                        </a:rPr>
-                        <a:t>0</a:t>
-                      </a:r>
-                    </a:p>
-                  </a:txBody>
-                  <a:tcPr>
-                    <a:solidFill>
-                      <a:srgbClr val="F2F2F2"/>
-                    </a:solidFill>
-                  </a:tcPr>
-                </a:tc>
-                <a:tc>
-                  <a:txBody>
-                    <a:bodyPr/>
-                    <a:lstStyle/>
-                    <a:p>
-                      <a:pPr algn="l"/>
-                      <a:r>
-                        <a:rPr sz="1000" b="0">
-                          <a:solidFill>
-                            <a:srgbClr val="1D1B43"/>
-                          </a:solidFill>
-                          <a:latin typeface="Calibri"/>
-                        </a:rPr>
-                        <a:t>100.0%</a:t>
-                      </a:r>
-                    </a:p>
-                  </a:txBody>
-                  <a:tcPr>
-                    <a:solidFill>
-                      <a:srgbClr val="F2F2F2"/>
-                    </a:solidFill>
-                  </a:tcPr>
-                </a:tc>
-                <a:tc>
-                  <a:txBody>
-                    <a:bodyPr/>
-                    <a:lstStyle/>
-                    <a:p>
-                      <a:pPr algn="l"/>
-                      <a:r>
-                        <a:rPr sz="1000" b="0">
-                          <a:solidFill>
-                            <a:srgbClr val="1D1B43"/>
-                          </a:solidFill>
-                          <a:latin typeface="Calibri"/>
-                        </a:rPr>
-                        <a:t>Excelente</a:t>
-                      </a:r>
-                    </a:p>
-                  </a:txBody>
-                  <a:tcPr>
-                    <a:solidFill>
-                      <a:srgbClr val="F2F2F2"/>
-                    </a:solidFill>
-                  </a:tcPr>
-                </a:tc>
-              </a:tr>
-              <a:tr h="399010">
-                <a:tc>
-                  <a:txBody>
-                    <a:bodyPr/>
-                    <a:lstStyle/>
-                    <a:p>
-                      <a:pPr algn="l"/>
-                      <a:r>
-                        <a:rPr sz="1000" b="0">
-                          <a:solidFill>
-                            <a:srgbClr val="1D1B43"/>
-                          </a:solidFill>
-                          <a:latin typeface="Calibri"/>
-                        </a:rPr>
-                        <a:t>RS</a:t>
-                      </a:r>
-                    </a:p>
-                  </a:txBody>
-                  <a:tcPr>
-                    <a:solidFill>
-                      <a:srgbClr val="FFFFFF"/>
-                    </a:solidFill>
-                  </a:tcPr>
-                </a:tc>
-                <a:tc>
-                  <a:txBody>
-                    <a:bodyPr/>
-                    <a:lstStyle/>
-                    <a:p>
-                      <a:pPr algn="l"/>
-                      <a:r>
-                        <a:rPr sz="1000" b="0">
-                          <a:solidFill>
-                            <a:srgbClr val="1D1B43"/>
-                          </a:solidFill>
-                          <a:latin typeface="Calibri"/>
-                        </a:rPr>
-                        <a:t>4</a:t>
-                      </a:r>
-                    </a:p>
-                  </a:txBody>
-                  <a:tcPr>
-                    <a:solidFill>
-                      <a:srgbClr val="FFFFFF"/>
-                    </a:solidFill>
-                  </a:tcPr>
-                </a:tc>
-                <a:tc>
-                  <a:txBody>
-                    <a:bodyPr/>
-                    <a:lstStyle/>
-                    <a:p>
-                      <a:pPr algn="l"/>
-                      <a:r>
-                        <a:rPr sz="1000" b="0">
-                          <a:solidFill>
-                            <a:srgbClr val="1D1B43"/>
-                          </a:solidFill>
-                          <a:latin typeface="Calibri"/>
-                        </a:rPr>
-                        <a:t>4</a:t>
-                      </a:r>
-                    </a:p>
-                  </a:txBody>
-                  <a:tcPr>
-                    <a:solidFill>
-                      <a:srgbClr val="FFFFFF"/>
-                    </a:solidFill>
-                  </a:tcPr>
-                </a:tc>
-                <a:tc>
-                  <a:txBody>
-                    <a:bodyPr/>
-                    <a:lstStyle/>
-                    <a:p>
-                      <a:pPr algn="l"/>
-                      <a:r>
-                        <a:rPr sz="1000" b="0">
-                          <a:solidFill>
-                            <a:srgbClr val="1D1B43"/>
-                          </a:solidFill>
-                          <a:latin typeface="Calibri"/>
-                        </a:rPr>
-                        <a:t>0</a:t>
-                      </a:r>
-                    </a:p>
-                  </a:txBody>
-                  <a:tcPr>
-                    <a:solidFill>
-                      <a:srgbClr val="FFFFFF"/>
-                    </a:solidFill>
-                  </a:tcPr>
-                </a:tc>
-                <a:tc>
-                  <a:txBody>
-                    <a:bodyPr/>
-                    <a:lstStyle/>
-                    <a:p>
-                      <a:pPr algn="l"/>
-                      <a:r>
-                        <a:rPr sz="1000" b="0">
-                          <a:solidFill>
-                            <a:srgbClr val="1D1B43"/>
-                          </a:solidFill>
-                          <a:latin typeface="Calibri"/>
-                        </a:rPr>
-                        <a:t>100.0%</a:t>
-                      </a:r>
-                    </a:p>
-                  </a:txBody>
-                  <a:tcPr>
-                    <a:solidFill>
-                      <a:srgbClr val="FFFFFF"/>
-                    </a:solidFill>
-                  </a:tcPr>
-                </a:tc>
-                <a:tc>
-                  <a:txBody>
-                    <a:bodyPr/>
-                    <a:lstStyle/>
-                    <a:p>
-                      <a:pPr algn="l"/>
-                      <a:r>
-                        <a:rPr sz="1000" b="0">
-                          <a:solidFill>
-                            <a:srgbClr val="1D1B43"/>
-                          </a:solidFill>
-                          <a:latin typeface="Calibri"/>
-                        </a:rPr>
-                        <a:t>Excelente</a:t>
-                      </a:r>
-                    </a:p>
-                  </a:txBody>
-                  <a:tcPr>
-                    <a:solidFill>
-                      <a:srgbClr val="FFFFFF"/>
-                    </a:solidFill>
-                  </a:tcPr>
-                </a:tc>
-              </a:tr>
-              <a:tr h="399010">
-                <a:tc>
-                  <a:txBody>
-                    <a:bodyPr/>
-                    <a:lstStyle/>
-                    <a:p>
-                      <a:pPr algn="l"/>
-                      <a:r>
-                        <a:rPr sz="1000" b="0">
-                          <a:solidFill>
-                            <a:srgbClr val="1D1B43"/>
-                          </a:solidFill>
-                          <a:latin typeface="Calibri"/>
-                        </a:rPr>
-                        <a:t>MA</a:t>
-                      </a:r>
-                    </a:p>
-                  </a:txBody>
-                  <a:tcPr>
-                    <a:solidFill>
-                      <a:srgbClr val="F2F2F2"/>
-                    </a:solidFill>
-                  </a:tcPr>
-                </a:tc>
-                <a:tc>
-                  <a:txBody>
-                    <a:bodyPr/>
-                    <a:lstStyle/>
-                    <a:p>
-                      <a:pPr algn="l"/>
-                      <a:r>
-                        <a:rPr sz="1000" b="0">
-                          <a:solidFill>
-                            <a:srgbClr val="1D1B43"/>
-                          </a:solidFill>
-                          <a:latin typeface="Calibri"/>
-                        </a:rPr>
-                        <a:t>2</a:t>
-                      </a:r>
-                    </a:p>
-                  </a:txBody>
-                  <a:tcPr>
-                    <a:solidFill>
-                      <a:srgbClr val="F2F2F2"/>
-                    </a:solidFill>
-                  </a:tcPr>
-                </a:tc>
-                <a:tc>
-                  <a:txBody>
-                    <a:bodyPr/>
-                    <a:lstStyle/>
-                    <a:p>
-                      <a:pPr algn="l"/>
-                      <a:r>
-                        <a:rPr sz="1000" b="0">
-                          <a:solidFill>
-                            <a:srgbClr val="1D1B43"/>
-                          </a:solidFill>
-                          <a:latin typeface="Calibri"/>
-                        </a:rPr>
-                        <a:t>0</a:t>
-                      </a:r>
-                    </a:p>
-                  </a:txBody>
-                  <a:tcPr>
-                    <a:solidFill>
-                      <a:srgbClr val="F2F2F2"/>
-                    </a:solidFill>
-                  </a:tcPr>
-                </a:tc>
-                <a:tc>
-                  <a:txBody>
-                    <a:bodyPr/>
-                    <a:lstStyle/>
-                    <a:p>
-                      <a:pPr algn="l"/>
-                      <a:r>
-                        <a:rPr sz="1000" b="0">
-                          <a:solidFill>
-                            <a:srgbClr val="1D1B43"/>
-                          </a:solidFill>
-                          <a:latin typeface="Calibri"/>
-                        </a:rPr>
-                        <a:t>2</a:t>
-                      </a:r>
-                    </a:p>
-                  </a:txBody>
-                  <a:tcPr>
-                    <a:solidFill>
-                      <a:srgbClr val="F2F2F2"/>
-                    </a:solidFill>
-                  </a:tcPr>
-                </a:tc>
-                <a:tc>
-                  <a:txBody>
-                    <a:bodyPr/>
-                    <a:lstStyle/>
-                    <a:p>
-                      <a:pPr algn="l"/>
-                      <a:r>
-                        <a:rPr sz="1000" b="0">
-                          <a:solidFill>
-                            <a:srgbClr val="1D1B43"/>
-                          </a:solidFill>
-                          <a:latin typeface="Calibri"/>
-                        </a:rPr>
-                        <a:t>0.0%</a:t>
-                      </a:r>
-                    </a:p>
-                  </a:txBody>
-                  <a:tcPr>
-                    <a:solidFill>
-                      <a:srgbClr val="F2F2F2"/>
-                    </a:solidFill>
-                  </a:tcPr>
-                </a:tc>
-                <a:tc>
-                  <a:txBody>
-                    <a:bodyPr/>
-                    <a:lstStyle/>
-                    <a:p>
-                      <a:pPr algn="l"/>
-                      <a:r>
-                        <a:rPr sz="1000" b="0">
-                          <a:solidFill>
-                            <a:srgbClr val="1D1B43"/>
-                          </a:solidFill>
-                          <a:latin typeface="Calibri"/>
-                        </a:rPr>
-                        <a:t>Atencao</a:t>
-                      </a:r>
-                    </a:p>
-                  </a:txBody>
-                  <a:tcPr>
-                    <a:solidFill>
-                      <a:srgbClr val="F2F2F2"/>
-                    </a:solidFill>
-                  </a:tcPr>
-                </a:tc>
-              </a:tr>
-              <a:tr h="399010">
-                <a:tc>
-                  <a:txBody>
-                    <a:bodyPr/>
-                    <a:lstStyle/>
-                    <a:p>
-                      <a:pPr algn="l"/>
-                      <a:r>
-                        <a:rPr sz="1000" b="0">
-                          <a:solidFill>
-                            <a:srgbClr val="1D1B43"/>
-                          </a:solidFill>
-                          <a:latin typeface="Calibri"/>
-                        </a:rPr>
-                        <a:t>GO</a:t>
-                      </a:r>
-                    </a:p>
-                  </a:txBody>
-                  <a:tcPr>
-                    <a:solidFill>
-                      <a:srgbClr val="FFFFFF"/>
-                    </a:solidFill>
-                  </a:tcPr>
-                </a:tc>
-                <a:tc>
-                  <a:txBody>
-                    <a:bodyPr/>
-                    <a:lstStyle/>
-                    <a:p>
-                      <a:pPr algn="l"/>
-                      <a:r>
-                        <a:rPr sz="1000" b="0">
-                          <a:solidFill>
-                            <a:srgbClr val="1D1B43"/>
-                          </a:solidFill>
-                          <a:latin typeface="Calibri"/>
-                        </a:rPr>
-                        <a:t>2</a:t>
-                      </a:r>
-                    </a:p>
-                  </a:txBody>
-                  <a:tcPr>
-                    <a:solidFill>
-                      <a:srgbClr val="FFFFFF"/>
-                    </a:solidFill>
-                  </a:tcPr>
-                </a:tc>
-                <a:tc>
-                  <a:txBody>
-                    <a:bodyPr/>
-                    <a:lstStyle/>
-                    <a:p>
-                      <a:pPr algn="l"/>
-                      <a:r>
-                        <a:rPr sz="1000" b="0">
-                          <a:solidFill>
-                            <a:srgbClr val="1D1B43"/>
-                          </a:solidFill>
-                          <a:latin typeface="Calibri"/>
-                        </a:rPr>
-                        <a:t>2</a:t>
-                      </a:r>
-                    </a:p>
-                  </a:txBody>
-                  <a:tcPr>
-                    <a:solidFill>
-                      <a:srgbClr val="FFFFFF"/>
-                    </a:solidFill>
-                  </a:tcPr>
-                </a:tc>
-                <a:tc>
-                  <a:txBody>
-                    <a:bodyPr/>
-                    <a:lstStyle/>
-                    <a:p>
-                      <a:pPr algn="l"/>
-                      <a:r>
-                        <a:rPr sz="1000" b="0">
-                          <a:solidFill>
-                            <a:srgbClr val="1D1B43"/>
-                          </a:solidFill>
-                          <a:latin typeface="Calibri"/>
-                        </a:rPr>
-                        <a:t>0</a:t>
-                      </a:r>
-                    </a:p>
-                  </a:txBody>
-                  <a:tcPr>
-                    <a:solidFill>
-                      <a:srgbClr val="FFFFFF"/>
-                    </a:solidFill>
-                  </a:tcPr>
-                </a:tc>
-                <a:tc>
-                  <a:txBody>
-                    <a:bodyPr/>
-                    <a:lstStyle/>
-                    <a:p>
-                      <a:pPr algn="l"/>
-                      <a:r>
-                        <a:rPr sz="1000" b="0">
-                          <a:solidFill>
-                            <a:srgbClr val="1D1B43"/>
-                          </a:solidFill>
-                          <a:latin typeface="Calibri"/>
-                        </a:rPr>
-                        <a:t>100.0%</a:t>
-                      </a:r>
-                    </a:p>
-                  </a:txBody>
-                  <a:tcPr>
-                    <a:solidFill>
-                      <a:srgbClr val="FFFFFF"/>
-                    </a:solidFill>
-                  </a:tcPr>
-                </a:tc>
-                <a:tc>
-                  <a:txBody>
-                    <a:bodyPr/>
-                    <a:lstStyle/>
-                    <a:p>
-                      <a:pPr algn="l"/>
-                      <a:r>
-                        <a:rPr sz="1000" b="0">
-                          <a:solidFill>
-                            <a:srgbClr val="1D1B43"/>
-                          </a:solidFill>
-                          <a:latin typeface="Calibri"/>
-                        </a:rPr>
-                        <a:t>Excelente</a:t>
-                      </a:r>
-                    </a:p>
-                  </a:txBody>
-                  <a:tcPr>
-                    <a:solidFill>
-                      <a:srgbClr val="FFFFFF"/>
-                    </a:solidFill>
-                  </a:tcPr>
-                </a:tc>
-              </a:tr>
-              <a:tr h="399010">
-                <a:tc>
-                  <a:txBody>
-                    <a:bodyPr/>
-                    <a:lstStyle/>
-                    <a:p>
-                      <a:pPr algn="l"/>
-                      <a:r>
-                        <a:rPr sz="1000" b="0">
-                          <a:solidFill>
-                            <a:srgbClr val="1D1B43"/>
-                          </a:solidFill>
-                          <a:latin typeface="Calibri"/>
-                        </a:rPr>
-                        <a:t>MG</a:t>
-                      </a:r>
-                    </a:p>
-                  </a:txBody>
-                  <a:tcPr>
-                    <a:solidFill>
-                      <a:srgbClr val="F2F2F2"/>
-                    </a:solidFill>
-                  </a:tcPr>
-                </a:tc>
-                <a:tc>
-                  <a:txBody>
-                    <a:bodyPr/>
-                    <a:lstStyle/>
-                    <a:p>
-                      <a:pPr algn="l"/>
-                      <a:r>
-                        <a:rPr sz="1000" b="0">
-                          <a:solidFill>
-                            <a:srgbClr val="1D1B43"/>
-                          </a:solidFill>
-                          <a:latin typeface="Calibri"/>
-                        </a:rPr>
-                        <a:t>2</a:t>
-                      </a:r>
-                    </a:p>
-                  </a:txBody>
-                  <a:tcPr>
-                    <a:solidFill>
-                      <a:srgbClr val="F2F2F2"/>
-                    </a:solidFill>
-                  </a:tcPr>
-                </a:tc>
-                <a:tc>
-                  <a:txBody>
-                    <a:bodyPr/>
-                    <a:lstStyle/>
-                    <a:p>
-                      <a:pPr algn="l"/>
-                      <a:r>
-                        <a:rPr sz="1000" b="0">
-                          <a:solidFill>
-                            <a:srgbClr val="1D1B43"/>
-                          </a:solidFill>
-                          <a:latin typeface="Calibri"/>
-                        </a:rPr>
-                        <a:t>2</a:t>
-                      </a:r>
-                    </a:p>
-                  </a:txBody>
-                  <a:tcPr>
-                    <a:solidFill>
-                      <a:srgbClr val="F2F2F2"/>
-                    </a:solidFill>
-                  </a:tcPr>
-                </a:tc>
-                <a:tc>
-                  <a:txBody>
-                    <a:bodyPr/>
-                    <a:lstStyle/>
-                    <a:p>
-                      <a:pPr algn="l"/>
-                      <a:r>
-                        <a:rPr sz="1000" b="0">
-                          <a:solidFill>
-                            <a:srgbClr val="1D1B43"/>
-                          </a:solidFill>
-                          <a:latin typeface="Calibri"/>
-                        </a:rPr>
-                        <a:t>0</a:t>
-                      </a:r>
-                    </a:p>
-                  </a:txBody>
-                  <a:tcPr>
-                    <a:solidFill>
-                      <a:srgbClr val="F2F2F2"/>
-                    </a:solidFill>
-                  </a:tcPr>
-                </a:tc>
-                <a:tc>
-                  <a:txBody>
-                    <a:bodyPr/>
-                    <a:lstStyle/>
-                    <a:p>
-                      <a:pPr algn="l"/>
-                      <a:r>
-                        <a:rPr sz="1000" b="0">
-                          <a:solidFill>
-                            <a:srgbClr val="1D1B43"/>
-                          </a:solidFill>
-                          <a:latin typeface="Calibri"/>
-                        </a:rPr>
-                        <a:t>100.0%</a:t>
-                      </a:r>
-                    </a:p>
-                  </a:txBody>
-                  <a:tcPr>
-                    <a:solidFill>
-                      <a:srgbClr val="F2F2F2"/>
-                    </a:solidFill>
-                  </a:tcPr>
-                </a:tc>
-                <a:tc>
-                  <a:txBody>
-                    <a:bodyPr/>
-                    <a:lstStyle/>
-                    <a:p>
-                      <a:pPr algn="l"/>
-                      <a:r>
-                        <a:rPr sz="1000" b="0">
-                          <a:solidFill>
-                            <a:srgbClr val="1D1B43"/>
-                          </a:solidFill>
-                          <a:latin typeface="Calibri"/>
-                        </a:rPr>
-                        <a:t>Excelente</a:t>
-                      </a:r>
-                    </a:p>
-                  </a:txBody>
-                  <a:tcPr>
-                    <a:solidFill>
-                      <a:srgbClr val="F2F2F2"/>
-                    </a:solidFill>
-                  </a:tcPr>
-                </a:tc>
-              </a:tr>
-              <a:tr h="399010">
-                <a:tc>
-                  <a:txBody>
-                    <a:bodyPr/>
-                    <a:lstStyle/>
-                    <a:p>
-                      <a:pPr algn="l"/>
-                      <a:r>
-                        <a:rPr sz="1000" b="0">
-                          <a:solidFill>
-                            <a:srgbClr val="1D1B43"/>
-                          </a:solidFill>
-                          <a:latin typeface="Calibri"/>
-                        </a:rPr>
-                        <a:t>DF</a:t>
-                      </a:r>
-                    </a:p>
-                  </a:txBody>
-                  <a:tcPr>
-                    <a:solidFill>
-                      <a:srgbClr val="FFFFFF"/>
-                    </a:solidFill>
-                  </a:tcPr>
-                </a:tc>
-                <a:tc>
-                  <a:txBody>
-                    <a:bodyPr/>
-                    <a:lstStyle/>
-                    <a:p>
-                      <a:pPr algn="l"/>
-                      <a:r>
-                        <a:rPr sz="1000" b="0">
-                          <a:solidFill>
-                            <a:srgbClr val="1D1B43"/>
-                          </a:solidFill>
-                          <a:latin typeface="Calibri"/>
-                        </a:rPr>
-                        <a:t>1</a:t>
-                      </a:r>
-                    </a:p>
-                  </a:txBody>
-                  <a:tcPr>
-                    <a:solidFill>
-                      <a:srgbClr val="FFFFFF"/>
-                    </a:solidFill>
-                  </a:tcPr>
-                </a:tc>
-                <a:tc>
-                  <a:txBody>
-                    <a:bodyPr/>
-                    <a:lstStyle/>
-                    <a:p>
-                      <a:pPr algn="l"/>
-                      <a:r>
-                        <a:rPr sz="1000" b="0">
-                          <a:solidFill>
-                            <a:srgbClr val="1D1B43"/>
-                          </a:solidFill>
-                          <a:latin typeface="Calibri"/>
-                        </a:rPr>
-                        <a:t>0</a:t>
-                      </a:r>
-                    </a:p>
-                  </a:txBody>
-                  <a:tcPr>
-                    <a:solidFill>
-                      <a:srgbClr val="FFFFFF"/>
-                    </a:solidFill>
-                  </a:tcPr>
-                </a:tc>
-                <a:tc>
-                  <a:txBody>
-                    <a:bodyPr/>
-                    <a:lstStyle/>
-                    <a:p>
-                      <a:pPr algn="l"/>
-                      <a:r>
-                        <a:rPr sz="1000" b="0">
-                          <a:solidFill>
-                            <a:srgbClr val="1D1B43"/>
-                          </a:solidFill>
-                          <a:latin typeface="Calibri"/>
-                        </a:rPr>
-                        <a:t>1</a:t>
-                      </a:r>
-                    </a:p>
-                  </a:txBody>
-                  <a:tcPr>
-                    <a:solidFill>
-                      <a:srgbClr val="FFFFFF"/>
-                    </a:solidFill>
-                  </a:tcPr>
-                </a:tc>
-                <a:tc>
-                  <a:txBody>
-                    <a:bodyPr/>
-                    <a:lstStyle/>
-                    <a:p>
-                      <a:pPr algn="l"/>
-                      <a:r>
-                        <a:rPr sz="1000" b="0">
-                          <a:solidFill>
-                            <a:srgbClr val="1D1B43"/>
-                          </a:solidFill>
-                          <a:latin typeface="Calibri"/>
-                        </a:rPr>
-                        <a:t>0.0%</a:t>
-                      </a:r>
-                    </a:p>
-                  </a:txBody>
-                  <a:tcPr>
-                    <a:solidFill>
-                      <a:srgbClr val="FFFFFF"/>
-                    </a:solidFill>
-                  </a:tcPr>
-                </a:tc>
-                <a:tc>
-                  <a:txBody>
-                    <a:bodyPr/>
-                    <a:lstStyle/>
-                    <a:p>
-                      <a:pPr algn="l"/>
-                      <a:r>
-                        <a:rPr sz="1000" b="0">
-                          <a:solidFill>
-                            <a:srgbClr val="1D1B43"/>
-                          </a:solidFill>
-                          <a:latin typeface="Calibri"/>
-                        </a:rPr>
-                        <a:t>Atencao</a:t>
-                      </a:r>
-                    </a:p>
-                  </a:txBody>
-                  <a:tcPr>
-                    <a:solidFill>
-                      <a:srgbClr val="FFFFFF"/>
-                    </a:solidFill>
-                  </a:tcPr>
-                </a:tc>
-              </a:tr>
-              <a:tr h="399010">
-                <a:tc>
-                  <a:txBody>
-                    <a:bodyPr/>
-                    <a:lstStyle/>
-                    <a:p>
-                      <a:pPr algn="l"/>
-                      <a:r>
-                        <a:rPr sz="1000" b="0">
-                          <a:solidFill>
-                            <a:srgbClr val="1D1B43"/>
-                          </a:solidFill>
-                          <a:latin typeface="Calibri"/>
-                        </a:rPr>
-                        <a:t>CE</a:t>
-                      </a:r>
-                    </a:p>
-                  </a:txBody>
-                  <a:tcPr>
-                    <a:solidFill>
-                      <a:srgbClr val="F2F2F2"/>
-                    </a:solidFill>
-                  </a:tcPr>
-                </a:tc>
-                <a:tc>
-                  <a:txBody>
-                    <a:bodyPr/>
-                    <a:lstStyle/>
-                    <a:p>
-                      <a:pPr algn="l"/>
-                      <a:r>
-                        <a:rPr sz="1000" b="0">
-                          <a:solidFill>
-                            <a:srgbClr val="1D1B43"/>
-                          </a:solidFill>
-                          <a:latin typeface="Calibri"/>
-                        </a:rPr>
-                        <a:t>1</a:t>
-                      </a:r>
-                    </a:p>
-                  </a:txBody>
-                  <a:tcPr>
-                    <a:solidFill>
-                      <a:srgbClr val="F2F2F2"/>
-                    </a:solidFill>
-                  </a:tcPr>
-                </a:tc>
-                <a:tc>
-                  <a:txBody>
-                    <a:bodyPr/>
-                    <a:lstStyle/>
-                    <a:p>
-                      <a:pPr algn="l"/>
-                      <a:r>
-                        <a:rPr sz="1000" b="0">
-                          <a:solidFill>
-                            <a:srgbClr val="1D1B43"/>
-                          </a:solidFill>
-                          <a:latin typeface="Calibri"/>
-                        </a:rPr>
-                        <a:t>1</a:t>
-                      </a:r>
-                    </a:p>
-                  </a:txBody>
-                  <a:tcPr>
-                    <a:solidFill>
-                      <a:srgbClr val="F2F2F2"/>
-                    </a:solidFill>
-                  </a:tcPr>
-                </a:tc>
-                <a:tc>
-                  <a:txBody>
-                    <a:bodyPr/>
-                    <a:lstStyle/>
-                    <a:p>
-                      <a:pPr algn="l"/>
-                      <a:r>
-                        <a:rPr sz="1000" b="0">
-                          <a:solidFill>
-                            <a:srgbClr val="1D1B43"/>
-                          </a:solidFill>
-                          <a:latin typeface="Calibri"/>
-                        </a:rPr>
-                        <a:t>0</a:t>
-                      </a:r>
-                    </a:p>
-                  </a:txBody>
-                  <a:tcPr>
-                    <a:solidFill>
-                      <a:srgbClr val="F2F2F2"/>
-                    </a:solidFill>
-                  </a:tcPr>
-                </a:tc>
-                <a:tc>
-                  <a:txBody>
-                    <a:bodyPr/>
-                    <a:lstStyle/>
-                    <a:p>
-                      <a:pPr algn="l"/>
-                      <a:r>
-                        <a:rPr sz="1000" b="0">
-                          <a:solidFill>
-                            <a:srgbClr val="1D1B43"/>
-                          </a:solidFill>
-                          <a:latin typeface="Calibri"/>
-                        </a:rPr>
-                        <a:t>100.0%</a:t>
-                      </a:r>
-                    </a:p>
-                  </a:txBody>
-                  <a:tcPr>
-                    <a:solidFill>
-                      <a:srgbClr val="F2F2F2"/>
-                    </a:solidFill>
-                  </a:tcPr>
-                </a:tc>
-                <a:tc>
-                  <a:txBody>
-                    <a:bodyPr/>
-                    <a:lstStyle/>
-                    <a:p>
-                      <a:pPr algn="l"/>
-                      <a:r>
-                        <a:rPr sz="1000" b="0">
-                          <a:solidFill>
-                            <a:srgbClr val="1D1B43"/>
-                          </a:solidFill>
-                          <a:latin typeface="Calibri"/>
-                        </a:rPr>
-                        <a:t>Excelente</a:t>
-                      </a:r>
-                    </a:p>
-                  </a:txBody>
-                  <a:tcPr>
-                    <a:solidFill>
-                      <a:srgbClr val="F2F2F2"/>
-                    </a:solidFill>
-                  </a:tcPr>
-                </a:tc>
-              </a:tr>
-              <a:tr h="399010">
-                <a:tc>
-                  <a:txBody>
-                    <a:bodyPr/>
-                    <a:lstStyle/>
-                    <a:p>
-                      <a:pPr algn="l"/>
-                      <a:r>
-                        <a:rPr sz="1000" b="0">
-                          <a:solidFill>
-                            <a:srgbClr val="1D1B43"/>
-                          </a:solidFill>
-                          <a:latin typeface="Calibri"/>
-                        </a:rPr>
-                        <a:t>BA</a:t>
-                      </a:r>
-                    </a:p>
-                  </a:txBody>
-                  <a:tcPr>
-                    <a:solidFill>
-                      <a:srgbClr val="FFFFFF"/>
-                    </a:solidFill>
-                  </a:tcPr>
-                </a:tc>
-                <a:tc>
-                  <a:txBody>
-                    <a:bodyPr/>
-                    <a:lstStyle/>
-                    <a:p>
-                      <a:pPr algn="l"/>
-                      <a:r>
-                        <a:rPr sz="1000" b="0">
-                          <a:solidFill>
-                            <a:srgbClr val="1D1B43"/>
-                          </a:solidFill>
-                          <a:latin typeface="Calibri"/>
-                        </a:rPr>
-                        <a:t>1</a:t>
-                      </a:r>
-                    </a:p>
-                  </a:txBody>
-                  <a:tcPr>
-                    <a:solidFill>
-                      <a:srgbClr val="FFFFFF"/>
-                    </a:solidFill>
-                  </a:tcPr>
-                </a:tc>
-                <a:tc>
-                  <a:txBody>
-                    <a:bodyPr/>
-                    <a:lstStyle/>
-                    <a:p>
-                      <a:pPr algn="l"/>
-                      <a:r>
-                        <a:rPr sz="1000" b="0">
-                          <a:solidFill>
-                            <a:srgbClr val="1D1B43"/>
-                          </a:solidFill>
-                          <a:latin typeface="Calibri"/>
-                        </a:rPr>
-                        <a:t>1</a:t>
-                      </a:r>
-                    </a:p>
-                  </a:txBody>
-                  <a:tcPr>
-                    <a:solidFill>
-                      <a:srgbClr val="FFFFFF"/>
-                    </a:solidFill>
-                  </a:tcPr>
-                </a:tc>
-                <a:tc>
-                  <a:txBody>
-                    <a:bodyPr/>
-                    <a:lstStyle/>
-                    <a:p>
-                      <a:pPr algn="l"/>
-                      <a:r>
-                        <a:rPr sz="1000" b="0">
-                          <a:solidFill>
-                            <a:srgbClr val="1D1B43"/>
-                          </a:solidFill>
-                          <a:latin typeface="Calibri"/>
-                        </a:rPr>
-                        <a:t>0</a:t>
-                      </a:r>
-                    </a:p>
-                  </a:txBody>
-                  <a:tcPr>
-                    <a:solidFill>
-                      <a:srgbClr val="FFFFFF"/>
-                    </a:solidFill>
-                  </a:tcPr>
-                </a:tc>
-                <a:tc>
-                  <a:txBody>
-                    <a:bodyPr/>
-                    <a:lstStyle/>
-                    <a:p>
-                      <a:pPr algn="l"/>
-                      <a:r>
-                        <a:rPr sz="1000" b="0">
-                          <a:solidFill>
-                            <a:srgbClr val="1D1B43"/>
-                          </a:solidFill>
-                          <a:latin typeface="Calibri"/>
-                        </a:rPr>
-                        <a:t>100.0%</a:t>
-                      </a:r>
-                    </a:p>
-                  </a:txBody>
-                  <a:tcPr>
-                    <a:solidFill>
-                      <a:srgbClr val="FFFFFF"/>
-                    </a:solidFill>
-                  </a:tcPr>
-                </a:tc>
-                <a:tc>
-                  <a:txBody>
-                    <a:bodyPr/>
-                    <a:lstStyle/>
-                    <a:p>
-                      <a:pPr algn="l"/>
-                      <a:r>
-                        <a:rPr sz="1000" b="0">
-                          <a:solidFill>
-                            <a:srgbClr val="1D1B43"/>
-                          </a:solidFill>
-                          <a:latin typeface="Calibri"/>
-                        </a:rPr>
-                        <a:t>Excelente</a:t>
-                      </a:r>
-                    </a:p>
-                  </a:txBody>
-                  <a:tcPr>
-                    <a:solidFill>
-                      <a:srgbClr val="FFFFFF"/>
-                    </a:solidFill>
-                  </a:tcPr>
-                </a:tc>
-              </a:tr>
-              <a:tr h="399010">
-                <a:tc>
-                  <a:txBody>
-                    <a:bodyPr/>
-                    <a:lstStyle/>
-                    <a:p>
-                      <a:pPr algn="l"/>
-                      <a:r>
-                        <a:rPr sz="1000" b="0">
-                          <a:solidFill>
-                            <a:srgbClr val="1D1B43"/>
-                          </a:solidFill>
-                          <a:latin typeface="Calibri"/>
-                        </a:rPr>
-                        <a:t>ES</a:t>
-                      </a:r>
-                    </a:p>
-                  </a:txBody>
-                  <a:tcPr>
-                    <a:solidFill>
-                      <a:srgbClr val="F2F2F2"/>
-                    </a:solidFill>
-                  </a:tcPr>
-                </a:tc>
-                <a:tc>
-                  <a:txBody>
-                    <a:bodyPr/>
-                    <a:lstStyle/>
-                    <a:p>
-                      <a:pPr algn="l"/>
-                      <a:r>
-                        <a:rPr sz="1000" b="0">
-                          <a:solidFill>
-                            <a:srgbClr val="1D1B43"/>
-                          </a:solidFill>
-                          <a:latin typeface="Calibri"/>
-                        </a:rPr>
-                        <a:t>1</a:t>
-                      </a:r>
-                    </a:p>
-                  </a:txBody>
-                  <a:tcPr>
-                    <a:solidFill>
-                      <a:srgbClr val="F2F2F2"/>
-                    </a:solidFill>
-                  </a:tcPr>
-                </a:tc>
-                <a:tc>
-                  <a:txBody>
-                    <a:bodyPr/>
-                    <a:lstStyle/>
-                    <a:p>
-                      <a:pPr algn="l"/>
-                      <a:r>
-                        <a:rPr sz="1000" b="0">
-                          <a:solidFill>
-                            <a:srgbClr val="1D1B43"/>
-                          </a:solidFill>
-                          <a:latin typeface="Calibri"/>
-                        </a:rPr>
-                        <a:t>1</a:t>
-                      </a:r>
-                    </a:p>
-                  </a:txBody>
-                  <a:tcPr>
-                    <a:solidFill>
-                      <a:srgbClr val="F2F2F2"/>
-                    </a:solidFill>
-                  </a:tcPr>
-                </a:tc>
-                <a:tc>
-                  <a:txBody>
-                    <a:bodyPr/>
-                    <a:lstStyle/>
-                    <a:p>
-                      <a:pPr algn="l"/>
-                      <a:r>
-                        <a:rPr sz="1000" b="0">
-                          <a:solidFill>
-                            <a:srgbClr val="1D1B43"/>
-                          </a:solidFill>
-                          <a:latin typeface="Calibri"/>
-                        </a:rPr>
-                        <a:t>0</a:t>
-                      </a:r>
-                    </a:p>
-                  </a:txBody>
-                  <a:tcPr>
-                    <a:solidFill>
-                      <a:srgbClr val="F2F2F2"/>
-                    </a:solidFill>
-                  </a:tcPr>
-                </a:tc>
-                <a:tc>
-                  <a:txBody>
-                    <a:bodyPr/>
-                    <a:lstStyle/>
-                    <a:p>
-                      <a:pPr algn="l"/>
-                      <a:r>
-                        <a:rPr sz="1000" b="0">
-                          <a:solidFill>
-                            <a:srgbClr val="1D1B43"/>
-                          </a:solidFill>
-                          <a:latin typeface="Calibri"/>
-                        </a:rPr>
-                        <a:t>100.0%</a:t>
-                      </a:r>
-                    </a:p>
-                  </a:txBody>
-                  <a:tcPr>
-                    <a:solidFill>
-                      <a:srgbClr val="F2F2F2"/>
-                    </a:solidFill>
-                  </a:tcPr>
-                </a:tc>
-                <a:tc>
-                  <a:txBody>
-                    <a:bodyPr/>
-                    <a:lstStyle/>
-                    <a:p>
-                      <a:pPr algn="l"/>
-                      <a:r>
-                        <a:rPr sz="1000" b="0">
-                          <a:solidFill>
-                            <a:srgbClr val="1D1B43"/>
-                          </a:solidFill>
-                          <a:latin typeface="Calibri"/>
-                        </a:rPr>
-                        <a:t>Excelente</a:t>
-                      </a:r>
-                    </a:p>
-                  </a:txBody>
-                  <a:tcPr>
-                    <a:solidFill>
-                      <a:srgbClr val="F2F2F2"/>
-                    </a:solidFill>
-                  </a:tcPr>
-                </a:tc>
-              </a:tr>
-            </a:tbl>
-          </a:graphicData>
-        </a:graphic>
-      </p:graphicFrame>
-    </p:spTree>
-  </p:cSld>
-  <p:clrMapOvr>
-    <a:masterClrMapping/>
-  </p:clrMapOvr>
-</p:sld>
-</file>
-
-<file path=ppt/slides/slide6.xml><?xml version="1.0" encoding="utf-8"?>
-<p:sld xmlns:a="http://schemas.openxmlformats.org/drawingml/2006/main" xmlns:p="http://schemas.openxmlformats.org/presentationml/2006/main" xmlns:r="http://schemas.openxmlformats.org/officeDocument/2006/relationships">
-  <p:cSld>
-    <p:bg>
-      <p:bgPr>
-        <a:solidFill>
-          <a:srgbClr val="FFFFFF"/>
-        </a:solidFill>
-        <a:effectLst/>
-      </p:bgPr>
-    </p:bg>
-    <p:spTree>
-      <p:nvGrpSpPr>
-        <p:cNvPr id="1" name=""/>
-        <p:cNvGrpSpPr/>
-        <p:nvPr/>
-      </p:nvGrpSpPr>
-      <p:grpSpPr/>
-      <p:pic>
-        <p:nvPicPr>
-          <p:cNvPr id="2" name="Picture 1" descr="slide2_img3.png"/>
-          <p:cNvPicPr>
-            <a:picLocks noChangeAspect="1"/>
-          </p:cNvPicPr>
-          <p:nvPr/>
-        </p:nvPicPr>
-        <p:blipFill>
-          <a:blip r:embed="rId2"/>
-          <a:stretch>
-            <a:fillRect/>
-          </a:stretch>
-        </p:blipFill>
-        <p:spPr>
-          <a:xfrm>
-            <a:off x="10661904" y="155448"/>
-            <a:ext cx="1380744" cy="667512"/>
-          </a:xfrm>
-          <a:prstGeom prst="rect">
-            <a:avLst/>
-          </a:prstGeom>
-        </p:spPr>
-      </p:pic>
-      <p:sp>
-        <p:nvSpPr>
-          <p:cNvPr id="3" name="TextBox 2"/>
-          <p:cNvSpPr txBox="1"/>
-          <p:nvPr/>
-        </p:nvSpPr>
-        <p:spPr>
-          <a:xfrm>
-            <a:off x="749808" y="502920"/>
             <a:ext cx="10058400" cy="914400"/>
           </a:xfrm>
           <a:prstGeom prst="rect">
@@ -7716,7 +6563,7 @@
                 </a:solidFill>
                 <a:latin typeface="Calibri"/>
               </a:rPr>
-              <a:t>TOP DESTINATARIOS (34 pontos)</a:t>
+              <a:t>TOP DESTINATARIOS (26 pontos)</a:t>
             </a:r>
           </a:p>
         </p:txBody>
@@ -7991,7 +6838,7 @@
                           </a:solidFill>
                           <a:latin typeface="Calibri"/>
                         </a:rPr>
-                        <a:t>JP COMERCIO EXTERIOR - RIO DE JANEIRO / RJ</a:t>
+                        <a:t>MRCEGLIA IMPORTACAO - ITAJAI / SC</a:t>
                       </a:r>
                     </a:p>
                   </a:txBody>
@@ -8014,7 +6861,7 @@
                           </a:solidFill>
                           <a:latin typeface="Calibri"/>
                         </a:rPr>
-                        <a:t>2</a:t>
+                        <a:t>3</a:t>
                       </a:r>
                     </a:p>
                   </a:txBody>
@@ -8037,7 +6884,7 @@
                           </a:solidFill>
                           <a:latin typeface="Calibri"/>
                         </a:rPr>
-                        <a:t>2</a:t>
+                        <a:t>3</a:t>
                       </a:r>
                     </a:p>
                   </a:txBody>
@@ -8154,7 +7001,7 @@
                           </a:solidFill>
                           <a:latin typeface="Calibri"/>
                         </a:rPr>
-                        <a:t>JAY ARBUDA PRESENTES - SAO PAULO / SP</a:t>
+                        <a:t>GABRIEL VELISTA NASC - SANTOS / SP</a:t>
                       </a:r>
                     </a:p>
                   </a:txBody>
@@ -8317,7 +7164,7 @@
                           </a:solidFill>
                           <a:latin typeface="Calibri"/>
                         </a:rPr>
-                        <a:t>TRUST MEGA TECHNOLOG - SAO PAULO / SP</a:t>
+                        <a:t>UNNIX GROW E HEADSHO - SAO PAULO / SP</a:t>
                       </a:r>
                     </a:p>
                   </a:txBody>
@@ -8480,7 +7327,7 @@
                           </a:solidFill>
                           <a:latin typeface="Calibri"/>
                         </a:rPr>
-                        <a:t>REGIS G.MARQUES - PORTO ALEGRE / RS</a:t>
+                        <a:t>PORTOEXPRESS LOGISTI - ITAJAI / SC</a:t>
                       </a:r>
                     </a:p>
                   </a:txBody>
@@ -8643,7 +7490,7 @@
                           </a:solidFill>
                           <a:latin typeface="Calibri"/>
                         </a:rPr>
-                        <a:t>TABACARIA HIJAZI - SAO LUIZ / MA</a:t>
+                        <a:t>NEW FUTURE ARTIGOS D - RIO DE JANEIRO / RJ</a:t>
                       </a:r>
                     </a:p>
                   </a:txBody>
@@ -8689,6 +7536,29 @@
                           </a:solidFill>
                           <a:latin typeface="Calibri"/>
                         </a:rPr>
+                        <a:t>2</a:t>
+                      </a:r>
+                    </a:p>
+                  </a:txBody>
+                  <a:tcPr>
+                    <a:solidFill>
+                      <a:srgbClr val="FFFFFF"/>
+                    </a:solidFill>
+                  </a:tcPr>
+                </a:tc>
+                <a:tc>
+                  <a:txBody>
+                    <a:bodyPr/>
+                    <a:lstStyle/>
+                    <a:p>
+                      <a:pPr algn="l"/>
+                      <a:r>
+                        <a:rPr sz="1000" b="0">
+                          <a:solidFill>
+                            <a:srgbClr val="1D1B43"/>
+                          </a:solidFill>
+                          <a:latin typeface="Calibri"/>
+                        </a:rPr>
                         <a:t>0</a:t>
                       </a:r>
                     </a:p>
@@ -8712,7 +7582,7 @@
                           </a:solidFill>
                           <a:latin typeface="Calibri"/>
                         </a:rPr>
-                        <a:t>2</a:t>
+                        <a:t>100.0%</a:t>
                       </a:r>
                     </a:p>
                   </a:txBody>
@@ -8735,30 +7605,7 @@
                           </a:solidFill>
                           <a:latin typeface="Calibri"/>
                         </a:rPr>
-                        <a:t>0.0%</a:t>
-                      </a:r>
-                    </a:p>
-                  </a:txBody>
-                  <a:tcPr>
-                    <a:solidFill>
-                      <a:srgbClr val="FFFFFF"/>
-                    </a:solidFill>
-                  </a:tcPr>
-                </a:tc>
-                <a:tc>
-                  <a:txBody>
-                    <a:bodyPr/>
-                    <a:lstStyle/>
-                    <a:p>
-                      <a:pPr algn="l"/>
-                      <a:r>
-                        <a:rPr sz="1000" b="0">
-                          <a:solidFill>
-                            <a:srgbClr val="1D1B43"/>
-                          </a:solidFill>
-                          <a:latin typeface="Calibri"/>
-                        </a:rPr>
-                        <a:t>Atencao</a:t>
+                        <a:t>Excelente</a:t>
                       </a:r>
                     </a:p>
                   </a:txBody>
@@ -8806,7 +7653,7 @@
                           </a:solidFill>
                           <a:latin typeface="Calibri"/>
                         </a:rPr>
-                        <a:t>27.889.907 JESSE ROD - RIO DE JANEIRO / RJ</a:t>
+                        <a:t>TRUST MEGA TECHNOLOG - SAO PAULO / SP</a:t>
                       </a:r>
                     </a:p>
                   </a:txBody>
@@ -8829,7 +7676,7 @@
                           </a:solidFill>
                           <a:latin typeface="Calibri"/>
                         </a:rPr>
-                        <a:t>1</a:t>
+                        <a:t>2</a:t>
                       </a:r>
                     </a:p>
                   </a:txBody>
@@ -8852,7 +7699,7 @@
                           </a:solidFill>
                           <a:latin typeface="Calibri"/>
                         </a:rPr>
-                        <a:t>1</a:t>
+                        <a:t>2</a:t>
                       </a:r>
                     </a:p>
                   </a:txBody>
@@ -8969,7 +7816,7 @@
                           </a:solidFill>
                           <a:latin typeface="Calibri"/>
                         </a:rPr>
-                        <a:t>ALBERTO ANDRES ANDRE - JOAO PESSOA / PB</a:t>
+                        <a:t>GB COMERCIO DE VESTU - VOLTA REDONDA / RJ</a:t>
                       </a:r>
                     </a:p>
                   </a:txBody>
@@ -8992,7 +7839,7 @@
                           </a:solidFill>
                           <a:latin typeface="Calibri"/>
                         </a:rPr>
-                        <a:t>1</a:t>
+                        <a:t>2</a:t>
                       </a:r>
                     </a:p>
                   </a:txBody>
@@ -9015,6 +7862,29 @@
                           </a:solidFill>
                           <a:latin typeface="Calibri"/>
                         </a:rPr>
+                        <a:t>2</a:t>
+                      </a:r>
+                    </a:p>
+                  </a:txBody>
+                  <a:tcPr>
+                    <a:solidFill>
+                      <a:srgbClr val="FFFFFF"/>
+                    </a:solidFill>
+                  </a:tcPr>
+                </a:tc>
+                <a:tc>
+                  <a:txBody>
+                    <a:bodyPr/>
+                    <a:lstStyle/>
+                    <a:p>
+                      <a:pPr algn="l"/>
+                      <a:r>
+                        <a:rPr sz="1000" b="0">
+                          <a:solidFill>
+                            <a:srgbClr val="1D1B43"/>
+                          </a:solidFill>
+                          <a:latin typeface="Calibri"/>
+                        </a:rPr>
                         <a:t>0</a:t>
                       </a:r>
                     </a:p>
@@ -9038,7 +7908,7 @@
                           </a:solidFill>
                           <a:latin typeface="Calibri"/>
                         </a:rPr>
-                        <a:t>1</a:t>
+                        <a:t>100.0%</a:t>
                       </a:r>
                     </a:p>
                   </a:txBody>
@@ -9061,30 +7931,7 @@
                           </a:solidFill>
                           <a:latin typeface="Calibri"/>
                         </a:rPr>
-                        <a:t>0.0%</a:t>
-                      </a:r>
-                    </a:p>
-                  </a:txBody>
-                  <a:tcPr>
-                    <a:solidFill>
-                      <a:srgbClr val="FFFFFF"/>
-                    </a:solidFill>
-                  </a:tcPr>
-                </a:tc>
-                <a:tc>
-                  <a:txBody>
-                    <a:bodyPr/>
-                    <a:lstStyle/>
-                    <a:p>
-                      <a:pPr algn="l"/>
-                      <a:r>
-                        <a:rPr sz="1000" b="0">
-                          <a:solidFill>
-                            <a:srgbClr val="1D1B43"/>
-                          </a:solidFill>
-                          <a:latin typeface="Calibri"/>
-                        </a:rPr>
-                        <a:t>Atencao</a:t>
+                        <a:t>Excelente</a:t>
                       </a:r>
                     </a:p>
                   </a:txBody>
@@ -9132,7 +7979,7 @@
                           </a:solidFill>
                           <a:latin typeface="Calibri"/>
                         </a:rPr>
-                        <a:t>DARK SHOP TABACARIA - BELO HORIZONTE / MG</a:t>
+                        <a:t>BEST PRICE - BRASILIA / DF</a:t>
                       </a:r>
                     </a:p>
                   </a:txBody>
@@ -9295,7 +8142,7 @@
                           </a:solidFill>
                           <a:latin typeface="Calibri"/>
                         </a:rPr>
-                        <a:t>BE HAPPY TABACARIA L - VOLTA REDONDA / RJ</a:t>
+                        <a:t>CAFE DA MATA LTDA - SAO PAULO / SP</a:t>
                       </a:r>
                     </a:p>
                   </a:txBody>
@@ -9458,7 +8305,7 @@
                           </a:solidFill>
                           <a:latin typeface="Calibri"/>
                         </a:rPr>
-                        <a:t>BRENO SILVA MACHADO - NITEROI / RJ</a:t>
+                        <a:t>BELLI ROOTS - SAO PAULO / SP</a:t>
                       </a:r>
                     </a:p>
                   </a:txBody>
@@ -9621,7 +8468,7 @@
                           </a:solidFill>
                           <a:latin typeface="Calibri"/>
                         </a:rPr>
-                        <a:t>ERICKSON EUGENIO SUZ - CAXIAS DO SUL / RS</a:t>
+                        <a:t>J&amp;CIA - FLORIANOPOLIS / SC</a:t>
                       </a:r>
                     </a:p>
                   </a:txBody>
@@ -9784,7 +8631,7 @@
                           </a:solidFill>
                           <a:latin typeface="Calibri"/>
                         </a:rPr>
-                        <a:t>DOS CRIAS ATACADO LT - SERRA / ES</a:t>
+                        <a:t>IMNUNES ARTIGOS NACI - SAO PAULO / SP</a:t>
                       </a:r>
                     </a:p>
                   </a:txBody>
@@ -9947,7 +8794,7 @@
                           </a:solidFill>
                           <a:latin typeface="Calibri"/>
                         </a:rPr>
-                        <a:t>ESPECIARIAS DO CERRA - GOIANIA / GO</a:t>
+                        <a:t>DISTRIBUIDORA CORING - ANAPOLIS / GO</a:t>
                       </a:r>
                     </a:p>
                   </a:txBody>
@@ -10110,7 +8957,7 @@
                           </a:solidFill>
                           <a:latin typeface="Calibri"/>
                         </a:rPr>
-                        <a:t>FIRE COMERCIO DE ART - SANTOS / SP</a:t>
+                        <a:t>ERICKSON EUGENIO SUZ - CAXIAS DO SUL / RS</a:t>
                       </a:r>
                     </a:p>
                   </a:txBody>
@@ -10248,7 +9095,7 @@
 </p:sld>
 </file>
 
-<file path=ppt/slides/slide7.xml><?xml version="1.0" encoding="utf-8"?>
+<file path=ppt/slides/slide6.xml><?xml version="1.0" encoding="utf-8"?>
 <p:sld xmlns:a="http://schemas.openxmlformats.org/drawingml/2006/main" xmlns:p="http://schemas.openxmlformats.org/presentationml/2006/main" xmlns:r="http://schemas.openxmlformats.org/officeDocument/2006/relationships">
   <p:cSld>
     <p:bg>

--- a/MRCEGLIA_IMPORTACAO_E_SERVICOS.pptx
+++ b/MRCEGLIA_IMPORTACAO_E_SERVICOS.pptx
@@ -142,10 +142,13 @@
           </c:spPr>
           <c:cat>
             <c:strRef>
-              <c:f>Sheet1!$A$2:$A$2</c:f>
+              <c:f>Sheet1!$A$2:$A$3</c:f>
               <c:strCache>
-                <c:ptCount val="1"/>
+                <c:ptCount val="2"/>
                 <c:pt idx="0">
+                  <c:v>Maio 2026</c:v>
+                </c:pt>
+                <c:pt idx="1">
                   <c:v>Abril 2026</c:v>
                 </c:pt>
               </c:strCache>
@@ -153,11 +156,14 @@
           </c:cat>
           <c:val>
             <c:numRef>
-              <c:f>Sheet1!$B$2:$B$2</c:f>
+              <c:f>Sheet1!$B$2:$B$3</c:f>
               <c:numCache>
                 <c:formatCode>General</c:formatCode>
-                <c:ptCount val="1"/>
+                <c:ptCount val="2"/>
                 <c:pt idx="0">
+                  <c:v>35</c:v>
+                </c:pt>
+                <c:pt idx="1">
                   <c:v>34</c:v>
                 </c:pt>
               </c:numCache>
@@ -185,10 +191,13 @@
           </c:spPr>
           <c:cat>
             <c:strRef>
-              <c:f>Sheet1!$A$2:$A$2</c:f>
+              <c:f>Sheet1!$A$2:$A$3</c:f>
               <c:strCache>
-                <c:ptCount val="1"/>
+                <c:ptCount val="2"/>
                 <c:pt idx="0">
+                  <c:v>Maio 2026</c:v>
+                </c:pt>
+                <c:pt idx="1">
                   <c:v>Abril 2026</c:v>
                 </c:pt>
               </c:strCache>
@@ -196,11 +205,14 @@
           </c:cat>
           <c:val>
             <c:numRef>
-              <c:f>Sheet1!$C$2:$C$2</c:f>
+              <c:f>Sheet1!$C$2:$C$3</c:f>
               <c:numCache>
                 <c:formatCode>General</c:formatCode>
-                <c:ptCount val="1"/>
+                <c:ptCount val="2"/>
                 <c:pt idx="0">
+                  <c:v>4</c:v>
+                </c:pt>
+                <c:pt idx="1">
                   <c:v>0</c:v>
                 </c:pt>
               </c:numCache>
@@ -4141,7 +4153,7 @@
                           </a:solidFill>
                           <a:latin typeface="Calibri"/>
                         </a:rPr>
-                        <a:t>Marco 2026</a:t>
+                        <a:t>Maio 2026</a:t>
                       </a:r>
                     </a:p>
                   </a:txBody>
@@ -4235,7 +4247,7 @@
                           </a:solidFill>
                           <a:latin typeface="Calibri"/>
                         </a:rPr>
-                        <a:t>-</a:t>
+                        <a:t>39</a:t>
                       </a:r>
                     </a:p>
                   </a:txBody>
@@ -4281,7 +4293,7 @@
                           </a:solidFill>
                           <a:latin typeface="Calibri"/>
                         </a:rPr>
-                        <a:t>-</a:t>
+                        <a:t>- 5</a:t>
                       </a:r>
                     </a:p>
                   </a:txBody>
@@ -4329,7 +4341,7 @@
                           </a:solidFill>
                           <a:latin typeface="Calibri"/>
                         </a:rPr>
-                        <a:t>-</a:t>
+                        <a:t>35</a:t>
                       </a:r>
                     </a:p>
                   </a:txBody>
@@ -4375,7 +4387,7 @@
                           </a:solidFill>
                           <a:latin typeface="Calibri"/>
                         </a:rPr>
-                        <a:t>-</a:t>
+                        <a:t>- 1</a:t>
                       </a:r>
                     </a:p>
                   </a:txBody>
@@ -4423,7 +4435,7 @@
                           </a:solidFill>
                           <a:latin typeface="Calibri"/>
                         </a:rPr>
-                        <a:t>-</a:t>
+                        <a:t>4</a:t>
                       </a:r>
                     </a:p>
                   </a:txBody>
@@ -4469,7 +4481,7 @@
                           </a:solidFill>
                           <a:latin typeface="Calibri"/>
                         </a:rPr>
-                        <a:t>-</a:t>
+                        <a:t>- 4</a:t>
                       </a:r>
                     </a:p>
                   </a:txBody>
@@ -4517,7 +4529,7 @@
                           </a:solidFill>
                           <a:latin typeface="Calibri"/>
                         </a:rPr>
-                        <a:t>-</a:t>
+                        <a:t>89.7%</a:t>
                       </a:r>
                     </a:p>
                   </a:txBody>
@@ -4563,7 +4575,7 @@
                           </a:solidFill>
                           <a:latin typeface="Calibri"/>
                         </a:rPr>
-                        <a:t>-</a:t>
+                        <a:t>+ 10.3pp</a:t>
                       </a:r>
                     </a:p>
                   </a:txBody>
@@ -4734,7 +4746,7 @@
         </p:nvGraphicFramePr>
         <p:xfrm>
           <a:off x="7955279" y="2286000"/>
-          <a:ext cx="4480560" cy="877824"/>
+          <a:ext cx="4480560" cy="1316736"/>
         </p:xfrm>
         <a:graphic>
           <a:graphicData uri="http://schemas.openxmlformats.org/drawingml/2006/table">
@@ -4880,13 +4892,130 @@
                           </a:solidFill>
                           <a:latin typeface="Calibri"/>
                         </a:rPr>
+                        <a:t>Maio 2026</a:t>
+                      </a:r>
+                    </a:p>
+                  </a:txBody>
+                  <a:tcPr>
+                    <a:solidFill>
+                      <a:srgbClr val="FFFFFF"/>
+                    </a:solidFill>
+                  </a:tcPr>
+                </a:tc>
+                <a:tc>
+                  <a:txBody>
+                    <a:bodyPr/>
+                    <a:lstStyle/>
+                    <a:p>
+                      <a:pPr algn="l"/>
+                      <a:r>
+                        <a:rPr sz="1000" b="0">
+                          <a:solidFill>
+                            <a:srgbClr val="1D1B43"/>
+                          </a:solidFill>
+                          <a:latin typeface="Calibri"/>
+                        </a:rPr>
+                        <a:t>39</a:t>
+                      </a:r>
+                    </a:p>
+                  </a:txBody>
+                  <a:tcPr>
+                    <a:solidFill>
+                      <a:srgbClr val="FFFFFF"/>
+                    </a:solidFill>
+                  </a:tcPr>
+                </a:tc>
+                <a:tc>
+                  <a:txBody>
+                    <a:bodyPr/>
+                    <a:lstStyle/>
+                    <a:p>
+                      <a:pPr algn="l"/>
+                      <a:r>
+                        <a:rPr sz="1000" b="0">
+                          <a:solidFill>
+                            <a:srgbClr val="1D1B43"/>
+                          </a:solidFill>
+                          <a:latin typeface="Calibri"/>
+                        </a:rPr>
+                        <a:t>35</a:t>
+                      </a:r>
+                    </a:p>
+                  </a:txBody>
+                  <a:tcPr>
+                    <a:solidFill>
+                      <a:srgbClr val="FFFFFF"/>
+                    </a:solidFill>
+                  </a:tcPr>
+                </a:tc>
+                <a:tc>
+                  <a:txBody>
+                    <a:bodyPr/>
+                    <a:lstStyle/>
+                    <a:p>
+                      <a:pPr algn="l"/>
+                      <a:r>
+                        <a:rPr sz="1000" b="0">
+                          <a:solidFill>
+                            <a:srgbClr val="1D1B43"/>
+                          </a:solidFill>
+                          <a:latin typeface="Calibri"/>
+                        </a:rPr>
+                        <a:t>4</a:t>
+                      </a:r>
+                    </a:p>
+                  </a:txBody>
+                  <a:tcPr>
+                    <a:solidFill>
+                      <a:srgbClr val="FFFFFF"/>
+                    </a:solidFill>
+                  </a:tcPr>
+                </a:tc>
+                <a:tc>
+                  <a:txBody>
+                    <a:bodyPr/>
+                    <a:lstStyle/>
+                    <a:p>
+                      <a:pPr algn="l"/>
+                      <a:r>
+                        <a:rPr sz="1000" b="0">
+                          <a:solidFill>
+                            <a:srgbClr val="1D1B43"/>
+                          </a:solidFill>
+                          <a:latin typeface="Calibri"/>
+                        </a:rPr>
+                        <a:t>89.7%</a:t>
+                      </a:r>
+                    </a:p>
+                  </a:txBody>
+                  <a:tcPr>
+                    <a:solidFill>
+                      <a:srgbClr val="FFFFFF"/>
+                    </a:solidFill>
+                  </a:tcPr>
+                </a:tc>
+              </a:tr>
+              <a:tr h="438912">
+                <a:tc>
+                  <a:txBody>
+                    <a:bodyPr/>
+                    <a:lstStyle/>
+                    <a:p>
+                      <a:pPr algn="l"/>
+                      <a:r>
+                        <a:rPr sz="1000" b="0">
+                          <a:solidFill>
+                            <a:srgbClr val="1D1B43"/>
+                          </a:solidFill>
+                          <a:latin typeface="Calibri"/>
+                        </a:rPr>
                         <a:t>Abril 2026</a:t>
                       </a:r>
                     </a:p>
                   </a:txBody>
                   <a:tcPr>
                     <a:solidFill>
-                      <a:srgbClr val="FFFFFF"/>
+                      <a:srgbClr val="F2F2F2"/>
                     </a:solidFill>
                   </a:tcPr>
                 </a:tc>
@@ -4909,7 +5038,7 @@
                   </a:txBody>
                   <a:tcPr>
                     <a:solidFill>
-                      <a:srgbClr val="FFFFFF"/>
+                      <a:srgbClr val="F2F2F2"/>
                     </a:solidFill>
                   </a:tcPr>
                 </a:tc>
@@ -4932,7 +5061,7 @@
                   </a:txBody>
                   <a:tcPr>
                     <a:solidFill>
-                      <a:srgbClr val="FFFFFF"/>
+                      <a:srgbClr val="F2F2F2"/>
                     </a:solidFill>
                   </a:tcPr>
                 </a:tc>
@@ -4955,7 +5084,7 @@
                   </a:txBody>
                   <a:tcPr>
                     <a:solidFill>
-                      <a:srgbClr val="FFFFFF"/>
+                      <a:srgbClr val="F2F2F2"/>
                     </a:solidFill>
                   </a:tcPr>
                 </a:tc>
@@ -4978,7 +5107,7 @@
                   </a:txBody>
                   <a:tcPr>
                     <a:solidFill>
-                      <a:srgbClr val="FFFFFF"/>
+                      <a:srgbClr val="F2F2F2"/>
                     </a:solidFill>
                   </a:tcPr>
                 </a:tc>

--- a/MRCEGLIA_IMPORTACAO_E_SERVICOS.pptx
+++ b/MRCEGLIA_IMPORTACAO_E_SERVICOS.pptx
@@ -11,6 +11,7 @@
     <p:sldId id="259" r:id="rId10"/>
     <p:sldId id="260" r:id="rId11"/>
     <p:sldId id="261" r:id="rId12"/>
+    <p:sldId id="262" r:id="rId13"/>
   </p:sldIdLst>
   <p:sldSz cx="12188952" cy="6858000" type="screen4x3"/>
   <p:notesSz cx="6858000" cy="9144000"/>
@@ -146,10 +147,10 @@
               <c:strCache>
                 <c:ptCount val="2"/>
                 <c:pt idx="0">
-                  <c:v>Maio 2026</c:v>
+                  <c:v>Abril 2026</c:v>
                 </c:pt>
                 <c:pt idx="1">
-                  <c:v>Abril 2026</c:v>
+                  <c:v>Maio 2026</c:v>
                 </c:pt>
               </c:strCache>
             </c:strRef>
@@ -161,10 +162,10 @@
                 <c:formatCode>General</c:formatCode>
                 <c:ptCount val="2"/>
                 <c:pt idx="0">
-                  <c:v>35</c:v>
+                  <c:v>34</c:v>
                 </c:pt>
                 <c:pt idx="1">
-                  <c:v>34</c:v>
+                  <c:v>37</c:v>
                 </c:pt>
               </c:numCache>
             </c:numRef>
@@ -195,10 +196,10 @@
               <c:strCache>
                 <c:ptCount val="2"/>
                 <c:pt idx="0">
-                  <c:v>Maio 2026</c:v>
+                  <c:v>Abril 2026</c:v>
                 </c:pt>
                 <c:pt idx="1">
-                  <c:v>Abril 2026</c:v>
+                  <c:v>Maio 2026</c:v>
                 </c:pt>
               </c:strCache>
             </c:strRef>
@@ -210,10 +211,10 @@
                 <c:formatCode>General</c:formatCode>
                 <c:ptCount val="2"/>
                 <c:pt idx="0">
-                  <c:v>4</c:v>
+                  <c:v>0</c:v>
                 </c:pt>
                 <c:pt idx="1">
-                  <c:v>0</c:v>
+                  <c:v>3</c:v>
                 </c:pt>
               </c:numCache>
             </c:numRef>
@@ -3386,7 +3387,7 @@
                 </a:solidFill>
                 <a:latin typeface="Calibri"/>
               </a:rPr>
-              <a:t>INDICADORES ABRIL 2026</a:t>
+              <a:t>INDICADORES MAIO 2026</a:t>
             </a:r>
           </a:p>
         </p:txBody>
@@ -3707,7 +3708,7 @@
                 </a:solidFill>
                 <a:latin typeface="Calibri"/>
               </a:rPr>
-              <a:t>34</a:t>
+              <a:t>40</a:t>
             </a:r>
           </a:p>
         </p:txBody>
@@ -3822,7 +3823,7 @@
                 </a:solidFill>
                 <a:latin typeface="Calibri"/>
               </a:rPr>
-              <a:t>34</a:t>
+              <a:t>37</a:t>
             </a:r>
           </a:p>
         </p:txBody>
@@ -3933,11 +3934,11 @@
             <a:r>
               <a:rPr sz="2800" b="1">
                 <a:solidFill>
-                  <a:srgbClr val="10B981"/>
+                  <a:srgbClr val="EF4444"/>
                 </a:solidFill>
                 <a:latin typeface="Calibri"/>
               </a:rPr>
-              <a:t>0</a:t>
+              <a:t>3</a:t>
             </a:r>
           </a:p>
         </p:txBody>
@@ -4048,11 +4049,11 @@
             <a:r>
               <a:rPr sz="2800" b="1">
                 <a:solidFill>
-                  <a:srgbClr val="10B981"/>
+                  <a:srgbClr val="F59E0B"/>
                 </a:solidFill>
                 <a:latin typeface="Calibri"/>
               </a:rPr>
-              <a:t>100.0%</a:t>
+              <a:t>92.5%</a:t>
             </a:r>
           </a:p>
         </p:txBody>
@@ -4153,30 +4154,30 @@
                           </a:solidFill>
                           <a:latin typeface="Calibri"/>
                         </a:rPr>
+                        <a:t>Abril 2026</a:t>
+                      </a:r>
+                    </a:p>
+                  </a:txBody>
+                  <a:tcPr>
+                    <a:solidFill>
+                      <a:srgbClr val="1D1B43"/>
+                    </a:solidFill>
+                  </a:tcPr>
+                </a:tc>
+                <a:tc>
+                  <a:txBody>
+                    <a:bodyPr/>
+                    <a:lstStyle/>
+                    <a:p>
+                      <a:pPr algn="ctr"/>
+                      <a:r>
+                        <a:rPr sz="1100" b="1">
+                          <a:solidFill>
+                            <a:srgbClr val="FFFFFF"/>
+                          </a:solidFill>
+                          <a:latin typeface="Calibri"/>
+                        </a:rPr>
                         <a:t>Maio 2026</a:t>
-                      </a:r>
-                    </a:p>
-                  </a:txBody>
-                  <a:tcPr>
-                    <a:solidFill>
-                      <a:srgbClr val="1D1B43"/>
-                    </a:solidFill>
-                  </a:tcPr>
-                </a:tc>
-                <a:tc>
-                  <a:txBody>
-                    <a:bodyPr/>
-                    <a:lstStyle/>
-                    <a:p>
-                      <a:pPr algn="ctr"/>
-                      <a:r>
-                        <a:rPr sz="1100" b="1">
-                          <a:solidFill>
-                            <a:srgbClr val="FFFFFF"/>
-                          </a:solidFill>
-                          <a:latin typeface="Calibri"/>
-                        </a:rPr>
-                        <a:t>Abril 2026</a:t>
                       </a:r>
                     </a:p>
                   </a:txBody>
@@ -4247,7 +4248,7 @@
                           </a:solidFill>
                           <a:latin typeface="Calibri"/>
                         </a:rPr>
-                        <a:t>39</a:t>
+                        <a:t>34</a:t>
                       </a:r>
                     </a:p>
                   </a:txBody>
@@ -4270,7 +4271,7 @@
                           </a:solidFill>
                           <a:latin typeface="Calibri"/>
                         </a:rPr>
-                        <a:t>34</a:t>
+                        <a:t>40</a:t>
                       </a:r>
                     </a:p>
                   </a:txBody>
@@ -4293,7 +4294,7 @@
                           </a:solidFill>
                           <a:latin typeface="Calibri"/>
                         </a:rPr>
-                        <a:t>- 5</a:t>
+                        <a:t>+ 6</a:t>
                       </a:r>
                     </a:p>
                   </a:txBody>
@@ -4341,7 +4342,7 @@
                           </a:solidFill>
                           <a:latin typeface="Calibri"/>
                         </a:rPr>
-                        <a:t>35</a:t>
+                        <a:t>34</a:t>
                       </a:r>
                     </a:p>
                   </a:txBody>
@@ -4364,7 +4365,7 @@
                           </a:solidFill>
                           <a:latin typeface="Calibri"/>
                         </a:rPr>
-                        <a:t>34</a:t>
+                        <a:t>37</a:t>
                       </a:r>
                     </a:p>
                   </a:txBody>
@@ -4387,7 +4388,7 @@
                           </a:solidFill>
                           <a:latin typeface="Calibri"/>
                         </a:rPr>
-                        <a:t>- 1</a:t>
+                        <a:t>+ 3</a:t>
                       </a:r>
                     </a:p>
                   </a:txBody>
@@ -4435,7 +4436,7 @@
                           </a:solidFill>
                           <a:latin typeface="Calibri"/>
                         </a:rPr>
-                        <a:t>4</a:t>
+                        <a:t>-</a:t>
                       </a:r>
                     </a:p>
                   </a:txBody>
@@ -4458,7 +4459,7 @@
                           </a:solidFill>
                           <a:latin typeface="Calibri"/>
                         </a:rPr>
-                        <a:t>0</a:t>
+                        <a:t>3</a:t>
                       </a:r>
                     </a:p>
                   </a:txBody>
@@ -4481,7 +4482,7 @@
                           </a:solidFill>
                           <a:latin typeface="Calibri"/>
                         </a:rPr>
-                        <a:t>- 4</a:t>
+                        <a:t>-</a:t>
                       </a:r>
                     </a:p>
                   </a:txBody>
@@ -4529,7 +4530,7 @@
                           </a:solidFill>
                           <a:latin typeface="Calibri"/>
                         </a:rPr>
-                        <a:t>89.7%</a:t>
+                        <a:t>100.0%</a:t>
                       </a:r>
                     </a:p>
                   </a:txBody>
@@ -4552,7 +4553,7 @@
                           </a:solidFill>
                           <a:latin typeface="Calibri"/>
                         </a:rPr>
-                        <a:t>100.0%</a:t>
+                        <a:t>92.5%</a:t>
                       </a:r>
                     </a:p>
                   </a:txBody>
@@ -4575,7 +4576,7 @@
                           </a:solidFill>
                           <a:latin typeface="Calibri"/>
                         </a:rPr>
-                        <a:t>+ 10.3pp</a:t>
+                        <a:t>- 7.5pp</a:t>
                       </a:r>
                     </a:p>
                   </a:txBody>
@@ -4892,7 +4893,7 @@
                           </a:solidFill>
                           <a:latin typeface="Calibri"/>
                         </a:rPr>
-                        <a:t>Maio 2026</a:t>
+                        <a:t>Abril 2026</a:t>
                       </a:r>
                     </a:p>
                   </a:txBody>
@@ -4915,7 +4916,7 @@
                           </a:solidFill>
                           <a:latin typeface="Calibri"/>
                         </a:rPr>
-                        <a:t>39</a:t>
+                        <a:t>34</a:t>
                       </a:r>
                     </a:p>
                   </a:txBody>
@@ -4938,7 +4939,7 @@
                           </a:solidFill>
                           <a:latin typeface="Calibri"/>
                         </a:rPr>
-                        <a:t>35</a:t>
+                        <a:t>34</a:t>
                       </a:r>
                     </a:p>
                   </a:txBody>
@@ -4961,7 +4962,7 @@
                           </a:solidFill>
                           <a:latin typeface="Calibri"/>
                         </a:rPr>
-                        <a:t>4</a:t>
+                        <a:t>0</a:t>
                       </a:r>
                     </a:p>
                   </a:txBody>
@@ -4984,7 +4985,7 @@
                           </a:solidFill>
                           <a:latin typeface="Calibri"/>
                         </a:rPr>
-                        <a:t>89.7%</a:t>
+                        <a:t>100.0%</a:t>
                       </a:r>
                     </a:p>
                   </a:txBody>
@@ -5009,7 +5010,7 @@
                           </a:solidFill>
                           <a:latin typeface="Calibri"/>
                         </a:rPr>
-                        <a:t>Abril 2026</a:t>
+                        <a:t>Maio 2026</a:t>
                       </a:r>
                     </a:p>
                   </a:txBody>
@@ -5032,7 +5033,7 @@
                           </a:solidFill>
                           <a:latin typeface="Calibri"/>
                         </a:rPr>
-                        <a:t>34</a:t>
+                        <a:t>40</a:t>
                       </a:r>
                     </a:p>
                   </a:txBody>
@@ -5055,7 +5056,7 @@
                           </a:solidFill>
                           <a:latin typeface="Calibri"/>
                         </a:rPr>
-                        <a:t>34</a:t>
+                        <a:t>37</a:t>
                       </a:r>
                     </a:p>
                   </a:txBody>
@@ -5078,7 +5079,7 @@
                           </a:solidFill>
                           <a:latin typeface="Calibri"/>
                         </a:rPr>
-                        <a:t>0</a:t>
+                        <a:t>3</a:t>
                       </a:r>
                     </a:p>
                   </a:txBody>
@@ -5101,7 +5102,7 @@
                           </a:solidFill>
                           <a:latin typeface="Calibri"/>
                         </a:rPr>
-                        <a:t>100.0%</a:t>
+                        <a:t>92.5%</a:t>
                       </a:r>
                     </a:p>
                   </a:txBody>
@@ -5189,7 +5190,7 @@
                 </a:solidFill>
                 <a:latin typeface="Calibri"/>
               </a:rPr>
-              <a:t>PERFORMANCE: 100.0% - EXCELENTE</a:t>
+              <a:t>PERFORMANCE: 92.5% - REGULAR</a:t>
             </a:r>
           </a:p>
         </p:txBody>
@@ -5253,7 +5254,7 @@
         <p:spPr>
           <a:xfrm>
             <a:off x="749808" y="502920"/>
-            <a:ext cx="9144000" cy="914400"/>
+            <a:ext cx="10058400" cy="914400"/>
           </a:xfrm>
           <a:prstGeom prst="rect">
             <a:avLst/>
@@ -5268,13 +5269,13 @@
           <a:p>
             <a:pPr algn="l"/>
             <a:r>
-              <a:rPr sz="4000" b="1">
+              <a:rPr sz="3200" b="1">
                 <a:solidFill>
                   <a:srgbClr val="F97316"/>
                 </a:solidFill>
                 <a:latin typeface="Calibri"/>
               </a:rPr>
-              <a:t>PERFORMANCE POR UF</a:t>
+              <a:t>OCORRENCIAS FORA DO PRAZO (3)</a:t>
             </a:r>
           </a:p>
         </p:txBody>
@@ -5287,7 +5288,7 @@
         </p:nvSpPr>
         <p:spPr>
           <a:xfrm>
-            <a:off x="749808" y="1719072"/>
+            <a:off x="749808" y="1600200"/>
             <a:ext cx="10424160" cy="36576"/>
           </a:xfrm>
           <a:prstGeom prst="rect">
@@ -5331,8 +5332,8 @@
           <p:nvPr/>
         </p:nvGraphicFramePr>
         <p:xfrm>
-          <a:off x="731520" y="1920240"/>
-          <a:ext cx="10698480" cy="4114800"/>
+          <a:off x="457200" y="1828800"/>
+          <a:ext cx="11429999" cy="1536192"/>
         </p:xfrm>
         <a:graphic>
           <a:graphicData uri="http://schemas.openxmlformats.org/drawingml/2006/table">
@@ -5341,14 +5342,13 @@
                 <a:tableStyleId>{5C22544A-7EE6-4342-B048-85BDC9FD1C3A}</a:tableStyleId>
               </a:tblPr>
               <a:tblGrid>
-                <a:gridCol w="1097280"/>
-                <a:gridCol w="1645920"/>
-                <a:gridCol w="1645920"/>
-                <a:gridCol w="1645920"/>
+                <a:gridCol w="1280160"/>
+                <a:gridCol w="3749039"/>
+                <a:gridCol w="2103120"/>
                 <a:gridCol w="1554480"/>
-                <a:gridCol w="3108960"/>
+                <a:gridCol w="2743200"/>
               </a:tblGrid>
-              <a:tr h="457200">
+              <a:tr h="384048">
                 <a:tc>
                   <a:txBody>
                     <a:bodyPr/>
@@ -5362,7 +5362,7 @@
                           </a:solidFill>
                           <a:latin typeface="Calibri"/>
                         </a:rPr>
-                        <a:t>UF</a:t>
+                        <a:t>MD</a:t>
                       </a:r>
                     </a:p>
                   </a:txBody>
@@ -5385,7 +5385,7 @@
                           </a:solidFill>
                           <a:latin typeface="Calibri"/>
                         </a:rPr>
-                        <a:t>TOTAL</a:t>
+                        <a:t>DESTINATARIO</a:t>
                       </a:r>
                     </a:p>
                   </a:txBody>
@@ -5408,7 +5408,7 @@
                           </a:solidFill>
                           <a:latin typeface="Calibri"/>
                         </a:rPr>
-                        <a:t>NO PRAZO</a:t>
+                        <a:t>CIDADE/UF</a:t>
                       </a:r>
                     </a:p>
                   </a:txBody>
@@ -5431,7 +5431,7 @@
                           </a:solidFill>
                           <a:latin typeface="Calibri"/>
                         </a:rPr>
-                        <a:t>FORA</a:t>
+                        <a:t>PREV. ENTREGA</a:t>
                       </a:r>
                     </a:p>
                   </a:txBody>
@@ -5454,7 +5454,7 @@
                           </a:solidFill>
                           <a:latin typeface="Calibri"/>
                         </a:rPr>
-                        <a:t>TAXA</a:t>
+                        <a:t>STATUS</a:t>
                       </a:r>
                     </a:p>
                   </a:txBody>
@@ -5464,45 +5464,22 @@
                     </a:solidFill>
                   </a:tcPr>
                 </a:tc>
-                <a:tc>
-                  <a:txBody>
-                    <a:bodyPr/>
-                    <a:lstStyle/>
-                    <a:p>
-                      <a:pPr algn="ctr"/>
-                      <a:r>
-                        <a:rPr sz="1100" b="1">
-                          <a:solidFill>
-                            <a:srgbClr val="FFFFFF"/>
-                          </a:solidFill>
-                          <a:latin typeface="Calibri"/>
-                        </a:rPr>
-                        <a:t>STATUS</a:t>
-                      </a:r>
-                    </a:p>
-                  </a:txBody>
-                  <a:tcPr>
-                    <a:solidFill>
-                      <a:srgbClr val="1D1B43"/>
-                    </a:solidFill>
-                  </a:tcPr>
-                </a:tc>
               </a:tr>
-              <a:tr h="457200">
-                <a:tc>
-                  <a:txBody>
-                    <a:bodyPr/>
-                    <a:lstStyle/>
-                    <a:p>
-                      <a:pPr algn="l"/>
-                      <a:r>
-                        <a:rPr sz="1000" b="0">
-                          <a:solidFill>
-                            <a:srgbClr val="1D1B43"/>
-                          </a:solidFill>
-                          <a:latin typeface="Calibri"/>
-                        </a:rPr>
-                        <a:t>SP</a:t>
+              <a:tr h="384048">
+                <a:tc>
+                  <a:txBody>
+                    <a:bodyPr/>
+                    <a:lstStyle/>
+                    <a:p>
+                      <a:pPr algn="l"/>
+                      <a:r>
+                        <a:rPr sz="1000" b="0">
+                          <a:solidFill>
+                            <a:srgbClr val="1D1B43"/>
+                          </a:solidFill>
+                          <a:latin typeface="Calibri"/>
+                        </a:rPr>
+                        <a:t>280714</a:t>
                       </a:r>
                     </a:p>
                   </a:txBody>
@@ -5525,7 +5502,7 @@
                           </a:solidFill>
                           <a:latin typeface="Calibri"/>
                         </a:rPr>
-                        <a:t>14</a:t>
+                        <a:t>ALBERTO ANDRES ANDRE - JOAO PESSOA / PB</a:t>
                       </a:r>
                     </a:p>
                   </a:txBody>
@@ -5548,7 +5525,7 @@
                           </a:solidFill>
                           <a:latin typeface="Calibri"/>
                         </a:rPr>
-                        <a:t>14</a:t>
+                        <a:t>JOAO PESSOA/PB</a:t>
                       </a:r>
                     </a:p>
                   </a:txBody>
@@ -5571,7 +5548,7 @@
                           </a:solidFill>
                           <a:latin typeface="Calibri"/>
                         </a:rPr>
-                        <a:t>0</a:t>
+                        <a:t>08/05/2026</a:t>
                       </a:r>
                     </a:p>
                   </a:txBody>
@@ -5594,7 +5571,7 @@
                           </a:solidFill>
                           <a:latin typeface="Calibri"/>
                         </a:rPr>
-                        <a:t>100.0%</a:t>
+                        <a:t>ENTREGUE FORA DO PRAZO</a:t>
                       </a:r>
                     </a:p>
                   </a:txBody>
@@ -5604,20 +5581,139 @@
                     </a:solidFill>
                   </a:tcPr>
                 </a:tc>
-                <a:tc>
-                  <a:txBody>
-                    <a:bodyPr/>
-                    <a:lstStyle/>
-                    <a:p>
-                      <a:pPr algn="l"/>
-                      <a:r>
-                        <a:rPr sz="1000" b="0">
-                          <a:solidFill>
-                            <a:srgbClr val="1D1B43"/>
-                          </a:solidFill>
-                          <a:latin typeface="Calibri"/>
-                        </a:rPr>
-                        <a:t>Excelente</a:t>
+              </a:tr>
+              <a:tr h="384048">
+                <a:tc>
+                  <a:txBody>
+                    <a:bodyPr/>
+                    <a:lstStyle/>
+                    <a:p>
+                      <a:pPr algn="l"/>
+                      <a:r>
+                        <a:rPr sz="1000" b="0">
+                          <a:solidFill>
+                            <a:srgbClr val="1D1B43"/>
+                          </a:solidFill>
+                          <a:latin typeface="Calibri"/>
+                        </a:rPr>
+                        <a:t>280719</a:t>
+                      </a:r>
+                    </a:p>
+                  </a:txBody>
+                  <a:tcPr>
+                    <a:solidFill>
+                      <a:srgbClr val="F2F2F2"/>
+                    </a:solidFill>
+                  </a:tcPr>
+                </a:tc>
+                <a:tc>
+                  <a:txBody>
+                    <a:bodyPr/>
+                    <a:lstStyle/>
+                    <a:p>
+                      <a:pPr algn="l"/>
+                      <a:r>
+                        <a:rPr sz="1000" b="0">
+                          <a:solidFill>
+                            <a:srgbClr val="1D1B43"/>
+                          </a:solidFill>
+                          <a:latin typeface="Calibri"/>
+                        </a:rPr>
+                        <a:t>PITINHO DE PALHA PRO - BRASILIA / DF</a:t>
+                      </a:r>
+                    </a:p>
+                  </a:txBody>
+                  <a:tcPr>
+                    <a:solidFill>
+                      <a:srgbClr val="F2F2F2"/>
+                    </a:solidFill>
+                  </a:tcPr>
+                </a:tc>
+                <a:tc>
+                  <a:txBody>
+                    <a:bodyPr/>
+                    <a:lstStyle/>
+                    <a:p>
+                      <a:pPr algn="l"/>
+                      <a:r>
+                        <a:rPr sz="1000" b="0">
+                          <a:solidFill>
+                            <a:srgbClr val="1D1B43"/>
+                          </a:solidFill>
+                          <a:latin typeface="Calibri"/>
+                        </a:rPr>
+                        <a:t>BRASILIA/DF</a:t>
+                      </a:r>
+                    </a:p>
+                  </a:txBody>
+                  <a:tcPr>
+                    <a:solidFill>
+                      <a:srgbClr val="F2F2F2"/>
+                    </a:solidFill>
+                  </a:tcPr>
+                </a:tc>
+                <a:tc>
+                  <a:txBody>
+                    <a:bodyPr/>
+                    <a:lstStyle/>
+                    <a:p>
+                      <a:pPr algn="l"/>
+                      <a:r>
+                        <a:rPr sz="1000" b="0">
+                          <a:solidFill>
+                            <a:srgbClr val="1D1B43"/>
+                          </a:solidFill>
+                          <a:latin typeface="Calibri"/>
+                        </a:rPr>
+                        <a:t>08/05/2026</a:t>
+                      </a:r>
+                    </a:p>
+                  </a:txBody>
+                  <a:tcPr>
+                    <a:solidFill>
+                      <a:srgbClr val="F2F2F2"/>
+                    </a:solidFill>
+                  </a:tcPr>
+                </a:tc>
+                <a:tc>
+                  <a:txBody>
+                    <a:bodyPr/>
+                    <a:lstStyle/>
+                    <a:p>
+                      <a:pPr algn="l"/>
+                      <a:r>
+                        <a:rPr sz="1000" b="0">
+                          <a:solidFill>
+                            <a:srgbClr val="1D1B43"/>
+                          </a:solidFill>
+                          <a:latin typeface="Calibri"/>
+                        </a:rPr>
+                        <a:t>ENTREGUE FORA DO PRAZO</a:t>
+                      </a:r>
+                    </a:p>
+                  </a:txBody>
+                  <a:tcPr>
+                    <a:solidFill>
+                      <a:srgbClr val="F2F2F2"/>
+                    </a:solidFill>
+                  </a:tcPr>
+                </a:tc>
+              </a:tr>
+              <a:tr h="384048">
+                <a:tc>
+                  <a:txBody>
+                    <a:bodyPr/>
+                    <a:lstStyle/>
+                    <a:p>
+                      <a:pPr algn="l"/>
+                      <a:r>
+                        <a:rPr sz="1000" b="0">
+                          <a:solidFill>
+                            <a:srgbClr val="1D1B43"/>
+                          </a:solidFill>
+                          <a:latin typeface="Calibri"/>
+                        </a:rPr>
+                        <a:t>282336</a:t>
                       </a:r>
                     </a:p>
                   </a:txBody>
@@ -5627,162 +5723,20 @@
                     </a:solidFill>
                   </a:tcPr>
                 </a:tc>
-              </a:tr>
-              <a:tr h="457200">
-                <a:tc>
-                  <a:txBody>
-                    <a:bodyPr/>
-                    <a:lstStyle/>
-                    <a:p>
-                      <a:pPr algn="l"/>
-                      <a:r>
-                        <a:rPr sz="1000" b="0">
-                          <a:solidFill>
-                            <a:srgbClr val="1D1B43"/>
-                          </a:solidFill>
-                          <a:latin typeface="Calibri"/>
-                        </a:rPr>
-                        <a:t>RJ</a:t>
-                      </a:r>
-                    </a:p>
-                  </a:txBody>
-                  <a:tcPr>
-                    <a:solidFill>
-                      <a:srgbClr val="F2F2F2"/>
-                    </a:solidFill>
-                  </a:tcPr>
-                </a:tc>
-                <a:tc>
-                  <a:txBody>
-                    <a:bodyPr/>
-                    <a:lstStyle/>
-                    <a:p>
-                      <a:pPr algn="l"/>
-                      <a:r>
-                        <a:rPr sz="1000" b="0">
-                          <a:solidFill>
-                            <a:srgbClr val="1D1B43"/>
-                          </a:solidFill>
-                          <a:latin typeface="Calibri"/>
-                        </a:rPr>
-                        <a:t>6</a:t>
-                      </a:r>
-                    </a:p>
-                  </a:txBody>
-                  <a:tcPr>
-                    <a:solidFill>
-                      <a:srgbClr val="F2F2F2"/>
-                    </a:solidFill>
-                  </a:tcPr>
-                </a:tc>
-                <a:tc>
-                  <a:txBody>
-                    <a:bodyPr/>
-                    <a:lstStyle/>
-                    <a:p>
-                      <a:pPr algn="l"/>
-                      <a:r>
-                        <a:rPr sz="1000" b="0">
-                          <a:solidFill>
-                            <a:srgbClr val="1D1B43"/>
-                          </a:solidFill>
-                          <a:latin typeface="Calibri"/>
-                        </a:rPr>
-                        <a:t>6</a:t>
-                      </a:r>
-                    </a:p>
-                  </a:txBody>
-                  <a:tcPr>
-                    <a:solidFill>
-                      <a:srgbClr val="F2F2F2"/>
-                    </a:solidFill>
-                  </a:tcPr>
-                </a:tc>
-                <a:tc>
-                  <a:txBody>
-                    <a:bodyPr/>
-                    <a:lstStyle/>
-                    <a:p>
-                      <a:pPr algn="l"/>
-                      <a:r>
-                        <a:rPr sz="1000" b="0">
-                          <a:solidFill>
-                            <a:srgbClr val="1D1B43"/>
-                          </a:solidFill>
-                          <a:latin typeface="Calibri"/>
-                        </a:rPr>
-                        <a:t>0</a:t>
-                      </a:r>
-                    </a:p>
-                  </a:txBody>
-                  <a:tcPr>
-                    <a:solidFill>
-                      <a:srgbClr val="F2F2F2"/>
-                    </a:solidFill>
-                  </a:tcPr>
-                </a:tc>
-                <a:tc>
-                  <a:txBody>
-                    <a:bodyPr/>
-                    <a:lstStyle/>
-                    <a:p>
-                      <a:pPr algn="l"/>
-                      <a:r>
-                        <a:rPr sz="1000" b="0">
-                          <a:solidFill>
-                            <a:srgbClr val="1D1B43"/>
-                          </a:solidFill>
-                          <a:latin typeface="Calibri"/>
-                        </a:rPr>
-                        <a:t>100.0%</a:t>
-                      </a:r>
-                    </a:p>
-                  </a:txBody>
-                  <a:tcPr>
-                    <a:solidFill>
-                      <a:srgbClr val="F2F2F2"/>
-                    </a:solidFill>
-                  </a:tcPr>
-                </a:tc>
-                <a:tc>
-                  <a:txBody>
-                    <a:bodyPr/>
-                    <a:lstStyle/>
-                    <a:p>
-                      <a:pPr algn="l"/>
-                      <a:r>
-                        <a:rPr sz="1000" b="0">
-                          <a:solidFill>
-                            <a:srgbClr val="1D1B43"/>
-                          </a:solidFill>
-                          <a:latin typeface="Calibri"/>
-                        </a:rPr>
-                        <a:t>Excelente</a:t>
-                      </a:r>
-                    </a:p>
-                  </a:txBody>
-                  <a:tcPr>
-                    <a:solidFill>
-                      <a:srgbClr val="F2F2F2"/>
-                    </a:solidFill>
-                  </a:tcPr>
-                </a:tc>
-              </a:tr>
-              <a:tr h="457200">
-                <a:tc>
-                  <a:txBody>
-                    <a:bodyPr/>
-                    <a:lstStyle/>
-                    <a:p>
-                      <a:pPr algn="l"/>
-                      <a:r>
-                        <a:rPr sz="1000" b="0">
-                          <a:solidFill>
-                            <a:srgbClr val="1D1B43"/>
-                          </a:solidFill>
-                          <a:latin typeface="Calibri"/>
-                        </a:rPr>
-                        <a:t>SC</a:t>
+                <a:tc>
+                  <a:txBody>
+                    <a:bodyPr/>
+                    <a:lstStyle/>
+                    <a:p>
+                      <a:pPr algn="l"/>
+                      <a:r>
+                        <a:rPr sz="1000" b="0">
+                          <a:solidFill>
+                            <a:srgbClr val="1D1B43"/>
+                          </a:solidFill>
+                          <a:latin typeface="Calibri"/>
+                        </a:rPr>
+                        <a:t>TABACARIA HIJAZI - SAO LUIZ / MA</a:t>
                       </a:r>
                     </a:p>
                   </a:txBody>
@@ -5805,7 +5759,7 @@
                           </a:solidFill>
                           <a:latin typeface="Calibri"/>
                         </a:rPr>
-                        <a:t>6</a:t>
+                        <a:t>SAO LUIZ/MA</a:t>
                       </a:r>
                     </a:p>
                   </a:txBody>
@@ -5828,7 +5782,7 @@
                           </a:solidFill>
                           <a:latin typeface="Calibri"/>
                         </a:rPr>
-                        <a:t>6</a:t>
+                        <a:t>19/05/2026</a:t>
                       </a:r>
                     </a:p>
                   </a:txBody>
@@ -5851,759 +5805,13 @@
                           </a:solidFill>
                           <a:latin typeface="Calibri"/>
                         </a:rPr>
-                        <a:t>0</a:t>
+                        <a:t>ENTREGUE FORA DO PRAZO</a:t>
                       </a:r>
                     </a:p>
                   </a:txBody>
                   <a:tcPr>
                     <a:solidFill>
                       <a:srgbClr val="FFFFFF"/>
-                    </a:solidFill>
-                  </a:tcPr>
-                </a:tc>
-                <a:tc>
-                  <a:txBody>
-                    <a:bodyPr/>
-                    <a:lstStyle/>
-                    <a:p>
-                      <a:pPr algn="l"/>
-                      <a:r>
-                        <a:rPr sz="1000" b="0">
-                          <a:solidFill>
-                            <a:srgbClr val="1D1B43"/>
-                          </a:solidFill>
-                          <a:latin typeface="Calibri"/>
-                        </a:rPr>
-                        <a:t>100.0%</a:t>
-                      </a:r>
-                    </a:p>
-                  </a:txBody>
-                  <a:tcPr>
-                    <a:solidFill>
-                      <a:srgbClr val="FFFFFF"/>
-                    </a:solidFill>
-                  </a:tcPr>
-                </a:tc>
-                <a:tc>
-                  <a:txBody>
-                    <a:bodyPr/>
-                    <a:lstStyle/>
-                    <a:p>
-                      <a:pPr algn="l"/>
-                      <a:r>
-                        <a:rPr sz="1000" b="0">
-                          <a:solidFill>
-                            <a:srgbClr val="1D1B43"/>
-                          </a:solidFill>
-                          <a:latin typeface="Calibri"/>
-                        </a:rPr>
-                        <a:t>Excelente</a:t>
-                      </a:r>
-                    </a:p>
-                  </a:txBody>
-                  <a:tcPr>
-                    <a:solidFill>
-                      <a:srgbClr val="FFFFFF"/>
-                    </a:solidFill>
-                  </a:tcPr>
-                </a:tc>
-              </a:tr>
-              <a:tr h="457200">
-                <a:tc>
-                  <a:txBody>
-                    <a:bodyPr/>
-                    <a:lstStyle/>
-                    <a:p>
-                      <a:pPr algn="l"/>
-                      <a:r>
-                        <a:rPr sz="1000" b="0">
-                          <a:solidFill>
-                            <a:srgbClr val="1D1B43"/>
-                          </a:solidFill>
-                          <a:latin typeface="Calibri"/>
-                        </a:rPr>
-                        <a:t>RS</a:t>
-                      </a:r>
-                    </a:p>
-                  </a:txBody>
-                  <a:tcPr>
-                    <a:solidFill>
-                      <a:srgbClr val="F2F2F2"/>
-                    </a:solidFill>
-                  </a:tcPr>
-                </a:tc>
-                <a:tc>
-                  <a:txBody>
-                    <a:bodyPr/>
-                    <a:lstStyle/>
-                    <a:p>
-                      <a:pPr algn="l"/>
-                      <a:r>
-                        <a:rPr sz="1000" b="0">
-                          <a:solidFill>
-                            <a:srgbClr val="1D1B43"/>
-                          </a:solidFill>
-                          <a:latin typeface="Calibri"/>
-                        </a:rPr>
-                        <a:t>3</a:t>
-                      </a:r>
-                    </a:p>
-                  </a:txBody>
-                  <a:tcPr>
-                    <a:solidFill>
-                      <a:srgbClr val="F2F2F2"/>
-                    </a:solidFill>
-                  </a:tcPr>
-                </a:tc>
-                <a:tc>
-                  <a:txBody>
-                    <a:bodyPr/>
-                    <a:lstStyle/>
-                    <a:p>
-                      <a:pPr algn="l"/>
-                      <a:r>
-                        <a:rPr sz="1000" b="0">
-                          <a:solidFill>
-                            <a:srgbClr val="1D1B43"/>
-                          </a:solidFill>
-                          <a:latin typeface="Calibri"/>
-                        </a:rPr>
-                        <a:t>3</a:t>
-                      </a:r>
-                    </a:p>
-                  </a:txBody>
-                  <a:tcPr>
-                    <a:solidFill>
-                      <a:srgbClr val="F2F2F2"/>
-                    </a:solidFill>
-                  </a:tcPr>
-                </a:tc>
-                <a:tc>
-                  <a:txBody>
-                    <a:bodyPr/>
-                    <a:lstStyle/>
-                    <a:p>
-                      <a:pPr algn="l"/>
-                      <a:r>
-                        <a:rPr sz="1000" b="0">
-                          <a:solidFill>
-                            <a:srgbClr val="1D1B43"/>
-                          </a:solidFill>
-                          <a:latin typeface="Calibri"/>
-                        </a:rPr>
-                        <a:t>0</a:t>
-                      </a:r>
-                    </a:p>
-                  </a:txBody>
-                  <a:tcPr>
-                    <a:solidFill>
-                      <a:srgbClr val="F2F2F2"/>
-                    </a:solidFill>
-                  </a:tcPr>
-                </a:tc>
-                <a:tc>
-                  <a:txBody>
-                    <a:bodyPr/>
-                    <a:lstStyle/>
-                    <a:p>
-                      <a:pPr algn="l"/>
-                      <a:r>
-                        <a:rPr sz="1000" b="0">
-                          <a:solidFill>
-                            <a:srgbClr val="1D1B43"/>
-                          </a:solidFill>
-                          <a:latin typeface="Calibri"/>
-                        </a:rPr>
-                        <a:t>100.0%</a:t>
-                      </a:r>
-                    </a:p>
-                  </a:txBody>
-                  <a:tcPr>
-                    <a:solidFill>
-                      <a:srgbClr val="F2F2F2"/>
-                    </a:solidFill>
-                  </a:tcPr>
-                </a:tc>
-                <a:tc>
-                  <a:txBody>
-                    <a:bodyPr/>
-                    <a:lstStyle/>
-                    <a:p>
-                      <a:pPr algn="l"/>
-                      <a:r>
-                        <a:rPr sz="1000" b="0">
-                          <a:solidFill>
-                            <a:srgbClr val="1D1B43"/>
-                          </a:solidFill>
-                          <a:latin typeface="Calibri"/>
-                        </a:rPr>
-                        <a:t>Excelente</a:t>
-                      </a:r>
-                    </a:p>
-                  </a:txBody>
-                  <a:tcPr>
-                    <a:solidFill>
-                      <a:srgbClr val="F2F2F2"/>
-                    </a:solidFill>
-                  </a:tcPr>
-                </a:tc>
-              </a:tr>
-              <a:tr h="457200">
-                <a:tc>
-                  <a:txBody>
-                    <a:bodyPr/>
-                    <a:lstStyle/>
-                    <a:p>
-                      <a:pPr algn="l"/>
-                      <a:r>
-                        <a:rPr sz="1000" b="0">
-                          <a:solidFill>
-                            <a:srgbClr val="1D1B43"/>
-                          </a:solidFill>
-                          <a:latin typeface="Calibri"/>
-                        </a:rPr>
-                        <a:t>GO</a:t>
-                      </a:r>
-                    </a:p>
-                  </a:txBody>
-                  <a:tcPr>
-                    <a:solidFill>
-                      <a:srgbClr val="FFFFFF"/>
-                    </a:solidFill>
-                  </a:tcPr>
-                </a:tc>
-                <a:tc>
-                  <a:txBody>
-                    <a:bodyPr/>
-                    <a:lstStyle/>
-                    <a:p>
-                      <a:pPr algn="l"/>
-                      <a:r>
-                        <a:rPr sz="1000" b="0">
-                          <a:solidFill>
-                            <a:srgbClr val="1D1B43"/>
-                          </a:solidFill>
-                          <a:latin typeface="Calibri"/>
-                        </a:rPr>
-                        <a:t>2</a:t>
-                      </a:r>
-                    </a:p>
-                  </a:txBody>
-                  <a:tcPr>
-                    <a:solidFill>
-                      <a:srgbClr val="FFFFFF"/>
-                    </a:solidFill>
-                  </a:tcPr>
-                </a:tc>
-                <a:tc>
-                  <a:txBody>
-                    <a:bodyPr/>
-                    <a:lstStyle/>
-                    <a:p>
-                      <a:pPr algn="l"/>
-                      <a:r>
-                        <a:rPr sz="1000" b="0">
-                          <a:solidFill>
-                            <a:srgbClr val="1D1B43"/>
-                          </a:solidFill>
-                          <a:latin typeface="Calibri"/>
-                        </a:rPr>
-                        <a:t>2</a:t>
-                      </a:r>
-                    </a:p>
-                  </a:txBody>
-                  <a:tcPr>
-                    <a:solidFill>
-                      <a:srgbClr val="FFFFFF"/>
-                    </a:solidFill>
-                  </a:tcPr>
-                </a:tc>
-                <a:tc>
-                  <a:txBody>
-                    <a:bodyPr/>
-                    <a:lstStyle/>
-                    <a:p>
-                      <a:pPr algn="l"/>
-                      <a:r>
-                        <a:rPr sz="1000" b="0">
-                          <a:solidFill>
-                            <a:srgbClr val="1D1B43"/>
-                          </a:solidFill>
-                          <a:latin typeface="Calibri"/>
-                        </a:rPr>
-                        <a:t>0</a:t>
-                      </a:r>
-                    </a:p>
-                  </a:txBody>
-                  <a:tcPr>
-                    <a:solidFill>
-                      <a:srgbClr val="FFFFFF"/>
-                    </a:solidFill>
-                  </a:tcPr>
-                </a:tc>
-                <a:tc>
-                  <a:txBody>
-                    <a:bodyPr/>
-                    <a:lstStyle/>
-                    <a:p>
-                      <a:pPr algn="l"/>
-                      <a:r>
-                        <a:rPr sz="1000" b="0">
-                          <a:solidFill>
-                            <a:srgbClr val="1D1B43"/>
-                          </a:solidFill>
-                          <a:latin typeface="Calibri"/>
-                        </a:rPr>
-                        <a:t>100.0%</a:t>
-                      </a:r>
-                    </a:p>
-                  </a:txBody>
-                  <a:tcPr>
-                    <a:solidFill>
-                      <a:srgbClr val="FFFFFF"/>
-                    </a:solidFill>
-                  </a:tcPr>
-                </a:tc>
-                <a:tc>
-                  <a:txBody>
-                    <a:bodyPr/>
-                    <a:lstStyle/>
-                    <a:p>
-                      <a:pPr algn="l"/>
-                      <a:r>
-                        <a:rPr sz="1000" b="0">
-                          <a:solidFill>
-                            <a:srgbClr val="1D1B43"/>
-                          </a:solidFill>
-                          <a:latin typeface="Calibri"/>
-                        </a:rPr>
-                        <a:t>Excelente</a:t>
-                      </a:r>
-                    </a:p>
-                  </a:txBody>
-                  <a:tcPr>
-                    <a:solidFill>
-                      <a:srgbClr val="FFFFFF"/>
-                    </a:solidFill>
-                  </a:tcPr>
-                </a:tc>
-              </a:tr>
-              <a:tr h="457200">
-                <a:tc>
-                  <a:txBody>
-                    <a:bodyPr/>
-                    <a:lstStyle/>
-                    <a:p>
-                      <a:pPr algn="l"/>
-                      <a:r>
-                        <a:rPr sz="1000" b="0">
-                          <a:solidFill>
-                            <a:srgbClr val="1D1B43"/>
-                          </a:solidFill>
-                          <a:latin typeface="Calibri"/>
-                        </a:rPr>
-                        <a:t>PE</a:t>
-                      </a:r>
-                    </a:p>
-                  </a:txBody>
-                  <a:tcPr>
-                    <a:solidFill>
-                      <a:srgbClr val="F2F2F2"/>
-                    </a:solidFill>
-                  </a:tcPr>
-                </a:tc>
-                <a:tc>
-                  <a:txBody>
-                    <a:bodyPr/>
-                    <a:lstStyle/>
-                    <a:p>
-                      <a:pPr algn="l"/>
-                      <a:r>
-                        <a:rPr sz="1000" b="0">
-                          <a:solidFill>
-                            <a:srgbClr val="1D1B43"/>
-                          </a:solidFill>
-                          <a:latin typeface="Calibri"/>
-                        </a:rPr>
-                        <a:t>1</a:t>
-                      </a:r>
-                    </a:p>
-                  </a:txBody>
-                  <a:tcPr>
-                    <a:solidFill>
-                      <a:srgbClr val="F2F2F2"/>
-                    </a:solidFill>
-                  </a:tcPr>
-                </a:tc>
-                <a:tc>
-                  <a:txBody>
-                    <a:bodyPr/>
-                    <a:lstStyle/>
-                    <a:p>
-                      <a:pPr algn="l"/>
-                      <a:r>
-                        <a:rPr sz="1000" b="0">
-                          <a:solidFill>
-                            <a:srgbClr val="1D1B43"/>
-                          </a:solidFill>
-                          <a:latin typeface="Calibri"/>
-                        </a:rPr>
-                        <a:t>1</a:t>
-                      </a:r>
-                    </a:p>
-                  </a:txBody>
-                  <a:tcPr>
-                    <a:solidFill>
-                      <a:srgbClr val="F2F2F2"/>
-                    </a:solidFill>
-                  </a:tcPr>
-                </a:tc>
-                <a:tc>
-                  <a:txBody>
-                    <a:bodyPr/>
-                    <a:lstStyle/>
-                    <a:p>
-                      <a:pPr algn="l"/>
-                      <a:r>
-                        <a:rPr sz="1000" b="0">
-                          <a:solidFill>
-                            <a:srgbClr val="1D1B43"/>
-                          </a:solidFill>
-                          <a:latin typeface="Calibri"/>
-                        </a:rPr>
-                        <a:t>0</a:t>
-                      </a:r>
-                    </a:p>
-                  </a:txBody>
-                  <a:tcPr>
-                    <a:solidFill>
-                      <a:srgbClr val="F2F2F2"/>
-                    </a:solidFill>
-                  </a:tcPr>
-                </a:tc>
-                <a:tc>
-                  <a:txBody>
-                    <a:bodyPr/>
-                    <a:lstStyle/>
-                    <a:p>
-                      <a:pPr algn="l"/>
-                      <a:r>
-                        <a:rPr sz="1000" b="0">
-                          <a:solidFill>
-                            <a:srgbClr val="1D1B43"/>
-                          </a:solidFill>
-                          <a:latin typeface="Calibri"/>
-                        </a:rPr>
-                        <a:t>100.0%</a:t>
-                      </a:r>
-                    </a:p>
-                  </a:txBody>
-                  <a:tcPr>
-                    <a:solidFill>
-                      <a:srgbClr val="F2F2F2"/>
-                    </a:solidFill>
-                  </a:tcPr>
-                </a:tc>
-                <a:tc>
-                  <a:txBody>
-                    <a:bodyPr/>
-                    <a:lstStyle/>
-                    <a:p>
-                      <a:pPr algn="l"/>
-                      <a:r>
-                        <a:rPr sz="1000" b="0">
-                          <a:solidFill>
-                            <a:srgbClr val="1D1B43"/>
-                          </a:solidFill>
-                          <a:latin typeface="Calibri"/>
-                        </a:rPr>
-                        <a:t>Excelente</a:t>
-                      </a:r>
-                    </a:p>
-                  </a:txBody>
-                  <a:tcPr>
-                    <a:solidFill>
-                      <a:srgbClr val="F2F2F2"/>
-                    </a:solidFill>
-                  </a:tcPr>
-                </a:tc>
-              </a:tr>
-              <a:tr h="457200">
-                <a:tc>
-                  <a:txBody>
-                    <a:bodyPr/>
-                    <a:lstStyle/>
-                    <a:p>
-                      <a:pPr algn="l"/>
-                      <a:r>
-                        <a:rPr sz="1000" b="0">
-                          <a:solidFill>
-                            <a:srgbClr val="1D1B43"/>
-                          </a:solidFill>
-                          <a:latin typeface="Calibri"/>
-                        </a:rPr>
-                        <a:t>BA</a:t>
-                      </a:r>
-                    </a:p>
-                  </a:txBody>
-                  <a:tcPr>
-                    <a:solidFill>
-                      <a:srgbClr val="FFFFFF"/>
-                    </a:solidFill>
-                  </a:tcPr>
-                </a:tc>
-                <a:tc>
-                  <a:txBody>
-                    <a:bodyPr/>
-                    <a:lstStyle/>
-                    <a:p>
-                      <a:pPr algn="l"/>
-                      <a:r>
-                        <a:rPr sz="1000" b="0">
-                          <a:solidFill>
-                            <a:srgbClr val="1D1B43"/>
-                          </a:solidFill>
-                          <a:latin typeface="Calibri"/>
-                        </a:rPr>
-                        <a:t>1</a:t>
-                      </a:r>
-                    </a:p>
-                  </a:txBody>
-                  <a:tcPr>
-                    <a:solidFill>
-                      <a:srgbClr val="FFFFFF"/>
-                    </a:solidFill>
-                  </a:tcPr>
-                </a:tc>
-                <a:tc>
-                  <a:txBody>
-                    <a:bodyPr/>
-                    <a:lstStyle/>
-                    <a:p>
-                      <a:pPr algn="l"/>
-                      <a:r>
-                        <a:rPr sz="1000" b="0">
-                          <a:solidFill>
-                            <a:srgbClr val="1D1B43"/>
-                          </a:solidFill>
-                          <a:latin typeface="Calibri"/>
-                        </a:rPr>
-                        <a:t>1</a:t>
-                      </a:r>
-                    </a:p>
-                  </a:txBody>
-                  <a:tcPr>
-                    <a:solidFill>
-                      <a:srgbClr val="FFFFFF"/>
-                    </a:solidFill>
-                  </a:tcPr>
-                </a:tc>
-                <a:tc>
-                  <a:txBody>
-                    <a:bodyPr/>
-                    <a:lstStyle/>
-                    <a:p>
-                      <a:pPr algn="l"/>
-                      <a:r>
-                        <a:rPr sz="1000" b="0">
-                          <a:solidFill>
-                            <a:srgbClr val="1D1B43"/>
-                          </a:solidFill>
-                          <a:latin typeface="Calibri"/>
-                        </a:rPr>
-                        <a:t>0</a:t>
-                      </a:r>
-                    </a:p>
-                  </a:txBody>
-                  <a:tcPr>
-                    <a:solidFill>
-                      <a:srgbClr val="FFFFFF"/>
-                    </a:solidFill>
-                  </a:tcPr>
-                </a:tc>
-                <a:tc>
-                  <a:txBody>
-                    <a:bodyPr/>
-                    <a:lstStyle/>
-                    <a:p>
-                      <a:pPr algn="l"/>
-                      <a:r>
-                        <a:rPr sz="1000" b="0">
-                          <a:solidFill>
-                            <a:srgbClr val="1D1B43"/>
-                          </a:solidFill>
-                          <a:latin typeface="Calibri"/>
-                        </a:rPr>
-                        <a:t>100.0%</a:t>
-                      </a:r>
-                    </a:p>
-                  </a:txBody>
-                  <a:tcPr>
-                    <a:solidFill>
-                      <a:srgbClr val="FFFFFF"/>
-                    </a:solidFill>
-                  </a:tcPr>
-                </a:tc>
-                <a:tc>
-                  <a:txBody>
-                    <a:bodyPr/>
-                    <a:lstStyle/>
-                    <a:p>
-                      <a:pPr algn="l"/>
-                      <a:r>
-                        <a:rPr sz="1000" b="0">
-                          <a:solidFill>
-                            <a:srgbClr val="1D1B43"/>
-                          </a:solidFill>
-                          <a:latin typeface="Calibri"/>
-                        </a:rPr>
-                        <a:t>Excelente</a:t>
-                      </a:r>
-                    </a:p>
-                  </a:txBody>
-                  <a:tcPr>
-                    <a:solidFill>
-                      <a:srgbClr val="FFFFFF"/>
-                    </a:solidFill>
-                  </a:tcPr>
-                </a:tc>
-              </a:tr>
-              <a:tr h="457200">
-                <a:tc>
-                  <a:txBody>
-                    <a:bodyPr/>
-                    <a:lstStyle/>
-                    <a:p>
-                      <a:pPr algn="l"/>
-                      <a:r>
-                        <a:rPr sz="1000" b="0">
-                          <a:solidFill>
-                            <a:srgbClr val="1D1B43"/>
-                          </a:solidFill>
-                          <a:latin typeface="Calibri"/>
-                        </a:rPr>
-                        <a:t>DF</a:t>
-                      </a:r>
-                    </a:p>
-                  </a:txBody>
-                  <a:tcPr>
-                    <a:solidFill>
-                      <a:srgbClr val="F2F2F2"/>
-                    </a:solidFill>
-                  </a:tcPr>
-                </a:tc>
-                <a:tc>
-                  <a:txBody>
-                    <a:bodyPr/>
-                    <a:lstStyle/>
-                    <a:p>
-                      <a:pPr algn="l"/>
-                      <a:r>
-                        <a:rPr sz="1000" b="0">
-                          <a:solidFill>
-                            <a:srgbClr val="1D1B43"/>
-                          </a:solidFill>
-                          <a:latin typeface="Calibri"/>
-                        </a:rPr>
-                        <a:t>1</a:t>
-                      </a:r>
-                    </a:p>
-                  </a:txBody>
-                  <a:tcPr>
-                    <a:solidFill>
-                      <a:srgbClr val="F2F2F2"/>
-                    </a:solidFill>
-                  </a:tcPr>
-                </a:tc>
-                <a:tc>
-                  <a:txBody>
-                    <a:bodyPr/>
-                    <a:lstStyle/>
-                    <a:p>
-                      <a:pPr algn="l"/>
-                      <a:r>
-                        <a:rPr sz="1000" b="0">
-                          <a:solidFill>
-                            <a:srgbClr val="1D1B43"/>
-                          </a:solidFill>
-                          <a:latin typeface="Calibri"/>
-                        </a:rPr>
-                        <a:t>1</a:t>
-                      </a:r>
-                    </a:p>
-                  </a:txBody>
-                  <a:tcPr>
-                    <a:solidFill>
-                      <a:srgbClr val="F2F2F2"/>
-                    </a:solidFill>
-                  </a:tcPr>
-                </a:tc>
-                <a:tc>
-                  <a:txBody>
-                    <a:bodyPr/>
-                    <a:lstStyle/>
-                    <a:p>
-                      <a:pPr algn="l"/>
-                      <a:r>
-                        <a:rPr sz="1000" b="0">
-                          <a:solidFill>
-                            <a:srgbClr val="1D1B43"/>
-                          </a:solidFill>
-                          <a:latin typeface="Calibri"/>
-                        </a:rPr>
-                        <a:t>0</a:t>
-                      </a:r>
-                    </a:p>
-                  </a:txBody>
-                  <a:tcPr>
-                    <a:solidFill>
-                      <a:srgbClr val="F2F2F2"/>
-                    </a:solidFill>
-                  </a:tcPr>
-                </a:tc>
-                <a:tc>
-                  <a:txBody>
-                    <a:bodyPr/>
-                    <a:lstStyle/>
-                    <a:p>
-                      <a:pPr algn="l"/>
-                      <a:r>
-                        <a:rPr sz="1000" b="0">
-                          <a:solidFill>
-                            <a:srgbClr val="1D1B43"/>
-                          </a:solidFill>
-                          <a:latin typeface="Calibri"/>
-                        </a:rPr>
-                        <a:t>100.0%</a:t>
-                      </a:r>
-                    </a:p>
-                  </a:txBody>
-                  <a:tcPr>
-                    <a:solidFill>
-                      <a:srgbClr val="F2F2F2"/>
-                    </a:solidFill>
-                  </a:tcPr>
-                </a:tc>
-                <a:tc>
-                  <a:txBody>
-                    <a:bodyPr/>
-                    <a:lstStyle/>
-                    <a:p>
-                      <a:pPr algn="l"/>
-                      <a:r>
-                        <a:rPr sz="1000" b="0">
-                          <a:solidFill>
-                            <a:srgbClr val="1D1B43"/>
-                          </a:solidFill>
-                          <a:latin typeface="Calibri"/>
-                        </a:rPr>
-                        <a:t>Excelente</a:t>
-                      </a:r>
-                    </a:p>
-                  </a:txBody>
-                  <a:tcPr>
-                    <a:solidFill>
-                      <a:srgbClr val="F2F2F2"/>
                     </a:solidFill>
                   </a:tcPr>
                 </a:tc>
@@ -6671,6 +5879,1704 @@
         <p:spPr>
           <a:xfrm>
             <a:off x="749808" y="502920"/>
+            <a:ext cx="9144000" cy="914400"/>
+          </a:xfrm>
+          <a:prstGeom prst="rect">
+            <a:avLst/>
+          </a:prstGeom>
+          <a:noFill/>
+        </p:spPr>
+        <p:txBody>
+          <a:bodyPr wrap="square">
+            <a:spAutoFit/>
+          </a:bodyPr>
+          <a:lstStyle/>
+          <a:p>
+            <a:pPr algn="l"/>
+            <a:r>
+              <a:rPr sz="4000" b="1">
+                <a:solidFill>
+                  <a:srgbClr val="F97316"/>
+                </a:solidFill>
+                <a:latin typeface="Calibri"/>
+              </a:rPr>
+              <a:t>PERFORMANCE POR UF</a:t>
+            </a:r>
+          </a:p>
+        </p:txBody>
+      </p:sp>
+      <p:sp>
+        <p:nvSpPr>
+          <p:cNvPr id="4" name="Rectangle 3"/>
+          <p:cNvSpPr/>
+          <p:nvPr/>
+        </p:nvSpPr>
+        <p:spPr>
+          <a:xfrm>
+            <a:off x="749808" y="1719072"/>
+            <a:ext cx="10424160" cy="36576"/>
+          </a:xfrm>
+          <a:prstGeom prst="rect">
+            <a:avLst/>
+          </a:prstGeom>
+          <a:solidFill>
+            <a:srgbClr val="F97316"/>
+          </a:solidFill>
+          <a:ln>
+            <a:noFill/>
+          </a:ln>
+        </p:spPr>
+        <p:style>
+          <a:lnRef idx="1">
+            <a:schemeClr val="accent1"/>
+          </a:lnRef>
+          <a:fillRef idx="3">
+            <a:schemeClr val="accent1"/>
+          </a:fillRef>
+          <a:effectRef idx="2">
+            <a:schemeClr val="accent1"/>
+          </a:effectRef>
+          <a:fontRef idx="minor">
+            <a:schemeClr val="lt1"/>
+          </a:fontRef>
+        </p:style>
+        <p:txBody>
+          <a:bodyPr rtlCol="0" anchor="ctr"/>
+          <a:lstStyle/>
+          <a:p>
+            <a:pPr algn="ctr"/>
+          </a:p>
+        </p:txBody>
+      </p:sp>
+      <p:graphicFrame>
+        <p:nvGraphicFramePr>
+          <p:cNvPr id="5" name="Table 4"/>
+          <p:cNvGraphicFramePr>
+            <a:graphicFrameLocks noGrp="1"/>
+          </p:cNvGraphicFramePr>
+          <p:nvPr/>
+        </p:nvGraphicFramePr>
+        <p:xfrm>
+          <a:off x="731520" y="1920240"/>
+          <a:ext cx="10698480" cy="4389110"/>
+        </p:xfrm>
+        <a:graphic>
+          <a:graphicData uri="http://schemas.openxmlformats.org/drawingml/2006/table">
+            <a:tbl>
+              <a:tblPr firstRow="1" bandRow="1">
+                <a:tableStyleId>{5C22544A-7EE6-4342-B048-85BDC9FD1C3A}</a:tableStyleId>
+              </a:tblPr>
+              <a:tblGrid>
+                <a:gridCol w="1097280"/>
+                <a:gridCol w="1645920"/>
+                <a:gridCol w="1645920"/>
+                <a:gridCol w="1645920"/>
+                <a:gridCol w="1554480"/>
+                <a:gridCol w="3108960"/>
+              </a:tblGrid>
+              <a:tr h="399010">
+                <a:tc>
+                  <a:txBody>
+                    <a:bodyPr/>
+                    <a:lstStyle/>
+                    <a:p>
+                      <a:pPr algn="ctr"/>
+                      <a:r>
+                        <a:rPr sz="1100" b="1">
+                          <a:solidFill>
+                            <a:srgbClr val="FFFFFF"/>
+                          </a:solidFill>
+                          <a:latin typeface="Calibri"/>
+                        </a:rPr>
+                        <a:t>UF</a:t>
+                      </a:r>
+                    </a:p>
+                  </a:txBody>
+                  <a:tcPr>
+                    <a:solidFill>
+                      <a:srgbClr val="1D1B43"/>
+                    </a:solidFill>
+                  </a:tcPr>
+                </a:tc>
+                <a:tc>
+                  <a:txBody>
+                    <a:bodyPr/>
+                    <a:lstStyle/>
+                    <a:p>
+                      <a:pPr algn="ctr"/>
+                      <a:r>
+                        <a:rPr sz="1100" b="1">
+                          <a:solidFill>
+                            <a:srgbClr val="FFFFFF"/>
+                          </a:solidFill>
+                          <a:latin typeface="Calibri"/>
+                        </a:rPr>
+                        <a:t>TOTAL</a:t>
+                      </a:r>
+                    </a:p>
+                  </a:txBody>
+                  <a:tcPr>
+                    <a:solidFill>
+                      <a:srgbClr val="1D1B43"/>
+                    </a:solidFill>
+                  </a:tcPr>
+                </a:tc>
+                <a:tc>
+                  <a:txBody>
+                    <a:bodyPr/>
+                    <a:lstStyle/>
+                    <a:p>
+                      <a:pPr algn="ctr"/>
+                      <a:r>
+                        <a:rPr sz="1100" b="1">
+                          <a:solidFill>
+                            <a:srgbClr val="FFFFFF"/>
+                          </a:solidFill>
+                          <a:latin typeface="Calibri"/>
+                        </a:rPr>
+                        <a:t>NO PRAZO</a:t>
+                      </a:r>
+                    </a:p>
+                  </a:txBody>
+                  <a:tcPr>
+                    <a:solidFill>
+                      <a:srgbClr val="1D1B43"/>
+                    </a:solidFill>
+                  </a:tcPr>
+                </a:tc>
+                <a:tc>
+                  <a:txBody>
+                    <a:bodyPr/>
+                    <a:lstStyle/>
+                    <a:p>
+                      <a:pPr algn="ctr"/>
+                      <a:r>
+                        <a:rPr sz="1100" b="1">
+                          <a:solidFill>
+                            <a:srgbClr val="FFFFFF"/>
+                          </a:solidFill>
+                          <a:latin typeface="Calibri"/>
+                        </a:rPr>
+                        <a:t>FORA</a:t>
+                      </a:r>
+                    </a:p>
+                  </a:txBody>
+                  <a:tcPr>
+                    <a:solidFill>
+                      <a:srgbClr val="1D1B43"/>
+                    </a:solidFill>
+                  </a:tcPr>
+                </a:tc>
+                <a:tc>
+                  <a:txBody>
+                    <a:bodyPr/>
+                    <a:lstStyle/>
+                    <a:p>
+                      <a:pPr algn="ctr"/>
+                      <a:r>
+                        <a:rPr sz="1100" b="1">
+                          <a:solidFill>
+                            <a:srgbClr val="FFFFFF"/>
+                          </a:solidFill>
+                          <a:latin typeface="Calibri"/>
+                        </a:rPr>
+                        <a:t>TAXA</a:t>
+                      </a:r>
+                    </a:p>
+                  </a:txBody>
+                  <a:tcPr>
+                    <a:solidFill>
+                      <a:srgbClr val="1D1B43"/>
+                    </a:solidFill>
+                  </a:tcPr>
+                </a:tc>
+                <a:tc>
+                  <a:txBody>
+                    <a:bodyPr/>
+                    <a:lstStyle/>
+                    <a:p>
+                      <a:pPr algn="ctr"/>
+                      <a:r>
+                        <a:rPr sz="1100" b="1">
+                          <a:solidFill>
+                            <a:srgbClr val="FFFFFF"/>
+                          </a:solidFill>
+                          <a:latin typeface="Calibri"/>
+                        </a:rPr>
+                        <a:t>STATUS</a:t>
+                      </a:r>
+                    </a:p>
+                  </a:txBody>
+                  <a:tcPr>
+                    <a:solidFill>
+                      <a:srgbClr val="1D1B43"/>
+                    </a:solidFill>
+                  </a:tcPr>
+                </a:tc>
+              </a:tr>
+              <a:tr h="399010">
+                <a:tc>
+                  <a:txBody>
+                    <a:bodyPr/>
+                    <a:lstStyle/>
+                    <a:p>
+                      <a:pPr algn="l"/>
+                      <a:r>
+                        <a:rPr sz="1000" b="0">
+                          <a:solidFill>
+                            <a:srgbClr val="1D1B43"/>
+                          </a:solidFill>
+                          <a:latin typeface="Calibri"/>
+                        </a:rPr>
+                        <a:t>SP</a:t>
+                      </a:r>
+                    </a:p>
+                  </a:txBody>
+                  <a:tcPr>
+                    <a:solidFill>
+                      <a:srgbClr val="FFFFFF"/>
+                    </a:solidFill>
+                  </a:tcPr>
+                </a:tc>
+                <a:tc>
+                  <a:txBody>
+                    <a:bodyPr/>
+                    <a:lstStyle/>
+                    <a:p>
+                      <a:pPr algn="l"/>
+                      <a:r>
+                        <a:rPr sz="1000" b="0">
+                          <a:solidFill>
+                            <a:srgbClr val="1D1B43"/>
+                          </a:solidFill>
+                          <a:latin typeface="Calibri"/>
+                        </a:rPr>
+                        <a:t>17</a:t>
+                      </a:r>
+                    </a:p>
+                  </a:txBody>
+                  <a:tcPr>
+                    <a:solidFill>
+                      <a:srgbClr val="FFFFFF"/>
+                    </a:solidFill>
+                  </a:tcPr>
+                </a:tc>
+                <a:tc>
+                  <a:txBody>
+                    <a:bodyPr/>
+                    <a:lstStyle/>
+                    <a:p>
+                      <a:pPr algn="l"/>
+                      <a:r>
+                        <a:rPr sz="1000" b="0">
+                          <a:solidFill>
+                            <a:srgbClr val="1D1B43"/>
+                          </a:solidFill>
+                          <a:latin typeface="Calibri"/>
+                        </a:rPr>
+                        <a:t>17</a:t>
+                      </a:r>
+                    </a:p>
+                  </a:txBody>
+                  <a:tcPr>
+                    <a:solidFill>
+                      <a:srgbClr val="FFFFFF"/>
+                    </a:solidFill>
+                  </a:tcPr>
+                </a:tc>
+                <a:tc>
+                  <a:txBody>
+                    <a:bodyPr/>
+                    <a:lstStyle/>
+                    <a:p>
+                      <a:pPr algn="l"/>
+                      <a:r>
+                        <a:rPr sz="1000" b="0">
+                          <a:solidFill>
+                            <a:srgbClr val="1D1B43"/>
+                          </a:solidFill>
+                          <a:latin typeface="Calibri"/>
+                        </a:rPr>
+                        <a:t>0</a:t>
+                      </a:r>
+                    </a:p>
+                  </a:txBody>
+                  <a:tcPr>
+                    <a:solidFill>
+                      <a:srgbClr val="FFFFFF"/>
+                    </a:solidFill>
+                  </a:tcPr>
+                </a:tc>
+                <a:tc>
+                  <a:txBody>
+                    <a:bodyPr/>
+                    <a:lstStyle/>
+                    <a:p>
+                      <a:pPr algn="l"/>
+                      <a:r>
+                        <a:rPr sz="1000" b="0">
+                          <a:solidFill>
+                            <a:srgbClr val="1D1B43"/>
+                          </a:solidFill>
+                          <a:latin typeface="Calibri"/>
+                        </a:rPr>
+                        <a:t>100.0%</a:t>
+                      </a:r>
+                    </a:p>
+                  </a:txBody>
+                  <a:tcPr>
+                    <a:solidFill>
+                      <a:srgbClr val="FFFFFF"/>
+                    </a:solidFill>
+                  </a:tcPr>
+                </a:tc>
+                <a:tc>
+                  <a:txBody>
+                    <a:bodyPr/>
+                    <a:lstStyle/>
+                    <a:p>
+                      <a:pPr algn="l"/>
+                      <a:r>
+                        <a:rPr sz="1000" b="0">
+                          <a:solidFill>
+                            <a:srgbClr val="1D1B43"/>
+                          </a:solidFill>
+                          <a:latin typeface="Calibri"/>
+                        </a:rPr>
+                        <a:t>Excelente</a:t>
+                      </a:r>
+                    </a:p>
+                  </a:txBody>
+                  <a:tcPr>
+                    <a:solidFill>
+                      <a:srgbClr val="FFFFFF"/>
+                    </a:solidFill>
+                  </a:tcPr>
+                </a:tc>
+              </a:tr>
+              <a:tr h="399010">
+                <a:tc>
+                  <a:txBody>
+                    <a:bodyPr/>
+                    <a:lstStyle/>
+                    <a:p>
+                      <a:pPr algn="l"/>
+                      <a:r>
+                        <a:rPr sz="1000" b="0">
+                          <a:solidFill>
+                            <a:srgbClr val="1D1B43"/>
+                          </a:solidFill>
+                          <a:latin typeface="Calibri"/>
+                        </a:rPr>
+                        <a:t>RJ</a:t>
+                      </a:r>
+                    </a:p>
+                  </a:txBody>
+                  <a:tcPr>
+                    <a:solidFill>
+                      <a:srgbClr val="F2F2F2"/>
+                    </a:solidFill>
+                  </a:tcPr>
+                </a:tc>
+                <a:tc>
+                  <a:txBody>
+                    <a:bodyPr/>
+                    <a:lstStyle/>
+                    <a:p>
+                      <a:pPr algn="l"/>
+                      <a:r>
+                        <a:rPr sz="1000" b="0">
+                          <a:solidFill>
+                            <a:srgbClr val="1D1B43"/>
+                          </a:solidFill>
+                          <a:latin typeface="Calibri"/>
+                        </a:rPr>
+                        <a:t>6</a:t>
+                      </a:r>
+                    </a:p>
+                  </a:txBody>
+                  <a:tcPr>
+                    <a:solidFill>
+                      <a:srgbClr val="F2F2F2"/>
+                    </a:solidFill>
+                  </a:tcPr>
+                </a:tc>
+                <a:tc>
+                  <a:txBody>
+                    <a:bodyPr/>
+                    <a:lstStyle/>
+                    <a:p>
+                      <a:pPr algn="l"/>
+                      <a:r>
+                        <a:rPr sz="1000" b="0">
+                          <a:solidFill>
+                            <a:srgbClr val="1D1B43"/>
+                          </a:solidFill>
+                          <a:latin typeface="Calibri"/>
+                        </a:rPr>
+                        <a:t>6</a:t>
+                      </a:r>
+                    </a:p>
+                  </a:txBody>
+                  <a:tcPr>
+                    <a:solidFill>
+                      <a:srgbClr val="F2F2F2"/>
+                    </a:solidFill>
+                  </a:tcPr>
+                </a:tc>
+                <a:tc>
+                  <a:txBody>
+                    <a:bodyPr/>
+                    <a:lstStyle/>
+                    <a:p>
+                      <a:pPr algn="l"/>
+                      <a:r>
+                        <a:rPr sz="1000" b="0">
+                          <a:solidFill>
+                            <a:srgbClr val="1D1B43"/>
+                          </a:solidFill>
+                          <a:latin typeface="Calibri"/>
+                        </a:rPr>
+                        <a:t>0</a:t>
+                      </a:r>
+                    </a:p>
+                  </a:txBody>
+                  <a:tcPr>
+                    <a:solidFill>
+                      <a:srgbClr val="F2F2F2"/>
+                    </a:solidFill>
+                  </a:tcPr>
+                </a:tc>
+                <a:tc>
+                  <a:txBody>
+                    <a:bodyPr/>
+                    <a:lstStyle/>
+                    <a:p>
+                      <a:pPr algn="l"/>
+                      <a:r>
+                        <a:rPr sz="1000" b="0">
+                          <a:solidFill>
+                            <a:srgbClr val="1D1B43"/>
+                          </a:solidFill>
+                          <a:latin typeface="Calibri"/>
+                        </a:rPr>
+                        <a:t>100.0%</a:t>
+                      </a:r>
+                    </a:p>
+                  </a:txBody>
+                  <a:tcPr>
+                    <a:solidFill>
+                      <a:srgbClr val="F2F2F2"/>
+                    </a:solidFill>
+                  </a:tcPr>
+                </a:tc>
+                <a:tc>
+                  <a:txBody>
+                    <a:bodyPr/>
+                    <a:lstStyle/>
+                    <a:p>
+                      <a:pPr algn="l"/>
+                      <a:r>
+                        <a:rPr sz="1000" b="0">
+                          <a:solidFill>
+                            <a:srgbClr val="1D1B43"/>
+                          </a:solidFill>
+                          <a:latin typeface="Calibri"/>
+                        </a:rPr>
+                        <a:t>Excelente</a:t>
+                      </a:r>
+                    </a:p>
+                  </a:txBody>
+                  <a:tcPr>
+                    <a:solidFill>
+                      <a:srgbClr val="F2F2F2"/>
+                    </a:solidFill>
+                  </a:tcPr>
+                </a:tc>
+              </a:tr>
+              <a:tr h="399010">
+                <a:tc>
+                  <a:txBody>
+                    <a:bodyPr/>
+                    <a:lstStyle/>
+                    <a:p>
+                      <a:pPr algn="l"/>
+                      <a:r>
+                        <a:rPr sz="1000" b="0">
+                          <a:solidFill>
+                            <a:srgbClr val="1D1B43"/>
+                          </a:solidFill>
+                          <a:latin typeface="Calibri"/>
+                        </a:rPr>
+                        <a:t>RS</a:t>
+                      </a:r>
+                    </a:p>
+                  </a:txBody>
+                  <a:tcPr>
+                    <a:solidFill>
+                      <a:srgbClr val="FFFFFF"/>
+                    </a:solidFill>
+                  </a:tcPr>
+                </a:tc>
+                <a:tc>
+                  <a:txBody>
+                    <a:bodyPr/>
+                    <a:lstStyle/>
+                    <a:p>
+                      <a:pPr algn="l"/>
+                      <a:r>
+                        <a:rPr sz="1000" b="0">
+                          <a:solidFill>
+                            <a:srgbClr val="1D1B43"/>
+                          </a:solidFill>
+                          <a:latin typeface="Calibri"/>
+                        </a:rPr>
+                        <a:t>4</a:t>
+                      </a:r>
+                    </a:p>
+                  </a:txBody>
+                  <a:tcPr>
+                    <a:solidFill>
+                      <a:srgbClr val="FFFFFF"/>
+                    </a:solidFill>
+                  </a:tcPr>
+                </a:tc>
+                <a:tc>
+                  <a:txBody>
+                    <a:bodyPr/>
+                    <a:lstStyle/>
+                    <a:p>
+                      <a:pPr algn="l"/>
+                      <a:r>
+                        <a:rPr sz="1000" b="0">
+                          <a:solidFill>
+                            <a:srgbClr val="1D1B43"/>
+                          </a:solidFill>
+                          <a:latin typeface="Calibri"/>
+                        </a:rPr>
+                        <a:t>4</a:t>
+                      </a:r>
+                    </a:p>
+                  </a:txBody>
+                  <a:tcPr>
+                    <a:solidFill>
+                      <a:srgbClr val="FFFFFF"/>
+                    </a:solidFill>
+                  </a:tcPr>
+                </a:tc>
+                <a:tc>
+                  <a:txBody>
+                    <a:bodyPr/>
+                    <a:lstStyle/>
+                    <a:p>
+                      <a:pPr algn="l"/>
+                      <a:r>
+                        <a:rPr sz="1000" b="0">
+                          <a:solidFill>
+                            <a:srgbClr val="1D1B43"/>
+                          </a:solidFill>
+                          <a:latin typeface="Calibri"/>
+                        </a:rPr>
+                        <a:t>0</a:t>
+                      </a:r>
+                    </a:p>
+                  </a:txBody>
+                  <a:tcPr>
+                    <a:solidFill>
+                      <a:srgbClr val="FFFFFF"/>
+                    </a:solidFill>
+                  </a:tcPr>
+                </a:tc>
+                <a:tc>
+                  <a:txBody>
+                    <a:bodyPr/>
+                    <a:lstStyle/>
+                    <a:p>
+                      <a:pPr algn="l"/>
+                      <a:r>
+                        <a:rPr sz="1000" b="0">
+                          <a:solidFill>
+                            <a:srgbClr val="1D1B43"/>
+                          </a:solidFill>
+                          <a:latin typeface="Calibri"/>
+                        </a:rPr>
+                        <a:t>100.0%</a:t>
+                      </a:r>
+                    </a:p>
+                  </a:txBody>
+                  <a:tcPr>
+                    <a:solidFill>
+                      <a:srgbClr val="FFFFFF"/>
+                    </a:solidFill>
+                  </a:tcPr>
+                </a:tc>
+                <a:tc>
+                  <a:txBody>
+                    <a:bodyPr/>
+                    <a:lstStyle/>
+                    <a:p>
+                      <a:pPr algn="l"/>
+                      <a:r>
+                        <a:rPr sz="1000" b="0">
+                          <a:solidFill>
+                            <a:srgbClr val="1D1B43"/>
+                          </a:solidFill>
+                          <a:latin typeface="Calibri"/>
+                        </a:rPr>
+                        <a:t>Excelente</a:t>
+                      </a:r>
+                    </a:p>
+                  </a:txBody>
+                  <a:tcPr>
+                    <a:solidFill>
+                      <a:srgbClr val="FFFFFF"/>
+                    </a:solidFill>
+                  </a:tcPr>
+                </a:tc>
+              </a:tr>
+              <a:tr h="399010">
+                <a:tc>
+                  <a:txBody>
+                    <a:bodyPr/>
+                    <a:lstStyle/>
+                    <a:p>
+                      <a:pPr algn="l"/>
+                      <a:r>
+                        <a:rPr sz="1000" b="0">
+                          <a:solidFill>
+                            <a:srgbClr val="1D1B43"/>
+                          </a:solidFill>
+                          <a:latin typeface="Calibri"/>
+                        </a:rPr>
+                        <a:t>MA</a:t>
+                      </a:r>
+                    </a:p>
+                  </a:txBody>
+                  <a:tcPr>
+                    <a:solidFill>
+                      <a:srgbClr val="F2F2F2"/>
+                    </a:solidFill>
+                  </a:tcPr>
+                </a:tc>
+                <a:tc>
+                  <a:txBody>
+                    <a:bodyPr/>
+                    <a:lstStyle/>
+                    <a:p>
+                      <a:pPr algn="l"/>
+                      <a:r>
+                        <a:rPr sz="1000" b="0">
+                          <a:solidFill>
+                            <a:srgbClr val="1D1B43"/>
+                          </a:solidFill>
+                          <a:latin typeface="Calibri"/>
+                        </a:rPr>
+                        <a:t>2</a:t>
+                      </a:r>
+                    </a:p>
+                  </a:txBody>
+                  <a:tcPr>
+                    <a:solidFill>
+                      <a:srgbClr val="F2F2F2"/>
+                    </a:solidFill>
+                  </a:tcPr>
+                </a:tc>
+                <a:tc>
+                  <a:txBody>
+                    <a:bodyPr/>
+                    <a:lstStyle/>
+                    <a:p>
+                      <a:pPr algn="l"/>
+                      <a:r>
+                        <a:rPr sz="1000" b="0">
+                          <a:solidFill>
+                            <a:srgbClr val="1D1B43"/>
+                          </a:solidFill>
+                          <a:latin typeface="Calibri"/>
+                        </a:rPr>
+                        <a:t>1</a:t>
+                      </a:r>
+                    </a:p>
+                  </a:txBody>
+                  <a:tcPr>
+                    <a:solidFill>
+                      <a:srgbClr val="F2F2F2"/>
+                    </a:solidFill>
+                  </a:tcPr>
+                </a:tc>
+                <a:tc>
+                  <a:txBody>
+                    <a:bodyPr/>
+                    <a:lstStyle/>
+                    <a:p>
+                      <a:pPr algn="l"/>
+                      <a:r>
+                        <a:rPr sz="1000" b="0">
+                          <a:solidFill>
+                            <a:srgbClr val="1D1B43"/>
+                          </a:solidFill>
+                          <a:latin typeface="Calibri"/>
+                        </a:rPr>
+                        <a:t>1</a:t>
+                      </a:r>
+                    </a:p>
+                  </a:txBody>
+                  <a:tcPr>
+                    <a:solidFill>
+                      <a:srgbClr val="F2F2F2"/>
+                    </a:solidFill>
+                  </a:tcPr>
+                </a:tc>
+                <a:tc>
+                  <a:txBody>
+                    <a:bodyPr/>
+                    <a:lstStyle/>
+                    <a:p>
+                      <a:pPr algn="l"/>
+                      <a:r>
+                        <a:rPr sz="1000" b="0">
+                          <a:solidFill>
+                            <a:srgbClr val="1D1B43"/>
+                          </a:solidFill>
+                          <a:latin typeface="Calibri"/>
+                        </a:rPr>
+                        <a:t>50.0%</a:t>
+                      </a:r>
+                    </a:p>
+                  </a:txBody>
+                  <a:tcPr>
+                    <a:solidFill>
+                      <a:srgbClr val="F2F2F2"/>
+                    </a:solidFill>
+                  </a:tcPr>
+                </a:tc>
+                <a:tc>
+                  <a:txBody>
+                    <a:bodyPr/>
+                    <a:lstStyle/>
+                    <a:p>
+                      <a:pPr algn="l"/>
+                      <a:r>
+                        <a:rPr sz="1000" b="0">
+                          <a:solidFill>
+                            <a:srgbClr val="1D1B43"/>
+                          </a:solidFill>
+                          <a:latin typeface="Calibri"/>
+                        </a:rPr>
+                        <a:t>Atencao</a:t>
+                      </a:r>
+                    </a:p>
+                  </a:txBody>
+                  <a:tcPr>
+                    <a:solidFill>
+                      <a:srgbClr val="F2F2F2"/>
+                    </a:solidFill>
+                  </a:tcPr>
+                </a:tc>
+              </a:tr>
+              <a:tr h="399010">
+                <a:tc>
+                  <a:txBody>
+                    <a:bodyPr/>
+                    <a:lstStyle/>
+                    <a:p>
+                      <a:pPr algn="l"/>
+                      <a:r>
+                        <a:rPr sz="1000" b="0">
+                          <a:solidFill>
+                            <a:srgbClr val="1D1B43"/>
+                          </a:solidFill>
+                          <a:latin typeface="Calibri"/>
+                        </a:rPr>
+                        <a:t>GO</a:t>
+                      </a:r>
+                    </a:p>
+                  </a:txBody>
+                  <a:tcPr>
+                    <a:solidFill>
+                      <a:srgbClr val="FFFFFF"/>
+                    </a:solidFill>
+                  </a:tcPr>
+                </a:tc>
+                <a:tc>
+                  <a:txBody>
+                    <a:bodyPr/>
+                    <a:lstStyle/>
+                    <a:p>
+                      <a:pPr algn="l"/>
+                      <a:r>
+                        <a:rPr sz="1000" b="0">
+                          <a:solidFill>
+                            <a:srgbClr val="1D1B43"/>
+                          </a:solidFill>
+                          <a:latin typeface="Calibri"/>
+                        </a:rPr>
+                        <a:t>2</a:t>
+                      </a:r>
+                    </a:p>
+                  </a:txBody>
+                  <a:tcPr>
+                    <a:solidFill>
+                      <a:srgbClr val="FFFFFF"/>
+                    </a:solidFill>
+                  </a:tcPr>
+                </a:tc>
+                <a:tc>
+                  <a:txBody>
+                    <a:bodyPr/>
+                    <a:lstStyle/>
+                    <a:p>
+                      <a:pPr algn="l"/>
+                      <a:r>
+                        <a:rPr sz="1000" b="0">
+                          <a:solidFill>
+                            <a:srgbClr val="1D1B43"/>
+                          </a:solidFill>
+                          <a:latin typeface="Calibri"/>
+                        </a:rPr>
+                        <a:t>2</a:t>
+                      </a:r>
+                    </a:p>
+                  </a:txBody>
+                  <a:tcPr>
+                    <a:solidFill>
+                      <a:srgbClr val="FFFFFF"/>
+                    </a:solidFill>
+                  </a:tcPr>
+                </a:tc>
+                <a:tc>
+                  <a:txBody>
+                    <a:bodyPr/>
+                    <a:lstStyle/>
+                    <a:p>
+                      <a:pPr algn="l"/>
+                      <a:r>
+                        <a:rPr sz="1000" b="0">
+                          <a:solidFill>
+                            <a:srgbClr val="1D1B43"/>
+                          </a:solidFill>
+                          <a:latin typeface="Calibri"/>
+                        </a:rPr>
+                        <a:t>0</a:t>
+                      </a:r>
+                    </a:p>
+                  </a:txBody>
+                  <a:tcPr>
+                    <a:solidFill>
+                      <a:srgbClr val="FFFFFF"/>
+                    </a:solidFill>
+                  </a:tcPr>
+                </a:tc>
+                <a:tc>
+                  <a:txBody>
+                    <a:bodyPr/>
+                    <a:lstStyle/>
+                    <a:p>
+                      <a:pPr algn="l"/>
+                      <a:r>
+                        <a:rPr sz="1000" b="0">
+                          <a:solidFill>
+                            <a:srgbClr val="1D1B43"/>
+                          </a:solidFill>
+                          <a:latin typeface="Calibri"/>
+                        </a:rPr>
+                        <a:t>100.0%</a:t>
+                      </a:r>
+                    </a:p>
+                  </a:txBody>
+                  <a:tcPr>
+                    <a:solidFill>
+                      <a:srgbClr val="FFFFFF"/>
+                    </a:solidFill>
+                  </a:tcPr>
+                </a:tc>
+                <a:tc>
+                  <a:txBody>
+                    <a:bodyPr/>
+                    <a:lstStyle/>
+                    <a:p>
+                      <a:pPr algn="l"/>
+                      <a:r>
+                        <a:rPr sz="1000" b="0">
+                          <a:solidFill>
+                            <a:srgbClr val="1D1B43"/>
+                          </a:solidFill>
+                          <a:latin typeface="Calibri"/>
+                        </a:rPr>
+                        <a:t>Excelente</a:t>
+                      </a:r>
+                    </a:p>
+                  </a:txBody>
+                  <a:tcPr>
+                    <a:solidFill>
+                      <a:srgbClr val="FFFFFF"/>
+                    </a:solidFill>
+                  </a:tcPr>
+                </a:tc>
+              </a:tr>
+              <a:tr h="399010">
+                <a:tc>
+                  <a:txBody>
+                    <a:bodyPr/>
+                    <a:lstStyle/>
+                    <a:p>
+                      <a:pPr algn="l"/>
+                      <a:r>
+                        <a:rPr sz="1000" b="0">
+                          <a:solidFill>
+                            <a:srgbClr val="1D1B43"/>
+                          </a:solidFill>
+                          <a:latin typeface="Calibri"/>
+                        </a:rPr>
+                        <a:t>MG</a:t>
+                      </a:r>
+                    </a:p>
+                  </a:txBody>
+                  <a:tcPr>
+                    <a:solidFill>
+                      <a:srgbClr val="F2F2F2"/>
+                    </a:solidFill>
+                  </a:tcPr>
+                </a:tc>
+                <a:tc>
+                  <a:txBody>
+                    <a:bodyPr/>
+                    <a:lstStyle/>
+                    <a:p>
+                      <a:pPr algn="l"/>
+                      <a:r>
+                        <a:rPr sz="1000" b="0">
+                          <a:solidFill>
+                            <a:srgbClr val="1D1B43"/>
+                          </a:solidFill>
+                          <a:latin typeface="Calibri"/>
+                        </a:rPr>
+                        <a:t>2</a:t>
+                      </a:r>
+                    </a:p>
+                  </a:txBody>
+                  <a:tcPr>
+                    <a:solidFill>
+                      <a:srgbClr val="F2F2F2"/>
+                    </a:solidFill>
+                  </a:tcPr>
+                </a:tc>
+                <a:tc>
+                  <a:txBody>
+                    <a:bodyPr/>
+                    <a:lstStyle/>
+                    <a:p>
+                      <a:pPr algn="l"/>
+                      <a:r>
+                        <a:rPr sz="1000" b="0">
+                          <a:solidFill>
+                            <a:srgbClr val="1D1B43"/>
+                          </a:solidFill>
+                          <a:latin typeface="Calibri"/>
+                        </a:rPr>
+                        <a:t>2</a:t>
+                      </a:r>
+                    </a:p>
+                  </a:txBody>
+                  <a:tcPr>
+                    <a:solidFill>
+                      <a:srgbClr val="F2F2F2"/>
+                    </a:solidFill>
+                  </a:tcPr>
+                </a:tc>
+                <a:tc>
+                  <a:txBody>
+                    <a:bodyPr/>
+                    <a:lstStyle/>
+                    <a:p>
+                      <a:pPr algn="l"/>
+                      <a:r>
+                        <a:rPr sz="1000" b="0">
+                          <a:solidFill>
+                            <a:srgbClr val="1D1B43"/>
+                          </a:solidFill>
+                          <a:latin typeface="Calibri"/>
+                        </a:rPr>
+                        <a:t>0</a:t>
+                      </a:r>
+                    </a:p>
+                  </a:txBody>
+                  <a:tcPr>
+                    <a:solidFill>
+                      <a:srgbClr val="F2F2F2"/>
+                    </a:solidFill>
+                  </a:tcPr>
+                </a:tc>
+                <a:tc>
+                  <a:txBody>
+                    <a:bodyPr/>
+                    <a:lstStyle/>
+                    <a:p>
+                      <a:pPr algn="l"/>
+                      <a:r>
+                        <a:rPr sz="1000" b="0">
+                          <a:solidFill>
+                            <a:srgbClr val="1D1B43"/>
+                          </a:solidFill>
+                          <a:latin typeface="Calibri"/>
+                        </a:rPr>
+                        <a:t>100.0%</a:t>
+                      </a:r>
+                    </a:p>
+                  </a:txBody>
+                  <a:tcPr>
+                    <a:solidFill>
+                      <a:srgbClr val="F2F2F2"/>
+                    </a:solidFill>
+                  </a:tcPr>
+                </a:tc>
+                <a:tc>
+                  <a:txBody>
+                    <a:bodyPr/>
+                    <a:lstStyle/>
+                    <a:p>
+                      <a:pPr algn="l"/>
+                      <a:r>
+                        <a:rPr sz="1000" b="0">
+                          <a:solidFill>
+                            <a:srgbClr val="1D1B43"/>
+                          </a:solidFill>
+                          <a:latin typeface="Calibri"/>
+                        </a:rPr>
+                        <a:t>Excelente</a:t>
+                      </a:r>
+                    </a:p>
+                  </a:txBody>
+                  <a:tcPr>
+                    <a:solidFill>
+                      <a:srgbClr val="F2F2F2"/>
+                    </a:solidFill>
+                  </a:tcPr>
+                </a:tc>
+              </a:tr>
+              <a:tr h="399010">
+                <a:tc>
+                  <a:txBody>
+                    <a:bodyPr/>
+                    <a:lstStyle/>
+                    <a:p>
+                      <a:pPr algn="l"/>
+                      <a:r>
+                        <a:rPr sz="1000" b="0">
+                          <a:solidFill>
+                            <a:srgbClr val="1D1B43"/>
+                          </a:solidFill>
+                          <a:latin typeface="Calibri"/>
+                        </a:rPr>
+                        <a:t>DF</a:t>
+                      </a:r>
+                    </a:p>
+                  </a:txBody>
+                  <a:tcPr>
+                    <a:solidFill>
+                      <a:srgbClr val="FFFFFF"/>
+                    </a:solidFill>
+                  </a:tcPr>
+                </a:tc>
+                <a:tc>
+                  <a:txBody>
+                    <a:bodyPr/>
+                    <a:lstStyle/>
+                    <a:p>
+                      <a:pPr algn="l"/>
+                      <a:r>
+                        <a:rPr sz="1000" b="0">
+                          <a:solidFill>
+                            <a:srgbClr val="1D1B43"/>
+                          </a:solidFill>
+                          <a:latin typeface="Calibri"/>
+                        </a:rPr>
+                        <a:t>1</a:t>
+                      </a:r>
+                    </a:p>
+                  </a:txBody>
+                  <a:tcPr>
+                    <a:solidFill>
+                      <a:srgbClr val="FFFFFF"/>
+                    </a:solidFill>
+                  </a:tcPr>
+                </a:tc>
+                <a:tc>
+                  <a:txBody>
+                    <a:bodyPr/>
+                    <a:lstStyle/>
+                    <a:p>
+                      <a:pPr algn="l"/>
+                      <a:r>
+                        <a:rPr sz="1000" b="0">
+                          <a:solidFill>
+                            <a:srgbClr val="1D1B43"/>
+                          </a:solidFill>
+                          <a:latin typeface="Calibri"/>
+                        </a:rPr>
+                        <a:t>0</a:t>
+                      </a:r>
+                    </a:p>
+                  </a:txBody>
+                  <a:tcPr>
+                    <a:solidFill>
+                      <a:srgbClr val="FFFFFF"/>
+                    </a:solidFill>
+                  </a:tcPr>
+                </a:tc>
+                <a:tc>
+                  <a:txBody>
+                    <a:bodyPr/>
+                    <a:lstStyle/>
+                    <a:p>
+                      <a:pPr algn="l"/>
+                      <a:r>
+                        <a:rPr sz="1000" b="0">
+                          <a:solidFill>
+                            <a:srgbClr val="1D1B43"/>
+                          </a:solidFill>
+                          <a:latin typeface="Calibri"/>
+                        </a:rPr>
+                        <a:t>1</a:t>
+                      </a:r>
+                    </a:p>
+                  </a:txBody>
+                  <a:tcPr>
+                    <a:solidFill>
+                      <a:srgbClr val="FFFFFF"/>
+                    </a:solidFill>
+                  </a:tcPr>
+                </a:tc>
+                <a:tc>
+                  <a:txBody>
+                    <a:bodyPr/>
+                    <a:lstStyle/>
+                    <a:p>
+                      <a:pPr algn="l"/>
+                      <a:r>
+                        <a:rPr sz="1000" b="0">
+                          <a:solidFill>
+                            <a:srgbClr val="1D1B43"/>
+                          </a:solidFill>
+                          <a:latin typeface="Calibri"/>
+                        </a:rPr>
+                        <a:t>0.0%</a:t>
+                      </a:r>
+                    </a:p>
+                  </a:txBody>
+                  <a:tcPr>
+                    <a:solidFill>
+                      <a:srgbClr val="FFFFFF"/>
+                    </a:solidFill>
+                  </a:tcPr>
+                </a:tc>
+                <a:tc>
+                  <a:txBody>
+                    <a:bodyPr/>
+                    <a:lstStyle/>
+                    <a:p>
+                      <a:pPr algn="l"/>
+                      <a:r>
+                        <a:rPr sz="1000" b="0">
+                          <a:solidFill>
+                            <a:srgbClr val="1D1B43"/>
+                          </a:solidFill>
+                          <a:latin typeface="Calibri"/>
+                        </a:rPr>
+                        <a:t>Atencao</a:t>
+                      </a:r>
+                    </a:p>
+                  </a:txBody>
+                  <a:tcPr>
+                    <a:solidFill>
+                      <a:srgbClr val="FFFFFF"/>
+                    </a:solidFill>
+                  </a:tcPr>
+                </a:tc>
+              </a:tr>
+              <a:tr h="399010">
+                <a:tc>
+                  <a:txBody>
+                    <a:bodyPr/>
+                    <a:lstStyle/>
+                    <a:p>
+                      <a:pPr algn="l"/>
+                      <a:r>
+                        <a:rPr sz="1000" b="0">
+                          <a:solidFill>
+                            <a:srgbClr val="1D1B43"/>
+                          </a:solidFill>
+                          <a:latin typeface="Calibri"/>
+                        </a:rPr>
+                        <a:t>CE</a:t>
+                      </a:r>
+                    </a:p>
+                  </a:txBody>
+                  <a:tcPr>
+                    <a:solidFill>
+                      <a:srgbClr val="F2F2F2"/>
+                    </a:solidFill>
+                  </a:tcPr>
+                </a:tc>
+                <a:tc>
+                  <a:txBody>
+                    <a:bodyPr/>
+                    <a:lstStyle/>
+                    <a:p>
+                      <a:pPr algn="l"/>
+                      <a:r>
+                        <a:rPr sz="1000" b="0">
+                          <a:solidFill>
+                            <a:srgbClr val="1D1B43"/>
+                          </a:solidFill>
+                          <a:latin typeface="Calibri"/>
+                        </a:rPr>
+                        <a:t>1</a:t>
+                      </a:r>
+                    </a:p>
+                  </a:txBody>
+                  <a:tcPr>
+                    <a:solidFill>
+                      <a:srgbClr val="F2F2F2"/>
+                    </a:solidFill>
+                  </a:tcPr>
+                </a:tc>
+                <a:tc>
+                  <a:txBody>
+                    <a:bodyPr/>
+                    <a:lstStyle/>
+                    <a:p>
+                      <a:pPr algn="l"/>
+                      <a:r>
+                        <a:rPr sz="1000" b="0">
+                          <a:solidFill>
+                            <a:srgbClr val="1D1B43"/>
+                          </a:solidFill>
+                          <a:latin typeface="Calibri"/>
+                        </a:rPr>
+                        <a:t>1</a:t>
+                      </a:r>
+                    </a:p>
+                  </a:txBody>
+                  <a:tcPr>
+                    <a:solidFill>
+                      <a:srgbClr val="F2F2F2"/>
+                    </a:solidFill>
+                  </a:tcPr>
+                </a:tc>
+                <a:tc>
+                  <a:txBody>
+                    <a:bodyPr/>
+                    <a:lstStyle/>
+                    <a:p>
+                      <a:pPr algn="l"/>
+                      <a:r>
+                        <a:rPr sz="1000" b="0">
+                          <a:solidFill>
+                            <a:srgbClr val="1D1B43"/>
+                          </a:solidFill>
+                          <a:latin typeface="Calibri"/>
+                        </a:rPr>
+                        <a:t>0</a:t>
+                      </a:r>
+                    </a:p>
+                  </a:txBody>
+                  <a:tcPr>
+                    <a:solidFill>
+                      <a:srgbClr val="F2F2F2"/>
+                    </a:solidFill>
+                  </a:tcPr>
+                </a:tc>
+                <a:tc>
+                  <a:txBody>
+                    <a:bodyPr/>
+                    <a:lstStyle/>
+                    <a:p>
+                      <a:pPr algn="l"/>
+                      <a:r>
+                        <a:rPr sz="1000" b="0">
+                          <a:solidFill>
+                            <a:srgbClr val="1D1B43"/>
+                          </a:solidFill>
+                          <a:latin typeface="Calibri"/>
+                        </a:rPr>
+                        <a:t>100.0%</a:t>
+                      </a:r>
+                    </a:p>
+                  </a:txBody>
+                  <a:tcPr>
+                    <a:solidFill>
+                      <a:srgbClr val="F2F2F2"/>
+                    </a:solidFill>
+                  </a:tcPr>
+                </a:tc>
+                <a:tc>
+                  <a:txBody>
+                    <a:bodyPr/>
+                    <a:lstStyle/>
+                    <a:p>
+                      <a:pPr algn="l"/>
+                      <a:r>
+                        <a:rPr sz="1000" b="0">
+                          <a:solidFill>
+                            <a:srgbClr val="1D1B43"/>
+                          </a:solidFill>
+                          <a:latin typeface="Calibri"/>
+                        </a:rPr>
+                        <a:t>Excelente</a:t>
+                      </a:r>
+                    </a:p>
+                  </a:txBody>
+                  <a:tcPr>
+                    <a:solidFill>
+                      <a:srgbClr val="F2F2F2"/>
+                    </a:solidFill>
+                  </a:tcPr>
+                </a:tc>
+              </a:tr>
+              <a:tr h="399010">
+                <a:tc>
+                  <a:txBody>
+                    <a:bodyPr/>
+                    <a:lstStyle/>
+                    <a:p>
+                      <a:pPr algn="l"/>
+                      <a:r>
+                        <a:rPr sz="1000" b="0">
+                          <a:solidFill>
+                            <a:srgbClr val="1D1B43"/>
+                          </a:solidFill>
+                          <a:latin typeface="Calibri"/>
+                        </a:rPr>
+                        <a:t>BA</a:t>
+                      </a:r>
+                    </a:p>
+                  </a:txBody>
+                  <a:tcPr>
+                    <a:solidFill>
+                      <a:srgbClr val="FFFFFF"/>
+                    </a:solidFill>
+                  </a:tcPr>
+                </a:tc>
+                <a:tc>
+                  <a:txBody>
+                    <a:bodyPr/>
+                    <a:lstStyle/>
+                    <a:p>
+                      <a:pPr algn="l"/>
+                      <a:r>
+                        <a:rPr sz="1000" b="0">
+                          <a:solidFill>
+                            <a:srgbClr val="1D1B43"/>
+                          </a:solidFill>
+                          <a:latin typeface="Calibri"/>
+                        </a:rPr>
+                        <a:t>1</a:t>
+                      </a:r>
+                    </a:p>
+                  </a:txBody>
+                  <a:tcPr>
+                    <a:solidFill>
+                      <a:srgbClr val="FFFFFF"/>
+                    </a:solidFill>
+                  </a:tcPr>
+                </a:tc>
+                <a:tc>
+                  <a:txBody>
+                    <a:bodyPr/>
+                    <a:lstStyle/>
+                    <a:p>
+                      <a:pPr algn="l"/>
+                      <a:r>
+                        <a:rPr sz="1000" b="0">
+                          <a:solidFill>
+                            <a:srgbClr val="1D1B43"/>
+                          </a:solidFill>
+                          <a:latin typeface="Calibri"/>
+                        </a:rPr>
+                        <a:t>1</a:t>
+                      </a:r>
+                    </a:p>
+                  </a:txBody>
+                  <a:tcPr>
+                    <a:solidFill>
+                      <a:srgbClr val="FFFFFF"/>
+                    </a:solidFill>
+                  </a:tcPr>
+                </a:tc>
+                <a:tc>
+                  <a:txBody>
+                    <a:bodyPr/>
+                    <a:lstStyle/>
+                    <a:p>
+                      <a:pPr algn="l"/>
+                      <a:r>
+                        <a:rPr sz="1000" b="0">
+                          <a:solidFill>
+                            <a:srgbClr val="1D1B43"/>
+                          </a:solidFill>
+                          <a:latin typeface="Calibri"/>
+                        </a:rPr>
+                        <a:t>0</a:t>
+                      </a:r>
+                    </a:p>
+                  </a:txBody>
+                  <a:tcPr>
+                    <a:solidFill>
+                      <a:srgbClr val="FFFFFF"/>
+                    </a:solidFill>
+                  </a:tcPr>
+                </a:tc>
+                <a:tc>
+                  <a:txBody>
+                    <a:bodyPr/>
+                    <a:lstStyle/>
+                    <a:p>
+                      <a:pPr algn="l"/>
+                      <a:r>
+                        <a:rPr sz="1000" b="0">
+                          <a:solidFill>
+                            <a:srgbClr val="1D1B43"/>
+                          </a:solidFill>
+                          <a:latin typeface="Calibri"/>
+                        </a:rPr>
+                        <a:t>100.0%</a:t>
+                      </a:r>
+                    </a:p>
+                  </a:txBody>
+                  <a:tcPr>
+                    <a:solidFill>
+                      <a:srgbClr val="FFFFFF"/>
+                    </a:solidFill>
+                  </a:tcPr>
+                </a:tc>
+                <a:tc>
+                  <a:txBody>
+                    <a:bodyPr/>
+                    <a:lstStyle/>
+                    <a:p>
+                      <a:pPr algn="l"/>
+                      <a:r>
+                        <a:rPr sz="1000" b="0">
+                          <a:solidFill>
+                            <a:srgbClr val="1D1B43"/>
+                          </a:solidFill>
+                          <a:latin typeface="Calibri"/>
+                        </a:rPr>
+                        <a:t>Excelente</a:t>
+                      </a:r>
+                    </a:p>
+                  </a:txBody>
+                  <a:tcPr>
+                    <a:solidFill>
+                      <a:srgbClr val="FFFFFF"/>
+                    </a:solidFill>
+                  </a:tcPr>
+                </a:tc>
+              </a:tr>
+              <a:tr h="399010">
+                <a:tc>
+                  <a:txBody>
+                    <a:bodyPr/>
+                    <a:lstStyle/>
+                    <a:p>
+                      <a:pPr algn="l"/>
+                      <a:r>
+                        <a:rPr sz="1000" b="0">
+                          <a:solidFill>
+                            <a:srgbClr val="1D1B43"/>
+                          </a:solidFill>
+                          <a:latin typeface="Calibri"/>
+                        </a:rPr>
+                        <a:t>ES</a:t>
+                      </a:r>
+                    </a:p>
+                  </a:txBody>
+                  <a:tcPr>
+                    <a:solidFill>
+                      <a:srgbClr val="F2F2F2"/>
+                    </a:solidFill>
+                  </a:tcPr>
+                </a:tc>
+                <a:tc>
+                  <a:txBody>
+                    <a:bodyPr/>
+                    <a:lstStyle/>
+                    <a:p>
+                      <a:pPr algn="l"/>
+                      <a:r>
+                        <a:rPr sz="1000" b="0">
+                          <a:solidFill>
+                            <a:srgbClr val="1D1B43"/>
+                          </a:solidFill>
+                          <a:latin typeface="Calibri"/>
+                        </a:rPr>
+                        <a:t>1</a:t>
+                      </a:r>
+                    </a:p>
+                  </a:txBody>
+                  <a:tcPr>
+                    <a:solidFill>
+                      <a:srgbClr val="F2F2F2"/>
+                    </a:solidFill>
+                  </a:tcPr>
+                </a:tc>
+                <a:tc>
+                  <a:txBody>
+                    <a:bodyPr/>
+                    <a:lstStyle/>
+                    <a:p>
+                      <a:pPr algn="l"/>
+                      <a:r>
+                        <a:rPr sz="1000" b="0">
+                          <a:solidFill>
+                            <a:srgbClr val="1D1B43"/>
+                          </a:solidFill>
+                          <a:latin typeface="Calibri"/>
+                        </a:rPr>
+                        <a:t>1</a:t>
+                      </a:r>
+                    </a:p>
+                  </a:txBody>
+                  <a:tcPr>
+                    <a:solidFill>
+                      <a:srgbClr val="F2F2F2"/>
+                    </a:solidFill>
+                  </a:tcPr>
+                </a:tc>
+                <a:tc>
+                  <a:txBody>
+                    <a:bodyPr/>
+                    <a:lstStyle/>
+                    <a:p>
+                      <a:pPr algn="l"/>
+                      <a:r>
+                        <a:rPr sz="1000" b="0">
+                          <a:solidFill>
+                            <a:srgbClr val="1D1B43"/>
+                          </a:solidFill>
+                          <a:latin typeface="Calibri"/>
+                        </a:rPr>
+                        <a:t>0</a:t>
+                      </a:r>
+                    </a:p>
+                  </a:txBody>
+                  <a:tcPr>
+                    <a:solidFill>
+                      <a:srgbClr val="F2F2F2"/>
+                    </a:solidFill>
+                  </a:tcPr>
+                </a:tc>
+                <a:tc>
+                  <a:txBody>
+                    <a:bodyPr/>
+                    <a:lstStyle/>
+                    <a:p>
+                      <a:pPr algn="l"/>
+                      <a:r>
+                        <a:rPr sz="1000" b="0">
+                          <a:solidFill>
+                            <a:srgbClr val="1D1B43"/>
+                          </a:solidFill>
+                          <a:latin typeface="Calibri"/>
+                        </a:rPr>
+                        <a:t>100.0%</a:t>
+                      </a:r>
+                    </a:p>
+                  </a:txBody>
+                  <a:tcPr>
+                    <a:solidFill>
+                      <a:srgbClr val="F2F2F2"/>
+                    </a:solidFill>
+                  </a:tcPr>
+                </a:tc>
+                <a:tc>
+                  <a:txBody>
+                    <a:bodyPr/>
+                    <a:lstStyle/>
+                    <a:p>
+                      <a:pPr algn="l"/>
+                      <a:r>
+                        <a:rPr sz="1000" b="0">
+                          <a:solidFill>
+                            <a:srgbClr val="1D1B43"/>
+                          </a:solidFill>
+                          <a:latin typeface="Calibri"/>
+                        </a:rPr>
+                        <a:t>Excelente</a:t>
+                      </a:r>
+                    </a:p>
+                  </a:txBody>
+                  <a:tcPr>
+                    <a:solidFill>
+                      <a:srgbClr val="F2F2F2"/>
+                    </a:solidFill>
+                  </a:tcPr>
+                </a:tc>
+              </a:tr>
+            </a:tbl>
+          </a:graphicData>
+        </a:graphic>
+      </p:graphicFrame>
+    </p:spTree>
+  </p:cSld>
+  <p:clrMapOvr>
+    <a:masterClrMapping/>
+  </p:clrMapOvr>
+</p:sld>
+</file>
+
+<file path=ppt/slides/slide6.xml><?xml version="1.0" encoding="utf-8"?>
+<p:sld xmlns:a="http://schemas.openxmlformats.org/drawingml/2006/main" xmlns:p="http://schemas.openxmlformats.org/presentationml/2006/main" xmlns:r="http://schemas.openxmlformats.org/officeDocument/2006/relationships">
+  <p:cSld>
+    <p:bg>
+      <p:bgPr>
+        <a:solidFill>
+          <a:srgbClr val="FFFFFF"/>
+        </a:solidFill>
+        <a:effectLst/>
+      </p:bgPr>
+    </p:bg>
+    <p:spTree>
+      <p:nvGrpSpPr>
+        <p:cNvPr id="1" name=""/>
+        <p:cNvGrpSpPr/>
+        <p:nvPr/>
+      </p:nvGrpSpPr>
+      <p:grpSpPr/>
+      <p:pic>
+        <p:nvPicPr>
+          <p:cNvPr id="2" name="Picture 1" descr="slide2_img3.png"/>
+          <p:cNvPicPr>
+            <a:picLocks noChangeAspect="1"/>
+          </p:cNvPicPr>
+          <p:nvPr/>
+        </p:nvPicPr>
+        <p:blipFill>
+          <a:blip r:embed="rId2"/>
+          <a:stretch>
+            <a:fillRect/>
+          </a:stretch>
+        </p:blipFill>
+        <p:spPr>
+          <a:xfrm>
+            <a:off x="10661904" y="155448"/>
+            <a:ext cx="1380744" cy="667512"/>
+          </a:xfrm>
+          <a:prstGeom prst="rect">
+            <a:avLst/>
+          </a:prstGeom>
+        </p:spPr>
+      </p:pic>
+      <p:sp>
+        <p:nvSpPr>
+          <p:cNvPr id="3" name="TextBox 2"/>
+          <p:cNvSpPr txBox="1"/>
+          <p:nvPr/>
+        </p:nvSpPr>
+        <p:spPr>
+          <a:xfrm>
+            <a:off x="749808" y="502920"/>
             <a:ext cx="10058400" cy="914400"/>
           </a:xfrm>
           <a:prstGeom prst="rect">
@@ -6692,7 +7598,7 @@
                 </a:solidFill>
                 <a:latin typeface="Calibri"/>
               </a:rPr>
-              <a:t>TOP DESTINATARIOS (26 pontos)</a:t>
+              <a:t>TOP DESTINATARIOS (35 pontos)</a:t>
             </a:r>
           </a:p>
         </p:txBody>
@@ -6967,7 +7873,7 @@
                           </a:solidFill>
                           <a:latin typeface="Calibri"/>
                         </a:rPr>
-                        <a:t>MRCEGLIA IMPORTACAO - ITAJAI / SC</a:t>
+                        <a:t>TABACARIA HIJAZI - SAO LUIZ / MA</a:t>
                       </a:r>
                     </a:p>
                   </a:txBody>
@@ -6990,7 +7896,7 @@
                           </a:solidFill>
                           <a:latin typeface="Calibri"/>
                         </a:rPr>
-                        <a:t>3</a:t>
+                        <a:t>2</a:t>
                       </a:r>
                     </a:p>
                   </a:txBody>
@@ -7013,7 +7919,7 @@
                           </a:solidFill>
                           <a:latin typeface="Calibri"/>
                         </a:rPr>
-                        <a:t>3</a:t>
+                        <a:t>1</a:t>
                       </a:r>
                     </a:p>
                   </a:txBody>
@@ -7036,7 +7942,7 @@
                           </a:solidFill>
                           <a:latin typeface="Calibri"/>
                         </a:rPr>
-                        <a:t>0</a:t>
+                        <a:t>1</a:t>
                       </a:r>
                     </a:p>
                   </a:txBody>
@@ -7059,7 +7965,7 @@
                           </a:solidFill>
                           <a:latin typeface="Calibri"/>
                         </a:rPr>
-                        <a:t>100.0%</a:t>
+                        <a:t>50.0%</a:t>
                       </a:r>
                     </a:p>
                   </a:txBody>
@@ -7082,7 +7988,7 @@
                           </a:solidFill>
                           <a:latin typeface="Calibri"/>
                         </a:rPr>
-                        <a:t>Excelente</a:t>
+                        <a:t>Atencao</a:t>
                       </a:r>
                     </a:p>
                   </a:txBody>
@@ -7130,7 +8036,7 @@
                           </a:solidFill>
                           <a:latin typeface="Calibri"/>
                         </a:rPr>
-                        <a:t>GABRIEL VELISTA NASC - SANTOS / SP</a:t>
+                        <a:t>JP COMERCIO EXTERIOR - RIO DE JANEIRO / RJ</a:t>
                       </a:r>
                     </a:p>
                   </a:txBody>
@@ -7293,7 +8199,7 @@
                           </a:solidFill>
                           <a:latin typeface="Calibri"/>
                         </a:rPr>
-                        <a:t>UNNIX GROW E HEADSHO - SAO PAULO / SP</a:t>
+                        <a:t>JAY ARBUDA PRESENTES - SAO PAULO / SP</a:t>
                       </a:r>
                     </a:p>
                   </a:txBody>
@@ -7456,7 +8362,7 @@
                           </a:solidFill>
                           <a:latin typeface="Calibri"/>
                         </a:rPr>
-                        <a:t>PORTOEXPRESS LOGISTI - ITAJAI / SC</a:t>
+                        <a:t>TRUST MEGA TECHNOLOG - SAO PAULO / SP</a:t>
                       </a:r>
                     </a:p>
                   </a:txBody>
@@ -7619,7 +8525,7 @@
                           </a:solidFill>
                           <a:latin typeface="Calibri"/>
                         </a:rPr>
-                        <a:t>NEW FUTURE ARTIGOS D - RIO DE JANEIRO / RJ</a:t>
+                        <a:t>REGIS G.MARQUES - PORTO ALEGRE / RS</a:t>
                       </a:r>
                     </a:p>
                   </a:txBody>
@@ -7782,7 +8688,7 @@
                           </a:solidFill>
                           <a:latin typeface="Calibri"/>
                         </a:rPr>
-                        <a:t>TRUST MEGA TECHNOLOG - SAO PAULO / SP</a:t>
+                        <a:t>27.889.907 JESSE ROD - RIO DE JANEIRO / RJ</a:t>
                       </a:r>
                     </a:p>
                   </a:txBody>
@@ -7805,7 +8711,7 @@
                           </a:solidFill>
                           <a:latin typeface="Calibri"/>
                         </a:rPr>
-                        <a:t>2</a:t>
+                        <a:t>1</a:t>
                       </a:r>
                     </a:p>
                   </a:txBody>
@@ -7828,7 +8734,7 @@
                           </a:solidFill>
                           <a:latin typeface="Calibri"/>
                         </a:rPr>
-                        <a:t>2</a:t>
+                        <a:t>1</a:t>
                       </a:r>
                     </a:p>
                   </a:txBody>
@@ -7945,7 +8851,7 @@
                           </a:solidFill>
                           <a:latin typeface="Calibri"/>
                         </a:rPr>
-                        <a:t>GB COMERCIO DE VESTU - VOLTA REDONDA / RJ</a:t>
+                        <a:t>ALBERTO ANDRES ANDRE - JOAO PESSOA / PB</a:t>
                       </a:r>
                     </a:p>
                   </a:txBody>
@@ -7968,7 +8874,7 @@
                           </a:solidFill>
                           <a:latin typeface="Calibri"/>
                         </a:rPr>
-                        <a:t>2</a:t>
+                        <a:t>1</a:t>
                       </a:r>
                     </a:p>
                   </a:txBody>
@@ -7991,7 +8897,7 @@
                           </a:solidFill>
                           <a:latin typeface="Calibri"/>
                         </a:rPr>
-                        <a:t>2</a:t>
+                        <a:t>0</a:t>
                       </a:r>
                     </a:p>
                   </a:txBody>
@@ -8014,7 +8920,7 @@
                           </a:solidFill>
                           <a:latin typeface="Calibri"/>
                         </a:rPr>
-                        <a:t>0</a:t>
+                        <a:t>1</a:t>
                       </a:r>
                     </a:p>
                   </a:txBody>
@@ -8037,7 +8943,7 @@
                           </a:solidFill>
                           <a:latin typeface="Calibri"/>
                         </a:rPr>
-                        <a:t>100.0%</a:t>
+                        <a:t>0.0%</a:t>
                       </a:r>
                     </a:p>
                   </a:txBody>
@@ -8060,7 +8966,7 @@
                           </a:solidFill>
                           <a:latin typeface="Calibri"/>
                         </a:rPr>
-                        <a:t>Excelente</a:t>
+                        <a:t>Atencao</a:t>
                       </a:r>
                     </a:p>
                   </a:txBody>
@@ -8108,7 +9014,7 @@
                           </a:solidFill>
                           <a:latin typeface="Calibri"/>
                         </a:rPr>
-                        <a:t>BEST PRICE - BRASILIA / DF</a:t>
+                        <a:t>BE HAPPY TABACARIA L - VOLTA REDONDA / RJ</a:t>
                       </a:r>
                     </a:p>
                   </a:txBody>
@@ -8271,7 +9177,7 @@
                           </a:solidFill>
                           <a:latin typeface="Calibri"/>
                         </a:rPr>
-                        <a:t>CAFE DA MATA LTDA - SAO PAULO / SP</a:t>
+                        <a:t>DIBOA TABACARIA LTDA - SAO PAULO / SP</a:t>
                       </a:r>
                     </a:p>
                   </a:txBody>
@@ -8434,7 +9340,7 @@
                           </a:solidFill>
                           <a:latin typeface="Calibri"/>
                         </a:rPr>
-                        <a:t>BELLI ROOTS - SAO PAULO / SP</a:t>
+                        <a:t>BRENO SILVA MACHADO - NITEROI / RJ</a:t>
                       </a:r>
                     </a:p>
                   </a:txBody>
@@ -8597,7 +9503,7 @@
                           </a:solidFill>
                           <a:latin typeface="Calibri"/>
                         </a:rPr>
-                        <a:t>J&amp;CIA - FLORIANOPOLIS / SC</a:t>
+                        <a:t>CAFE DA MATA LTDA - SAO PAULO / SP</a:t>
                       </a:r>
                     </a:p>
                   </a:txBody>
@@ -8760,7 +9666,7 @@
                           </a:solidFill>
                           <a:latin typeface="Calibri"/>
                         </a:rPr>
-                        <a:t>IMNUNES ARTIGOS NACI - SAO PAULO / SP</a:t>
+                        <a:t>ESPECIARIAS DO CERRA - GOIANIA / GO</a:t>
                       </a:r>
                     </a:p>
                   </a:txBody>
@@ -8923,7 +9829,7 @@
                           </a:solidFill>
                           <a:latin typeface="Calibri"/>
                         </a:rPr>
-                        <a:t>DISTRIBUIDORA CORING - ANAPOLIS / GO</a:t>
+                        <a:t>ERICKSON EUGENIO SUZ - CAXIAS DO SUL / RS</a:t>
                       </a:r>
                     </a:p>
                   </a:txBody>
@@ -9086,7 +9992,7 @@
                           </a:solidFill>
                           <a:latin typeface="Calibri"/>
                         </a:rPr>
-                        <a:t>ERICKSON EUGENIO SUZ - CAXIAS DO SUL / RS</a:t>
+                        <a:t>FIRE COMERCIO DE ART - SANTOS / SP</a:t>
                       </a:r>
                     </a:p>
                   </a:txBody>
@@ -9224,7 +10130,7 @@
 </p:sld>
 </file>
 
-<file path=ppt/slides/slide6.xml><?xml version="1.0" encoding="utf-8"?>
+<file path=ppt/slides/slide7.xml><?xml version="1.0" encoding="utf-8"?>
 <p:sld xmlns:a="http://schemas.openxmlformats.org/drawingml/2006/main" xmlns:p="http://schemas.openxmlformats.org/presentationml/2006/main" xmlns:r="http://schemas.openxmlformats.org/officeDocument/2006/relationships">
   <p:cSld>
     <p:bg>
